--- a/downloads/presentations/modules/lesson-33-ai-portfolio-strategy-and-use-case-prioritization.pptx
+++ b/downloads/presentations/modules/lesson-33-ai-portfolio-strategy-and-use-case-prioritization.pptx
@@ -24,9 +24,11 @@
     <p:sldId id="272" r:id="rId18"/>
     <p:sldId id="273" r:id="rId19"/>
     <p:sldId id="274" r:id="rId20"/>
+    <p:sldId id="275" r:id="rId21"/>
+    <p:sldId id="276" r:id="rId22"/>
   </p:sldIdLst>
   <p:notesMasterIdLst>
-    <p:notesMasterId r:id="rId21"/>
+    <p:notesMasterId r:id="rId23"/>
   </p:notesMasterIdLst>
   <p:sldSz cx="12192000" cy="6858000"/>
   <p:notesSz cx="6858000" cy="12192000"/>
@@ -609,8 +611,10 @@
           <a:p>
             <a:r>
               <a:rPr lang="en-US" dirty="0"/>
-              <a:t>Application to AI-Supported Workflows
-Generative AI projects may be prioritized for internal knowledge management before public-facing use. Predictive analytics projects may be prioritized only when data and validation plans are mature. Agentic workflows may be deferred until governance has defined decision rights, access controls, and rollback procedures. Portfolio strategy helps leaders sequence AI adoption responsibly.</a:t>
+              <a:t>Technical and Governance Deep Dive
+A useful portfolio strategy begins with categories. Agencies can classify AI opportunities by function, such as internal productivity, knowledge management, surveillance support, decision support, communication, automation, research, or public-facing service. They can also classify by risk, such as low, moderate, high, or prohibited. These categories help leadership understand where AI activity is concentrated and whether the portfolio reflects agency priorities.
+Prioritization criteria should include mission alignment, expected public health benefit, workflow burden reduction, data readiness, legal authority, privacy sensitivity, equity impact, technical feasibility, implementation complexity, vendor dependency, cost, sustainability, and monitoring feasibility. A use case with high potential benefit but weak data readiness may be deferred until modernization work improves. A use case with moderate benefit and low risk may be an appropriate early pilot.
+Portfolio governance should include regular review. Some use cases should move from idea to pilot, from pilot to operational use, or from operational use to retirement. Others should be stopped because they lack value, create unacceptable risk, duplicate another effort, or depend on unsustainable funding. A living portfolio helps leadership make these decisions transparently.</a:t>
             </a:r>
             <a:endParaRPr lang="en-US" dirty="0"/>
           </a:p>
@@ -698,10 +702,9 @@
           <a:p>
             <a:r>
               <a:rPr lang="en-US" dirty="0"/>
-              <a:t>Reflection Questions
-Which current or proposed AI use case in your agency raises this leadership or governance issue most clearly?
-Who currently has authority to make decisions about this issue, and is that authority documented?
-What evidence would governance or leadership need before approving the use case?</a:t>
+              <a:t>Risks, Failure Modes, and Guardrails
+A major risk is pilot proliferation. Agencies may launch many small AI pilots without a pathway to scale, evaluate, sustain, or retire them. A guardrail is to require every pilot to define success criteria, evaluation evidence, funding assumptions, and an end point.
+Another risk is inequitable prioritization. Projects serving better-resourced programs may advance faster than projects addressing underserved communities. A guardrail is to include equity impact and community benefit in the prioritization rubric.</a:t>
             </a:r>
             <a:endParaRPr lang="en-US" dirty="0"/>
           </a:p>
@@ -789,9 +792,8 @@
           <a:p>
             <a:r>
               <a:rPr lang="en-US" dirty="0"/>
-              <a:t>Reflection Questions
-Which staff, partners, or communities would be affected if this issue were handled poorly?
-What policy, process, or artifact should be created or updated after this module?</a:t>
+              <a:t>Application to AI-Supported Workflows
+Generative AI projects may be prioritized for internal knowledge management before public-facing use. Predictive analytics projects may be prioritized only when data and validation plans are mature. Agentic workflows may be deferred until governance has defined decision rights, access controls, and rollback procedures. Portfolio strategy helps leaders sequence AI adoption responsibly.</a:t>
             </a:r>
             <a:endParaRPr lang="en-US" dirty="0"/>
           </a:p>
@@ -879,8 +881,10 @@
           <a:p>
             <a:r>
               <a:rPr lang="en-US" dirty="0"/>
-              <a:t>Practical Exercise
-Develop an AI use case prioritization rubric with criteria, scoring levels, required evidence, and decision categories such as pursue, pilot, redesign, defer, or reject.</a:t>
+              <a:t>Reflection Questions
+Which current or proposed AI use case in your agency raises this leadership or governance issue most clearly?
+Who currently has authority to make decisions about this issue, and is that authority documented?
+What evidence would governance or leadership need before approving the use case?</a:t>
             </a:r>
             <a:endParaRPr lang="en-US" dirty="0"/>
           </a:p>
@@ -968,8 +972,9 @@
           <a:p>
             <a:r>
               <a:rPr lang="en-US" dirty="0"/>
-              <a:t>Before You Begin
-Choose a real or realistic public health AI use case. Document assumptions, unresolved questions, and which agency roles would need to review the artifact before it is adopted. The exercise should produce a work product that could support governance review, leadership discussion, implementation planning, or policy development.</a:t>
+              <a:t>Reflection Questions
+Which staff, partners, or communities would be affected if this issue were handled poorly?
+What policy, process, or artifact should be created or updated after this module?</a:t>
             </a:r>
             <a:endParaRPr lang="en-US" dirty="0"/>
           </a:p>
@@ -1057,8 +1062,8 @@
           <a:p>
             <a:r>
               <a:rPr lang="en-US" dirty="0"/>
-              <a:t>Expected Artifact or Evidence
-Use case intake form; prioritization rubric; sample portfolio view; decision category definitions.</a:t>
+              <a:t>Practical Exercise
+Develop an AI use case prioritization rubric with criteria, scoring levels, required evidence, and decision categories such as pursue, pilot, redesign, defer, or reject.</a:t>
             </a:r>
             <a:endParaRPr lang="en-US" dirty="0"/>
           </a:p>
@@ -1146,8 +1151,8 @@
           <a:p>
             <a:r>
               <a:rPr lang="en-US" dirty="0"/>
-              <a:t>Expected Assignment
-Use case intake form; prioritization rubric; sample portfolio view; decision category definitions.</a:t>
+              <a:t>Before You Begin
+Choose a real or realistic public health AI use case. Document assumptions, unresolved questions, and which agency roles would need to review the artifact before it is adopted. The exercise should produce a work product that could support governance review, leadership discussion, implementation planning, or policy development.</a:t>
             </a:r>
             <a:endParaRPr lang="en-US" dirty="0"/>
           </a:p>
@@ -1235,12 +1240,8 @@
           <a:p>
             <a:r>
               <a:rPr lang="en-US" dirty="0"/>
-              <a:t>Knowledge Check
-1. What is the strongest reason this module topic belongs in AI leadership and governance training?
-2. Which practice best supports accountable public health AI governance?
-3. When should an AI use case be escalated for leadership or governance review?
-4. What is weak evidence of completion for a leadership and governance module?
-5. What should leaders do when an AI use case has meaningful benefits but unresolved risks?</a:t>
+              <a:t>Expected Artifact or Evidence
+Use case intake form; prioritization rubric; sample portfolio view; decision category definitions.</a:t>
             </a:r>
             <a:endParaRPr lang="en-US" dirty="0"/>
           </a:p>
@@ -1328,12 +1329,8 @@
           <a:p>
             <a:r>
               <a:rPr lang="en-US" dirty="0"/>
-              <a:t>References and Resources
-NIST Artificial Intelligence Risk Management Framework (AI RMF 1.0): https://www.nist.gov/itl/ai-risk-management-framework
-NIST Generative AI Profile: https://www.nist.gov/publications/artificial-intelligence-risk-management-framework-generative-artificial-intelligence
-NIST Privacy Framework
-CDC Public Health Data Strategy and Data Modernization resources: https://www.cdc.gov/public-health-data-strategy/php/about/index.html
-WHO Ethics and Governance of Artificial Intelligence for Health: https://www.who.int/publications/i/item/9789240029200</a:t>
+              <a:t>Expected Assignment
+Use case intake form; prioritization rubric; sample portfolio view; decision category definitions.</a:t>
             </a:r>
             <a:endParaRPr lang="en-US" dirty="0"/>
           </a:p>
@@ -1421,9 +1418,12 @@
           <a:p>
             <a:r>
               <a:rPr lang="en-US" dirty="0"/>
-              <a:t>References and Resources
-OMB Memorandum M-24-10 on federal AI governance, risk management, and innovation, where relevant to public-sector governance models
-Agency strategic plans, procurement policies, privacy policies, cybersecurity policies, records policies, and equity plans</a:t>
+              <a:t>Knowledge Check
+1. What is the strongest reason this module topic belongs in AI leadership and governance training?
+2. Which practice best supports accountable public health AI governance?
+3. When should an AI use case be escalated for leadership or governance review?
+4. What is weak evidence of completion for a leadership and governance module?
+5. What should leaders do when an AI use case has meaningful benefits but unresolved risks?</a:t>
             </a:r>
             <a:endParaRPr lang="en-US" dirty="0"/>
           </a:p>
@@ -1557,6 +1557,189 @@
 </p:notes>
 </file>
 
+<file path=ppt/notesSlides/notesSlide20.xml><?xml version="1.0" encoding="utf-8"?>
+<p:notes xmlns:a="http://schemas.openxmlformats.org/drawingml/2006/main" xmlns:r="http://schemas.openxmlformats.org/officeDocument/2006/relationships" xmlns:p="http://schemas.openxmlformats.org/presentationml/2006/main">
+  <p:cSld>
+    <p:spTree>
+      <p:nvGrpSpPr>
+        <p:cNvPr id="1" name=""/>
+        <p:cNvGrpSpPr/>
+        <p:nvPr/>
+      </p:nvGrpSpPr>
+      <p:grpSpPr>
+        <a:xfrm>
+          <a:off x="0" y="0"/>
+          <a:ext cx="0" cy="0"/>
+          <a:chOff x="0" y="0"/>
+          <a:chExt cx="0" cy="0"/>
+        </a:xfrm>
+      </p:grpSpPr>
+      <p:sp>
+        <p:nvSpPr>
+          <p:cNvPr id="2" name="Slide Image Placeholder 1"/>
+          <p:cNvSpPr>
+            <a:spLocks noGrp="1" noRot="1" noChangeAspect="1"/>
+          </p:cNvSpPr>
+          <p:nvPr>
+            <p:ph type="sldImg"/>
+          </p:nvPr>
+        </p:nvSpPr>
+        <p:spPr/>
+      </p:sp>
+      <p:sp>
+        <p:nvSpPr>
+          <p:cNvPr id="3" name="Notes Placeholder 2"/>
+          <p:cNvSpPr>
+            <a:spLocks noGrp="1"/>
+          </p:cNvSpPr>
+          <p:nvPr>
+            <p:ph type="body" idx="1"/>
+          </p:nvPr>
+        </p:nvSpPr>
+        <p:spPr/>
+        <p:txBody>
+          <a:bodyPr/>
+          <a:lstStyle/>
+          <a:p>
+            <a:r>
+              <a:rPr lang="en-US" dirty="0"/>
+              <a:t>References and Resources
+NIST Artificial Intelligence Risk Management Framework (AI RMF 1.0): https://www.nist.gov/itl/ai-risk-management-framework
+NIST Generative AI Profile: https://www.nist.gov/publications/artificial-intelligence-risk-management-framework-generative-artificial-intelligence
+NIST Privacy Framework
+CDC Public Health Data Strategy and Data Modernization resources: https://www.cdc.gov/public-health-data-strategy/php/about/index.html
+WHO Ethics and Governance of Artificial Intelligence for Health: https://www.who.int/publications/i/item/9789240029200</a:t>
+            </a:r>
+            <a:endParaRPr lang="en-US" dirty="0"/>
+          </a:p>
+        </p:txBody>
+      </p:sp>
+      <p:sp>
+        <p:nvSpPr>
+          <p:cNvPr id="4" name="Slide Number Placeholder 3"/>
+          <p:cNvSpPr>
+            <a:spLocks noGrp="1"/>
+          </p:cNvSpPr>
+          <p:nvPr>
+            <p:ph type="sldNum" sz="quarter" idx="10"/>
+          </p:nvPr>
+        </p:nvSpPr>
+        <p:spPr/>
+        <p:txBody>
+          <a:bodyPr/>
+          <a:lstStyle/>
+          <a:p>
+            <a:fld id="{F7021451-1387-4CA6-816F-3879F97B5CBC}" type="slidenum">
+              <a:rPr lang="en-US"/>
+              <a:t>20</a:t>
+            </a:fld>
+            <a:endParaRPr lang="en-US"/>
+          </a:p>
+        </p:txBody>
+      </p:sp>
+    </p:spTree>
+    <p:extLst>
+      <p:ext uri="{BB962C8B-B14F-4D97-AF65-F5344CB8AC3E}">
+        <p14:creationId xmlns:p14="http://schemas.microsoft.com/office/powerpoint/2010/main" val="1024086991"/>
+      </p:ext>
+    </p:extLst>
+  </p:cSld>
+  <p:clrMapOvr>
+    <a:masterClrMapping/>
+  </p:clrMapOvr>
+</p:notes>
+</file>
+
+<file path=ppt/notesSlides/notesSlide21.xml><?xml version="1.0" encoding="utf-8"?>
+<p:notes xmlns:a="http://schemas.openxmlformats.org/drawingml/2006/main" xmlns:r="http://schemas.openxmlformats.org/officeDocument/2006/relationships" xmlns:p="http://schemas.openxmlformats.org/presentationml/2006/main">
+  <p:cSld>
+    <p:spTree>
+      <p:nvGrpSpPr>
+        <p:cNvPr id="1" name=""/>
+        <p:cNvGrpSpPr/>
+        <p:nvPr/>
+      </p:nvGrpSpPr>
+      <p:grpSpPr>
+        <a:xfrm>
+          <a:off x="0" y="0"/>
+          <a:ext cx="0" cy="0"/>
+          <a:chOff x="0" y="0"/>
+          <a:chExt cx="0" cy="0"/>
+        </a:xfrm>
+      </p:grpSpPr>
+      <p:sp>
+        <p:nvSpPr>
+          <p:cNvPr id="2" name="Slide Image Placeholder 1"/>
+          <p:cNvSpPr>
+            <a:spLocks noGrp="1" noRot="1" noChangeAspect="1"/>
+          </p:cNvSpPr>
+          <p:nvPr>
+            <p:ph type="sldImg"/>
+          </p:nvPr>
+        </p:nvSpPr>
+        <p:spPr/>
+      </p:sp>
+      <p:sp>
+        <p:nvSpPr>
+          <p:cNvPr id="3" name="Notes Placeholder 2"/>
+          <p:cNvSpPr>
+            <a:spLocks noGrp="1"/>
+          </p:cNvSpPr>
+          <p:nvPr>
+            <p:ph type="body" idx="1"/>
+          </p:nvPr>
+        </p:nvSpPr>
+        <p:spPr/>
+        <p:txBody>
+          <a:bodyPr/>
+          <a:lstStyle/>
+          <a:p>
+            <a:r>
+              <a:rPr lang="en-US" dirty="0"/>
+              <a:t>References and Resources
+OMB Memorandum M-24-10 on federal AI governance, risk management, and innovation, where relevant to public-sector governance models
+Agency strategic plans, procurement policies, privacy policies, cybersecurity policies, records policies, and equity plans</a:t>
+            </a:r>
+            <a:endParaRPr lang="en-US" dirty="0"/>
+          </a:p>
+        </p:txBody>
+      </p:sp>
+      <p:sp>
+        <p:nvSpPr>
+          <p:cNvPr id="4" name="Slide Number Placeholder 3"/>
+          <p:cNvSpPr>
+            <a:spLocks noGrp="1"/>
+          </p:cNvSpPr>
+          <p:nvPr>
+            <p:ph type="sldNum" sz="quarter" idx="10"/>
+          </p:nvPr>
+        </p:nvSpPr>
+        <p:spPr/>
+        <p:txBody>
+          <a:bodyPr/>
+          <a:lstStyle/>
+          <a:p>
+            <a:fld id="{F7021451-1387-4CA6-816F-3879F97B5CBC}" type="slidenum">
+              <a:rPr lang="en-US"/>
+              <a:t>21</a:t>
+            </a:fld>
+            <a:endParaRPr lang="en-US"/>
+          </a:p>
+        </p:txBody>
+      </p:sp>
+    </p:spTree>
+    <p:extLst>
+      <p:ext uri="{BB962C8B-B14F-4D97-AF65-F5344CB8AC3E}">
+        <p14:creationId xmlns:p14="http://schemas.microsoft.com/office/powerpoint/2010/main" val="1024086991"/>
+      </p:ext>
+    </p:extLst>
+  </p:cSld>
+  <p:clrMapOvr>
+    <a:masterClrMapping/>
+  </p:clrMapOvr>
+</p:notes>
+</file>
+
 <file path=ppt/notesSlides/notesSlide3.xml><?xml version="1.0" encoding="utf-8"?>
 <p:notes xmlns:a="http://schemas.openxmlformats.org/drawingml/2006/main" xmlns:r="http://schemas.openxmlformats.org/officeDocument/2006/relationships" xmlns:p="http://schemas.openxmlformats.org/presentationml/2006/main">
   <p:cSld>
@@ -1603,12 +1786,11 @@
           <a:p>
             <a:r>
               <a:rPr lang="en-US" dirty="0"/>
-              <a:t>Learning Objectives
-Define the purpose of an AI portfolio strategy for public health agencies.
-Develop criteria for prioritizing AI use cases based on public health value, readiness, risk, and sustainability.
-Identify use cases that should be pursued, piloted, deferred, redesigned, or rejected.
-Create a portfolio view that balances innovation, risk, equity, and operational capacity.
-Produce a use case prioritization rubric for governance or leadership review.</a:t>
+              <a:t>Related Playbook Plays
+Play 11: Build and Deploy AI Solutions - This lesson informs Play 11 by helping learners connect the lesson topic to build and deploy ai solutions work in the AI Playbook.
+Play 7: Prioritize Use Cases - This lesson informs Play 7 by helping learners connect the lesson topic to prioritize use cases work in the AI Playbook sequence.
+Play 8: Develop a Funding Strategy - This lesson informs Play 8 by helping learners connect the lesson topic to develop a funding strategy work in the AI Playbook sequence.
+Play 1: Vision &amp; Guardrails - This lesson informs Play 1 by helping learners connect the lesson topic to vision &amp; guardrails work in the AI Playbook sequence.</a:t>
             </a:r>
             <a:endParaRPr lang="en-US" dirty="0"/>
           </a:p>
@@ -1696,9 +1878,13 @@
           <a:p>
             <a:r>
               <a:rPr lang="en-US" dirty="0"/>
-              <a:t>Module Overview
-AI opportunities can quickly exceed an agency's capacity to evaluate, implement, and sustain them. Leaders need a portfolio strategy that helps distinguish high-value public health uses from attractive but low-impact experiments. A portfolio approach organizes AI opportunities across programs, risk levels, readiness, equity impact, technical feasibility, expected benefit, and sustainability needs.
-This module teaches leaders how to create an AI use case intake and prioritization process. The module emphasizes that prioritization should not be based only on novelty or vendor availability. It should be based on mission alignment, public health value, data readiness, workflow fit, risk, equity, staff capacity, cost, and the ability to monitor and sustain the use case over time.</a:t>
+              <a:t>Related Toolkit Resources
+Tool 33: Funding Strategy Checklists (Checklist) - Use this tool to complete or strengthen the practical exercise for the module using fictional, de-identified, or generalized.
+Tool 35: AI Total Cost of Ownership and Sustainability Worksheet (Worksheet) - Use this tool to complete or strengthen the practical exercise for the module using fictional, de-identified, or generalized.
+Tool 4: AI Policy Landscape Scan (Worksheet) - Use AI Policy Landscape Scan to translate this lesson into a documented public health AI planning, governance, implementation,.
+Tool 5: AI Environmental and Resource Impact Review (Checklist) - Use this tool to complete or strengthen the practical exercise for the module using fictional, de-identified, or generalized.
+Tool 6: Human-Centered AI Decision Rule Checklist (Checklist) - Use Human-Centered AI Decision Rule Checklist to translate this lesson into a documented public health AI planning, governance,.
+Tool 8: AI Project Charter (Planning) - Use AI Project Charter to translate this lesson into a documented public health AI planning, governance, implementation, or.</a:t>
             </a:r>
             <a:endParaRPr lang="en-US" dirty="0"/>
           </a:p>
@@ -1786,8 +1972,12 @@
           <a:p>
             <a:r>
               <a:rPr lang="en-US" dirty="0"/>
-              <a:t>Jurisdiction and Agency Policy Note
-This national-level module is intended for training and planning purposes. It does not replace legal, privacy, procurement, civil rights, records, or agency policy review. Learners should confirm applicable requirements in their own jurisdiction and organization before implementing AI-supported workflows.</a:t>
+              <a:t>Learning Objectives
+Define the purpose of an AI portfolio strategy for public health agencies.
+Develop criteria for prioritizing AI use cases based on public health value, readiness, risk, and sustainability.
+Identify use cases that should be pursued, piloted, deferred, redesigned, or rejected.
+Create a portfolio view that balances innovation, risk, equity, and operational capacity.
+Produce a use case prioritization rubric for governance or leadership review.</a:t>
             </a:r>
             <a:endParaRPr lang="en-US" dirty="0"/>
           </a:p>
@@ -1875,9 +2065,9 @@
           <a:p>
             <a:r>
               <a:rPr lang="en-US" dirty="0"/>
-              <a:t>Why This Topic Matters for Public Health AI
-Public health agencies have many possible AI use cases: summarizing case notes, analyzing call logs, drafting messages, identifying data quality gaps, forecasting demand, prioritizing inspections, supporting grants, and improving knowledge management. Without a portfolio strategy, agencies may choose projects because they are visible, easy to demonstrate, or championed by a strong vendor rather than because they advance the public health mission.
-A portfolio strategy protects scarce capacity. Technical teams, privacy officers, legal counsel, procurement staff, program leaders, and data stewards cannot review every idea at the same intensity. Prioritization helps the agency focus deep review on use cases with meaningful benefit and material risk while creating faster pathways for low-risk internal productivity uses.</a:t>
+              <a:t>Module Overview
+AI opportunities can quickly exceed an agency's capacity to evaluate, implement, and sustain them. Leaders need a portfolio strategy that helps distinguish high-value public health uses from attractive but low-impact experiments. A portfolio approach organizes AI opportunities across programs, risk levels, readiness, equity impact, technical feasibility, expected benefit, and sustainability needs.
+This module teaches leaders how to create an AI use case intake and prioritization process. The module emphasizes that prioritization should not be based only on novelty or vendor availability. It should be based on mission alignment, public health value, data readiness, workflow fit, risk, equity, staff capacity, cost, and the ability to monitor and sustain the use case over time.</a:t>
             </a:r>
             <a:endParaRPr lang="en-US" dirty="0"/>
           </a:p>
@@ -1965,9 +2155,8 @@
           <a:p>
             <a:r>
               <a:rPr lang="en-US" dirty="0"/>
-              <a:t>Public Health Example
-A health department receives proposals for five AI uses: a public chatbot, a staff policy assistant, an outbreak signal detection model, a vendor tool to summarize eCRs, and an internal tool to draft grant narratives. Each proposal has different benefits and risks. A public chatbot may be visible but high-risk if it gives health advice. A staff policy assistant may be lower risk if it uses approved internal documents. An outbreak model may be valuable but require strong data quality and validation.
-A portfolio review allows the agency to compare these proposals systematically. The agency may approve a low-risk internal pilot, defer the chatbot until public communication safeguards are developed, require validation planning for the outbreak model, and move the eCR summarization tool into deeper technical review. The result is a balanced portfolio rather than a series of disconnected decisions.</a:t>
+              <a:t>Jurisdiction and Agency Policy Note
+This national-level module is intended for training and planning purposes. It does not replace legal, privacy, procurement, civil rights, records, or agency policy review. Learners should confirm applicable requirements in their own jurisdiction and organization before implementing AI-supported workflows.</a:t>
             </a:r>
             <a:endParaRPr lang="en-US" dirty="0"/>
           </a:p>
@@ -2055,10 +2244,9 @@
           <a:p>
             <a:r>
               <a:rPr lang="en-US" dirty="0"/>
-              <a:t>Technical and Governance Deep Dive
-A useful portfolio strategy begins with categories. Agencies can classify AI opportunities by function, such as internal productivity, knowledge management, surveillance support, decision support, communication, automation, research, or public-facing service. They can also classify by risk, such as low, moderate, high, or prohibited. These categories help leadership understand where AI activity is concentrated and whether the portfolio reflects agency priorities.
-Prioritization criteria should include mission alignment, expected public health benefit, workflow burden reduction, data readiness, legal authority, privacy sensitivity, equity impact, technical feasibility, implementation complexity, vendor dependency, cost, sustainability, and monitoring feasibility. A use case with high potential benefit but weak data readiness may be deferred until modernization work improves. A use case with moderate benefit and low risk may be an appropriate early pilot.
-Portfolio governance should include regular review. Some use cases should move from idea to pilot, from pilot to operational use, or from operational use to retirement. Others should be stopped because they lack value, create unacceptable risk, duplicate another effort, or depend on unsustainable funding. A living portfolio helps leadership make these decisions transparently.</a:t>
+              <a:t>Why This Topic Matters for Public Health AI
+Public health agencies have many possible AI use cases: summarizing case notes, analyzing call logs, drafting messages, identifying data quality gaps, forecasting demand, prioritizing inspections, supporting grants, and improving knowledge management. Without a portfolio strategy, agencies may choose projects because they are visible, easy to demonstrate, or championed by a strong vendor rather than because they advance the public health mission.
+A portfolio strategy protects scarce capacity. Technical teams, privacy officers, legal counsel, procurement staff, program leaders, and data stewards cannot review every idea at the same intensity. Prioritization helps the agency focus deep review on use cases with meaningful benefit and material risk while creating faster pathways for low-risk internal productivity uses.</a:t>
             </a:r>
             <a:endParaRPr lang="en-US" dirty="0"/>
           </a:p>
@@ -2146,9 +2334,9 @@
           <a:p>
             <a:r>
               <a:rPr lang="en-US" dirty="0"/>
-              <a:t>Risks, Failure Modes, and Guardrails
-A major risk is pilot proliferation. Agencies may launch many small AI pilots without a pathway to scale, evaluate, sustain, or retire them. A guardrail is to require every pilot to define success criteria, evaluation evidence, funding assumptions, and an end point.
-Another risk is inequitable prioritization. Projects serving better-resourced programs may advance faster than projects addressing underserved communities. A guardrail is to include equity impact and community benefit in the prioritization rubric.</a:t>
+              <a:t>Public Health Example
+A health department receives proposals for five AI uses: a public chatbot, a staff policy assistant, an outbreak signal detection model, a vendor tool to summarize eCRs, and an internal tool to draft grant narratives. Each proposal has different benefits and risks. A public chatbot may be visible but high-risk if it gives health advice. A staff policy assistant may be lower risk if it uses approved internal documents. An outbreak model may be valuable but require strong data quality and validation.
+A portfolio review allows the agency to compare these proposals systematically. The agency may approve a low-risk internal pilot, defer the chatbot until public communication safeguards are developed, require validation planning for the outbreak model, and move the eCR summarization tool into deeper technical review. The result is a balanced portfolio rather than a series of disconnected decisions.</a:t>
             </a:r>
             <a:endParaRPr lang="en-US" dirty="0"/>
           </a:p>
@@ -2771,7 +2959,32 @@
       </p:sp>
       <p:sp>
         <p:nvSpPr>
-          <p:cNvPr id="3" name="Text 1"/>
+          <p:cNvPr id="3" name="Shape 1"/>
+          <p:cNvSpPr/>
+          <p:nvPr/>
+        </p:nvSpPr>
+        <p:spPr>
+          <a:xfrm>
+            <a:off x="0" y="164592"/>
+            <a:ext cx="146304" cy="6693408"/>
+          </a:xfrm>
+          <a:prstGeom prst="rect">
+            <a:avLst/>
+          </a:prstGeom>
+          <a:solidFill>
+            <a:srgbClr val="2F8A28"/>
+          </a:solidFill>
+          <a:ln w="12700">
+            <a:solidFill>
+              <a:srgbClr val="2F8A28"/>
+            </a:solidFill>
+            <a:prstDash val="solid"/>
+          </a:ln>
+        </p:spPr>
+      </p:sp>
+      <p:sp>
+        <p:nvSpPr>
+          <p:cNvPr id="4" name="Text 2"/>
           <p:cNvSpPr/>
           <p:nvPr/>
         </p:nvSpPr>
@@ -2810,7 +3023,7 @@
       </p:sp>
       <p:sp>
         <p:nvSpPr>
-          <p:cNvPr id="4" name="Text 2"/>
+          <p:cNvPr id="5" name="Text 3"/>
           <p:cNvSpPr/>
           <p:nvPr/>
         </p:nvSpPr>
@@ -2849,7 +3062,7 @@
       </p:sp>
       <p:sp>
         <p:nvSpPr>
-          <p:cNvPr id="5" name="Text 3"/>
+          <p:cNvPr id="6" name="Text 4"/>
           <p:cNvSpPr/>
           <p:nvPr/>
         </p:nvSpPr>
@@ -2888,13 +3101,77 @@
       </p:sp>
       <p:sp>
         <p:nvSpPr>
-          <p:cNvPr id="6" name="Text 4"/>
+          <p:cNvPr id="7" name="Shape 5"/>
           <p:cNvSpPr/>
           <p:nvPr/>
         </p:nvSpPr>
         <p:spPr>
           <a:xfrm>
             <a:off x="640080" y="658368"/>
+            <a:ext cx="420624" cy="420624"/>
+          </a:xfrm>
+          <a:prstGeom prst="ellipse">
+            <a:avLst/>
+          </a:prstGeom>
+          <a:solidFill>
+            <a:srgbClr val="0068B7"/>
+          </a:solidFill>
+          <a:ln w="12700">
+            <a:solidFill>
+              <a:srgbClr val="0068B7"/>
+            </a:solidFill>
+            <a:prstDash val="solid"/>
+          </a:ln>
+        </p:spPr>
+      </p:sp>
+      <p:sp>
+        <p:nvSpPr>
+          <p:cNvPr id="8" name="Text 6"/>
+          <p:cNvSpPr/>
+          <p:nvPr/>
+        </p:nvSpPr>
+        <p:spPr>
+          <a:xfrm>
+            <a:off x="640080" y="731520"/>
+            <a:ext cx="420624" cy="164592"/>
+          </a:xfrm>
+          <a:prstGeom prst="rect">
+            <a:avLst/>
+          </a:prstGeom>
+          <a:noFill/>
+          <a:ln/>
+        </p:spPr>
+        <p:txBody>
+          <a:bodyPr wrap="square" lIns="0" tIns="0" rIns="0" bIns="0" rtlCol="0" anchor="ctr"/>
+          <a:lstStyle/>
+          <a:p>
+            <a:pPr algn="ctr" indent="0" marL="0">
+              <a:buNone/>
+            </a:pPr>
+            <a:r>
+              <a:rPr lang="en-US" sz="1100" b="1" dirty="0">
+                <a:solidFill>
+                  <a:srgbClr val="FFFFFF"/>
+                </a:solidFill>
+                <a:latin typeface="Aptos" pitchFamily="34" charset="0"/>
+                <a:ea typeface="Aptos" pitchFamily="34" charset="-122"/>
+                <a:cs typeface="Aptos" pitchFamily="34" charset="-120"/>
+              </a:rPr>
+              <a:t>6</a:t>
+            </a:r>
+            <a:endParaRPr lang="en-US" sz="1100" dirty="0"/>
+          </a:p>
+        </p:txBody>
+      </p:sp>
+      <p:sp>
+        <p:nvSpPr>
+          <p:cNvPr id="9" name="Text 7"/>
+          <p:cNvSpPr/>
+          <p:nvPr/>
+        </p:nvSpPr>
+        <p:spPr>
+          <a:xfrm>
+            <a:off x="640080" y="621792"/>
             <a:ext cx="10881360" cy="566928"/>
           </a:xfrm>
           <a:prstGeom prst="rect">
@@ -2921,7 +3198,7 @@
                 <a:ea typeface="Aptos Display" pitchFamily="34" charset="-122"/>
                 <a:cs typeface="Aptos Display" pitchFamily="34" charset="-120"/>
               </a:rPr>
-              <a:t>Application to AI-Supported Workflows</a:t>
+              <a:t>Technical and Governance Deep Dive</a:t>
             </a:r>
             <a:endParaRPr lang="en-US" sz="2700" dirty="0"/>
           </a:p>
@@ -2929,32 +3206,178 @@
       </p:sp>
       <p:sp>
         <p:nvSpPr>
-          <p:cNvPr id="7" name="Text 5"/>
-          <p:cNvSpPr/>
-          <p:nvPr/>
-        </p:nvSpPr>
-        <p:spPr>
-          <a:xfrm>
-            <a:off x="822960" y="1325880"/>
-            <a:ext cx="10378440" cy="4800600"/>
-          </a:xfrm>
-          <a:prstGeom prst="rect">
-            <a:avLst/>
-          </a:prstGeom>
-          <a:noFill/>
-          <a:ln/>
-        </p:spPr>
-        <p:txBody>
-          <a:bodyPr wrap="square" lIns="1016" tIns="1016" rIns="1016" bIns="1016" rtlCol="0" anchor="t">
+          <p:cNvPr id="10" name="Text 8"/>
+          <p:cNvSpPr/>
+          <p:nvPr/>
+        </p:nvSpPr>
+        <p:spPr>
+          <a:xfrm>
+            <a:off x="868680" y="1417320"/>
+            <a:ext cx="6675120" cy="4434840"/>
+          </a:xfrm>
+          <a:prstGeom prst="rect">
+            <a:avLst/>
+          </a:prstGeom>
+          <a:noFill/>
+          <a:ln/>
+        </p:spPr>
+        <p:txBody>
+          <a:bodyPr wrap="square" lIns="635" tIns="635" rIns="635" bIns="635" rtlCol="0" anchor="t">
             <a:normAutofit/>
           </a:bodyPr>
           <a:lstStyle/>
           <a:p>
+            <a:r>
+              <a:rPr lang="en-US" sz="1700" dirty="0">
+                <a:solidFill>
+                  <a:srgbClr val="17364A"/>
+                </a:solidFill>
+                <a:latin typeface="Aptos" pitchFamily="34" charset="0"/>
+                <a:ea typeface="Aptos" pitchFamily="34" charset="-122"/>
+                <a:cs typeface="Aptos" pitchFamily="34" charset="-120"/>
+              </a:rPr>
+              <a:t>A useful portfolio strategy begins with categories.</a:t>
+            </a:r>
+            <a:endParaRPr lang="en-US" sz="1700" dirty="0"/>
+          </a:p>
+          <a:p>
+            <a:r>
+              <a:rPr lang="en-US" sz="1700" dirty="0">
+                <a:solidFill>
+                  <a:srgbClr val="17364A"/>
+                </a:solidFill>
+                <a:latin typeface="Aptos" pitchFamily="34" charset="0"/>
+                <a:ea typeface="Aptos" pitchFamily="34" charset="-122"/>
+                <a:cs typeface="Aptos" pitchFamily="34" charset="-120"/>
+              </a:rPr>
+              <a:t>Agencies can classify AI opportunities by function, such as internal productivity, knowledge management, surveillance.</a:t>
+            </a:r>
+            <a:endParaRPr lang="en-US" sz="1700" dirty="0"/>
+          </a:p>
+          <a:p>
+            <a:r>
+              <a:rPr lang="en-US" sz="1700" dirty="0">
+                <a:solidFill>
+                  <a:srgbClr val="17364A"/>
+                </a:solidFill>
+                <a:latin typeface="Aptos" pitchFamily="34" charset="0"/>
+                <a:ea typeface="Aptos" pitchFamily="34" charset="-122"/>
+                <a:cs typeface="Aptos" pitchFamily="34" charset="-120"/>
+              </a:rPr>
+              <a:t>They can also classify by risk, such as low, moderate, high, or prohibited.</a:t>
+            </a:r>
+            <a:endParaRPr lang="en-US" sz="1700" dirty="0"/>
+          </a:p>
+          <a:p>
+            <a:r>
+              <a:rPr lang="en-US" sz="1700" dirty="0">
+                <a:solidFill>
+                  <a:srgbClr val="17364A"/>
+                </a:solidFill>
+                <a:latin typeface="Aptos" pitchFamily="34" charset="0"/>
+                <a:ea typeface="Aptos" pitchFamily="34" charset="-122"/>
+                <a:cs typeface="Aptos" pitchFamily="34" charset="-120"/>
+              </a:rPr>
+              <a:t>These categories help leadership understand where AI activity is concentrated and whether the portfolio reflects agency.</a:t>
+            </a:r>
+            <a:endParaRPr lang="en-US" sz="1700" dirty="0"/>
+          </a:p>
+        </p:txBody>
+      </p:sp>
+      <p:sp>
+        <p:nvSpPr>
+          <p:cNvPr id="11" name="Shape 9"/>
+          <p:cNvSpPr/>
+          <p:nvPr/>
+        </p:nvSpPr>
+        <p:spPr>
+          <a:xfrm>
+            <a:off x="7909560" y="1417320"/>
+            <a:ext cx="3154680" cy="1828800"/>
+          </a:xfrm>
+          <a:prstGeom prst="roundRect">
+            <a:avLst>
+              <a:gd name="adj" fmla="val 6000"/>
+            </a:avLst>
+          </a:prstGeom>
+          <a:solidFill>
+            <a:srgbClr val="EEF8ED"/>
+          </a:solidFill>
+          <a:ln w="12700">
+            <a:solidFill>
+              <a:srgbClr val="B9D7E6"/>
+            </a:solidFill>
+            <a:prstDash val="solid"/>
+          </a:ln>
+        </p:spPr>
+      </p:sp>
+      <p:sp>
+        <p:nvSpPr>
+          <p:cNvPr id="12" name="Text 10"/>
+          <p:cNvSpPr/>
+          <p:nvPr/>
+        </p:nvSpPr>
+        <p:spPr>
+          <a:xfrm>
+            <a:off x="8074152" y="1563624"/>
+            <a:ext cx="2825496" cy="201168"/>
+          </a:xfrm>
+          <a:prstGeom prst="rect">
+            <a:avLst/>
+          </a:prstGeom>
+          <a:noFill/>
+          <a:ln/>
+        </p:spPr>
+        <p:txBody>
+          <a:bodyPr wrap="square" lIns="0" tIns="0" rIns="0" bIns="0" rtlCol="0" anchor="ctr"/>
+          <a:lstStyle/>
+          <a:p>
             <a:pPr indent="0" marL="0">
               <a:buNone/>
             </a:pPr>
             <a:r>
-              <a:rPr lang="en-US" sz="1420" dirty="0">
+              <a:rPr lang="en-US" sz="950" b="1" dirty="0">
+                <a:solidFill>
+                  <a:srgbClr val="0068B7"/>
+                </a:solidFill>
+                <a:latin typeface="Aptos" pitchFamily="34" charset="0"/>
+                <a:ea typeface="Aptos" pitchFamily="34" charset="-122"/>
+                <a:cs typeface="Aptos" pitchFamily="34" charset="-120"/>
+              </a:rPr>
+              <a:t>Key idea</a:t>
+            </a:r>
+            <a:endParaRPr lang="en-US" sz="950" dirty="0"/>
+          </a:p>
+        </p:txBody>
+      </p:sp>
+      <p:sp>
+        <p:nvSpPr>
+          <p:cNvPr id="13" name="Text 11"/>
+          <p:cNvSpPr/>
+          <p:nvPr/>
+        </p:nvSpPr>
+        <p:spPr>
+          <a:xfrm>
+            <a:off x="8074152" y="1856232"/>
+            <a:ext cx="2825496" cy="1261872"/>
+          </a:xfrm>
+          <a:prstGeom prst="rect">
+            <a:avLst/>
+          </a:prstGeom>
+          <a:noFill/>
+          <a:ln/>
+        </p:spPr>
+        <p:txBody>
+          <a:bodyPr wrap="square" lIns="0" tIns="0" rIns="0" bIns="0" rtlCol="0" anchor="t">
+            <a:normAutofit/>
+          </a:bodyPr>
+          <a:lstStyle/>
+          <a:p>
+            <a:pPr indent="0" marL="0">
+              <a:buNone/>
+            </a:pPr>
+            <a:r>
+              <a:rPr lang="en-US" sz="1250" dirty="0">
                 <a:solidFill>
                   <a:srgbClr val="17364A"/>
                 </a:solidFill>
@@ -2962,9 +3385,116 @@
                 <a:ea typeface="Aptos" pitchFamily="34" charset="-122"/>
                 <a:cs typeface="Aptos" pitchFamily="34" charset="-120"/>
               </a:rPr>
-              <a:t>Generative AI projects may be prioritized for internal knowledge management before public-facing use. Predictive analytics projects may be prioritized only when data and validation plans are mature. Agentic workflows may be deferred until governance has defined decision rights, access controls, and rollback procedures. Portfolio strategy helps leaders sequence AI adoption responsibly.</a:t>
-            </a:r>
-            <a:endParaRPr lang="en-US" sz="1420" dirty="0"/>
+              <a:t>A useful portfolio strategy begins with categories.</a:t>
+            </a:r>
+            <a:endParaRPr lang="en-US" sz="1250" dirty="0"/>
+          </a:p>
+        </p:txBody>
+      </p:sp>
+      <p:sp>
+        <p:nvSpPr>
+          <p:cNvPr id="14" name="Shape 12"/>
+          <p:cNvSpPr/>
+          <p:nvPr/>
+        </p:nvSpPr>
+        <p:spPr>
+          <a:xfrm>
+            <a:off x="7909560" y="3520440"/>
+            <a:ext cx="3154680" cy="1737360"/>
+          </a:xfrm>
+          <a:prstGeom prst="roundRect">
+            <a:avLst>
+              <a:gd name="adj" fmla="val 6316"/>
+            </a:avLst>
+          </a:prstGeom>
+          <a:solidFill>
+            <a:srgbClr val="EAF6F8"/>
+          </a:solidFill>
+          <a:ln w="12700">
+            <a:solidFill>
+              <a:srgbClr val="B9D7E6"/>
+            </a:solidFill>
+            <a:prstDash val="solid"/>
+          </a:ln>
+        </p:spPr>
+      </p:sp>
+      <p:sp>
+        <p:nvSpPr>
+          <p:cNvPr id="15" name="Text 13"/>
+          <p:cNvSpPr/>
+          <p:nvPr/>
+        </p:nvSpPr>
+        <p:spPr>
+          <a:xfrm>
+            <a:off x="8074152" y="3666744"/>
+            <a:ext cx="2825496" cy="201168"/>
+          </a:xfrm>
+          <a:prstGeom prst="rect">
+            <a:avLst/>
+          </a:prstGeom>
+          <a:noFill/>
+          <a:ln/>
+        </p:spPr>
+        <p:txBody>
+          <a:bodyPr wrap="square" lIns="0" tIns="0" rIns="0" bIns="0" rtlCol="0" anchor="ctr"/>
+          <a:lstStyle/>
+          <a:p>
+            <a:pPr indent="0" marL="0">
+              <a:buNone/>
+            </a:pPr>
+            <a:r>
+              <a:rPr lang="en-US" sz="950" b="1" dirty="0">
+                <a:solidFill>
+                  <a:srgbClr val="0068B7"/>
+                </a:solidFill>
+                <a:latin typeface="Aptos" pitchFamily="34" charset="0"/>
+                <a:ea typeface="Aptos" pitchFamily="34" charset="-122"/>
+                <a:cs typeface="Aptos" pitchFamily="34" charset="-120"/>
+              </a:rPr>
+              <a:t>Use this for</a:t>
+            </a:r>
+            <a:endParaRPr lang="en-US" sz="950" dirty="0"/>
+          </a:p>
+        </p:txBody>
+      </p:sp>
+      <p:sp>
+        <p:nvSpPr>
+          <p:cNvPr id="16" name="Text 14"/>
+          <p:cNvSpPr/>
+          <p:nvPr/>
+        </p:nvSpPr>
+        <p:spPr>
+          <a:xfrm>
+            <a:off x="8074152" y="3959352"/>
+            <a:ext cx="2825496" cy="1170432"/>
+          </a:xfrm>
+          <a:prstGeom prst="rect">
+            <a:avLst/>
+          </a:prstGeom>
+          <a:noFill/>
+          <a:ln/>
+        </p:spPr>
+        <p:txBody>
+          <a:bodyPr wrap="square" lIns="0" tIns="0" rIns="0" bIns="0" rtlCol="0" anchor="t">
+            <a:normAutofit/>
+          </a:bodyPr>
+          <a:lstStyle/>
+          <a:p>
+            <a:pPr indent="0" marL="0">
+              <a:buNone/>
+            </a:pPr>
+            <a:r>
+              <a:rPr lang="en-US" sz="1250" dirty="0">
+                <a:solidFill>
+                  <a:srgbClr val="17364A"/>
+                </a:solidFill>
+                <a:latin typeface="Aptos" pitchFamily="34" charset="0"/>
+                <a:ea typeface="Aptos" pitchFamily="34" charset="-122"/>
+                <a:cs typeface="Aptos" pitchFamily="34" charset="-120"/>
+              </a:rPr>
+              <a:t>Connect the concept to public health decisions, safeguards, documentation, or implementation work.</a:t>
+            </a:r>
+            <a:endParaRPr lang="en-US" sz="1250" dirty="0"/>
           </a:p>
         </p:txBody>
       </p:sp>
@@ -3027,7 +3557,32 @@
       </p:sp>
       <p:sp>
         <p:nvSpPr>
-          <p:cNvPr id="3" name="Text 1"/>
+          <p:cNvPr id="3" name="Shape 1"/>
+          <p:cNvSpPr/>
+          <p:nvPr/>
+        </p:nvSpPr>
+        <p:spPr>
+          <a:xfrm>
+            <a:off x="0" y="164592"/>
+            <a:ext cx="146304" cy="6693408"/>
+          </a:xfrm>
+          <a:prstGeom prst="rect">
+            <a:avLst/>
+          </a:prstGeom>
+          <a:solidFill>
+            <a:srgbClr val="2F8A28"/>
+          </a:solidFill>
+          <a:ln w="12700">
+            <a:solidFill>
+              <a:srgbClr val="2F8A28"/>
+            </a:solidFill>
+            <a:prstDash val="solid"/>
+          </a:ln>
+        </p:spPr>
+      </p:sp>
+      <p:sp>
+        <p:nvSpPr>
+          <p:cNvPr id="4" name="Text 2"/>
           <p:cNvSpPr/>
           <p:nvPr/>
         </p:nvSpPr>
@@ -3066,7 +3621,7 @@
       </p:sp>
       <p:sp>
         <p:nvSpPr>
-          <p:cNvPr id="4" name="Text 2"/>
+          <p:cNvPr id="5" name="Text 3"/>
           <p:cNvSpPr/>
           <p:nvPr/>
         </p:nvSpPr>
@@ -3105,7 +3660,7 @@
       </p:sp>
       <p:sp>
         <p:nvSpPr>
-          <p:cNvPr id="5" name="Text 3"/>
+          <p:cNvPr id="6" name="Text 4"/>
           <p:cNvSpPr/>
           <p:nvPr/>
         </p:nvSpPr>
@@ -3144,13 +3699,77 @@
       </p:sp>
       <p:sp>
         <p:nvSpPr>
-          <p:cNvPr id="6" name="Text 4"/>
+          <p:cNvPr id="7" name="Shape 5"/>
           <p:cNvSpPr/>
           <p:nvPr/>
         </p:nvSpPr>
         <p:spPr>
           <a:xfrm>
             <a:off x="640080" y="658368"/>
+            <a:ext cx="420624" cy="420624"/>
+          </a:xfrm>
+          <a:prstGeom prst="ellipse">
+            <a:avLst/>
+          </a:prstGeom>
+          <a:solidFill>
+            <a:srgbClr val="0068B7"/>
+          </a:solidFill>
+          <a:ln w="12700">
+            <a:solidFill>
+              <a:srgbClr val="0068B7"/>
+            </a:solidFill>
+            <a:prstDash val="solid"/>
+          </a:ln>
+        </p:spPr>
+      </p:sp>
+      <p:sp>
+        <p:nvSpPr>
+          <p:cNvPr id="8" name="Text 6"/>
+          <p:cNvSpPr/>
+          <p:nvPr/>
+        </p:nvSpPr>
+        <p:spPr>
+          <a:xfrm>
+            <a:off x="640080" y="731520"/>
+            <a:ext cx="420624" cy="164592"/>
+          </a:xfrm>
+          <a:prstGeom prst="rect">
+            <a:avLst/>
+          </a:prstGeom>
+          <a:noFill/>
+          <a:ln/>
+        </p:spPr>
+        <p:txBody>
+          <a:bodyPr wrap="square" lIns="0" tIns="0" rIns="0" bIns="0" rtlCol="0" anchor="ctr"/>
+          <a:lstStyle/>
+          <a:p>
+            <a:pPr algn="ctr" indent="0" marL="0">
+              <a:buNone/>
+            </a:pPr>
+            <a:r>
+              <a:rPr lang="en-US" sz="1100" b="1" dirty="0">
+                <a:solidFill>
+                  <a:srgbClr val="FFFFFF"/>
+                </a:solidFill>
+                <a:latin typeface="Aptos" pitchFamily="34" charset="0"/>
+                <a:ea typeface="Aptos" pitchFamily="34" charset="-122"/>
+                <a:cs typeface="Aptos" pitchFamily="34" charset="-120"/>
+              </a:rPr>
+              <a:t>7</a:t>
+            </a:r>
+            <a:endParaRPr lang="en-US" sz="1100" dirty="0"/>
+          </a:p>
+        </p:txBody>
+      </p:sp>
+      <p:sp>
+        <p:nvSpPr>
+          <p:cNvPr id="9" name="Text 7"/>
+          <p:cNvSpPr/>
+          <p:nvPr/>
+        </p:nvSpPr>
+        <p:spPr>
+          <a:xfrm>
+            <a:off x="640080" y="621792"/>
             <a:ext cx="10881360" cy="566928"/>
           </a:xfrm>
           <a:prstGeom prst="rect">
@@ -3177,7 +3796,7 @@
                 <a:ea typeface="Aptos Display" pitchFamily="34" charset="-122"/>
                 <a:cs typeface="Aptos Display" pitchFamily="34" charset="-120"/>
               </a:rPr>
-              <a:t>Reflection Questions</a:t>
+              <a:t>Risks, Failure Modes, and Guardrails</a:t>
             </a:r>
             <a:endParaRPr lang="en-US" sz="2700" dirty="0"/>
           </a:p>
@@ -3185,32 +3804,178 @@
       </p:sp>
       <p:sp>
         <p:nvSpPr>
-          <p:cNvPr id="7" name="Text 5"/>
-          <p:cNvSpPr/>
-          <p:nvPr/>
-        </p:nvSpPr>
-        <p:spPr>
-          <a:xfrm>
-            <a:off x="822960" y="1325880"/>
-            <a:ext cx="10378440" cy="4800600"/>
-          </a:xfrm>
-          <a:prstGeom prst="rect">
-            <a:avLst/>
-          </a:prstGeom>
-          <a:noFill/>
-          <a:ln/>
-        </p:spPr>
-        <p:txBody>
-          <a:bodyPr wrap="square" lIns="1016" tIns="1016" rIns="1016" bIns="1016" rtlCol="0" anchor="t">
+          <p:cNvPr id="10" name="Text 8"/>
+          <p:cNvSpPr/>
+          <p:nvPr/>
+        </p:nvSpPr>
+        <p:spPr>
+          <a:xfrm>
+            <a:off x="868680" y="1417320"/>
+            <a:ext cx="6675120" cy="4434840"/>
+          </a:xfrm>
+          <a:prstGeom prst="rect">
+            <a:avLst/>
+          </a:prstGeom>
+          <a:noFill/>
+          <a:ln/>
+        </p:spPr>
+        <p:txBody>
+          <a:bodyPr wrap="square" lIns="635" tIns="635" rIns="635" bIns="635" rtlCol="0" anchor="t">
             <a:normAutofit/>
           </a:bodyPr>
           <a:lstStyle/>
           <a:p>
+            <a:r>
+              <a:rPr lang="en-US" sz="1700" dirty="0">
+                <a:solidFill>
+                  <a:srgbClr val="17364A"/>
+                </a:solidFill>
+                <a:latin typeface="Aptos" pitchFamily="34" charset="0"/>
+                <a:ea typeface="Aptos" pitchFamily="34" charset="-122"/>
+                <a:cs typeface="Aptos" pitchFamily="34" charset="-120"/>
+              </a:rPr>
+              <a:t>A major risk is pilot proliferation.</a:t>
+            </a:r>
+            <a:endParaRPr lang="en-US" sz="1700" dirty="0"/>
+          </a:p>
+          <a:p>
+            <a:r>
+              <a:rPr lang="en-US" sz="1700" dirty="0">
+                <a:solidFill>
+                  <a:srgbClr val="17364A"/>
+                </a:solidFill>
+                <a:latin typeface="Aptos" pitchFamily="34" charset="0"/>
+                <a:ea typeface="Aptos" pitchFamily="34" charset="-122"/>
+                <a:cs typeface="Aptos" pitchFamily="34" charset="-120"/>
+              </a:rPr>
+              <a:t>Agencies may launch many small AI pilots without a pathway to scale, evaluate, sustain, or retire them.</a:t>
+            </a:r>
+            <a:endParaRPr lang="en-US" sz="1700" dirty="0"/>
+          </a:p>
+          <a:p>
+            <a:r>
+              <a:rPr lang="en-US" sz="1700" dirty="0">
+                <a:solidFill>
+                  <a:srgbClr val="17364A"/>
+                </a:solidFill>
+                <a:latin typeface="Aptos" pitchFamily="34" charset="0"/>
+                <a:ea typeface="Aptos" pitchFamily="34" charset="-122"/>
+                <a:cs typeface="Aptos" pitchFamily="34" charset="-120"/>
+              </a:rPr>
+              <a:t>A guardrail is to require every pilot to define success criteria, evaluation evidence, funding assumptions, and an end point.</a:t>
+            </a:r>
+            <a:endParaRPr lang="en-US" sz="1700" dirty="0"/>
+          </a:p>
+          <a:p>
+            <a:r>
+              <a:rPr lang="en-US" sz="1700" dirty="0">
+                <a:solidFill>
+                  <a:srgbClr val="17364A"/>
+                </a:solidFill>
+                <a:latin typeface="Aptos" pitchFamily="34" charset="0"/>
+                <a:ea typeface="Aptos" pitchFamily="34" charset="-122"/>
+                <a:cs typeface="Aptos" pitchFamily="34" charset="-120"/>
+              </a:rPr>
+              <a:t>Another risk is inequitable prioritization.</a:t>
+            </a:r>
+            <a:endParaRPr lang="en-US" sz="1700" dirty="0"/>
+          </a:p>
+        </p:txBody>
+      </p:sp>
+      <p:sp>
+        <p:nvSpPr>
+          <p:cNvPr id="11" name="Shape 9"/>
+          <p:cNvSpPr/>
+          <p:nvPr/>
+        </p:nvSpPr>
+        <p:spPr>
+          <a:xfrm>
+            <a:off x="7909560" y="1417320"/>
+            <a:ext cx="3154680" cy="1828800"/>
+          </a:xfrm>
+          <a:prstGeom prst="roundRect">
+            <a:avLst>
+              <a:gd name="adj" fmla="val 6000"/>
+            </a:avLst>
+          </a:prstGeom>
+          <a:solidFill>
+            <a:srgbClr val="EEF8ED"/>
+          </a:solidFill>
+          <a:ln w="12700">
+            <a:solidFill>
+              <a:srgbClr val="B9D7E6"/>
+            </a:solidFill>
+            <a:prstDash val="solid"/>
+          </a:ln>
+        </p:spPr>
+      </p:sp>
+      <p:sp>
+        <p:nvSpPr>
+          <p:cNvPr id="12" name="Text 10"/>
+          <p:cNvSpPr/>
+          <p:nvPr/>
+        </p:nvSpPr>
+        <p:spPr>
+          <a:xfrm>
+            <a:off x="8074152" y="1563624"/>
+            <a:ext cx="2825496" cy="201168"/>
+          </a:xfrm>
+          <a:prstGeom prst="rect">
+            <a:avLst/>
+          </a:prstGeom>
+          <a:noFill/>
+          <a:ln/>
+        </p:spPr>
+        <p:txBody>
+          <a:bodyPr wrap="square" lIns="0" tIns="0" rIns="0" bIns="0" rtlCol="0" anchor="ctr"/>
+          <a:lstStyle/>
+          <a:p>
             <a:pPr indent="0" marL="0">
               <a:buNone/>
             </a:pPr>
             <a:r>
-              <a:rPr lang="en-US" sz="1420" dirty="0">
+              <a:rPr lang="en-US" sz="950" b="1" dirty="0">
+                <a:solidFill>
+                  <a:srgbClr val="0068B7"/>
+                </a:solidFill>
+                <a:latin typeface="Aptos" pitchFamily="34" charset="0"/>
+                <a:ea typeface="Aptos" pitchFamily="34" charset="-122"/>
+                <a:cs typeface="Aptos" pitchFamily="34" charset="-120"/>
+              </a:rPr>
+              <a:t>Key idea</a:t>
+            </a:r>
+            <a:endParaRPr lang="en-US" sz="950" dirty="0"/>
+          </a:p>
+        </p:txBody>
+      </p:sp>
+      <p:sp>
+        <p:nvSpPr>
+          <p:cNvPr id="13" name="Text 11"/>
+          <p:cNvSpPr/>
+          <p:nvPr/>
+        </p:nvSpPr>
+        <p:spPr>
+          <a:xfrm>
+            <a:off x="8074152" y="1856232"/>
+            <a:ext cx="2825496" cy="1261872"/>
+          </a:xfrm>
+          <a:prstGeom prst="rect">
+            <a:avLst/>
+          </a:prstGeom>
+          <a:noFill/>
+          <a:ln/>
+        </p:spPr>
+        <p:txBody>
+          <a:bodyPr wrap="square" lIns="0" tIns="0" rIns="0" bIns="0" rtlCol="0" anchor="t">
+            <a:normAutofit/>
+          </a:bodyPr>
+          <a:lstStyle/>
+          <a:p>
+            <a:pPr indent="0" marL="0">
+              <a:buNone/>
+            </a:pPr>
+            <a:r>
+              <a:rPr lang="en-US" sz="1250" dirty="0">
                 <a:solidFill>
                   <a:srgbClr val="17364A"/>
                 </a:solidFill>
@@ -3218,9 +3983,116 @@
                 <a:ea typeface="Aptos" pitchFamily="34" charset="-122"/>
                 <a:cs typeface="Aptos" pitchFamily="34" charset="-120"/>
               </a:rPr>
-              <a:t>Which current or proposed AI use case in your agency raises this leadership or governance issue most clearly? Who currently has authority to make decisions about this issue, and is that authority documented? What evidence would governance or leadership need before approving the use case?</a:t>
-            </a:r>
-            <a:endParaRPr lang="en-US" sz="1420" dirty="0"/>
+              <a:t>A major risk is pilot proliferation.</a:t>
+            </a:r>
+            <a:endParaRPr lang="en-US" sz="1250" dirty="0"/>
+          </a:p>
+        </p:txBody>
+      </p:sp>
+      <p:sp>
+        <p:nvSpPr>
+          <p:cNvPr id="14" name="Shape 12"/>
+          <p:cNvSpPr/>
+          <p:nvPr/>
+        </p:nvSpPr>
+        <p:spPr>
+          <a:xfrm>
+            <a:off x="7909560" y="3520440"/>
+            <a:ext cx="3154680" cy="1737360"/>
+          </a:xfrm>
+          <a:prstGeom prst="roundRect">
+            <a:avLst>
+              <a:gd name="adj" fmla="val 6316"/>
+            </a:avLst>
+          </a:prstGeom>
+          <a:solidFill>
+            <a:srgbClr val="EAF6F8"/>
+          </a:solidFill>
+          <a:ln w="12700">
+            <a:solidFill>
+              <a:srgbClr val="B9D7E6"/>
+            </a:solidFill>
+            <a:prstDash val="solid"/>
+          </a:ln>
+        </p:spPr>
+      </p:sp>
+      <p:sp>
+        <p:nvSpPr>
+          <p:cNvPr id="15" name="Text 13"/>
+          <p:cNvSpPr/>
+          <p:nvPr/>
+        </p:nvSpPr>
+        <p:spPr>
+          <a:xfrm>
+            <a:off x="8074152" y="3666744"/>
+            <a:ext cx="2825496" cy="201168"/>
+          </a:xfrm>
+          <a:prstGeom prst="rect">
+            <a:avLst/>
+          </a:prstGeom>
+          <a:noFill/>
+          <a:ln/>
+        </p:spPr>
+        <p:txBody>
+          <a:bodyPr wrap="square" lIns="0" tIns="0" rIns="0" bIns="0" rtlCol="0" anchor="ctr"/>
+          <a:lstStyle/>
+          <a:p>
+            <a:pPr indent="0" marL="0">
+              <a:buNone/>
+            </a:pPr>
+            <a:r>
+              <a:rPr lang="en-US" sz="950" b="1" dirty="0">
+                <a:solidFill>
+                  <a:srgbClr val="0068B7"/>
+                </a:solidFill>
+                <a:latin typeface="Aptos" pitchFamily="34" charset="0"/>
+                <a:ea typeface="Aptos" pitchFamily="34" charset="-122"/>
+                <a:cs typeface="Aptos" pitchFamily="34" charset="-120"/>
+              </a:rPr>
+              <a:t>Use this for</a:t>
+            </a:r>
+            <a:endParaRPr lang="en-US" sz="950" dirty="0"/>
+          </a:p>
+        </p:txBody>
+      </p:sp>
+      <p:sp>
+        <p:nvSpPr>
+          <p:cNvPr id="16" name="Text 14"/>
+          <p:cNvSpPr/>
+          <p:nvPr/>
+        </p:nvSpPr>
+        <p:spPr>
+          <a:xfrm>
+            <a:off x="8074152" y="3959352"/>
+            <a:ext cx="2825496" cy="1170432"/>
+          </a:xfrm>
+          <a:prstGeom prst="rect">
+            <a:avLst/>
+          </a:prstGeom>
+          <a:noFill/>
+          <a:ln/>
+        </p:spPr>
+        <p:txBody>
+          <a:bodyPr wrap="square" lIns="0" tIns="0" rIns="0" bIns="0" rtlCol="0" anchor="t">
+            <a:normAutofit/>
+          </a:bodyPr>
+          <a:lstStyle/>
+          <a:p>
+            <a:pPr indent="0" marL="0">
+              <a:buNone/>
+            </a:pPr>
+            <a:r>
+              <a:rPr lang="en-US" sz="1250" dirty="0">
+                <a:solidFill>
+                  <a:srgbClr val="17364A"/>
+                </a:solidFill>
+                <a:latin typeface="Aptos" pitchFamily="34" charset="0"/>
+                <a:ea typeface="Aptos" pitchFamily="34" charset="-122"/>
+                <a:cs typeface="Aptos" pitchFamily="34" charset="-120"/>
+              </a:rPr>
+              <a:t>Connect the concept to public health decisions, safeguards, documentation, or implementation work.</a:t>
+            </a:r>
+            <a:endParaRPr lang="en-US" sz="1250" dirty="0"/>
           </a:p>
         </p:txBody>
       </p:sp>
@@ -3283,7 +4155,32 @@
       </p:sp>
       <p:sp>
         <p:nvSpPr>
-          <p:cNvPr id="3" name="Text 1"/>
+          <p:cNvPr id="3" name="Shape 1"/>
+          <p:cNvSpPr/>
+          <p:nvPr/>
+        </p:nvSpPr>
+        <p:spPr>
+          <a:xfrm>
+            <a:off x="0" y="164592"/>
+            <a:ext cx="146304" cy="6693408"/>
+          </a:xfrm>
+          <a:prstGeom prst="rect">
+            <a:avLst/>
+          </a:prstGeom>
+          <a:solidFill>
+            <a:srgbClr val="2F8A28"/>
+          </a:solidFill>
+          <a:ln w="12700">
+            <a:solidFill>
+              <a:srgbClr val="2F8A28"/>
+            </a:solidFill>
+            <a:prstDash val="solid"/>
+          </a:ln>
+        </p:spPr>
+      </p:sp>
+      <p:sp>
+        <p:nvSpPr>
+          <p:cNvPr id="4" name="Text 2"/>
           <p:cNvSpPr/>
           <p:nvPr/>
         </p:nvSpPr>
@@ -3322,7 +4219,7 @@
       </p:sp>
       <p:sp>
         <p:nvSpPr>
-          <p:cNvPr id="4" name="Text 2"/>
+          <p:cNvPr id="5" name="Text 3"/>
           <p:cNvSpPr/>
           <p:nvPr/>
         </p:nvSpPr>
@@ -3361,7 +4258,7 @@
       </p:sp>
       <p:sp>
         <p:nvSpPr>
-          <p:cNvPr id="5" name="Text 3"/>
+          <p:cNvPr id="6" name="Text 4"/>
           <p:cNvSpPr/>
           <p:nvPr/>
         </p:nvSpPr>
@@ -3400,13 +4297,77 @@
       </p:sp>
       <p:sp>
         <p:nvSpPr>
-          <p:cNvPr id="6" name="Text 4"/>
+          <p:cNvPr id="7" name="Shape 5"/>
           <p:cNvSpPr/>
           <p:nvPr/>
         </p:nvSpPr>
         <p:spPr>
           <a:xfrm>
             <a:off x="640080" y="658368"/>
+            <a:ext cx="420624" cy="420624"/>
+          </a:xfrm>
+          <a:prstGeom prst="ellipse">
+            <a:avLst/>
+          </a:prstGeom>
+          <a:solidFill>
+            <a:srgbClr val="0068B7"/>
+          </a:solidFill>
+          <a:ln w="12700">
+            <a:solidFill>
+              <a:srgbClr val="0068B7"/>
+            </a:solidFill>
+            <a:prstDash val="solid"/>
+          </a:ln>
+        </p:spPr>
+      </p:sp>
+      <p:sp>
+        <p:nvSpPr>
+          <p:cNvPr id="8" name="Text 6"/>
+          <p:cNvSpPr/>
+          <p:nvPr/>
+        </p:nvSpPr>
+        <p:spPr>
+          <a:xfrm>
+            <a:off x="640080" y="731520"/>
+            <a:ext cx="420624" cy="164592"/>
+          </a:xfrm>
+          <a:prstGeom prst="rect">
+            <a:avLst/>
+          </a:prstGeom>
+          <a:noFill/>
+          <a:ln/>
+        </p:spPr>
+        <p:txBody>
+          <a:bodyPr wrap="square" lIns="0" tIns="0" rIns="0" bIns="0" rtlCol="0" anchor="ctr"/>
+          <a:lstStyle/>
+          <a:p>
+            <a:pPr algn="ctr" indent="0" marL="0">
+              <a:buNone/>
+            </a:pPr>
+            <a:r>
+              <a:rPr lang="en-US" sz="1100" b="1" dirty="0">
+                <a:solidFill>
+                  <a:srgbClr val="FFFFFF"/>
+                </a:solidFill>
+                <a:latin typeface="Aptos" pitchFamily="34" charset="0"/>
+                <a:ea typeface="Aptos" pitchFamily="34" charset="-122"/>
+                <a:cs typeface="Aptos" pitchFamily="34" charset="-120"/>
+              </a:rPr>
+              <a:t>8</a:t>
+            </a:r>
+            <a:endParaRPr lang="en-US" sz="1100" dirty="0"/>
+          </a:p>
+        </p:txBody>
+      </p:sp>
+      <p:sp>
+        <p:nvSpPr>
+          <p:cNvPr id="9" name="Text 7"/>
+          <p:cNvSpPr/>
+          <p:nvPr/>
+        </p:nvSpPr>
+        <p:spPr>
+          <a:xfrm>
+            <a:off x="640080" y="621792"/>
             <a:ext cx="10881360" cy="566928"/>
           </a:xfrm>
           <a:prstGeom prst="rect">
@@ -3433,7 +4394,7 @@
                 <a:ea typeface="Aptos Display" pitchFamily="34" charset="-122"/>
                 <a:cs typeface="Aptos Display" pitchFamily="34" charset="-120"/>
               </a:rPr>
-              <a:t>Reflection Questions Continued</a:t>
+              <a:t>Application to AI-Supported Workflows</a:t>
             </a:r>
             <a:endParaRPr lang="en-US" sz="2700" dirty="0"/>
           </a:p>
@@ -3441,32 +4402,178 @@
       </p:sp>
       <p:sp>
         <p:nvSpPr>
-          <p:cNvPr id="7" name="Text 5"/>
-          <p:cNvSpPr/>
-          <p:nvPr/>
-        </p:nvSpPr>
-        <p:spPr>
-          <a:xfrm>
-            <a:off x="822960" y="1325880"/>
-            <a:ext cx="10378440" cy="4800600"/>
-          </a:xfrm>
-          <a:prstGeom prst="rect">
-            <a:avLst/>
-          </a:prstGeom>
-          <a:noFill/>
-          <a:ln/>
-        </p:spPr>
-        <p:txBody>
-          <a:bodyPr wrap="square" lIns="1016" tIns="1016" rIns="1016" bIns="1016" rtlCol="0" anchor="t">
+          <p:cNvPr id="10" name="Text 8"/>
+          <p:cNvSpPr/>
+          <p:nvPr/>
+        </p:nvSpPr>
+        <p:spPr>
+          <a:xfrm>
+            <a:off x="868680" y="1417320"/>
+            <a:ext cx="6675120" cy="4434840"/>
+          </a:xfrm>
+          <a:prstGeom prst="rect">
+            <a:avLst/>
+          </a:prstGeom>
+          <a:noFill/>
+          <a:ln/>
+        </p:spPr>
+        <p:txBody>
+          <a:bodyPr wrap="square" lIns="635" tIns="635" rIns="635" bIns="635" rtlCol="0" anchor="t">
             <a:normAutofit/>
           </a:bodyPr>
           <a:lstStyle/>
           <a:p>
+            <a:r>
+              <a:rPr lang="en-US" sz="1700" dirty="0">
+                <a:solidFill>
+                  <a:srgbClr val="17364A"/>
+                </a:solidFill>
+                <a:latin typeface="Aptos" pitchFamily="34" charset="0"/>
+                <a:ea typeface="Aptos" pitchFamily="34" charset="-122"/>
+                <a:cs typeface="Aptos" pitchFamily="34" charset="-120"/>
+              </a:rPr>
+              <a:t>Generative AI projects may be prioritized for internal knowledge management before public-facing use.</a:t>
+            </a:r>
+            <a:endParaRPr lang="en-US" sz="1700" dirty="0"/>
+          </a:p>
+          <a:p>
+            <a:r>
+              <a:rPr lang="en-US" sz="1700" dirty="0">
+                <a:solidFill>
+                  <a:srgbClr val="17364A"/>
+                </a:solidFill>
+                <a:latin typeface="Aptos" pitchFamily="34" charset="0"/>
+                <a:ea typeface="Aptos" pitchFamily="34" charset="-122"/>
+                <a:cs typeface="Aptos" pitchFamily="34" charset="-120"/>
+              </a:rPr>
+              <a:t>Predictive analytics projects may be prioritized only when data and validation plans are mature.</a:t>
+            </a:r>
+            <a:endParaRPr lang="en-US" sz="1700" dirty="0"/>
+          </a:p>
+          <a:p>
+            <a:r>
+              <a:rPr lang="en-US" sz="1700" dirty="0">
+                <a:solidFill>
+                  <a:srgbClr val="17364A"/>
+                </a:solidFill>
+                <a:latin typeface="Aptos" pitchFamily="34" charset="0"/>
+                <a:ea typeface="Aptos" pitchFamily="34" charset="-122"/>
+                <a:cs typeface="Aptos" pitchFamily="34" charset="-120"/>
+              </a:rPr>
+              <a:t>Agentic workflows may be deferred until governance has defined decision rights, access controls, and rollback procedures.</a:t>
+            </a:r>
+            <a:endParaRPr lang="en-US" sz="1700" dirty="0"/>
+          </a:p>
+          <a:p>
+            <a:r>
+              <a:rPr lang="en-US" sz="1700" dirty="0">
+                <a:solidFill>
+                  <a:srgbClr val="17364A"/>
+                </a:solidFill>
+                <a:latin typeface="Aptos" pitchFamily="34" charset="0"/>
+                <a:ea typeface="Aptos" pitchFamily="34" charset="-122"/>
+                <a:cs typeface="Aptos" pitchFamily="34" charset="-120"/>
+              </a:rPr>
+              <a:t>Portfolio strategy helps leaders sequence AI adoption responsibly.</a:t>
+            </a:r>
+            <a:endParaRPr lang="en-US" sz="1700" dirty="0"/>
+          </a:p>
+        </p:txBody>
+      </p:sp>
+      <p:sp>
+        <p:nvSpPr>
+          <p:cNvPr id="11" name="Shape 9"/>
+          <p:cNvSpPr/>
+          <p:nvPr/>
+        </p:nvSpPr>
+        <p:spPr>
+          <a:xfrm>
+            <a:off x="7909560" y="1417320"/>
+            <a:ext cx="3154680" cy="1828800"/>
+          </a:xfrm>
+          <a:prstGeom prst="roundRect">
+            <a:avLst>
+              <a:gd name="adj" fmla="val 6000"/>
+            </a:avLst>
+          </a:prstGeom>
+          <a:solidFill>
+            <a:srgbClr val="EEF8ED"/>
+          </a:solidFill>
+          <a:ln w="12700">
+            <a:solidFill>
+              <a:srgbClr val="B9D7E6"/>
+            </a:solidFill>
+            <a:prstDash val="solid"/>
+          </a:ln>
+        </p:spPr>
+      </p:sp>
+      <p:sp>
+        <p:nvSpPr>
+          <p:cNvPr id="12" name="Text 10"/>
+          <p:cNvSpPr/>
+          <p:nvPr/>
+        </p:nvSpPr>
+        <p:spPr>
+          <a:xfrm>
+            <a:off x="8074152" y="1563624"/>
+            <a:ext cx="2825496" cy="201168"/>
+          </a:xfrm>
+          <a:prstGeom prst="rect">
+            <a:avLst/>
+          </a:prstGeom>
+          <a:noFill/>
+          <a:ln/>
+        </p:spPr>
+        <p:txBody>
+          <a:bodyPr wrap="square" lIns="0" tIns="0" rIns="0" bIns="0" rtlCol="0" anchor="ctr"/>
+          <a:lstStyle/>
+          <a:p>
             <a:pPr indent="0" marL="0">
               <a:buNone/>
             </a:pPr>
             <a:r>
-              <a:rPr lang="en-US" sz="1420" dirty="0">
+              <a:rPr lang="en-US" sz="950" b="1" dirty="0">
+                <a:solidFill>
+                  <a:srgbClr val="0068B7"/>
+                </a:solidFill>
+                <a:latin typeface="Aptos" pitchFamily="34" charset="0"/>
+                <a:ea typeface="Aptos" pitchFamily="34" charset="-122"/>
+                <a:cs typeface="Aptos" pitchFamily="34" charset="-120"/>
+              </a:rPr>
+              <a:t>Key idea</a:t>
+            </a:r>
+            <a:endParaRPr lang="en-US" sz="950" dirty="0"/>
+          </a:p>
+        </p:txBody>
+      </p:sp>
+      <p:sp>
+        <p:nvSpPr>
+          <p:cNvPr id="13" name="Text 11"/>
+          <p:cNvSpPr/>
+          <p:nvPr/>
+        </p:nvSpPr>
+        <p:spPr>
+          <a:xfrm>
+            <a:off x="8074152" y="1856232"/>
+            <a:ext cx="2825496" cy="1261872"/>
+          </a:xfrm>
+          <a:prstGeom prst="rect">
+            <a:avLst/>
+          </a:prstGeom>
+          <a:noFill/>
+          <a:ln/>
+        </p:spPr>
+        <p:txBody>
+          <a:bodyPr wrap="square" lIns="0" tIns="0" rIns="0" bIns="0" rtlCol="0" anchor="t">
+            <a:normAutofit/>
+          </a:bodyPr>
+          <a:lstStyle/>
+          <a:p>
+            <a:pPr indent="0" marL="0">
+              <a:buNone/>
+            </a:pPr>
+            <a:r>
+              <a:rPr lang="en-US" sz="1250" dirty="0">
                 <a:solidFill>
                   <a:srgbClr val="17364A"/>
                 </a:solidFill>
@@ -3474,9 +4581,116 @@
                 <a:ea typeface="Aptos" pitchFamily="34" charset="-122"/>
                 <a:cs typeface="Aptos" pitchFamily="34" charset="-120"/>
               </a:rPr>
-              <a:t>Which staff, partners, or communities would be affected if this issue were handled poorly? What policy, process, or artifact should be created or updated after this module?</a:t>
-            </a:r>
-            <a:endParaRPr lang="en-US" sz="1420" dirty="0"/>
+              <a:t>Generative AI projects may be prioritized for internal knowledge management before public-facing use.</a:t>
+            </a:r>
+            <a:endParaRPr lang="en-US" sz="1250" dirty="0"/>
+          </a:p>
+        </p:txBody>
+      </p:sp>
+      <p:sp>
+        <p:nvSpPr>
+          <p:cNvPr id="14" name="Shape 12"/>
+          <p:cNvSpPr/>
+          <p:nvPr/>
+        </p:nvSpPr>
+        <p:spPr>
+          <a:xfrm>
+            <a:off x="7909560" y="3520440"/>
+            <a:ext cx="3154680" cy="1737360"/>
+          </a:xfrm>
+          <a:prstGeom prst="roundRect">
+            <a:avLst>
+              <a:gd name="adj" fmla="val 6316"/>
+            </a:avLst>
+          </a:prstGeom>
+          <a:solidFill>
+            <a:srgbClr val="EAF6F8"/>
+          </a:solidFill>
+          <a:ln w="12700">
+            <a:solidFill>
+              <a:srgbClr val="B9D7E6"/>
+            </a:solidFill>
+            <a:prstDash val="solid"/>
+          </a:ln>
+        </p:spPr>
+      </p:sp>
+      <p:sp>
+        <p:nvSpPr>
+          <p:cNvPr id="15" name="Text 13"/>
+          <p:cNvSpPr/>
+          <p:nvPr/>
+        </p:nvSpPr>
+        <p:spPr>
+          <a:xfrm>
+            <a:off x="8074152" y="3666744"/>
+            <a:ext cx="2825496" cy="201168"/>
+          </a:xfrm>
+          <a:prstGeom prst="rect">
+            <a:avLst/>
+          </a:prstGeom>
+          <a:noFill/>
+          <a:ln/>
+        </p:spPr>
+        <p:txBody>
+          <a:bodyPr wrap="square" lIns="0" tIns="0" rIns="0" bIns="0" rtlCol="0" anchor="ctr"/>
+          <a:lstStyle/>
+          <a:p>
+            <a:pPr indent="0" marL="0">
+              <a:buNone/>
+            </a:pPr>
+            <a:r>
+              <a:rPr lang="en-US" sz="950" b="1" dirty="0">
+                <a:solidFill>
+                  <a:srgbClr val="0068B7"/>
+                </a:solidFill>
+                <a:latin typeface="Aptos" pitchFamily="34" charset="0"/>
+                <a:ea typeface="Aptos" pitchFamily="34" charset="-122"/>
+                <a:cs typeface="Aptos" pitchFamily="34" charset="-120"/>
+              </a:rPr>
+              <a:t>Use this for</a:t>
+            </a:r>
+            <a:endParaRPr lang="en-US" sz="950" dirty="0"/>
+          </a:p>
+        </p:txBody>
+      </p:sp>
+      <p:sp>
+        <p:nvSpPr>
+          <p:cNvPr id="16" name="Text 14"/>
+          <p:cNvSpPr/>
+          <p:nvPr/>
+        </p:nvSpPr>
+        <p:spPr>
+          <a:xfrm>
+            <a:off x="8074152" y="3959352"/>
+            <a:ext cx="2825496" cy="1170432"/>
+          </a:xfrm>
+          <a:prstGeom prst="rect">
+            <a:avLst/>
+          </a:prstGeom>
+          <a:noFill/>
+          <a:ln/>
+        </p:spPr>
+        <p:txBody>
+          <a:bodyPr wrap="square" lIns="0" tIns="0" rIns="0" bIns="0" rtlCol="0" anchor="t">
+            <a:normAutofit/>
+          </a:bodyPr>
+          <a:lstStyle/>
+          <a:p>
+            <a:pPr indent="0" marL="0">
+              <a:buNone/>
+            </a:pPr>
+            <a:r>
+              <a:rPr lang="en-US" sz="1250" dirty="0">
+                <a:solidFill>
+                  <a:srgbClr val="17364A"/>
+                </a:solidFill>
+                <a:latin typeface="Aptos" pitchFamily="34" charset="0"/>
+                <a:ea typeface="Aptos" pitchFamily="34" charset="-122"/>
+                <a:cs typeface="Aptos" pitchFamily="34" charset="-120"/>
+              </a:rPr>
+              <a:t>Connect the concept to public health decisions, safeguards, documentation, or implementation work.</a:t>
+            </a:r>
+            <a:endParaRPr lang="en-US" sz="1250" dirty="0"/>
           </a:p>
         </p:txBody>
       </p:sp>
@@ -3539,7 +4753,32 @@
       </p:sp>
       <p:sp>
         <p:nvSpPr>
-          <p:cNvPr id="3" name="Text 1"/>
+          <p:cNvPr id="3" name="Shape 1"/>
+          <p:cNvSpPr/>
+          <p:nvPr/>
+        </p:nvSpPr>
+        <p:spPr>
+          <a:xfrm>
+            <a:off x="0" y="164592"/>
+            <a:ext cx="146304" cy="6693408"/>
+          </a:xfrm>
+          <a:prstGeom prst="rect">
+            <a:avLst/>
+          </a:prstGeom>
+          <a:solidFill>
+            <a:srgbClr val="2F8A28"/>
+          </a:solidFill>
+          <a:ln w="12700">
+            <a:solidFill>
+              <a:srgbClr val="2F8A28"/>
+            </a:solidFill>
+            <a:prstDash val="solid"/>
+          </a:ln>
+        </p:spPr>
+      </p:sp>
+      <p:sp>
+        <p:nvSpPr>
+          <p:cNvPr id="4" name="Text 2"/>
           <p:cNvSpPr/>
           <p:nvPr/>
         </p:nvSpPr>
@@ -3578,7 +4817,7 @@
       </p:sp>
       <p:sp>
         <p:nvSpPr>
-          <p:cNvPr id="4" name="Text 2"/>
+          <p:cNvPr id="5" name="Text 3"/>
           <p:cNvSpPr/>
           <p:nvPr/>
         </p:nvSpPr>
@@ -3617,7 +4856,7 @@
       </p:sp>
       <p:sp>
         <p:nvSpPr>
-          <p:cNvPr id="5" name="Text 3"/>
+          <p:cNvPr id="6" name="Text 4"/>
           <p:cNvSpPr/>
           <p:nvPr/>
         </p:nvSpPr>
@@ -3656,13 +4895,77 @@
       </p:sp>
       <p:sp>
         <p:nvSpPr>
-          <p:cNvPr id="6" name="Text 4"/>
+          <p:cNvPr id="7" name="Shape 5"/>
           <p:cNvSpPr/>
           <p:nvPr/>
         </p:nvSpPr>
         <p:spPr>
           <a:xfrm>
             <a:off x="640080" y="658368"/>
+            <a:ext cx="420624" cy="420624"/>
+          </a:xfrm>
+          <a:prstGeom prst="ellipse">
+            <a:avLst/>
+          </a:prstGeom>
+          <a:solidFill>
+            <a:srgbClr val="0068B7"/>
+          </a:solidFill>
+          <a:ln w="12700">
+            <a:solidFill>
+              <a:srgbClr val="0068B7"/>
+            </a:solidFill>
+            <a:prstDash val="solid"/>
+          </a:ln>
+        </p:spPr>
+      </p:sp>
+      <p:sp>
+        <p:nvSpPr>
+          <p:cNvPr id="8" name="Text 6"/>
+          <p:cNvSpPr/>
+          <p:nvPr/>
+        </p:nvSpPr>
+        <p:spPr>
+          <a:xfrm>
+            <a:off x="640080" y="731520"/>
+            <a:ext cx="420624" cy="164592"/>
+          </a:xfrm>
+          <a:prstGeom prst="rect">
+            <a:avLst/>
+          </a:prstGeom>
+          <a:noFill/>
+          <a:ln/>
+        </p:spPr>
+        <p:txBody>
+          <a:bodyPr wrap="square" lIns="0" tIns="0" rIns="0" bIns="0" rtlCol="0" anchor="ctr"/>
+          <a:lstStyle/>
+          <a:p>
+            <a:pPr algn="ctr" indent="0" marL="0">
+              <a:buNone/>
+            </a:pPr>
+            <a:r>
+              <a:rPr lang="en-US" sz="1100" b="1" dirty="0">
+                <a:solidFill>
+                  <a:srgbClr val="FFFFFF"/>
+                </a:solidFill>
+                <a:latin typeface="Aptos" pitchFamily="34" charset="0"/>
+                <a:ea typeface="Aptos" pitchFamily="34" charset="-122"/>
+                <a:cs typeface="Aptos" pitchFamily="34" charset="-120"/>
+              </a:rPr>
+              <a:t>9</a:t>
+            </a:r>
+            <a:endParaRPr lang="en-US" sz="1100" dirty="0"/>
+          </a:p>
+        </p:txBody>
+      </p:sp>
+      <p:sp>
+        <p:nvSpPr>
+          <p:cNvPr id="9" name="Text 7"/>
+          <p:cNvSpPr/>
+          <p:nvPr/>
+        </p:nvSpPr>
+        <p:spPr>
+          <a:xfrm>
+            <a:off x="640080" y="621792"/>
             <a:ext cx="10881360" cy="566928"/>
           </a:xfrm>
           <a:prstGeom prst="rect">
@@ -3689,7 +4992,7 @@
                 <a:ea typeface="Aptos Display" pitchFamily="34" charset="-122"/>
                 <a:cs typeface="Aptos Display" pitchFamily="34" charset="-120"/>
               </a:rPr>
-              <a:t>Practical Exercise</a:t>
+              <a:t>Reflection Questions</a:t>
             </a:r>
             <a:endParaRPr lang="en-US" sz="2700" dirty="0"/>
           </a:p>
@@ -3697,32 +5000,164 @@
       </p:sp>
       <p:sp>
         <p:nvSpPr>
-          <p:cNvPr id="7" name="Text 5"/>
-          <p:cNvSpPr/>
-          <p:nvPr/>
-        </p:nvSpPr>
-        <p:spPr>
-          <a:xfrm>
-            <a:off x="822960" y="1325880"/>
-            <a:ext cx="10378440" cy="4800600"/>
-          </a:xfrm>
-          <a:prstGeom prst="rect">
-            <a:avLst/>
-          </a:prstGeom>
-          <a:noFill/>
-          <a:ln/>
-        </p:spPr>
-        <p:txBody>
-          <a:bodyPr wrap="square" lIns="1016" tIns="1016" rIns="1016" bIns="1016" rtlCol="0" anchor="t">
+          <p:cNvPr id="10" name="Text 8"/>
+          <p:cNvSpPr/>
+          <p:nvPr/>
+        </p:nvSpPr>
+        <p:spPr>
+          <a:xfrm>
+            <a:off x="868680" y="1417320"/>
+            <a:ext cx="6675120" cy="4434840"/>
+          </a:xfrm>
+          <a:prstGeom prst="rect">
+            <a:avLst/>
+          </a:prstGeom>
+          <a:noFill/>
+          <a:ln/>
+        </p:spPr>
+        <p:txBody>
+          <a:bodyPr wrap="square" lIns="635" tIns="635" rIns="635" bIns="635" rtlCol="0" anchor="t">
             <a:normAutofit/>
           </a:bodyPr>
           <a:lstStyle/>
           <a:p>
+            <a:r>
+              <a:rPr lang="en-US" sz="1700" dirty="0">
+                <a:solidFill>
+                  <a:srgbClr val="17364A"/>
+                </a:solidFill>
+                <a:latin typeface="Aptos" pitchFamily="34" charset="0"/>
+                <a:ea typeface="Aptos" pitchFamily="34" charset="-122"/>
+                <a:cs typeface="Aptos" pitchFamily="34" charset="-120"/>
+              </a:rPr>
+              <a:t>Which current or proposed AI use case in your agency raises this leadership or governance issue most clearly?</a:t>
+            </a:r>
+            <a:endParaRPr lang="en-US" sz="1700" dirty="0"/>
+          </a:p>
+          <a:p>
+            <a:r>
+              <a:rPr lang="en-US" sz="1700" dirty="0">
+                <a:solidFill>
+                  <a:srgbClr val="17364A"/>
+                </a:solidFill>
+                <a:latin typeface="Aptos" pitchFamily="34" charset="0"/>
+                <a:ea typeface="Aptos" pitchFamily="34" charset="-122"/>
+                <a:cs typeface="Aptos" pitchFamily="34" charset="-120"/>
+              </a:rPr>
+              <a:t>Who currently has authority to make decisions about this issue, and is that authority documented?</a:t>
+            </a:r>
+            <a:endParaRPr lang="en-US" sz="1700" dirty="0"/>
+          </a:p>
+          <a:p>
+            <a:r>
+              <a:rPr lang="en-US" sz="1700" dirty="0">
+                <a:solidFill>
+                  <a:srgbClr val="17364A"/>
+                </a:solidFill>
+                <a:latin typeface="Aptos" pitchFamily="34" charset="0"/>
+                <a:ea typeface="Aptos" pitchFamily="34" charset="-122"/>
+                <a:cs typeface="Aptos" pitchFamily="34" charset="-120"/>
+              </a:rPr>
+              <a:t>What evidence would governance or leadership need before approving the use case?</a:t>
+            </a:r>
+            <a:endParaRPr lang="en-US" sz="1700" dirty="0"/>
+          </a:p>
+        </p:txBody>
+      </p:sp>
+      <p:sp>
+        <p:nvSpPr>
+          <p:cNvPr id="11" name="Shape 9"/>
+          <p:cNvSpPr/>
+          <p:nvPr/>
+        </p:nvSpPr>
+        <p:spPr>
+          <a:xfrm>
+            <a:off x="7909560" y="1417320"/>
+            <a:ext cx="3154680" cy="1828800"/>
+          </a:xfrm>
+          <a:prstGeom prst="roundRect">
+            <a:avLst>
+              <a:gd name="adj" fmla="val 6000"/>
+            </a:avLst>
+          </a:prstGeom>
+          <a:solidFill>
+            <a:srgbClr val="EEF8ED"/>
+          </a:solidFill>
+          <a:ln w="12700">
+            <a:solidFill>
+              <a:srgbClr val="B9D7E6"/>
+            </a:solidFill>
+            <a:prstDash val="solid"/>
+          </a:ln>
+        </p:spPr>
+      </p:sp>
+      <p:sp>
+        <p:nvSpPr>
+          <p:cNvPr id="12" name="Text 10"/>
+          <p:cNvSpPr/>
+          <p:nvPr/>
+        </p:nvSpPr>
+        <p:spPr>
+          <a:xfrm>
+            <a:off x="8074152" y="1563624"/>
+            <a:ext cx="2825496" cy="201168"/>
+          </a:xfrm>
+          <a:prstGeom prst="rect">
+            <a:avLst/>
+          </a:prstGeom>
+          <a:noFill/>
+          <a:ln/>
+        </p:spPr>
+        <p:txBody>
+          <a:bodyPr wrap="square" lIns="0" tIns="0" rIns="0" bIns="0" rtlCol="0" anchor="ctr"/>
+          <a:lstStyle/>
+          <a:p>
             <a:pPr indent="0" marL="0">
               <a:buNone/>
             </a:pPr>
             <a:r>
-              <a:rPr lang="en-US" sz="1420" dirty="0">
+              <a:rPr lang="en-US" sz="950" b="1" dirty="0">
+                <a:solidFill>
+                  <a:srgbClr val="0068B7"/>
+                </a:solidFill>
+                <a:latin typeface="Aptos" pitchFamily="34" charset="0"/>
+                <a:ea typeface="Aptos" pitchFamily="34" charset="-122"/>
+                <a:cs typeface="Aptos" pitchFamily="34" charset="-120"/>
+              </a:rPr>
+              <a:t>Key idea</a:t>
+            </a:r>
+            <a:endParaRPr lang="en-US" sz="950" dirty="0"/>
+          </a:p>
+        </p:txBody>
+      </p:sp>
+      <p:sp>
+        <p:nvSpPr>
+          <p:cNvPr id="13" name="Text 11"/>
+          <p:cNvSpPr/>
+          <p:nvPr/>
+        </p:nvSpPr>
+        <p:spPr>
+          <a:xfrm>
+            <a:off x="8074152" y="1856232"/>
+            <a:ext cx="2825496" cy="1261872"/>
+          </a:xfrm>
+          <a:prstGeom prst="rect">
+            <a:avLst/>
+          </a:prstGeom>
+          <a:noFill/>
+          <a:ln/>
+        </p:spPr>
+        <p:txBody>
+          <a:bodyPr wrap="square" lIns="0" tIns="0" rIns="0" bIns="0" rtlCol="0" anchor="t">
+            <a:normAutofit/>
+          </a:bodyPr>
+          <a:lstStyle/>
+          <a:p>
+            <a:pPr indent="0" marL="0">
+              <a:buNone/>
+            </a:pPr>
+            <a:r>
+              <a:rPr lang="en-US" sz="1250" dirty="0">
                 <a:solidFill>
                   <a:srgbClr val="17364A"/>
                 </a:solidFill>
@@ -3730,9 +5165,116 @@
                 <a:ea typeface="Aptos" pitchFamily="34" charset="-122"/>
                 <a:cs typeface="Aptos" pitchFamily="34" charset="-120"/>
               </a:rPr>
-              <a:t>Develop an AI use case prioritization rubric with criteria, scoring levels, required evidence, and decision categories such as pursue, pilot, redesign, defer, or reject.</a:t>
-            </a:r>
-            <a:endParaRPr lang="en-US" sz="1420" dirty="0"/>
+              <a:t>Which current or proposed AI use case in your agency raises this leadership or governance issue most clearly?</a:t>
+            </a:r>
+            <a:endParaRPr lang="en-US" sz="1250" dirty="0"/>
+          </a:p>
+        </p:txBody>
+      </p:sp>
+      <p:sp>
+        <p:nvSpPr>
+          <p:cNvPr id="14" name="Shape 12"/>
+          <p:cNvSpPr/>
+          <p:nvPr/>
+        </p:nvSpPr>
+        <p:spPr>
+          <a:xfrm>
+            <a:off x="7909560" y="3520440"/>
+            <a:ext cx="3154680" cy="1737360"/>
+          </a:xfrm>
+          <a:prstGeom prst="roundRect">
+            <a:avLst>
+              <a:gd name="adj" fmla="val 6316"/>
+            </a:avLst>
+          </a:prstGeom>
+          <a:solidFill>
+            <a:srgbClr val="EAF6F8"/>
+          </a:solidFill>
+          <a:ln w="12700">
+            <a:solidFill>
+              <a:srgbClr val="B9D7E6"/>
+            </a:solidFill>
+            <a:prstDash val="solid"/>
+          </a:ln>
+        </p:spPr>
+      </p:sp>
+      <p:sp>
+        <p:nvSpPr>
+          <p:cNvPr id="15" name="Text 13"/>
+          <p:cNvSpPr/>
+          <p:nvPr/>
+        </p:nvSpPr>
+        <p:spPr>
+          <a:xfrm>
+            <a:off x="8074152" y="3666744"/>
+            <a:ext cx="2825496" cy="201168"/>
+          </a:xfrm>
+          <a:prstGeom prst="rect">
+            <a:avLst/>
+          </a:prstGeom>
+          <a:noFill/>
+          <a:ln/>
+        </p:spPr>
+        <p:txBody>
+          <a:bodyPr wrap="square" lIns="0" tIns="0" rIns="0" bIns="0" rtlCol="0" anchor="ctr"/>
+          <a:lstStyle/>
+          <a:p>
+            <a:pPr indent="0" marL="0">
+              <a:buNone/>
+            </a:pPr>
+            <a:r>
+              <a:rPr lang="en-US" sz="950" b="1" dirty="0">
+                <a:solidFill>
+                  <a:srgbClr val="0068B7"/>
+                </a:solidFill>
+                <a:latin typeface="Aptos" pitchFamily="34" charset="0"/>
+                <a:ea typeface="Aptos" pitchFamily="34" charset="-122"/>
+                <a:cs typeface="Aptos" pitchFamily="34" charset="-120"/>
+              </a:rPr>
+              <a:t>Use this for</a:t>
+            </a:r>
+            <a:endParaRPr lang="en-US" sz="950" dirty="0"/>
+          </a:p>
+        </p:txBody>
+      </p:sp>
+      <p:sp>
+        <p:nvSpPr>
+          <p:cNvPr id="16" name="Text 14"/>
+          <p:cNvSpPr/>
+          <p:nvPr/>
+        </p:nvSpPr>
+        <p:spPr>
+          <a:xfrm>
+            <a:off x="8074152" y="3959352"/>
+            <a:ext cx="2825496" cy="1170432"/>
+          </a:xfrm>
+          <a:prstGeom prst="rect">
+            <a:avLst/>
+          </a:prstGeom>
+          <a:noFill/>
+          <a:ln/>
+        </p:spPr>
+        <p:txBody>
+          <a:bodyPr wrap="square" lIns="0" tIns="0" rIns="0" bIns="0" rtlCol="0" anchor="t">
+            <a:normAutofit/>
+          </a:bodyPr>
+          <a:lstStyle/>
+          <a:p>
+            <a:pPr indent="0" marL="0">
+              <a:buNone/>
+            </a:pPr>
+            <a:r>
+              <a:rPr lang="en-US" sz="1250" dirty="0">
+                <a:solidFill>
+                  <a:srgbClr val="17364A"/>
+                </a:solidFill>
+                <a:latin typeface="Aptos" pitchFamily="34" charset="0"/>
+                <a:ea typeface="Aptos" pitchFamily="34" charset="-122"/>
+                <a:cs typeface="Aptos" pitchFamily="34" charset="-120"/>
+              </a:rPr>
+              <a:t>Connect the concept to public health decisions, safeguards, documentation, or implementation work.</a:t>
+            </a:r>
+            <a:endParaRPr lang="en-US" sz="1250" dirty="0"/>
           </a:p>
         </p:txBody>
       </p:sp>
@@ -3795,7 +5337,32 @@
       </p:sp>
       <p:sp>
         <p:nvSpPr>
-          <p:cNvPr id="3" name="Text 1"/>
+          <p:cNvPr id="3" name="Shape 1"/>
+          <p:cNvSpPr/>
+          <p:nvPr/>
+        </p:nvSpPr>
+        <p:spPr>
+          <a:xfrm>
+            <a:off x="0" y="164592"/>
+            <a:ext cx="146304" cy="6693408"/>
+          </a:xfrm>
+          <a:prstGeom prst="rect">
+            <a:avLst/>
+          </a:prstGeom>
+          <a:solidFill>
+            <a:srgbClr val="2F8A28"/>
+          </a:solidFill>
+          <a:ln w="12700">
+            <a:solidFill>
+              <a:srgbClr val="2F8A28"/>
+            </a:solidFill>
+            <a:prstDash val="solid"/>
+          </a:ln>
+        </p:spPr>
+      </p:sp>
+      <p:sp>
+        <p:nvSpPr>
+          <p:cNvPr id="4" name="Text 2"/>
           <p:cNvSpPr/>
           <p:nvPr/>
         </p:nvSpPr>
@@ -3834,7 +5401,7 @@
       </p:sp>
       <p:sp>
         <p:nvSpPr>
-          <p:cNvPr id="4" name="Text 2"/>
+          <p:cNvPr id="5" name="Text 3"/>
           <p:cNvSpPr/>
           <p:nvPr/>
         </p:nvSpPr>
@@ -3873,7 +5440,7 @@
       </p:sp>
       <p:sp>
         <p:nvSpPr>
-          <p:cNvPr id="5" name="Text 3"/>
+          <p:cNvPr id="6" name="Text 4"/>
           <p:cNvSpPr/>
           <p:nvPr/>
         </p:nvSpPr>
@@ -3912,7 +5479,7 @@
       </p:sp>
       <p:sp>
         <p:nvSpPr>
-          <p:cNvPr id="6" name="Text 4"/>
+          <p:cNvPr id="7" name="Text 5"/>
           <p:cNvSpPr/>
           <p:nvPr/>
         </p:nvSpPr>
@@ -3945,7 +5512,7 @@
                 <a:ea typeface="Aptos Display" pitchFamily="34" charset="-122"/>
                 <a:cs typeface="Aptos Display" pitchFamily="34" charset="-120"/>
               </a:rPr>
-              <a:t>Before You Begin</a:t>
+              <a:t>Reflection Questions Continued</a:t>
             </a:r>
             <a:endParaRPr lang="en-US" sz="2700" dirty="0"/>
           </a:p>
@@ -3953,32 +5520,150 @@
       </p:sp>
       <p:sp>
         <p:nvSpPr>
-          <p:cNvPr id="7" name="Text 5"/>
-          <p:cNvSpPr/>
-          <p:nvPr/>
-        </p:nvSpPr>
-        <p:spPr>
-          <a:xfrm>
-            <a:off x="822960" y="1325880"/>
-            <a:ext cx="10378440" cy="4800600"/>
-          </a:xfrm>
-          <a:prstGeom prst="rect">
-            <a:avLst/>
-          </a:prstGeom>
-          <a:noFill/>
-          <a:ln/>
-        </p:spPr>
-        <p:txBody>
-          <a:bodyPr wrap="square" lIns="1016" tIns="1016" rIns="1016" bIns="1016" rtlCol="0" anchor="t">
+          <p:cNvPr id="8" name="Text 6"/>
+          <p:cNvSpPr/>
+          <p:nvPr/>
+        </p:nvSpPr>
+        <p:spPr>
+          <a:xfrm>
+            <a:off x="868680" y="1417320"/>
+            <a:ext cx="6675120" cy="4434840"/>
+          </a:xfrm>
+          <a:prstGeom prst="rect">
+            <a:avLst/>
+          </a:prstGeom>
+          <a:noFill/>
+          <a:ln/>
+        </p:spPr>
+        <p:txBody>
+          <a:bodyPr wrap="square" lIns="635" tIns="635" rIns="635" bIns="635" rtlCol="0" anchor="t">
             <a:normAutofit/>
           </a:bodyPr>
           <a:lstStyle/>
           <a:p>
+            <a:r>
+              <a:rPr lang="en-US" sz="1700" dirty="0">
+                <a:solidFill>
+                  <a:srgbClr val="17364A"/>
+                </a:solidFill>
+                <a:latin typeface="Aptos" pitchFamily="34" charset="0"/>
+                <a:ea typeface="Aptos" pitchFamily="34" charset="-122"/>
+                <a:cs typeface="Aptos" pitchFamily="34" charset="-120"/>
+              </a:rPr>
+              <a:t>Which staff, partners, or communities would be affected if this issue were handled poorly?</a:t>
+            </a:r>
+            <a:endParaRPr lang="en-US" sz="1700" dirty="0"/>
+          </a:p>
+          <a:p>
+            <a:r>
+              <a:rPr lang="en-US" sz="1700" dirty="0">
+                <a:solidFill>
+                  <a:srgbClr val="17364A"/>
+                </a:solidFill>
+                <a:latin typeface="Aptos" pitchFamily="34" charset="0"/>
+                <a:ea typeface="Aptos" pitchFamily="34" charset="-122"/>
+                <a:cs typeface="Aptos" pitchFamily="34" charset="-120"/>
+              </a:rPr>
+              <a:t>What policy, process, or artifact should be created or updated after this module?</a:t>
+            </a:r>
+            <a:endParaRPr lang="en-US" sz="1700" dirty="0"/>
+          </a:p>
+        </p:txBody>
+      </p:sp>
+      <p:sp>
+        <p:nvSpPr>
+          <p:cNvPr id="9" name="Shape 7"/>
+          <p:cNvSpPr/>
+          <p:nvPr/>
+        </p:nvSpPr>
+        <p:spPr>
+          <a:xfrm>
+            <a:off x="7909560" y="1417320"/>
+            <a:ext cx="3154680" cy="1828800"/>
+          </a:xfrm>
+          <a:prstGeom prst="roundRect">
+            <a:avLst>
+              <a:gd name="adj" fmla="val 6000"/>
+            </a:avLst>
+          </a:prstGeom>
+          <a:solidFill>
+            <a:srgbClr val="EEF8ED"/>
+          </a:solidFill>
+          <a:ln w="12700">
+            <a:solidFill>
+              <a:srgbClr val="B9D7E6"/>
+            </a:solidFill>
+            <a:prstDash val="solid"/>
+          </a:ln>
+        </p:spPr>
+      </p:sp>
+      <p:sp>
+        <p:nvSpPr>
+          <p:cNvPr id="10" name="Text 8"/>
+          <p:cNvSpPr/>
+          <p:nvPr/>
+        </p:nvSpPr>
+        <p:spPr>
+          <a:xfrm>
+            <a:off x="8074152" y="1563624"/>
+            <a:ext cx="2825496" cy="201168"/>
+          </a:xfrm>
+          <a:prstGeom prst="rect">
+            <a:avLst/>
+          </a:prstGeom>
+          <a:noFill/>
+          <a:ln/>
+        </p:spPr>
+        <p:txBody>
+          <a:bodyPr wrap="square" lIns="0" tIns="0" rIns="0" bIns="0" rtlCol="0" anchor="ctr"/>
+          <a:lstStyle/>
+          <a:p>
             <a:pPr indent="0" marL="0">
               <a:buNone/>
             </a:pPr>
             <a:r>
-              <a:rPr lang="en-US" sz="1420" dirty="0">
+              <a:rPr lang="en-US" sz="950" b="1" dirty="0">
+                <a:solidFill>
+                  <a:srgbClr val="0068B7"/>
+                </a:solidFill>
+                <a:latin typeface="Aptos" pitchFamily="34" charset="0"/>
+                <a:ea typeface="Aptos" pitchFamily="34" charset="-122"/>
+                <a:cs typeface="Aptos" pitchFamily="34" charset="-120"/>
+              </a:rPr>
+              <a:t>Key idea</a:t>
+            </a:r>
+            <a:endParaRPr lang="en-US" sz="950" dirty="0"/>
+          </a:p>
+        </p:txBody>
+      </p:sp>
+      <p:sp>
+        <p:nvSpPr>
+          <p:cNvPr id="11" name="Text 9"/>
+          <p:cNvSpPr/>
+          <p:nvPr/>
+        </p:nvSpPr>
+        <p:spPr>
+          <a:xfrm>
+            <a:off x="8074152" y="1856232"/>
+            <a:ext cx="2825496" cy="1261872"/>
+          </a:xfrm>
+          <a:prstGeom prst="rect">
+            <a:avLst/>
+          </a:prstGeom>
+          <a:noFill/>
+          <a:ln/>
+        </p:spPr>
+        <p:txBody>
+          <a:bodyPr wrap="square" lIns="0" tIns="0" rIns="0" bIns="0" rtlCol="0" anchor="t">
+            <a:normAutofit/>
+          </a:bodyPr>
+          <a:lstStyle/>
+          <a:p>
+            <a:pPr indent="0" marL="0">
+              <a:buNone/>
+            </a:pPr>
+            <a:r>
+              <a:rPr lang="en-US" sz="1250" dirty="0">
                 <a:solidFill>
                   <a:srgbClr val="17364A"/>
                 </a:solidFill>
@@ -3986,9 +5671,116 @@
                 <a:ea typeface="Aptos" pitchFamily="34" charset="-122"/>
                 <a:cs typeface="Aptos" pitchFamily="34" charset="-120"/>
               </a:rPr>
-              <a:t>Choose a real or realistic public health AI use case. Document assumptions, unresolved questions, and which agency roles would need to review the artifact before it is adopted. The exercise should produce a work product that could support governance review, leadership discussion, implementation planning, or policy development.</a:t>
-            </a:r>
-            <a:endParaRPr lang="en-US" sz="1420" dirty="0"/>
+              <a:t>Which staff, partners, or communities would be affected if this issue were handled poorly?</a:t>
+            </a:r>
+            <a:endParaRPr lang="en-US" sz="1250" dirty="0"/>
+          </a:p>
+        </p:txBody>
+      </p:sp>
+      <p:sp>
+        <p:nvSpPr>
+          <p:cNvPr id="12" name="Shape 10"/>
+          <p:cNvSpPr/>
+          <p:nvPr/>
+        </p:nvSpPr>
+        <p:spPr>
+          <a:xfrm>
+            <a:off x="7909560" y="3520440"/>
+            <a:ext cx="3154680" cy="1737360"/>
+          </a:xfrm>
+          <a:prstGeom prst="roundRect">
+            <a:avLst>
+              <a:gd name="adj" fmla="val 6316"/>
+            </a:avLst>
+          </a:prstGeom>
+          <a:solidFill>
+            <a:srgbClr val="EAF6F8"/>
+          </a:solidFill>
+          <a:ln w="12700">
+            <a:solidFill>
+              <a:srgbClr val="B9D7E6"/>
+            </a:solidFill>
+            <a:prstDash val="solid"/>
+          </a:ln>
+        </p:spPr>
+      </p:sp>
+      <p:sp>
+        <p:nvSpPr>
+          <p:cNvPr id="13" name="Text 11"/>
+          <p:cNvSpPr/>
+          <p:nvPr/>
+        </p:nvSpPr>
+        <p:spPr>
+          <a:xfrm>
+            <a:off x="8074152" y="3666744"/>
+            <a:ext cx="2825496" cy="201168"/>
+          </a:xfrm>
+          <a:prstGeom prst="rect">
+            <a:avLst/>
+          </a:prstGeom>
+          <a:noFill/>
+          <a:ln/>
+        </p:spPr>
+        <p:txBody>
+          <a:bodyPr wrap="square" lIns="0" tIns="0" rIns="0" bIns="0" rtlCol="0" anchor="ctr"/>
+          <a:lstStyle/>
+          <a:p>
+            <a:pPr indent="0" marL="0">
+              <a:buNone/>
+            </a:pPr>
+            <a:r>
+              <a:rPr lang="en-US" sz="950" b="1" dirty="0">
+                <a:solidFill>
+                  <a:srgbClr val="0068B7"/>
+                </a:solidFill>
+                <a:latin typeface="Aptos" pitchFamily="34" charset="0"/>
+                <a:ea typeface="Aptos" pitchFamily="34" charset="-122"/>
+                <a:cs typeface="Aptos" pitchFamily="34" charset="-120"/>
+              </a:rPr>
+              <a:t>Use this for</a:t>
+            </a:r>
+            <a:endParaRPr lang="en-US" sz="950" dirty="0"/>
+          </a:p>
+        </p:txBody>
+      </p:sp>
+      <p:sp>
+        <p:nvSpPr>
+          <p:cNvPr id="14" name="Text 12"/>
+          <p:cNvSpPr/>
+          <p:nvPr/>
+        </p:nvSpPr>
+        <p:spPr>
+          <a:xfrm>
+            <a:off x="8074152" y="3959352"/>
+            <a:ext cx="2825496" cy="1170432"/>
+          </a:xfrm>
+          <a:prstGeom prst="rect">
+            <a:avLst/>
+          </a:prstGeom>
+          <a:noFill/>
+          <a:ln/>
+        </p:spPr>
+        <p:txBody>
+          <a:bodyPr wrap="square" lIns="0" tIns="0" rIns="0" bIns="0" rtlCol="0" anchor="t">
+            <a:normAutofit/>
+          </a:bodyPr>
+          <a:lstStyle/>
+          <a:p>
+            <a:pPr indent="0" marL="0">
+              <a:buNone/>
+            </a:pPr>
+            <a:r>
+              <a:rPr lang="en-US" sz="1250" dirty="0">
+                <a:solidFill>
+                  <a:srgbClr val="17364A"/>
+                </a:solidFill>
+                <a:latin typeface="Aptos" pitchFamily="34" charset="0"/>
+                <a:ea typeface="Aptos" pitchFamily="34" charset="-122"/>
+                <a:cs typeface="Aptos" pitchFamily="34" charset="-120"/>
+              </a:rPr>
+              <a:t>Connect the concept to public health decisions, safeguards, documentation, or implementation work.</a:t>
+            </a:r>
+            <a:endParaRPr lang="en-US" sz="1250" dirty="0"/>
           </a:p>
         </p:txBody>
       </p:sp>
@@ -4051,7 +5843,32 @@
       </p:sp>
       <p:sp>
         <p:nvSpPr>
-          <p:cNvPr id="3" name="Text 1"/>
+          <p:cNvPr id="3" name="Shape 1"/>
+          <p:cNvSpPr/>
+          <p:nvPr/>
+        </p:nvSpPr>
+        <p:spPr>
+          <a:xfrm>
+            <a:off x="0" y="164592"/>
+            <a:ext cx="146304" cy="6693408"/>
+          </a:xfrm>
+          <a:prstGeom prst="rect">
+            <a:avLst/>
+          </a:prstGeom>
+          <a:solidFill>
+            <a:srgbClr val="2F8A28"/>
+          </a:solidFill>
+          <a:ln w="12700">
+            <a:solidFill>
+              <a:srgbClr val="2F8A28"/>
+            </a:solidFill>
+            <a:prstDash val="solid"/>
+          </a:ln>
+        </p:spPr>
+      </p:sp>
+      <p:sp>
+        <p:nvSpPr>
+          <p:cNvPr id="4" name="Text 2"/>
           <p:cNvSpPr/>
           <p:nvPr/>
         </p:nvSpPr>
@@ -4090,7 +5907,7 @@
       </p:sp>
       <p:sp>
         <p:nvSpPr>
-          <p:cNvPr id="4" name="Text 2"/>
+          <p:cNvPr id="5" name="Text 3"/>
           <p:cNvSpPr/>
           <p:nvPr/>
         </p:nvSpPr>
@@ -4129,7 +5946,7 @@
       </p:sp>
       <p:sp>
         <p:nvSpPr>
-          <p:cNvPr id="5" name="Text 3"/>
+          <p:cNvPr id="6" name="Text 4"/>
           <p:cNvSpPr/>
           <p:nvPr/>
         </p:nvSpPr>
@@ -4168,13 +5985,77 @@
       </p:sp>
       <p:sp>
         <p:nvSpPr>
-          <p:cNvPr id="6" name="Text 4"/>
+          <p:cNvPr id="7" name="Shape 5"/>
           <p:cNvSpPr/>
           <p:nvPr/>
         </p:nvSpPr>
         <p:spPr>
           <a:xfrm>
             <a:off x="640080" y="658368"/>
+            <a:ext cx="420624" cy="420624"/>
+          </a:xfrm>
+          <a:prstGeom prst="ellipse">
+            <a:avLst/>
+          </a:prstGeom>
+          <a:solidFill>
+            <a:srgbClr val="0068B7"/>
+          </a:solidFill>
+          <a:ln w="12700">
+            <a:solidFill>
+              <a:srgbClr val="0068B7"/>
+            </a:solidFill>
+            <a:prstDash val="solid"/>
+          </a:ln>
+        </p:spPr>
+      </p:sp>
+      <p:sp>
+        <p:nvSpPr>
+          <p:cNvPr id="8" name="Text 6"/>
+          <p:cNvSpPr/>
+          <p:nvPr/>
+        </p:nvSpPr>
+        <p:spPr>
+          <a:xfrm>
+            <a:off x="640080" y="731520"/>
+            <a:ext cx="420624" cy="164592"/>
+          </a:xfrm>
+          <a:prstGeom prst="rect">
+            <a:avLst/>
+          </a:prstGeom>
+          <a:noFill/>
+          <a:ln/>
+        </p:spPr>
+        <p:txBody>
+          <a:bodyPr wrap="square" lIns="0" tIns="0" rIns="0" bIns="0" rtlCol="0" anchor="ctr"/>
+          <a:lstStyle/>
+          <a:p>
+            <a:pPr algn="ctr" indent="0" marL="0">
+              <a:buNone/>
+            </a:pPr>
+            <a:r>
+              <a:rPr lang="en-US" sz="1100" b="1" dirty="0">
+                <a:solidFill>
+                  <a:srgbClr val="FFFFFF"/>
+                </a:solidFill>
+                <a:latin typeface="Aptos" pitchFamily="34" charset="0"/>
+                <a:ea typeface="Aptos" pitchFamily="34" charset="-122"/>
+                <a:cs typeface="Aptos" pitchFamily="34" charset="-120"/>
+              </a:rPr>
+              <a:t>10</a:t>
+            </a:r>
+            <a:endParaRPr lang="en-US" sz="1100" dirty="0"/>
+          </a:p>
+        </p:txBody>
+      </p:sp>
+      <p:sp>
+        <p:nvSpPr>
+          <p:cNvPr id="9" name="Text 7"/>
+          <p:cNvSpPr/>
+          <p:nvPr/>
+        </p:nvSpPr>
+        <p:spPr>
+          <a:xfrm>
+            <a:off x="640080" y="621792"/>
             <a:ext cx="10881360" cy="566928"/>
           </a:xfrm>
           <a:prstGeom prst="rect">
@@ -4201,7 +6082,7 @@
                 <a:ea typeface="Aptos Display" pitchFamily="34" charset="-122"/>
                 <a:cs typeface="Aptos Display" pitchFamily="34" charset="-120"/>
               </a:rPr>
-              <a:t>Expected Artifact or Evidence</a:t>
+              <a:t>Practical Exercise</a:t>
             </a:r>
             <a:endParaRPr lang="en-US" sz="2700" dirty="0"/>
           </a:p>
@@ -4209,32 +6090,136 @@
       </p:sp>
       <p:sp>
         <p:nvSpPr>
-          <p:cNvPr id="7" name="Text 5"/>
-          <p:cNvSpPr/>
-          <p:nvPr/>
-        </p:nvSpPr>
-        <p:spPr>
-          <a:xfrm>
-            <a:off x="822960" y="1325880"/>
-            <a:ext cx="10378440" cy="4800600"/>
-          </a:xfrm>
-          <a:prstGeom prst="rect">
-            <a:avLst/>
-          </a:prstGeom>
-          <a:noFill/>
-          <a:ln/>
-        </p:spPr>
-        <p:txBody>
-          <a:bodyPr wrap="square" lIns="1016" tIns="1016" rIns="1016" bIns="1016" rtlCol="0" anchor="t">
+          <p:cNvPr id="10" name="Text 8"/>
+          <p:cNvSpPr/>
+          <p:nvPr/>
+        </p:nvSpPr>
+        <p:spPr>
+          <a:xfrm>
+            <a:off x="868680" y="1417320"/>
+            <a:ext cx="6675120" cy="4434840"/>
+          </a:xfrm>
+          <a:prstGeom prst="rect">
+            <a:avLst/>
+          </a:prstGeom>
+          <a:noFill/>
+          <a:ln/>
+        </p:spPr>
+        <p:txBody>
+          <a:bodyPr wrap="square" lIns="635" tIns="635" rIns="635" bIns="635" rtlCol="0" anchor="t">
             <a:normAutofit/>
           </a:bodyPr>
           <a:lstStyle/>
           <a:p>
+            <a:r>
+              <a:rPr lang="en-US" sz="1700" dirty="0">
+                <a:solidFill>
+                  <a:srgbClr val="17364A"/>
+                </a:solidFill>
+                <a:latin typeface="Aptos" pitchFamily="34" charset="0"/>
+                <a:ea typeface="Aptos" pitchFamily="34" charset="-122"/>
+                <a:cs typeface="Aptos" pitchFamily="34" charset="-120"/>
+              </a:rPr>
+              <a:t>Develop an AI use case prioritization rubric with criteria, scoring levels, required evidence, and decision categories such.</a:t>
+            </a:r>
+            <a:endParaRPr lang="en-US" sz="1700" dirty="0"/>
+          </a:p>
+        </p:txBody>
+      </p:sp>
+      <p:sp>
+        <p:nvSpPr>
+          <p:cNvPr id="11" name="Shape 9"/>
+          <p:cNvSpPr/>
+          <p:nvPr/>
+        </p:nvSpPr>
+        <p:spPr>
+          <a:xfrm>
+            <a:off x="7909560" y="1417320"/>
+            <a:ext cx="3154680" cy="1828800"/>
+          </a:xfrm>
+          <a:prstGeom prst="roundRect">
+            <a:avLst>
+              <a:gd name="adj" fmla="val 6000"/>
+            </a:avLst>
+          </a:prstGeom>
+          <a:solidFill>
+            <a:srgbClr val="EEF8ED"/>
+          </a:solidFill>
+          <a:ln w="12700">
+            <a:solidFill>
+              <a:srgbClr val="B9D7E6"/>
+            </a:solidFill>
+            <a:prstDash val="solid"/>
+          </a:ln>
+        </p:spPr>
+      </p:sp>
+      <p:sp>
+        <p:nvSpPr>
+          <p:cNvPr id="12" name="Text 10"/>
+          <p:cNvSpPr/>
+          <p:nvPr/>
+        </p:nvSpPr>
+        <p:spPr>
+          <a:xfrm>
+            <a:off x="8074152" y="1563624"/>
+            <a:ext cx="2825496" cy="201168"/>
+          </a:xfrm>
+          <a:prstGeom prst="rect">
+            <a:avLst/>
+          </a:prstGeom>
+          <a:noFill/>
+          <a:ln/>
+        </p:spPr>
+        <p:txBody>
+          <a:bodyPr wrap="square" lIns="0" tIns="0" rIns="0" bIns="0" rtlCol="0" anchor="ctr"/>
+          <a:lstStyle/>
+          <a:p>
             <a:pPr indent="0" marL="0">
               <a:buNone/>
             </a:pPr>
             <a:r>
-              <a:rPr lang="en-US" sz="1420" dirty="0">
+              <a:rPr lang="en-US" sz="950" b="1" dirty="0">
+                <a:solidFill>
+                  <a:srgbClr val="0068B7"/>
+                </a:solidFill>
+                <a:latin typeface="Aptos" pitchFamily="34" charset="0"/>
+                <a:ea typeface="Aptos" pitchFamily="34" charset="-122"/>
+                <a:cs typeface="Aptos" pitchFamily="34" charset="-120"/>
+              </a:rPr>
+              <a:t>Key idea</a:t>
+            </a:r>
+            <a:endParaRPr lang="en-US" sz="950" dirty="0"/>
+          </a:p>
+        </p:txBody>
+      </p:sp>
+      <p:sp>
+        <p:nvSpPr>
+          <p:cNvPr id="13" name="Text 11"/>
+          <p:cNvSpPr/>
+          <p:nvPr/>
+        </p:nvSpPr>
+        <p:spPr>
+          <a:xfrm>
+            <a:off x="8074152" y="1856232"/>
+            <a:ext cx="2825496" cy="1261872"/>
+          </a:xfrm>
+          <a:prstGeom prst="rect">
+            <a:avLst/>
+          </a:prstGeom>
+          <a:noFill/>
+          <a:ln/>
+        </p:spPr>
+        <p:txBody>
+          <a:bodyPr wrap="square" lIns="0" tIns="0" rIns="0" bIns="0" rtlCol="0" anchor="t">
+            <a:normAutofit/>
+          </a:bodyPr>
+          <a:lstStyle/>
+          <a:p>
+            <a:pPr indent="0" marL="0">
+              <a:buNone/>
+            </a:pPr>
+            <a:r>
+              <a:rPr lang="en-US" sz="1250" dirty="0">
                 <a:solidFill>
                   <a:srgbClr val="17364A"/>
                 </a:solidFill>
@@ -4242,9 +6227,116 @@
                 <a:ea typeface="Aptos" pitchFamily="34" charset="-122"/>
                 <a:cs typeface="Aptos" pitchFamily="34" charset="-120"/>
               </a:rPr>
-              <a:t>Use case intake form; prioritization rubric; sample portfolio view; decision category definitions.</a:t>
-            </a:r>
-            <a:endParaRPr lang="en-US" sz="1420" dirty="0"/>
+              <a:t>Develop an AI use case prioritization rubric with criteria, scoring levels, required evidence, and decision categories such.</a:t>
+            </a:r>
+            <a:endParaRPr lang="en-US" sz="1250" dirty="0"/>
+          </a:p>
+        </p:txBody>
+      </p:sp>
+      <p:sp>
+        <p:nvSpPr>
+          <p:cNvPr id="14" name="Shape 12"/>
+          <p:cNvSpPr/>
+          <p:nvPr/>
+        </p:nvSpPr>
+        <p:spPr>
+          <a:xfrm>
+            <a:off x="7909560" y="3520440"/>
+            <a:ext cx="3154680" cy="1737360"/>
+          </a:xfrm>
+          <a:prstGeom prst="roundRect">
+            <a:avLst>
+              <a:gd name="adj" fmla="val 6316"/>
+            </a:avLst>
+          </a:prstGeom>
+          <a:solidFill>
+            <a:srgbClr val="EAF6F8"/>
+          </a:solidFill>
+          <a:ln w="12700">
+            <a:solidFill>
+              <a:srgbClr val="B9D7E6"/>
+            </a:solidFill>
+            <a:prstDash val="solid"/>
+          </a:ln>
+        </p:spPr>
+      </p:sp>
+      <p:sp>
+        <p:nvSpPr>
+          <p:cNvPr id="15" name="Text 13"/>
+          <p:cNvSpPr/>
+          <p:nvPr/>
+        </p:nvSpPr>
+        <p:spPr>
+          <a:xfrm>
+            <a:off x="8074152" y="3666744"/>
+            <a:ext cx="2825496" cy="201168"/>
+          </a:xfrm>
+          <a:prstGeom prst="rect">
+            <a:avLst/>
+          </a:prstGeom>
+          <a:noFill/>
+          <a:ln/>
+        </p:spPr>
+        <p:txBody>
+          <a:bodyPr wrap="square" lIns="0" tIns="0" rIns="0" bIns="0" rtlCol="0" anchor="ctr"/>
+          <a:lstStyle/>
+          <a:p>
+            <a:pPr indent="0" marL="0">
+              <a:buNone/>
+            </a:pPr>
+            <a:r>
+              <a:rPr lang="en-US" sz="950" b="1" dirty="0">
+                <a:solidFill>
+                  <a:srgbClr val="0068B7"/>
+                </a:solidFill>
+                <a:latin typeface="Aptos" pitchFamily="34" charset="0"/>
+                <a:ea typeface="Aptos" pitchFamily="34" charset="-122"/>
+                <a:cs typeface="Aptos" pitchFamily="34" charset="-120"/>
+              </a:rPr>
+              <a:t>Use this for</a:t>
+            </a:r>
+            <a:endParaRPr lang="en-US" sz="950" dirty="0"/>
+          </a:p>
+        </p:txBody>
+      </p:sp>
+      <p:sp>
+        <p:nvSpPr>
+          <p:cNvPr id="16" name="Text 14"/>
+          <p:cNvSpPr/>
+          <p:nvPr/>
+        </p:nvSpPr>
+        <p:spPr>
+          <a:xfrm>
+            <a:off x="8074152" y="3959352"/>
+            <a:ext cx="2825496" cy="1170432"/>
+          </a:xfrm>
+          <a:prstGeom prst="rect">
+            <a:avLst/>
+          </a:prstGeom>
+          <a:noFill/>
+          <a:ln/>
+        </p:spPr>
+        <p:txBody>
+          <a:bodyPr wrap="square" lIns="0" tIns="0" rIns="0" bIns="0" rtlCol="0" anchor="t">
+            <a:normAutofit/>
+          </a:bodyPr>
+          <a:lstStyle/>
+          <a:p>
+            <a:pPr indent="0" marL="0">
+              <a:buNone/>
+            </a:pPr>
+            <a:r>
+              <a:rPr lang="en-US" sz="1250" dirty="0">
+                <a:solidFill>
+                  <a:srgbClr val="17364A"/>
+                </a:solidFill>
+                <a:latin typeface="Aptos" pitchFamily="34" charset="0"/>
+                <a:ea typeface="Aptos" pitchFamily="34" charset="-122"/>
+                <a:cs typeface="Aptos" pitchFamily="34" charset="-120"/>
+              </a:rPr>
+              <a:t>Connect the concept to public health decisions, safeguards, documentation, or implementation work.</a:t>
+            </a:r>
+            <a:endParaRPr lang="en-US" sz="1250" dirty="0"/>
           </a:p>
         </p:txBody>
       </p:sp>
@@ -4307,7 +6399,32 @@
       </p:sp>
       <p:sp>
         <p:nvSpPr>
-          <p:cNvPr id="3" name="Text 1"/>
+          <p:cNvPr id="3" name="Shape 1"/>
+          <p:cNvSpPr/>
+          <p:nvPr/>
+        </p:nvSpPr>
+        <p:spPr>
+          <a:xfrm>
+            <a:off x="0" y="164592"/>
+            <a:ext cx="146304" cy="6693408"/>
+          </a:xfrm>
+          <a:prstGeom prst="rect">
+            <a:avLst/>
+          </a:prstGeom>
+          <a:solidFill>
+            <a:srgbClr val="2F8A28"/>
+          </a:solidFill>
+          <a:ln w="12700">
+            <a:solidFill>
+              <a:srgbClr val="2F8A28"/>
+            </a:solidFill>
+            <a:prstDash val="solid"/>
+          </a:ln>
+        </p:spPr>
+      </p:sp>
+      <p:sp>
+        <p:nvSpPr>
+          <p:cNvPr id="4" name="Text 2"/>
           <p:cNvSpPr/>
           <p:nvPr/>
         </p:nvSpPr>
@@ -4346,7 +6463,7 @@
       </p:sp>
       <p:sp>
         <p:nvSpPr>
-          <p:cNvPr id="4" name="Text 2"/>
+          <p:cNvPr id="5" name="Text 3"/>
           <p:cNvSpPr/>
           <p:nvPr/>
         </p:nvSpPr>
@@ -4385,7 +6502,7 @@
       </p:sp>
       <p:sp>
         <p:nvSpPr>
-          <p:cNvPr id="5" name="Text 3"/>
+          <p:cNvPr id="6" name="Text 4"/>
           <p:cNvSpPr/>
           <p:nvPr/>
         </p:nvSpPr>
@@ -4424,13 +6541,77 @@
       </p:sp>
       <p:sp>
         <p:nvSpPr>
-          <p:cNvPr id="6" name="Text 4"/>
+          <p:cNvPr id="7" name="Shape 5"/>
           <p:cNvSpPr/>
           <p:nvPr/>
         </p:nvSpPr>
         <p:spPr>
           <a:xfrm>
             <a:off x="640080" y="658368"/>
+            <a:ext cx="420624" cy="420624"/>
+          </a:xfrm>
+          <a:prstGeom prst="ellipse">
+            <a:avLst/>
+          </a:prstGeom>
+          <a:solidFill>
+            <a:srgbClr val="0068B7"/>
+          </a:solidFill>
+          <a:ln w="12700">
+            <a:solidFill>
+              <a:srgbClr val="0068B7"/>
+            </a:solidFill>
+            <a:prstDash val="solid"/>
+          </a:ln>
+        </p:spPr>
+      </p:sp>
+      <p:sp>
+        <p:nvSpPr>
+          <p:cNvPr id="8" name="Text 6"/>
+          <p:cNvSpPr/>
+          <p:nvPr/>
+        </p:nvSpPr>
+        <p:spPr>
+          <a:xfrm>
+            <a:off x="640080" y="731520"/>
+            <a:ext cx="420624" cy="164592"/>
+          </a:xfrm>
+          <a:prstGeom prst="rect">
+            <a:avLst/>
+          </a:prstGeom>
+          <a:noFill/>
+          <a:ln/>
+        </p:spPr>
+        <p:txBody>
+          <a:bodyPr wrap="square" lIns="0" tIns="0" rIns="0" bIns="0" rtlCol="0" anchor="ctr"/>
+          <a:lstStyle/>
+          <a:p>
+            <a:pPr algn="ctr" indent="0" marL="0">
+              <a:buNone/>
+            </a:pPr>
+            <a:r>
+              <a:rPr lang="en-US" sz="1100" b="1" dirty="0">
+                <a:solidFill>
+                  <a:srgbClr val="FFFFFF"/>
+                </a:solidFill>
+                <a:latin typeface="Aptos" pitchFamily="34" charset="0"/>
+                <a:ea typeface="Aptos" pitchFamily="34" charset="-122"/>
+                <a:cs typeface="Aptos" pitchFamily="34" charset="-120"/>
+              </a:rPr>
+              <a:t>11</a:t>
+            </a:r>
+            <a:endParaRPr lang="en-US" sz="1100" dirty="0"/>
+          </a:p>
+        </p:txBody>
+      </p:sp>
+      <p:sp>
+        <p:nvSpPr>
+          <p:cNvPr id="9" name="Text 7"/>
+          <p:cNvSpPr/>
+          <p:nvPr/>
+        </p:nvSpPr>
+        <p:spPr>
+          <a:xfrm>
+            <a:off x="640080" y="621792"/>
             <a:ext cx="10881360" cy="566928"/>
           </a:xfrm>
           <a:prstGeom prst="rect">
@@ -4457,7 +6638,7 @@
                 <a:ea typeface="Aptos Display" pitchFamily="34" charset="-122"/>
                 <a:cs typeface="Aptos Display" pitchFamily="34" charset="-120"/>
               </a:rPr>
-              <a:t>Expected Assignment</a:t>
+              <a:t>Before You Begin</a:t>
             </a:r>
             <a:endParaRPr lang="en-US" sz="2700" dirty="0"/>
           </a:p>
@@ -4465,14 +6646,14 @@
       </p:sp>
       <p:sp>
         <p:nvSpPr>
-          <p:cNvPr id="7" name="Text 5"/>
-          <p:cNvSpPr/>
-          <p:nvPr/>
-        </p:nvSpPr>
-        <p:spPr>
-          <a:xfrm>
-            <a:off x="822960" y="1325880"/>
-            <a:ext cx="10378440" cy="4800600"/>
+          <p:cNvPr id="10" name="Text 8"/>
+          <p:cNvSpPr/>
+          <p:nvPr/>
+        </p:nvSpPr>
+        <p:spPr>
+          <a:xfrm>
+            <a:off x="868680" y="1417320"/>
+            <a:ext cx="6675120" cy="4434840"/>
           </a:xfrm>
           <a:prstGeom prst="rect">
             <a:avLst/>
@@ -4487,7 +6668,7 @@
           <a:lstStyle/>
           <a:p>
             <a:r>
-              <a:rPr lang="en-US" sz="1450" dirty="0">
+              <a:rPr lang="en-US" sz="1700" dirty="0">
                 <a:solidFill>
                   <a:srgbClr val="17364A"/>
                 </a:solidFill>
@@ -4495,9 +6676,251 @@
                 <a:ea typeface="Aptos" pitchFamily="34" charset="-122"/>
                 <a:cs typeface="Aptos" pitchFamily="34" charset="-120"/>
               </a:rPr>
-              <a:t>Use case intake form; prioritization rubric; sample portfolio view; decision category definitions.</a:t>
-            </a:r>
-            <a:endParaRPr lang="en-US" sz="1450" dirty="0"/>
+              <a:t>Choose a real or realistic public health AI use case.</a:t>
+            </a:r>
+            <a:endParaRPr lang="en-US" sz="1700" dirty="0"/>
+          </a:p>
+          <a:p>
+            <a:r>
+              <a:rPr lang="en-US" sz="1700" dirty="0">
+                <a:solidFill>
+                  <a:srgbClr val="17364A"/>
+                </a:solidFill>
+                <a:latin typeface="Aptos" pitchFamily="34" charset="0"/>
+                <a:ea typeface="Aptos" pitchFamily="34" charset="-122"/>
+                <a:cs typeface="Aptos" pitchFamily="34" charset="-120"/>
+              </a:rPr>
+              <a:t>Document assumptions, unresolved questions, and which agency roles would need to review the artifact before it is adopted.</a:t>
+            </a:r>
+            <a:endParaRPr lang="en-US" sz="1700" dirty="0"/>
+          </a:p>
+          <a:p>
+            <a:r>
+              <a:rPr lang="en-US" sz="1700" dirty="0">
+                <a:solidFill>
+                  <a:srgbClr val="17364A"/>
+                </a:solidFill>
+                <a:latin typeface="Aptos" pitchFamily="34" charset="0"/>
+                <a:ea typeface="Aptos" pitchFamily="34" charset="-122"/>
+                <a:cs typeface="Aptos" pitchFamily="34" charset="-120"/>
+              </a:rPr>
+              <a:t>The exercise should produce a work product that could support governance review, leadership discussion, implementation.</a:t>
+            </a:r>
+            <a:endParaRPr lang="en-US" sz="1700" dirty="0"/>
+          </a:p>
+        </p:txBody>
+      </p:sp>
+      <p:sp>
+        <p:nvSpPr>
+          <p:cNvPr id="11" name="Shape 9"/>
+          <p:cNvSpPr/>
+          <p:nvPr/>
+        </p:nvSpPr>
+        <p:spPr>
+          <a:xfrm>
+            <a:off x="7909560" y="1417320"/>
+            <a:ext cx="3154680" cy="1828800"/>
+          </a:xfrm>
+          <a:prstGeom prst="roundRect">
+            <a:avLst>
+              <a:gd name="adj" fmla="val 6000"/>
+            </a:avLst>
+          </a:prstGeom>
+          <a:solidFill>
+            <a:srgbClr val="EEF8ED"/>
+          </a:solidFill>
+          <a:ln w="12700">
+            <a:solidFill>
+              <a:srgbClr val="B9D7E6"/>
+            </a:solidFill>
+            <a:prstDash val="solid"/>
+          </a:ln>
+        </p:spPr>
+      </p:sp>
+      <p:sp>
+        <p:nvSpPr>
+          <p:cNvPr id="12" name="Text 10"/>
+          <p:cNvSpPr/>
+          <p:nvPr/>
+        </p:nvSpPr>
+        <p:spPr>
+          <a:xfrm>
+            <a:off x="8074152" y="1563624"/>
+            <a:ext cx="2825496" cy="201168"/>
+          </a:xfrm>
+          <a:prstGeom prst="rect">
+            <a:avLst/>
+          </a:prstGeom>
+          <a:noFill/>
+          <a:ln/>
+        </p:spPr>
+        <p:txBody>
+          <a:bodyPr wrap="square" lIns="0" tIns="0" rIns="0" bIns="0" rtlCol="0" anchor="ctr"/>
+          <a:lstStyle/>
+          <a:p>
+            <a:pPr indent="0" marL="0">
+              <a:buNone/>
+            </a:pPr>
+            <a:r>
+              <a:rPr lang="en-US" sz="950" b="1" dirty="0">
+                <a:solidFill>
+                  <a:srgbClr val="0068B7"/>
+                </a:solidFill>
+                <a:latin typeface="Aptos" pitchFamily="34" charset="0"/>
+                <a:ea typeface="Aptos" pitchFamily="34" charset="-122"/>
+                <a:cs typeface="Aptos" pitchFamily="34" charset="-120"/>
+              </a:rPr>
+              <a:t>Key idea</a:t>
+            </a:r>
+            <a:endParaRPr lang="en-US" sz="950" dirty="0"/>
+          </a:p>
+        </p:txBody>
+      </p:sp>
+      <p:sp>
+        <p:nvSpPr>
+          <p:cNvPr id="13" name="Text 11"/>
+          <p:cNvSpPr/>
+          <p:nvPr/>
+        </p:nvSpPr>
+        <p:spPr>
+          <a:xfrm>
+            <a:off x="8074152" y="1856232"/>
+            <a:ext cx="2825496" cy="1261872"/>
+          </a:xfrm>
+          <a:prstGeom prst="rect">
+            <a:avLst/>
+          </a:prstGeom>
+          <a:noFill/>
+          <a:ln/>
+        </p:spPr>
+        <p:txBody>
+          <a:bodyPr wrap="square" lIns="0" tIns="0" rIns="0" bIns="0" rtlCol="0" anchor="t">
+            <a:normAutofit/>
+          </a:bodyPr>
+          <a:lstStyle/>
+          <a:p>
+            <a:pPr indent="0" marL="0">
+              <a:buNone/>
+            </a:pPr>
+            <a:r>
+              <a:rPr lang="en-US" sz="1250" dirty="0">
+                <a:solidFill>
+                  <a:srgbClr val="17364A"/>
+                </a:solidFill>
+                <a:latin typeface="Aptos" pitchFamily="34" charset="0"/>
+                <a:ea typeface="Aptos" pitchFamily="34" charset="-122"/>
+                <a:cs typeface="Aptos" pitchFamily="34" charset="-120"/>
+              </a:rPr>
+              <a:t>Choose a real or realistic public health AI use case.</a:t>
+            </a:r>
+            <a:endParaRPr lang="en-US" sz="1250" dirty="0"/>
+          </a:p>
+        </p:txBody>
+      </p:sp>
+      <p:sp>
+        <p:nvSpPr>
+          <p:cNvPr id="14" name="Shape 12"/>
+          <p:cNvSpPr/>
+          <p:nvPr/>
+        </p:nvSpPr>
+        <p:spPr>
+          <a:xfrm>
+            <a:off x="7909560" y="3520440"/>
+            <a:ext cx="3154680" cy="1737360"/>
+          </a:xfrm>
+          <a:prstGeom prst="roundRect">
+            <a:avLst>
+              <a:gd name="adj" fmla="val 6316"/>
+            </a:avLst>
+          </a:prstGeom>
+          <a:solidFill>
+            <a:srgbClr val="EAF6F8"/>
+          </a:solidFill>
+          <a:ln w="12700">
+            <a:solidFill>
+              <a:srgbClr val="B9D7E6"/>
+            </a:solidFill>
+            <a:prstDash val="solid"/>
+          </a:ln>
+        </p:spPr>
+      </p:sp>
+      <p:sp>
+        <p:nvSpPr>
+          <p:cNvPr id="15" name="Text 13"/>
+          <p:cNvSpPr/>
+          <p:nvPr/>
+        </p:nvSpPr>
+        <p:spPr>
+          <a:xfrm>
+            <a:off x="8074152" y="3666744"/>
+            <a:ext cx="2825496" cy="201168"/>
+          </a:xfrm>
+          <a:prstGeom prst="rect">
+            <a:avLst/>
+          </a:prstGeom>
+          <a:noFill/>
+          <a:ln/>
+        </p:spPr>
+        <p:txBody>
+          <a:bodyPr wrap="square" lIns="0" tIns="0" rIns="0" bIns="0" rtlCol="0" anchor="ctr"/>
+          <a:lstStyle/>
+          <a:p>
+            <a:pPr indent="0" marL="0">
+              <a:buNone/>
+            </a:pPr>
+            <a:r>
+              <a:rPr lang="en-US" sz="950" b="1" dirty="0">
+                <a:solidFill>
+                  <a:srgbClr val="0068B7"/>
+                </a:solidFill>
+                <a:latin typeface="Aptos" pitchFamily="34" charset="0"/>
+                <a:ea typeface="Aptos" pitchFamily="34" charset="-122"/>
+                <a:cs typeface="Aptos" pitchFamily="34" charset="-120"/>
+              </a:rPr>
+              <a:t>Use this for</a:t>
+            </a:r>
+            <a:endParaRPr lang="en-US" sz="950" dirty="0"/>
+          </a:p>
+        </p:txBody>
+      </p:sp>
+      <p:sp>
+        <p:nvSpPr>
+          <p:cNvPr id="16" name="Text 14"/>
+          <p:cNvSpPr/>
+          <p:nvPr/>
+        </p:nvSpPr>
+        <p:spPr>
+          <a:xfrm>
+            <a:off x="8074152" y="3959352"/>
+            <a:ext cx="2825496" cy="1170432"/>
+          </a:xfrm>
+          <a:prstGeom prst="rect">
+            <a:avLst/>
+          </a:prstGeom>
+          <a:noFill/>
+          <a:ln/>
+        </p:spPr>
+        <p:txBody>
+          <a:bodyPr wrap="square" lIns="0" tIns="0" rIns="0" bIns="0" rtlCol="0" anchor="t">
+            <a:normAutofit/>
+          </a:bodyPr>
+          <a:lstStyle/>
+          <a:p>
+            <a:pPr indent="0" marL="0">
+              <a:buNone/>
+            </a:pPr>
+            <a:r>
+              <a:rPr lang="en-US" sz="1250" dirty="0">
+                <a:solidFill>
+                  <a:srgbClr val="17364A"/>
+                </a:solidFill>
+                <a:latin typeface="Aptos" pitchFamily="34" charset="0"/>
+                <a:ea typeface="Aptos" pitchFamily="34" charset="-122"/>
+                <a:cs typeface="Aptos" pitchFamily="34" charset="-120"/>
+              </a:rPr>
+              <a:t>Connect the concept to public health decisions, safeguards, documentation, or implementation work.</a:t>
+            </a:r>
+            <a:endParaRPr lang="en-US" sz="1250" dirty="0"/>
           </a:p>
         </p:txBody>
       </p:sp>
@@ -4560,7 +6983,32 @@
       </p:sp>
       <p:sp>
         <p:nvSpPr>
-          <p:cNvPr id="3" name="Text 1"/>
+          <p:cNvPr id="3" name="Shape 1"/>
+          <p:cNvSpPr/>
+          <p:nvPr/>
+        </p:nvSpPr>
+        <p:spPr>
+          <a:xfrm>
+            <a:off x="0" y="164592"/>
+            <a:ext cx="146304" cy="6693408"/>
+          </a:xfrm>
+          <a:prstGeom prst="rect">
+            <a:avLst/>
+          </a:prstGeom>
+          <a:solidFill>
+            <a:srgbClr val="2F8A28"/>
+          </a:solidFill>
+          <a:ln w="12700">
+            <a:solidFill>
+              <a:srgbClr val="2F8A28"/>
+            </a:solidFill>
+            <a:prstDash val="solid"/>
+          </a:ln>
+        </p:spPr>
+      </p:sp>
+      <p:sp>
+        <p:nvSpPr>
+          <p:cNvPr id="4" name="Text 2"/>
           <p:cNvSpPr/>
           <p:nvPr/>
         </p:nvSpPr>
@@ -4599,7 +7047,7 @@
       </p:sp>
       <p:sp>
         <p:nvSpPr>
-          <p:cNvPr id="4" name="Text 2"/>
+          <p:cNvPr id="5" name="Text 3"/>
           <p:cNvSpPr/>
           <p:nvPr/>
         </p:nvSpPr>
@@ -4638,7 +7086,7 @@
       </p:sp>
       <p:sp>
         <p:nvSpPr>
-          <p:cNvPr id="5" name="Text 3"/>
+          <p:cNvPr id="6" name="Text 4"/>
           <p:cNvSpPr/>
           <p:nvPr/>
         </p:nvSpPr>
@@ -4677,13 +7125,77 @@
       </p:sp>
       <p:sp>
         <p:nvSpPr>
-          <p:cNvPr id="6" name="Text 4"/>
+          <p:cNvPr id="7" name="Shape 5"/>
           <p:cNvSpPr/>
           <p:nvPr/>
         </p:nvSpPr>
         <p:spPr>
           <a:xfrm>
             <a:off x="640080" y="658368"/>
+            <a:ext cx="420624" cy="420624"/>
+          </a:xfrm>
+          <a:prstGeom prst="ellipse">
+            <a:avLst/>
+          </a:prstGeom>
+          <a:solidFill>
+            <a:srgbClr val="0068B7"/>
+          </a:solidFill>
+          <a:ln w="12700">
+            <a:solidFill>
+              <a:srgbClr val="0068B7"/>
+            </a:solidFill>
+            <a:prstDash val="solid"/>
+          </a:ln>
+        </p:spPr>
+      </p:sp>
+      <p:sp>
+        <p:nvSpPr>
+          <p:cNvPr id="8" name="Text 6"/>
+          <p:cNvSpPr/>
+          <p:nvPr/>
+        </p:nvSpPr>
+        <p:spPr>
+          <a:xfrm>
+            <a:off x="640080" y="731520"/>
+            <a:ext cx="420624" cy="164592"/>
+          </a:xfrm>
+          <a:prstGeom prst="rect">
+            <a:avLst/>
+          </a:prstGeom>
+          <a:noFill/>
+          <a:ln/>
+        </p:spPr>
+        <p:txBody>
+          <a:bodyPr wrap="square" lIns="0" tIns="0" rIns="0" bIns="0" rtlCol="0" anchor="ctr"/>
+          <a:lstStyle/>
+          <a:p>
+            <a:pPr algn="ctr" indent="0" marL="0">
+              <a:buNone/>
+            </a:pPr>
+            <a:r>
+              <a:rPr lang="en-US" sz="1100" b="1" dirty="0">
+                <a:solidFill>
+                  <a:srgbClr val="FFFFFF"/>
+                </a:solidFill>
+                <a:latin typeface="Aptos" pitchFamily="34" charset="0"/>
+                <a:ea typeface="Aptos" pitchFamily="34" charset="-122"/>
+                <a:cs typeface="Aptos" pitchFamily="34" charset="-120"/>
+              </a:rPr>
+              <a:t>12</a:t>
+            </a:r>
+            <a:endParaRPr lang="en-US" sz="1100" dirty="0"/>
+          </a:p>
+        </p:txBody>
+      </p:sp>
+      <p:sp>
+        <p:nvSpPr>
+          <p:cNvPr id="9" name="Text 7"/>
+          <p:cNvSpPr/>
+          <p:nvPr/>
+        </p:nvSpPr>
+        <p:spPr>
+          <a:xfrm>
+            <a:off x="640080" y="621792"/>
             <a:ext cx="10881360" cy="566928"/>
           </a:xfrm>
           <a:prstGeom prst="rect">
@@ -4710,7 +7222,7 @@
                 <a:ea typeface="Aptos Display" pitchFamily="34" charset="-122"/>
                 <a:cs typeface="Aptos Display" pitchFamily="34" charset="-120"/>
               </a:rPr>
-              <a:t>Knowledge Check</a:t>
+              <a:t>Expected Artifact or Evidence</a:t>
             </a:r>
             <a:endParaRPr lang="en-US" sz="2700" dirty="0"/>
           </a:p>
@@ -4718,14 +7230,14 @@
       </p:sp>
       <p:sp>
         <p:nvSpPr>
-          <p:cNvPr id="7" name="Text 5"/>
-          <p:cNvSpPr/>
-          <p:nvPr/>
-        </p:nvSpPr>
-        <p:spPr>
-          <a:xfrm>
-            <a:off x="822960" y="1325880"/>
-            <a:ext cx="10378440" cy="4800600"/>
+          <p:cNvPr id="10" name="Text 8"/>
+          <p:cNvSpPr/>
+          <p:nvPr/>
+        </p:nvSpPr>
+        <p:spPr>
+          <a:xfrm>
+            <a:off x="868680" y="1417320"/>
+            <a:ext cx="6675120" cy="4434840"/>
           </a:xfrm>
           <a:prstGeom prst="rect">
             <a:avLst/>
@@ -4740,7 +7252,7 @@
           <a:lstStyle/>
           <a:p>
             <a:r>
-              <a:rPr lang="en-US" sz="1450" dirty="0">
+              <a:rPr lang="en-US" sz="1700" dirty="0">
                 <a:solidFill>
                   <a:srgbClr val="17364A"/>
                 </a:solidFill>
@@ -4748,13 +7260,106 @@
                 <a:ea typeface="Aptos" pitchFamily="34" charset="-122"/>
                 <a:cs typeface="Aptos" pitchFamily="34" charset="-120"/>
               </a:rPr>
-              <a:t>1. What is the strongest reason this module topic belongs in AI leadership and governance training?</a:t>
-            </a:r>
-            <a:endParaRPr lang="en-US" sz="1450" dirty="0"/>
-          </a:p>
-          <a:p>
-            <a:r>
-              <a:rPr lang="en-US" sz="1450" dirty="0">
+              <a:t>Use case intake form; prioritization rubric; sample portfolio view; decision category definitions.</a:t>
+            </a:r>
+            <a:endParaRPr lang="en-US" sz="1700" dirty="0"/>
+          </a:p>
+        </p:txBody>
+      </p:sp>
+      <p:sp>
+        <p:nvSpPr>
+          <p:cNvPr id="11" name="Shape 9"/>
+          <p:cNvSpPr/>
+          <p:nvPr/>
+        </p:nvSpPr>
+        <p:spPr>
+          <a:xfrm>
+            <a:off x="7909560" y="1417320"/>
+            <a:ext cx="3154680" cy="1828800"/>
+          </a:xfrm>
+          <a:prstGeom prst="roundRect">
+            <a:avLst>
+              <a:gd name="adj" fmla="val 6000"/>
+            </a:avLst>
+          </a:prstGeom>
+          <a:solidFill>
+            <a:srgbClr val="EEF8ED"/>
+          </a:solidFill>
+          <a:ln w="12700">
+            <a:solidFill>
+              <a:srgbClr val="B9D7E6"/>
+            </a:solidFill>
+            <a:prstDash val="solid"/>
+          </a:ln>
+        </p:spPr>
+      </p:sp>
+      <p:sp>
+        <p:nvSpPr>
+          <p:cNvPr id="12" name="Text 10"/>
+          <p:cNvSpPr/>
+          <p:nvPr/>
+        </p:nvSpPr>
+        <p:spPr>
+          <a:xfrm>
+            <a:off x="8074152" y="1563624"/>
+            <a:ext cx="2825496" cy="201168"/>
+          </a:xfrm>
+          <a:prstGeom prst="rect">
+            <a:avLst/>
+          </a:prstGeom>
+          <a:noFill/>
+          <a:ln/>
+        </p:spPr>
+        <p:txBody>
+          <a:bodyPr wrap="square" lIns="0" tIns="0" rIns="0" bIns="0" rtlCol="0" anchor="ctr"/>
+          <a:lstStyle/>
+          <a:p>
+            <a:pPr indent="0" marL="0">
+              <a:buNone/>
+            </a:pPr>
+            <a:r>
+              <a:rPr lang="en-US" sz="950" b="1" dirty="0">
+                <a:solidFill>
+                  <a:srgbClr val="0068B7"/>
+                </a:solidFill>
+                <a:latin typeface="Aptos" pitchFamily="34" charset="0"/>
+                <a:ea typeface="Aptos" pitchFamily="34" charset="-122"/>
+                <a:cs typeface="Aptos" pitchFamily="34" charset="-120"/>
+              </a:rPr>
+              <a:t>Key idea</a:t>
+            </a:r>
+            <a:endParaRPr lang="en-US" sz="950" dirty="0"/>
+          </a:p>
+        </p:txBody>
+      </p:sp>
+      <p:sp>
+        <p:nvSpPr>
+          <p:cNvPr id="13" name="Text 11"/>
+          <p:cNvSpPr/>
+          <p:nvPr/>
+        </p:nvSpPr>
+        <p:spPr>
+          <a:xfrm>
+            <a:off x="8074152" y="1856232"/>
+            <a:ext cx="2825496" cy="1261872"/>
+          </a:xfrm>
+          <a:prstGeom prst="rect">
+            <a:avLst/>
+          </a:prstGeom>
+          <a:noFill/>
+          <a:ln/>
+        </p:spPr>
+        <p:txBody>
+          <a:bodyPr wrap="square" lIns="0" tIns="0" rIns="0" bIns="0" rtlCol="0" anchor="t">
+            <a:normAutofit/>
+          </a:bodyPr>
+          <a:lstStyle/>
+          <a:p>
+            <a:pPr indent="0" marL="0">
+              <a:buNone/>
+            </a:pPr>
+            <a:r>
+              <a:rPr lang="en-US" sz="1250" dirty="0">
                 <a:solidFill>
                   <a:srgbClr val="17364A"/>
                 </a:solidFill>
@@ -4762,13 +7367,106 @@
                 <a:ea typeface="Aptos" pitchFamily="34" charset="-122"/>
                 <a:cs typeface="Aptos" pitchFamily="34" charset="-120"/>
               </a:rPr>
-              <a:t>2. Which practice best supports accountable public health AI governance?</a:t>
-            </a:r>
-            <a:endParaRPr lang="en-US" sz="1450" dirty="0"/>
-          </a:p>
-          <a:p>
-            <a:r>
-              <a:rPr lang="en-US" sz="1450" dirty="0">
+              <a:t>Use case intake form; prioritization rubric; sample portfolio view; decision category definitions.</a:t>
+            </a:r>
+            <a:endParaRPr lang="en-US" sz="1250" dirty="0"/>
+          </a:p>
+        </p:txBody>
+      </p:sp>
+      <p:sp>
+        <p:nvSpPr>
+          <p:cNvPr id="14" name="Shape 12"/>
+          <p:cNvSpPr/>
+          <p:nvPr/>
+        </p:nvSpPr>
+        <p:spPr>
+          <a:xfrm>
+            <a:off x="7909560" y="3520440"/>
+            <a:ext cx="3154680" cy="1737360"/>
+          </a:xfrm>
+          <a:prstGeom prst="roundRect">
+            <a:avLst>
+              <a:gd name="adj" fmla="val 6316"/>
+            </a:avLst>
+          </a:prstGeom>
+          <a:solidFill>
+            <a:srgbClr val="EAF6F8"/>
+          </a:solidFill>
+          <a:ln w="12700">
+            <a:solidFill>
+              <a:srgbClr val="B9D7E6"/>
+            </a:solidFill>
+            <a:prstDash val="solid"/>
+          </a:ln>
+        </p:spPr>
+      </p:sp>
+      <p:sp>
+        <p:nvSpPr>
+          <p:cNvPr id="15" name="Text 13"/>
+          <p:cNvSpPr/>
+          <p:nvPr/>
+        </p:nvSpPr>
+        <p:spPr>
+          <a:xfrm>
+            <a:off x="8074152" y="3666744"/>
+            <a:ext cx="2825496" cy="201168"/>
+          </a:xfrm>
+          <a:prstGeom prst="rect">
+            <a:avLst/>
+          </a:prstGeom>
+          <a:noFill/>
+          <a:ln/>
+        </p:spPr>
+        <p:txBody>
+          <a:bodyPr wrap="square" lIns="0" tIns="0" rIns="0" bIns="0" rtlCol="0" anchor="ctr"/>
+          <a:lstStyle/>
+          <a:p>
+            <a:pPr indent="0" marL="0">
+              <a:buNone/>
+            </a:pPr>
+            <a:r>
+              <a:rPr lang="en-US" sz="950" b="1" dirty="0">
+                <a:solidFill>
+                  <a:srgbClr val="0068B7"/>
+                </a:solidFill>
+                <a:latin typeface="Aptos" pitchFamily="34" charset="0"/>
+                <a:ea typeface="Aptos" pitchFamily="34" charset="-122"/>
+                <a:cs typeface="Aptos" pitchFamily="34" charset="-120"/>
+              </a:rPr>
+              <a:t>Use this for</a:t>
+            </a:r>
+            <a:endParaRPr lang="en-US" sz="950" dirty="0"/>
+          </a:p>
+        </p:txBody>
+      </p:sp>
+      <p:sp>
+        <p:nvSpPr>
+          <p:cNvPr id="16" name="Text 14"/>
+          <p:cNvSpPr/>
+          <p:nvPr/>
+        </p:nvSpPr>
+        <p:spPr>
+          <a:xfrm>
+            <a:off x="8074152" y="3959352"/>
+            <a:ext cx="2825496" cy="1170432"/>
+          </a:xfrm>
+          <a:prstGeom prst="rect">
+            <a:avLst/>
+          </a:prstGeom>
+          <a:noFill/>
+          <a:ln/>
+        </p:spPr>
+        <p:txBody>
+          <a:bodyPr wrap="square" lIns="0" tIns="0" rIns="0" bIns="0" rtlCol="0" anchor="t">
+            <a:normAutofit/>
+          </a:bodyPr>
+          <a:lstStyle/>
+          <a:p>
+            <a:pPr indent="0" marL="0">
+              <a:buNone/>
+            </a:pPr>
+            <a:r>
+              <a:rPr lang="en-US" sz="1250" dirty="0">
                 <a:solidFill>
                   <a:srgbClr val="17364A"/>
                 </a:solidFill>
@@ -4776,37 +7474,9 @@
                 <a:ea typeface="Aptos" pitchFamily="34" charset="-122"/>
                 <a:cs typeface="Aptos" pitchFamily="34" charset="-120"/>
               </a:rPr>
-              <a:t>3. When should an AI use case be escalated for leadership or governance review?</a:t>
-            </a:r>
-            <a:endParaRPr lang="en-US" sz="1450" dirty="0"/>
-          </a:p>
-          <a:p>
-            <a:r>
-              <a:rPr lang="en-US" sz="1450" dirty="0">
-                <a:solidFill>
-                  <a:srgbClr val="17364A"/>
-                </a:solidFill>
-                <a:latin typeface="Aptos" pitchFamily="34" charset="0"/>
-                <a:ea typeface="Aptos" pitchFamily="34" charset="-122"/>
-                <a:cs typeface="Aptos" pitchFamily="34" charset="-120"/>
-              </a:rPr>
-              <a:t>4. What is weak evidence of completion for a leadership and governance module?</a:t>
-            </a:r>
-            <a:endParaRPr lang="en-US" sz="1450" dirty="0"/>
-          </a:p>
-          <a:p>
-            <a:r>
-              <a:rPr lang="en-US" sz="1450" dirty="0">
-                <a:solidFill>
-                  <a:srgbClr val="17364A"/>
-                </a:solidFill>
-                <a:latin typeface="Aptos" pitchFamily="34" charset="0"/>
-                <a:ea typeface="Aptos" pitchFamily="34" charset="-122"/>
-                <a:cs typeface="Aptos" pitchFamily="34" charset="-120"/>
-              </a:rPr>
-              <a:t>5. What should leaders do when an AI use case has meaningful benefits but unresolved risks?</a:t>
-            </a:r>
-            <a:endParaRPr lang="en-US" sz="1450" dirty="0"/>
+              <a:t>Connect the concept to public health decisions, safeguards, documentation, or implementation work.</a:t>
+            </a:r>
+            <a:endParaRPr lang="en-US" sz="1250" dirty="0"/>
           </a:p>
         </p:txBody>
       </p:sp>
@@ -4869,7 +7539,32 @@
       </p:sp>
       <p:sp>
         <p:nvSpPr>
-          <p:cNvPr id="3" name="Text 1"/>
+          <p:cNvPr id="3" name="Shape 1"/>
+          <p:cNvSpPr/>
+          <p:nvPr/>
+        </p:nvSpPr>
+        <p:spPr>
+          <a:xfrm>
+            <a:off x="0" y="164592"/>
+            <a:ext cx="146304" cy="6693408"/>
+          </a:xfrm>
+          <a:prstGeom prst="rect">
+            <a:avLst/>
+          </a:prstGeom>
+          <a:solidFill>
+            <a:srgbClr val="2F8A28"/>
+          </a:solidFill>
+          <a:ln w="12700">
+            <a:solidFill>
+              <a:srgbClr val="2F8A28"/>
+            </a:solidFill>
+            <a:prstDash val="solid"/>
+          </a:ln>
+        </p:spPr>
+      </p:sp>
+      <p:sp>
+        <p:nvSpPr>
+          <p:cNvPr id="4" name="Text 2"/>
           <p:cNvSpPr/>
           <p:nvPr/>
         </p:nvSpPr>
@@ -4908,7 +7603,7 @@
       </p:sp>
       <p:sp>
         <p:nvSpPr>
-          <p:cNvPr id="4" name="Text 2"/>
+          <p:cNvPr id="5" name="Text 3"/>
           <p:cNvSpPr/>
           <p:nvPr/>
         </p:nvSpPr>
@@ -4947,7 +7642,7 @@
       </p:sp>
       <p:sp>
         <p:nvSpPr>
-          <p:cNvPr id="5" name="Text 3"/>
+          <p:cNvPr id="6" name="Text 4"/>
           <p:cNvSpPr/>
           <p:nvPr/>
         </p:nvSpPr>
@@ -4986,13 +7681,77 @@
       </p:sp>
       <p:sp>
         <p:nvSpPr>
-          <p:cNvPr id="6" name="Text 4"/>
+          <p:cNvPr id="7" name="Shape 5"/>
           <p:cNvSpPr/>
           <p:nvPr/>
         </p:nvSpPr>
         <p:spPr>
           <a:xfrm>
             <a:off x="640080" y="658368"/>
+            <a:ext cx="420624" cy="420624"/>
+          </a:xfrm>
+          <a:prstGeom prst="ellipse">
+            <a:avLst/>
+          </a:prstGeom>
+          <a:solidFill>
+            <a:srgbClr val="0068B7"/>
+          </a:solidFill>
+          <a:ln w="12700">
+            <a:solidFill>
+              <a:srgbClr val="0068B7"/>
+            </a:solidFill>
+            <a:prstDash val="solid"/>
+          </a:ln>
+        </p:spPr>
+      </p:sp>
+      <p:sp>
+        <p:nvSpPr>
+          <p:cNvPr id="8" name="Text 6"/>
+          <p:cNvSpPr/>
+          <p:nvPr/>
+        </p:nvSpPr>
+        <p:spPr>
+          <a:xfrm>
+            <a:off x="640080" y="731520"/>
+            <a:ext cx="420624" cy="164592"/>
+          </a:xfrm>
+          <a:prstGeom prst="rect">
+            <a:avLst/>
+          </a:prstGeom>
+          <a:noFill/>
+          <a:ln/>
+        </p:spPr>
+        <p:txBody>
+          <a:bodyPr wrap="square" lIns="0" tIns="0" rIns="0" bIns="0" rtlCol="0" anchor="ctr"/>
+          <a:lstStyle/>
+          <a:p>
+            <a:pPr algn="ctr" indent="0" marL="0">
+              <a:buNone/>
+            </a:pPr>
+            <a:r>
+              <a:rPr lang="en-US" sz="1100" b="1" dirty="0">
+                <a:solidFill>
+                  <a:srgbClr val="FFFFFF"/>
+                </a:solidFill>
+                <a:latin typeface="Aptos" pitchFamily="34" charset="0"/>
+                <a:ea typeface="Aptos" pitchFamily="34" charset="-122"/>
+                <a:cs typeface="Aptos" pitchFamily="34" charset="-120"/>
+              </a:rPr>
+              <a:t>13</a:t>
+            </a:r>
+            <a:endParaRPr lang="en-US" sz="1100" dirty="0"/>
+          </a:p>
+        </p:txBody>
+      </p:sp>
+      <p:sp>
+        <p:nvSpPr>
+          <p:cNvPr id="9" name="Text 7"/>
+          <p:cNvSpPr/>
+          <p:nvPr/>
+        </p:nvSpPr>
+        <p:spPr>
+          <a:xfrm>
+            <a:off x="640080" y="621792"/>
             <a:ext cx="10881360" cy="566928"/>
           </a:xfrm>
           <a:prstGeom prst="rect">
@@ -5019,7 +7778,7 @@
                 <a:ea typeface="Aptos Display" pitchFamily="34" charset="-122"/>
                 <a:cs typeface="Aptos Display" pitchFamily="34" charset="-120"/>
               </a:rPr>
-              <a:t>References and Resources</a:t>
+              <a:t>Expected Assignment</a:t>
             </a:r>
             <a:endParaRPr lang="en-US" sz="2700" dirty="0"/>
           </a:p>
@@ -5027,14 +7786,14 @@
       </p:sp>
       <p:sp>
         <p:nvSpPr>
-          <p:cNvPr id="7" name="Text 5"/>
-          <p:cNvSpPr/>
-          <p:nvPr/>
-        </p:nvSpPr>
-        <p:spPr>
-          <a:xfrm>
-            <a:off x="822960" y="1325880"/>
-            <a:ext cx="10378440" cy="4800600"/>
+          <p:cNvPr id="10" name="Text 8"/>
+          <p:cNvSpPr/>
+          <p:nvPr/>
+        </p:nvSpPr>
+        <p:spPr>
+          <a:xfrm>
+            <a:off x="868680" y="1417320"/>
+            <a:ext cx="6675120" cy="4434840"/>
           </a:xfrm>
           <a:prstGeom prst="rect">
             <a:avLst/>
@@ -5049,7 +7808,7 @@
           <a:lstStyle/>
           <a:p>
             <a:r>
-              <a:rPr lang="en-US" sz="1450" dirty="0">
+              <a:rPr lang="en-US" sz="1700" dirty="0">
                 <a:solidFill>
                   <a:srgbClr val="17364A"/>
                 </a:solidFill>
@@ -5057,13 +7816,106 @@
                 <a:ea typeface="Aptos" pitchFamily="34" charset="-122"/>
                 <a:cs typeface="Aptos" pitchFamily="34" charset="-120"/>
               </a:rPr>
-              <a:t>NIST Artificial Intelligence Risk Management Framework (AI RMF 1.0): https://www.nist.gov/itl/ai-risk-management-framework</a:t>
-            </a:r>
-            <a:endParaRPr lang="en-US" sz="1450" dirty="0"/>
-          </a:p>
-          <a:p>
-            <a:r>
-              <a:rPr lang="en-US" sz="1450" dirty="0">
+              <a:t>Use case intake form; prioritization rubric; sample portfolio view; decision category definitions.</a:t>
+            </a:r>
+            <a:endParaRPr lang="en-US" sz="1700" dirty="0"/>
+          </a:p>
+        </p:txBody>
+      </p:sp>
+      <p:sp>
+        <p:nvSpPr>
+          <p:cNvPr id="11" name="Shape 9"/>
+          <p:cNvSpPr/>
+          <p:nvPr/>
+        </p:nvSpPr>
+        <p:spPr>
+          <a:xfrm>
+            <a:off x="7909560" y="1417320"/>
+            <a:ext cx="3154680" cy="1828800"/>
+          </a:xfrm>
+          <a:prstGeom prst="roundRect">
+            <a:avLst>
+              <a:gd name="adj" fmla="val 6000"/>
+            </a:avLst>
+          </a:prstGeom>
+          <a:solidFill>
+            <a:srgbClr val="EEF8ED"/>
+          </a:solidFill>
+          <a:ln w="12700">
+            <a:solidFill>
+              <a:srgbClr val="B9D7E6"/>
+            </a:solidFill>
+            <a:prstDash val="solid"/>
+          </a:ln>
+        </p:spPr>
+      </p:sp>
+      <p:sp>
+        <p:nvSpPr>
+          <p:cNvPr id="12" name="Text 10"/>
+          <p:cNvSpPr/>
+          <p:nvPr/>
+        </p:nvSpPr>
+        <p:spPr>
+          <a:xfrm>
+            <a:off x="8074152" y="1563624"/>
+            <a:ext cx="2825496" cy="201168"/>
+          </a:xfrm>
+          <a:prstGeom prst="rect">
+            <a:avLst/>
+          </a:prstGeom>
+          <a:noFill/>
+          <a:ln/>
+        </p:spPr>
+        <p:txBody>
+          <a:bodyPr wrap="square" lIns="0" tIns="0" rIns="0" bIns="0" rtlCol="0" anchor="ctr"/>
+          <a:lstStyle/>
+          <a:p>
+            <a:pPr indent="0" marL="0">
+              <a:buNone/>
+            </a:pPr>
+            <a:r>
+              <a:rPr lang="en-US" sz="950" b="1" dirty="0">
+                <a:solidFill>
+                  <a:srgbClr val="0068B7"/>
+                </a:solidFill>
+                <a:latin typeface="Aptos" pitchFamily="34" charset="0"/>
+                <a:ea typeface="Aptos" pitchFamily="34" charset="-122"/>
+                <a:cs typeface="Aptos" pitchFamily="34" charset="-120"/>
+              </a:rPr>
+              <a:t>Key idea</a:t>
+            </a:r>
+            <a:endParaRPr lang="en-US" sz="950" dirty="0"/>
+          </a:p>
+        </p:txBody>
+      </p:sp>
+      <p:sp>
+        <p:nvSpPr>
+          <p:cNvPr id="13" name="Text 11"/>
+          <p:cNvSpPr/>
+          <p:nvPr/>
+        </p:nvSpPr>
+        <p:spPr>
+          <a:xfrm>
+            <a:off x="8074152" y="1856232"/>
+            <a:ext cx="2825496" cy="1261872"/>
+          </a:xfrm>
+          <a:prstGeom prst="rect">
+            <a:avLst/>
+          </a:prstGeom>
+          <a:noFill/>
+          <a:ln/>
+        </p:spPr>
+        <p:txBody>
+          <a:bodyPr wrap="square" lIns="0" tIns="0" rIns="0" bIns="0" rtlCol="0" anchor="t">
+            <a:normAutofit/>
+          </a:bodyPr>
+          <a:lstStyle/>
+          <a:p>
+            <a:pPr indent="0" marL="0">
+              <a:buNone/>
+            </a:pPr>
+            <a:r>
+              <a:rPr lang="en-US" sz="1250" dirty="0">
                 <a:solidFill>
                   <a:srgbClr val="17364A"/>
                 </a:solidFill>
@@ -5071,13 +7923,106 @@
                 <a:ea typeface="Aptos" pitchFamily="34" charset="-122"/>
                 <a:cs typeface="Aptos" pitchFamily="34" charset="-120"/>
               </a:rPr>
-              <a:t>NIST Generative AI Profile: https://www.nist.gov/publications/artificial-intelligence-risk-management-framework-generative-artificial-intelligence</a:t>
-            </a:r>
-            <a:endParaRPr lang="en-US" sz="1450" dirty="0"/>
-          </a:p>
-          <a:p>
-            <a:r>
-              <a:rPr lang="en-US" sz="1450" dirty="0">
+              <a:t>Use case intake form; prioritization rubric; sample portfolio view; decision category definitions.</a:t>
+            </a:r>
+            <a:endParaRPr lang="en-US" sz="1250" dirty="0"/>
+          </a:p>
+        </p:txBody>
+      </p:sp>
+      <p:sp>
+        <p:nvSpPr>
+          <p:cNvPr id="14" name="Shape 12"/>
+          <p:cNvSpPr/>
+          <p:nvPr/>
+        </p:nvSpPr>
+        <p:spPr>
+          <a:xfrm>
+            <a:off x="7909560" y="3520440"/>
+            <a:ext cx="3154680" cy="1737360"/>
+          </a:xfrm>
+          <a:prstGeom prst="roundRect">
+            <a:avLst>
+              <a:gd name="adj" fmla="val 6316"/>
+            </a:avLst>
+          </a:prstGeom>
+          <a:solidFill>
+            <a:srgbClr val="EAF6F8"/>
+          </a:solidFill>
+          <a:ln w="12700">
+            <a:solidFill>
+              <a:srgbClr val="B9D7E6"/>
+            </a:solidFill>
+            <a:prstDash val="solid"/>
+          </a:ln>
+        </p:spPr>
+      </p:sp>
+      <p:sp>
+        <p:nvSpPr>
+          <p:cNvPr id="15" name="Text 13"/>
+          <p:cNvSpPr/>
+          <p:nvPr/>
+        </p:nvSpPr>
+        <p:spPr>
+          <a:xfrm>
+            <a:off x="8074152" y="3666744"/>
+            <a:ext cx="2825496" cy="201168"/>
+          </a:xfrm>
+          <a:prstGeom prst="rect">
+            <a:avLst/>
+          </a:prstGeom>
+          <a:noFill/>
+          <a:ln/>
+        </p:spPr>
+        <p:txBody>
+          <a:bodyPr wrap="square" lIns="0" tIns="0" rIns="0" bIns="0" rtlCol="0" anchor="ctr"/>
+          <a:lstStyle/>
+          <a:p>
+            <a:pPr indent="0" marL="0">
+              <a:buNone/>
+            </a:pPr>
+            <a:r>
+              <a:rPr lang="en-US" sz="950" b="1" dirty="0">
+                <a:solidFill>
+                  <a:srgbClr val="0068B7"/>
+                </a:solidFill>
+                <a:latin typeface="Aptos" pitchFamily="34" charset="0"/>
+                <a:ea typeface="Aptos" pitchFamily="34" charset="-122"/>
+                <a:cs typeface="Aptos" pitchFamily="34" charset="-120"/>
+              </a:rPr>
+              <a:t>Use this for</a:t>
+            </a:r>
+            <a:endParaRPr lang="en-US" sz="950" dirty="0"/>
+          </a:p>
+        </p:txBody>
+      </p:sp>
+      <p:sp>
+        <p:nvSpPr>
+          <p:cNvPr id="16" name="Text 14"/>
+          <p:cNvSpPr/>
+          <p:nvPr/>
+        </p:nvSpPr>
+        <p:spPr>
+          <a:xfrm>
+            <a:off x="8074152" y="3959352"/>
+            <a:ext cx="2825496" cy="1170432"/>
+          </a:xfrm>
+          <a:prstGeom prst="rect">
+            <a:avLst/>
+          </a:prstGeom>
+          <a:noFill/>
+          <a:ln/>
+        </p:spPr>
+        <p:txBody>
+          <a:bodyPr wrap="square" lIns="0" tIns="0" rIns="0" bIns="0" rtlCol="0" anchor="t">
+            <a:normAutofit/>
+          </a:bodyPr>
+          <a:lstStyle/>
+          <a:p>
+            <a:pPr indent="0" marL="0">
+              <a:buNone/>
+            </a:pPr>
+            <a:r>
+              <a:rPr lang="en-US" sz="1250" dirty="0">
                 <a:solidFill>
                   <a:srgbClr val="17364A"/>
                 </a:solidFill>
@@ -5085,37 +8030,9 @@
                 <a:ea typeface="Aptos" pitchFamily="34" charset="-122"/>
                 <a:cs typeface="Aptos" pitchFamily="34" charset="-120"/>
               </a:rPr>
-              <a:t>NIST Privacy Framework</a:t>
-            </a:r>
-            <a:endParaRPr lang="en-US" sz="1450" dirty="0"/>
-          </a:p>
-          <a:p>
-            <a:r>
-              <a:rPr lang="en-US" sz="1450" dirty="0">
-                <a:solidFill>
-                  <a:srgbClr val="17364A"/>
-                </a:solidFill>
-                <a:latin typeface="Aptos" pitchFamily="34" charset="0"/>
-                <a:ea typeface="Aptos" pitchFamily="34" charset="-122"/>
-                <a:cs typeface="Aptos" pitchFamily="34" charset="-120"/>
-              </a:rPr>
-              <a:t>CDC Public Health Data Strategy and Data Modernization resources: https://www.cdc.gov/public-health-data-strategy/php/about/index.html</a:t>
-            </a:r>
-            <a:endParaRPr lang="en-US" sz="1450" dirty="0"/>
-          </a:p>
-          <a:p>
-            <a:r>
-              <a:rPr lang="en-US" sz="1450" dirty="0">
-                <a:solidFill>
-                  <a:srgbClr val="17364A"/>
-                </a:solidFill>
-                <a:latin typeface="Aptos" pitchFamily="34" charset="0"/>
-                <a:ea typeface="Aptos" pitchFamily="34" charset="-122"/>
-                <a:cs typeface="Aptos" pitchFamily="34" charset="-120"/>
-              </a:rPr>
-              <a:t>WHO Ethics and Governance of Artificial Intelligence for Health: https://www.who.int/publications/i/item/9789240029200</a:t>
-            </a:r>
-            <a:endParaRPr lang="en-US" sz="1450" dirty="0"/>
+              <a:t>Connect the concept to public health decisions, safeguards, documentation, or implementation work.</a:t>
+            </a:r>
+            <a:endParaRPr lang="en-US" sz="1250" dirty="0"/>
           </a:p>
         </p:txBody>
       </p:sp>
@@ -5178,7 +8095,32 @@
       </p:sp>
       <p:sp>
         <p:nvSpPr>
-          <p:cNvPr id="3" name="Text 1"/>
+          <p:cNvPr id="3" name="Shape 1"/>
+          <p:cNvSpPr/>
+          <p:nvPr/>
+        </p:nvSpPr>
+        <p:spPr>
+          <a:xfrm>
+            <a:off x="0" y="164592"/>
+            <a:ext cx="146304" cy="6693408"/>
+          </a:xfrm>
+          <a:prstGeom prst="rect">
+            <a:avLst/>
+          </a:prstGeom>
+          <a:solidFill>
+            <a:srgbClr val="2F8A28"/>
+          </a:solidFill>
+          <a:ln w="12700">
+            <a:solidFill>
+              <a:srgbClr val="2F8A28"/>
+            </a:solidFill>
+            <a:prstDash val="solid"/>
+          </a:ln>
+        </p:spPr>
+      </p:sp>
+      <p:sp>
+        <p:nvSpPr>
+          <p:cNvPr id="4" name="Text 2"/>
           <p:cNvSpPr/>
           <p:nvPr/>
         </p:nvSpPr>
@@ -5217,7 +8159,7 @@
       </p:sp>
       <p:sp>
         <p:nvSpPr>
-          <p:cNvPr id="4" name="Text 2"/>
+          <p:cNvPr id="5" name="Text 3"/>
           <p:cNvSpPr/>
           <p:nvPr/>
         </p:nvSpPr>
@@ -5256,7 +8198,7 @@
       </p:sp>
       <p:sp>
         <p:nvSpPr>
-          <p:cNvPr id="5" name="Text 3"/>
+          <p:cNvPr id="6" name="Text 4"/>
           <p:cNvSpPr/>
           <p:nvPr/>
         </p:nvSpPr>
@@ -5295,13 +8237,77 @@
       </p:sp>
       <p:sp>
         <p:nvSpPr>
-          <p:cNvPr id="6" name="Text 4"/>
+          <p:cNvPr id="7" name="Shape 5"/>
           <p:cNvSpPr/>
           <p:nvPr/>
         </p:nvSpPr>
         <p:spPr>
           <a:xfrm>
             <a:off x="640080" y="658368"/>
+            <a:ext cx="420624" cy="420624"/>
+          </a:xfrm>
+          <a:prstGeom prst="ellipse">
+            <a:avLst/>
+          </a:prstGeom>
+          <a:solidFill>
+            <a:srgbClr val="0068B7"/>
+          </a:solidFill>
+          <a:ln w="12700">
+            <a:solidFill>
+              <a:srgbClr val="0068B7"/>
+            </a:solidFill>
+            <a:prstDash val="solid"/>
+          </a:ln>
+        </p:spPr>
+      </p:sp>
+      <p:sp>
+        <p:nvSpPr>
+          <p:cNvPr id="8" name="Text 6"/>
+          <p:cNvSpPr/>
+          <p:nvPr/>
+        </p:nvSpPr>
+        <p:spPr>
+          <a:xfrm>
+            <a:off x="640080" y="731520"/>
+            <a:ext cx="420624" cy="164592"/>
+          </a:xfrm>
+          <a:prstGeom prst="rect">
+            <a:avLst/>
+          </a:prstGeom>
+          <a:noFill/>
+          <a:ln/>
+        </p:spPr>
+        <p:txBody>
+          <a:bodyPr wrap="square" lIns="0" tIns="0" rIns="0" bIns="0" rtlCol="0" anchor="ctr"/>
+          <a:lstStyle/>
+          <a:p>
+            <a:pPr algn="ctr" indent="0" marL="0">
+              <a:buNone/>
+            </a:pPr>
+            <a:r>
+              <a:rPr lang="en-US" sz="1100" b="1" dirty="0">
+                <a:solidFill>
+                  <a:srgbClr val="FFFFFF"/>
+                </a:solidFill>
+                <a:latin typeface="Aptos" pitchFamily="34" charset="0"/>
+                <a:ea typeface="Aptos" pitchFamily="34" charset="-122"/>
+                <a:cs typeface="Aptos" pitchFamily="34" charset="-120"/>
+              </a:rPr>
+              <a:t>14</a:t>
+            </a:r>
+            <a:endParaRPr lang="en-US" sz="1100" dirty="0"/>
+          </a:p>
+        </p:txBody>
+      </p:sp>
+      <p:sp>
+        <p:nvSpPr>
+          <p:cNvPr id="9" name="Text 7"/>
+          <p:cNvSpPr/>
+          <p:nvPr/>
+        </p:nvSpPr>
+        <p:spPr>
+          <a:xfrm>
+            <a:off x="640080" y="621792"/>
             <a:ext cx="10881360" cy="566928"/>
           </a:xfrm>
           <a:prstGeom prst="rect">
@@ -5328,7 +8334,7 @@
                 <a:ea typeface="Aptos Display" pitchFamily="34" charset="-122"/>
                 <a:cs typeface="Aptos Display" pitchFamily="34" charset="-120"/>
               </a:rPr>
-              <a:t>References and Resources Continued</a:t>
+              <a:t>Knowledge Check</a:t>
             </a:r>
             <a:endParaRPr lang="en-US" sz="2700" dirty="0"/>
           </a:p>
@@ -5336,14 +8342,14 @@
       </p:sp>
       <p:sp>
         <p:nvSpPr>
-          <p:cNvPr id="7" name="Text 5"/>
-          <p:cNvSpPr/>
-          <p:nvPr/>
-        </p:nvSpPr>
-        <p:spPr>
-          <a:xfrm>
-            <a:off x="822960" y="1325880"/>
-            <a:ext cx="10378440" cy="4800600"/>
+          <p:cNvPr id="10" name="Text 8"/>
+          <p:cNvSpPr/>
+          <p:nvPr/>
+        </p:nvSpPr>
+        <p:spPr>
+          <a:xfrm>
+            <a:off x="868680" y="1417320"/>
+            <a:ext cx="6675120" cy="4434840"/>
           </a:xfrm>
           <a:prstGeom prst="rect">
             <a:avLst/>
@@ -5358,7 +8364,7 @@
           <a:lstStyle/>
           <a:p>
             <a:r>
-              <a:rPr lang="en-US" sz="1450" dirty="0">
+              <a:rPr lang="en-US" sz="1700" dirty="0">
                 <a:solidFill>
                   <a:srgbClr val="17364A"/>
                 </a:solidFill>
@@ -5366,13 +8372,13 @@
                 <a:ea typeface="Aptos" pitchFamily="34" charset="-122"/>
                 <a:cs typeface="Aptos" pitchFamily="34" charset="-120"/>
               </a:rPr>
-              <a:t>OMB Memorandum M-24-10 on federal AI governance, risk management, and innovation, where relevant to public-sector governance models</a:t>
-            </a:r>
-            <a:endParaRPr lang="en-US" sz="1450" dirty="0"/>
-          </a:p>
-          <a:p>
-            <a:r>
-              <a:rPr lang="en-US" sz="1450" dirty="0">
+              <a:t>1. What is the strongest reason this module topic belongs in AI leadership and governance training?</a:t>
+            </a:r>
+            <a:endParaRPr lang="en-US" sz="1700" dirty="0"/>
+          </a:p>
+          <a:p>
+            <a:r>
+              <a:rPr lang="en-US" sz="1700" dirty="0">
                 <a:solidFill>
                   <a:srgbClr val="17364A"/>
                 </a:solidFill>
@@ -5380,9 +8386,251 @@
                 <a:ea typeface="Aptos" pitchFamily="34" charset="-122"/>
                 <a:cs typeface="Aptos" pitchFamily="34" charset="-120"/>
               </a:rPr>
-              <a:t>Agency strategic plans, procurement policies, privacy policies, cybersecurity policies, records policies, and equity plans</a:t>
-            </a:r>
-            <a:endParaRPr lang="en-US" sz="1450" dirty="0"/>
+              <a:t>2. Which practice best supports accountable public health AI governance?</a:t>
+            </a:r>
+            <a:endParaRPr lang="en-US" sz="1700" dirty="0"/>
+          </a:p>
+          <a:p>
+            <a:r>
+              <a:rPr lang="en-US" sz="1700" dirty="0">
+                <a:solidFill>
+                  <a:srgbClr val="17364A"/>
+                </a:solidFill>
+                <a:latin typeface="Aptos" pitchFamily="34" charset="0"/>
+                <a:ea typeface="Aptos" pitchFamily="34" charset="-122"/>
+                <a:cs typeface="Aptos" pitchFamily="34" charset="-120"/>
+              </a:rPr>
+              <a:t>3. When should an AI use case be escalated for leadership or governance review?</a:t>
+            </a:r>
+            <a:endParaRPr lang="en-US" sz="1700" dirty="0"/>
+          </a:p>
+          <a:p>
+            <a:r>
+              <a:rPr lang="en-US" sz="1700" dirty="0">
+                <a:solidFill>
+                  <a:srgbClr val="17364A"/>
+                </a:solidFill>
+                <a:latin typeface="Aptos" pitchFamily="34" charset="0"/>
+                <a:ea typeface="Aptos" pitchFamily="34" charset="-122"/>
+                <a:cs typeface="Aptos" pitchFamily="34" charset="-120"/>
+              </a:rPr>
+              <a:t>4. What is weak evidence of completion for a leadership and governance module?</a:t>
+            </a:r>
+            <a:endParaRPr lang="en-US" sz="1700" dirty="0"/>
+          </a:p>
+        </p:txBody>
+      </p:sp>
+      <p:sp>
+        <p:nvSpPr>
+          <p:cNvPr id="11" name="Shape 9"/>
+          <p:cNvSpPr/>
+          <p:nvPr/>
+        </p:nvSpPr>
+        <p:spPr>
+          <a:xfrm>
+            <a:off x="7909560" y="1417320"/>
+            <a:ext cx="3154680" cy="1828800"/>
+          </a:xfrm>
+          <a:prstGeom prst="roundRect">
+            <a:avLst>
+              <a:gd name="adj" fmla="val 6000"/>
+            </a:avLst>
+          </a:prstGeom>
+          <a:solidFill>
+            <a:srgbClr val="EEF8ED"/>
+          </a:solidFill>
+          <a:ln w="12700">
+            <a:solidFill>
+              <a:srgbClr val="B9D7E6"/>
+            </a:solidFill>
+            <a:prstDash val="solid"/>
+          </a:ln>
+        </p:spPr>
+      </p:sp>
+      <p:sp>
+        <p:nvSpPr>
+          <p:cNvPr id="12" name="Text 10"/>
+          <p:cNvSpPr/>
+          <p:nvPr/>
+        </p:nvSpPr>
+        <p:spPr>
+          <a:xfrm>
+            <a:off x="8074152" y="1563624"/>
+            <a:ext cx="2825496" cy="201168"/>
+          </a:xfrm>
+          <a:prstGeom prst="rect">
+            <a:avLst/>
+          </a:prstGeom>
+          <a:noFill/>
+          <a:ln/>
+        </p:spPr>
+        <p:txBody>
+          <a:bodyPr wrap="square" lIns="0" tIns="0" rIns="0" bIns="0" rtlCol="0" anchor="ctr"/>
+          <a:lstStyle/>
+          <a:p>
+            <a:pPr indent="0" marL="0">
+              <a:buNone/>
+            </a:pPr>
+            <a:r>
+              <a:rPr lang="en-US" sz="950" b="1" dirty="0">
+                <a:solidFill>
+                  <a:srgbClr val="0068B7"/>
+                </a:solidFill>
+                <a:latin typeface="Aptos" pitchFamily="34" charset="0"/>
+                <a:ea typeface="Aptos" pitchFamily="34" charset="-122"/>
+                <a:cs typeface="Aptos" pitchFamily="34" charset="-120"/>
+              </a:rPr>
+              <a:t>Key idea</a:t>
+            </a:r>
+            <a:endParaRPr lang="en-US" sz="950" dirty="0"/>
+          </a:p>
+        </p:txBody>
+      </p:sp>
+      <p:sp>
+        <p:nvSpPr>
+          <p:cNvPr id="13" name="Text 11"/>
+          <p:cNvSpPr/>
+          <p:nvPr/>
+        </p:nvSpPr>
+        <p:spPr>
+          <a:xfrm>
+            <a:off x="8074152" y="1856232"/>
+            <a:ext cx="2825496" cy="1261872"/>
+          </a:xfrm>
+          <a:prstGeom prst="rect">
+            <a:avLst/>
+          </a:prstGeom>
+          <a:noFill/>
+          <a:ln/>
+        </p:spPr>
+        <p:txBody>
+          <a:bodyPr wrap="square" lIns="0" tIns="0" rIns="0" bIns="0" rtlCol="0" anchor="t">
+            <a:normAutofit/>
+          </a:bodyPr>
+          <a:lstStyle/>
+          <a:p>
+            <a:pPr indent="0" marL="0">
+              <a:buNone/>
+            </a:pPr>
+            <a:r>
+              <a:rPr lang="en-US" sz="1250" dirty="0">
+                <a:solidFill>
+                  <a:srgbClr val="17364A"/>
+                </a:solidFill>
+                <a:latin typeface="Aptos" pitchFamily="34" charset="0"/>
+                <a:ea typeface="Aptos" pitchFamily="34" charset="-122"/>
+                <a:cs typeface="Aptos" pitchFamily="34" charset="-120"/>
+              </a:rPr>
+              <a:t>1. What is the strongest reason this module topic belongs in AI leadership and governance training?</a:t>
+            </a:r>
+            <a:endParaRPr lang="en-US" sz="1250" dirty="0"/>
+          </a:p>
+        </p:txBody>
+      </p:sp>
+      <p:sp>
+        <p:nvSpPr>
+          <p:cNvPr id="14" name="Shape 12"/>
+          <p:cNvSpPr/>
+          <p:nvPr/>
+        </p:nvSpPr>
+        <p:spPr>
+          <a:xfrm>
+            <a:off x="7909560" y="3520440"/>
+            <a:ext cx="3154680" cy="1737360"/>
+          </a:xfrm>
+          <a:prstGeom prst="roundRect">
+            <a:avLst>
+              <a:gd name="adj" fmla="val 6316"/>
+            </a:avLst>
+          </a:prstGeom>
+          <a:solidFill>
+            <a:srgbClr val="EAF6F8"/>
+          </a:solidFill>
+          <a:ln w="12700">
+            <a:solidFill>
+              <a:srgbClr val="B9D7E6"/>
+            </a:solidFill>
+            <a:prstDash val="solid"/>
+          </a:ln>
+        </p:spPr>
+      </p:sp>
+      <p:sp>
+        <p:nvSpPr>
+          <p:cNvPr id="15" name="Text 13"/>
+          <p:cNvSpPr/>
+          <p:nvPr/>
+        </p:nvSpPr>
+        <p:spPr>
+          <a:xfrm>
+            <a:off x="8074152" y="3666744"/>
+            <a:ext cx="2825496" cy="201168"/>
+          </a:xfrm>
+          <a:prstGeom prst="rect">
+            <a:avLst/>
+          </a:prstGeom>
+          <a:noFill/>
+          <a:ln/>
+        </p:spPr>
+        <p:txBody>
+          <a:bodyPr wrap="square" lIns="0" tIns="0" rIns="0" bIns="0" rtlCol="0" anchor="ctr"/>
+          <a:lstStyle/>
+          <a:p>
+            <a:pPr indent="0" marL="0">
+              <a:buNone/>
+            </a:pPr>
+            <a:r>
+              <a:rPr lang="en-US" sz="950" b="1" dirty="0">
+                <a:solidFill>
+                  <a:srgbClr val="0068B7"/>
+                </a:solidFill>
+                <a:latin typeface="Aptos" pitchFamily="34" charset="0"/>
+                <a:ea typeface="Aptos" pitchFamily="34" charset="-122"/>
+                <a:cs typeface="Aptos" pitchFamily="34" charset="-120"/>
+              </a:rPr>
+              <a:t>Use this for</a:t>
+            </a:r>
+            <a:endParaRPr lang="en-US" sz="950" dirty="0"/>
+          </a:p>
+        </p:txBody>
+      </p:sp>
+      <p:sp>
+        <p:nvSpPr>
+          <p:cNvPr id="16" name="Text 14"/>
+          <p:cNvSpPr/>
+          <p:nvPr/>
+        </p:nvSpPr>
+        <p:spPr>
+          <a:xfrm>
+            <a:off x="8074152" y="3959352"/>
+            <a:ext cx="2825496" cy="1170432"/>
+          </a:xfrm>
+          <a:prstGeom prst="rect">
+            <a:avLst/>
+          </a:prstGeom>
+          <a:noFill/>
+          <a:ln/>
+        </p:spPr>
+        <p:txBody>
+          <a:bodyPr wrap="square" lIns="0" tIns="0" rIns="0" bIns="0" rtlCol="0" anchor="t">
+            <a:normAutofit/>
+          </a:bodyPr>
+          <a:lstStyle/>
+          <a:p>
+            <a:pPr indent="0" marL="0">
+              <a:buNone/>
+            </a:pPr>
+            <a:r>
+              <a:rPr lang="en-US" sz="1250" dirty="0">
+                <a:solidFill>
+                  <a:srgbClr val="17364A"/>
+                </a:solidFill>
+                <a:latin typeface="Aptos" pitchFamily="34" charset="0"/>
+                <a:ea typeface="Aptos" pitchFamily="34" charset="-122"/>
+                <a:cs typeface="Aptos" pitchFamily="34" charset="-120"/>
+              </a:rPr>
+              <a:t>Connect the concept to public health decisions, safeguards, documentation, or implementation work.</a:t>
+            </a:r>
+            <a:endParaRPr lang="en-US" sz="1250" dirty="0"/>
           </a:p>
         </p:txBody>
       </p:sp>
@@ -5445,7 +8693,32 @@
       </p:sp>
       <p:sp>
         <p:nvSpPr>
-          <p:cNvPr id="3" name="Text 1"/>
+          <p:cNvPr id="3" name="Shape 1"/>
+          <p:cNvSpPr/>
+          <p:nvPr/>
+        </p:nvSpPr>
+        <p:spPr>
+          <a:xfrm>
+            <a:off x="0" y="164592"/>
+            <a:ext cx="146304" cy="6693408"/>
+          </a:xfrm>
+          <a:prstGeom prst="rect">
+            <a:avLst/>
+          </a:prstGeom>
+          <a:solidFill>
+            <a:srgbClr val="2F8A28"/>
+          </a:solidFill>
+          <a:ln w="12700">
+            <a:solidFill>
+              <a:srgbClr val="2F8A28"/>
+            </a:solidFill>
+            <a:prstDash val="solid"/>
+          </a:ln>
+        </p:spPr>
+      </p:sp>
+      <p:sp>
+        <p:nvSpPr>
+          <p:cNvPr id="4" name="Text 2"/>
           <p:cNvSpPr/>
           <p:nvPr/>
         </p:nvSpPr>
@@ -5484,7 +8757,7 @@
       </p:sp>
       <p:sp>
         <p:nvSpPr>
-          <p:cNvPr id="4" name="Text 2"/>
+          <p:cNvPr id="5" name="Text 3"/>
           <p:cNvSpPr/>
           <p:nvPr/>
         </p:nvSpPr>
@@ -5523,7 +8796,7 @@
       </p:sp>
       <p:sp>
         <p:nvSpPr>
-          <p:cNvPr id="5" name="Text 3"/>
+          <p:cNvPr id="6" name="Text 4"/>
           <p:cNvSpPr/>
           <p:nvPr/>
         </p:nvSpPr>
@@ -5562,7 +8835,7 @@
       </p:sp>
       <p:sp>
         <p:nvSpPr>
-          <p:cNvPr id="6" name="Text 4"/>
+          <p:cNvPr id="7" name="Text 5"/>
           <p:cNvSpPr/>
           <p:nvPr/>
         </p:nvSpPr>
@@ -5595,7 +8868,7 @@
                 <a:ea typeface="Aptos Display" pitchFamily="34" charset="-122"/>
                 <a:cs typeface="Aptos Display" pitchFamily="34" charset="-120"/>
               </a:rPr>
-              <a:t>Module Context</a:t>
+              <a:t>What this module helps you do</a:t>
             </a:r>
             <a:endParaRPr lang="en-US" sz="2700" dirty="0"/>
           </a:p>
@@ -5603,14 +8876,14 @@
       </p:sp>
       <p:sp>
         <p:nvSpPr>
-          <p:cNvPr id="7" name="Text 5"/>
-          <p:cNvSpPr/>
-          <p:nvPr/>
-        </p:nvSpPr>
-        <p:spPr>
-          <a:xfrm>
-            <a:off x="822960" y="1325880"/>
-            <a:ext cx="10378440" cy="1371600"/>
+          <p:cNvPr id="8" name="Text 6"/>
+          <p:cNvSpPr/>
+          <p:nvPr/>
+        </p:nvSpPr>
+        <p:spPr>
+          <a:xfrm>
+            <a:off x="868680" y="1417320"/>
+            <a:ext cx="6675120" cy="3291840"/>
           </a:xfrm>
           <a:prstGeom prst="rect">
             <a:avLst/>
@@ -5625,7 +8898,7 @@
           <a:lstStyle/>
           <a:p>
             <a:r>
-              <a:rPr lang="en-US" sz="1600" dirty="0">
+              <a:rPr lang="en-US" sz="1700" dirty="0">
                 <a:solidFill>
                   <a:srgbClr val="17364A"/>
                 </a:solidFill>
@@ -5633,13 +8906,13 @@
                 <a:ea typeface="Aptos" pitchFamily="34" charset="-122"/>
                 <a:cs typeface="Aptos" pitchFamily="34" charset="-120"/>
               </a:rPr>
-              <a:t>Level: advanced/leadership</a:t>
-            </a:r>
-            <a:endParaRPr lang="en-US" sz="1600" dirty="0"/>
-          </a:p>
-          <a:p>
-            <a:r>
-              <a:rPr lang="en-US" sz="1600" dirty="0">
+              <a:t>AI opportunities can quickly exceed an agency's capacity to evaluate, implement, and sustain them.</a:t>
+            </a:r>
+            <a:endParaRPr lang="en-US" sz="1700" dirty="0"/>
+          </a:p>
+          <a:p>
+            <a:r>
+              <a:rPr lang="en-US" sz="1700" dirty="0">
                 <a:solidFill>
                   <a:srgbClr val="17364A"/>
                 </a:solidFill>
@@ -5647,13 +8920,13 @@
                 <a:ea typeface="Aptos" pitchFamily="34" charset="-122"/>
                 <a:cs typeface="Aptos" pitchFamily="34" charset="-120"/>
               </a:rPr>
-              <a:t>Primary track: Public Health Executive Leadership Track</a:t>
-            </a:r>
-            <a:endParaRPr lang="en-US" sz="1600" dirty="0"/>
-          </a:p>
-          <a:p>
-            <a:r>
-              <a:rPr lang="en-US" sz="1600" dirty="0">
+              <a:t>Leaders need a portfolio strategy that helps distinguish high-value public health uses from attractive but low-impact experiments.</a:t>
+            </a:r>
+            <a:endParaRPr lang="en-US" sz="1700" dirty="0"/>
+          </a:p>
+          <a:p>
+            <a:r>
+              <a:rPr lang="en-US" sz="1700" dirty="0">
                 <a:solidFill>
                   <a:srgbClr val="17364A"/>
                 </a:solidFill>
@@ -5661,31 +8934,111 @@
                 <a:ea typeface="Aptos" pitchFamily="34" charset="-122"/>
                 <a:cs typeface="Aptos" pitchFamily="34" charset="-120"/>
               </a:rPr>
-              <a:t>Appears in tracks: governance-security</a:t>
-            </a:r>
-            <a:endParaRPr lang="en-US" sz="1600" dirty="0"/>
-          </a:p>
-        </p:txBody>
-      </p:sp>
-      <p:sp>
-        <p:nvSpPr>
-          <p:cNvPr id="8" name="Text 6"/>
-          <p:cNvSpPr/>
-          <p:nvPr/>
-        </p:nvSpPr>
-        <p:spPr>
-          <a:xfrm>
-            <a:off x="822960" y="2743200"/>
-            <a:ext cx="10378440" cy="2834640"/>
-          </a:xfrm>
-          <a:prstGeom prst="rect">
-            <a:avLst/>
-          </a:prstGeom>
-          <a:noFill/>
-          <a:ln/>
-        </p:spPr>
-        <p:txBody>
-          <a:bodyPr wrap="square" lIns="1016" tIns="1016" rIns="1016" bIns="1016" rtlCol="0" anchor="t">
+              <a:t>A portfolio approach organizes AI opportunities across programs, risk levels, readiness, equity impact, technical feasibility, expected benefit, and.</a:t>
+            </a:r>
+            <a:endParaRPr lang="en-US" sz="1700" dirty="0"/>
+          </a:p>
+          <a:p>
+            <a:r>
+              <a:rPr lang="en-US" sz="1700" dirty="0">
+                <a:solidFill>
+                  <a:srgbClr val="17364A"/>
+                </a:solidFill>
+                <a:latin typeface="Aptos" pitchFamily="34" charset="0"/>
+                <a:ea typeface="Aptos" pitchFamily="34" charset="-122"/>
+                <a:cs typeface="Aptos" pitchFamily="34" charset="-120"/>
+              </a:rPr>
+              <a:t>This module teaches leaders how to create an AI use case intake and prioritization process.</a:t>
+            </a:r>
+            <a:endParaRPr lang="en-US" sz="1700" dirty="0"/>
+          </a:p>
+        </p:txBody>
+      </p:sp>
+      <p:sp>
+        <p:nvSpPr>
+          <p:cNvPr id="9" name="Shape 7"/>
+          <p:cNvSpPr/>
+          <p:nvPr/>
+        </p:nvSpPr>
+        <p:spPr>
+          <a:xfrm>
+            <a:off x="7909560" y="1417320"/>
+            <a:ext cx="3154680" cy="1920240"/>
+          </a:xfrm>
+          <a:prstGeom prst="roundRect">
+            <a:avLst>
+              <a:gd name="adj" fmla="val 5714"/>
+            </a:avLst>
+          </a:prstGeom>
+          <a:solidFill>
+            <a:srgbClr val="EAF6F8"/>
+          </a:solidFill>
+          <a:ln w="12700">
+            <a:solidFill>
+              <a:srgbClr val="B9D7E6"/>
+            </a:solidFill>
+            <a:prstDash val="solid"/>
+          </a:ln>
+        </p:spPr>
+      </p:sp>
+      <p:sp>
+        <p:nvSpPr>
+          <p:cNvPr id="10" name="Text 8"/>
+          <p:cNvSpPr/>
+          <p:nvPr/>
+        </p:nvSpPr>
+        <p:spPr>
+          <a:xfrm>
+            <a:off x="8074152" y="1563624"/>
+            <a:ext cx="2825496" cy="201168"/>
+          </a:xfrm>
+          <a:prstGeom prst="rect">
+            <a:avLst/>
+          </a:prstGeom>
+          <a:noFill/>
+          <a:ln/>
+        </p:spPr>
+        <p:txBody>
+          <a:bodyPr wrap="square" lIns="0" tIns="0" rIns="0" bIns="0" rtlCol="0" anchor="ctr"/>
+          <a:lstStyle/>
+          <a:p>
+            <a:pPr indent="0" marL="0">
+              <a:buNone/>
+            </a:pPr>
+            <a:r>
+              <a:rPr lang="en-US" sz="950" b="1" dirty="0">
+                <a:solidFill>
+                  <a:srgbClr val="0068B7"/>
+                </a:solidFill>
+                <a:latin typeface="Aptos" pitchFamily="34" charset="0"/>
+                <a:ea typeface="Aptos" pitchFamily="34" charset="-122"/>
+                <a:cs typeface="Aptos" pitchFamily="34" charset="-120"/>
+              </a:rPr>
+              <a:t>Module details</a:t>
+            </a:r>
+            <a:endParaRPr lang="en-US" sz="950" dirty="0"/>
+          </a:p>
+        </p:txBody>
+      </p:sp>
+      <p:sp>
+        <p:nvSpPr>
+          <p:cNvPr id="11" name="Text 9"/>
+          <p:cNvSpPr/>
+          <p:nvPr/>
+        </p:nvSpPr>
+        <p:spPr>
+          <a:xfrm>
+            <a:off x="8074152" y="1856232"/>
+            <a:ext cx="2825496" cy="1353312"/>
+          </a:xfrm>
+          <a:prstGeom prst="rect">
+            <a:avLst/>
+          </a:prstGeom>
+          <a:noFill/>
+          <a:ln/>
+        </p:spPr>
+        <p:txBody>
+          <a:bodyPr wrap="square" lIns="0" tIns="0" rIns="0" bIns="0" rtlCol="0" anchor="t">
             <a:normAutofit/>
           </a:bodyPr>
           <a:lstStyle/>
@@ -5694,7 +9047,7 @@
               <a:buNone/>
             </a:pPr>
             <a:r>
-              <a:rPr lang="en-US" sz="1400" dirty="0">
+              <a:rPr lang="en-US" sz="1250" dirty="0">
                 <a:solidFill>
                   <a:srgbClr val="17364A"/>
                 </a:solidFill>
@@ -5702,9 +9055,1254 @@
                 <a:ea typeface="Aptos" pitchFamily="34" charset="-122"/>
                 <a:cs typeface="Aptos" pitchFamily="34" charset="-120"/>
               </a:rPr>
-              <a:t>AI opportunities can quickly exceed an agency's capacity to evaluate, implement, and sustain them. Leaders need a portfolio strategy that helps distinguish high-value public health uses from attractive but low-impact experiments. A portfolio approach organizes AI opportunities across programs, risk levels, readiness, equity impact, technical feasibility, expected benefit, and sustainability needs. This module teaches leaders how to create an AI use case intake and prioritization process. The module emphasizes that prioritization should not be based only on novelty or vendor availability. It should be based on mission alignment, public health value, data readiness, workflow fit, risk, equity, staff capacity, cost, and the ability to monitor and sustain the use case over time.</a:t>
-            </a:r>
-            <a:endParaRPr lang="en-US" sz="1400" dirty="0"/>
+              <a:t>Level: advanced/leadership</a:t>
+            </a:r>
+            <a:endParaRPr lang="en-US" sz="1250" dirty="0"/>
+          </a:p>
+          <a:p>
+            <a:pPr indent="0" marL="0">
+              <a:buNone/>
+            </a:pPr>
+            <a:r>
+              <a:rPr lang="en-US" sz="1250" dirty="0">
+                <a:solidFill>
+                  <a:srgbClr val="17364A"/>
+                </a:solidFill>
+                <a:latin typeface="Aptos" pitchFamily="34" charset="0"/>
+                <a:ea typeface="Aptos" pitchFamily="34" charset="-122"/>
+                <a:cs typeface="Aptos" pitchFamily="34" charset="-120"/>
+              </a:rPr>
+              <a:t>Primary track: Public Health Executive Leadership Track</a:t>
+            </a:r>
+            <a:endParaRPr lang="en-US" sz="1250" dirty="0"/>
+          </a:p>
+          <a:p>
+            <a:pPr indent="0" marL="0">
+              <a:buNone/>
+            </a:pPr>
+            <a:r>
+              <a:rPr lang="en-US" sz="1250" dirty="0">
+                <a:solidFill>
+                  <a:srgbClr val="17364A"/>
+                </a:solidFill>
+                <a:latin typeface="Aptos" pitchFamily="34" charset="0"/>
+                <a:ea typeface="Aptos" pitchFamily="34" charset="-122"/>
+                <a:cs typeface="Aptos" pitchFamily="34" charset="-120"/>
+              </a:rPr>
+              <a:t>Appears in tracks: governance-security</a:t>
+            </a:r>
+            <a:endParaRPr lang="en-US" sz="1250" dirty="0"/>
+          </a:p>
+        </p:txBody>
+      </p:sp>
+      <p:sp>
+        <p:nvSpPr>
+          <p:cNvPr id="12" name="Shape 10"/>
+          <p:cNvSpPr/>
+          <p:nvPr/>
+        </p:nvSpPr>
+        <p:spPr>
+          <a:xfrm>
+            <a:off x="7909560" y="3611880"/>
+            <a:ext cx="3154680" cy="1783080"/>
+          </a:xfrm>
+          <a:prstGeom prst="roundRect">
+            <a:avLst>
+              <a:gd name="adj" fmla="val 6154"/>
+            </a:avLst>
+          </a:prstGeom>
+          <a:solidFill>
+            <a:srgbClr val="EEF8ED"/>
+          </a:solidFill>
+          <a:ln w="12700">
+            <a:solidFill>
+              <a:srgbClr val="B9D7E6"/>
+            </a:solidFill>
+            <a:prstDash val="solid"/>
+          </a:ln>
+        </p:spPr>
+      </p:sp>
+      <p:sp>
+        <p:nvSpPr>
+          <p:cNvPr id="13" name="Text 11"/>
+          <p:cNvSpPr/>
+          <p:nvPr/>
+        </p:nvSpPr>
+        <p:spPr>
+          <a:xfrm>
+            <a:off x="8074152" y="3758184"/>
+            <a:ext cx="2825496" cy="201168"/>
+          </a:xfrm>
+          <a:prstGeom prst="rect">
+            <a:avLst/>
+          </a:prstGeom>
+          <a:noFill/>
+          <a:ln/>
+        </p:spPr>
+        <p:txBody>
+          <a:bodyPr wrap="square" lIns="0" tIns="0" rIns="0" bIns="0" rtlCol="0" anchor="ctr"/>
+          <a:lstStyle/>
+          <a:p>
+            <a:pPr indent="0" marL="0">
+              <a:buNone/>
+            </a:pPr>
+            <a:r>
+              <a:rPr lang="en-US" sz="950" b="1" dirty="0">
+                <a:solidFill>
+                  <a:srgbClr val="0068B7"/>
+                </a:solidFill>
+                <a:latin typeface="Aptos" pitchFamily="34" charset="0"/>
+                <a:ea typeface="Aptos" pitchFamily="34" charset="-122"/>
+                <a:cs typeface="Aptos" pitchFamily="34" charset="-120"/>
+              </a:rPr>
+              <a:t>Learning approach</a:t>
+            </a:r>
+            <a:endParaRPr lang="en-US" sz="950" dirty="0"/>
+          </a:p>
+        </p:txBody>
+      </p:sp>
+      <p:sp>
+        <p:nvSpPr>
+          <p:cNvPr id="14" name="Text 12"/>
+          <p:cNvSpPr/>
+          <p:nvPr/>
+        </p:nvSpPr>
+        <p:spPr>
+          <a:xfrm>
+            <a:off x="8074152" y="4050792"/>
+            <a:ext cx="2825496" cy="1216152"/>
+          </a:xfrm>
+          <a:prstGeom prst="rect">
+            <a:avLst/>
+          </a:prstGeom>
+          <a:noFill/>
+          <a:ln/>
+        </p:spPr>
+        <p:txBody>
+          <a:bodyPr wrap="square" lIns="0" tIns="0" rIns="0" bIns="0" rtlCol="0" anchor="t">
+            <a:normAutofit/>
+          </a:bodyPr>
+          <a:lstStyle/>
+          <a:p>
+            <a:pPr indent="0" marL="0">
+              <a:buNone/>
+            </a:pPr>
+            <a:r>
+              <a:rPr lang="en-US" sz="1250" dirty="0">
+                <a:solidFill>
+                  <a:srgbClr val="17364A"/>
+                </a:solidFill>
+                <a:latin typeface="Aptos" pitchFamily="34" charset="0"/>
+                <a:ea typeface="Aptos" pitchFamily="34" charset="-122"/>
+                <a:cs typeface="Aptos" pitchFamily="34" charset="-120"/>
+              </a:rPr>
+              <a:t>Review the core ideas, complete the practical exercise, check your understanding, and use the related plays and tools to apply the lesson.</a:t>
+            </a:r>
+            <a:endParaRPr lang="en-US" sz="1250" dirty="0"/>
+          </a:p>
+        </p:txBody>
+      </p:sp>
+    </p:spTree>
+  </p:cSld>
+  <p:clrMapOvr>
+    <a:masterClrMapping/>
+  </p:clrMapOvr>
+</p:sld>
+</file>
+
+<file path=ppt/slides/slide20.xml><?xml version="1.0" encoding="utf-8"?>
+<p:sld xmlns:a="http://schemas.openxmlformats.org/drawingml/2006/main" xmlns:r="http://schemas.openxmlformats.org/officeDocument/2006/relationships" xmlns:p="http://schemas.openxmlformats.org/presentationml/2006/main">
+  <p:cSld name="Slide 20">
+    <p:bg>
+      <p:bgPr>
+        <a:solidFill>
+          <a:srgbClr val="F7FBFD"/>
+        </a:solidFill>
+      </p:bgPr>
+    </p:bg>
+    <p:spTree>
+      <p:nvGrpSpPr>
+        <p:cNvPr id="1" name=""/>
+        <p:cNvGrpSpPr/>
+        <p:nvPr/>
+      </p:nvGrpSpPr>
+      <p:grpSpPr>
+        <a:xfrm>
+          <a:off x="0" y="0"/>
+          <a:ext cx="0" cy="0"/>
+          <a:chOff x="0" y="0"/>
+          <a:chExt cx="0" cy="0"/>
+        </a:xfrm>
+      </p:grpSpPr>
+      <p:sp>
+        <p:nvSpPr>
+          <p:cNvPr id="2" name="Shape 0"/>
+          <p:cNvSpPr/>
+          <p:nvPr/>
+        </p:nvSpPr>
+        <p:spPr>
+          <a:xfrm>
+            <a:off x="0" y="0"/>
+            <a:ext cx="12191695" cy="164592"/>
+          </a:xfrm>
+          <a:prstGeom prst="rect">
+            <a:avLst/>
+          </a:prstGeom>
+          <a:solidFill>
+            <a:srgbClr val="0068B7"/>
+          </a:solidFill>
+          <a:ln w="12700">
+            <a:solidFill>
+              <a:srgbClr val="0068B7"/>
+            </a:solidFill>
+            <a:prstDash val="solid"/>
+          </a:ln>
+        </p:spPr>
+      </p:sp>
+      <p:sp>
+        <p:nvSpPr>
+          <p:cNvPr id="3" name="Shape 1"/>
+          <p:cNvSpPr/>
+          <p:nvPr/>
+        </p:nvSpPr>
+        <p:spPr>
+          <a:xfrm>
+            <a:off x="0" y="164592"/>
+            <a:ext cx="146304" cy="6693408"/>
+          </a:xfrm>
+          <a:prstGeom prst="rect">
+            <a:avLst/>
+          </a:prstGeom>
+          <a:solidFill>
+            <a:srgbClr val="2F8A28"/>
+          </a:solidFill>
+          <a:ln w="12700">
+            <a:solidFill>
+              <a:srgbClr val="2F8A28"/>
+            </a:solidFill>
+            <a:prstDash val="solid"/>
+          </a:ln>
+        </p:spPr>
+      </p:sp>
+      <p:sp>
+        <p:nvSpPr>
+          <p:cNvPr id="4" name="Text 2"/>
+          <p:cNvSpPr/>
+          <p:nvPr/>
+        </p:nvSpPr>
+        <p:spPr>
+          <a:xfrm>
+            <a:off x="502920" y="292608"/>
+            <a:ext cx="10149840" cy="256032"/>
+          </a:xfrm>
+          <a:prstGeom prst="rect">
+            <a:avLst/>
+          </a:prstGeom>
+          <a:noFill/>
+          <a:ln/>
+        </p:spPr>
+        <p:txBody>
+          <a:bodyPr wrap="square" lIns="0" tIns="0" rIns="0" bIns="0" rtlCol="0" anchor="ctr"/>
+          <a:lstStyle/>
+          <a:p>
+            <a:pPr indent="0" marL="0">
+              <a:buNone/>
+            </a:pPr>
+            <a:r>
+              <a:rPr lang="en-US" sz="900" b="1" dirty="0">
+                <a:solidFill>
+                  <a:srgbClr val="5F7181"/>
+                </a:solidFill>
+                <a:latin typeface="Aptos" pitchFamily="34" charset="0"/>
+                <a:ea typeface="Aptos" pitchFamily="34" charset="-122"/>
+                <a:cs typeface="Aptos" pitchFamily="34" charset="-120"/>
+              </a:rPr>
+              <a:t>AI Portfolio Strategy and Use Case Prioritization</a:t>
+            </a:r>
+            <a:endParaRPr lang="en-US" sz="900" dirty="0"/>
+          </a:p>
+        </p:txBody>
+      </p:sp>
+      <p:sp>
+        <p:nvSpPr>
+          <p:cNvPr id="5" name="Text 3"/>
+          <p:cNvSpPr/>
+          <p:nvPr/>
+        </p:nvSpPr>
+        <p:spPr>
+          <a:xfrm>
+            <a:off x="502920" y="6537960"/>
+            <a:ext cx="7772400" cy="201168"/>
+          </a:xfrm>
+          <a:prstGeom prst="rect">
+            <a:avLst/>
+          </a:prstGeom>
+          <a:noFill/>
+          <a:ln/>
+        </p:spPr>
+        <p:txBody>
+          <a:bodyPr wrap="square" lIns="0" tIns="0" rIns="0" bIns="0" rtlCol="0" anchor="ctr"/>
+          <a:lstStyle/>
+          <a:p>
+            <a:pPr indent="0" marL="0">
+              <a:buNone/>
+            </a:pPr>
+            <a:r>
+              <a:rPr lang="en-US" sz="800" dirty="0">
+                <a:solidFill>
+                  <a:srgbClr val="5F7181"/>
+                </a:solidFill>
+                <a:latin typeface="Aptos" pitchFamily="34" charset="0"/>
+                <a:ea typeface="Aptos" pitchFamily="34" charset="-122"/>
+                <a:cs typeface="Aptos" pitchFamily="34" charset="-120"/>
+              </a:rPr>
+              <a:t>AI Playbook and Toolkit for Public Health Departments</a:t>
+            </a:r>
+            <a:endParaRPr lang="en-US" sz="800" dirty="0"/>
+          </a:p>
+        </p:txBody>
+      </p:sp>
+      <p:sp>
+        <p:nvSpPr>
+          <p:cNvPr id="6" name="Text 4"/>
+          <p:cNvSpPr/>
+          <p:nvPr/>
+        </p:nvSpPr>
+        <p:spPr>
+          <a:xfrm>
+            <a:off x="9966960" y="6537960"/>
+            <a:ext cx="1645920" cy="201168"/>
+          </a:xfrm>
+          <a:prstGeom prst="rect">
+            <a:avLst/>
+          </a:prstGeom>
+          <a:noFill/>
+          <a:ln/>
+        </p:spPr>
+        <p:txBody>
+          <a:bodyPr wrap="square" lIns="0" tIns="0" rIns="0" bIns="0" rtlCol="0" anchor="ctr"/>
+          <a:lstStyle/>
+          <a:p>
+            <a:pPr algn="r" indent="0" marL="0">
+              <a:buNone/>
+            </a:pPr>
+            <a:r>
+              <a:rPr lang="en-US" sz="800" dirty="0">
+                <a:solidFill>
+                  <a:srgbClr val="5F7181"/>
+                </a:solidFill>
+                <a:latin typeface="Aptos" pitchFamily="34" charset="0"/>
+                <a:ea typeface="Aptos" pitchFamily="34" charset="-122"/>
+                <a:cs typeface="Aptos" pitchFamily="34" charset="-120"/>
+              </a:rPr>
+              <a:t>© Paula Soper</a:t>
+            </a:r>
+            <a:endParaRPr lang="en-US" sz="800" dirty="0"/>
+          </a:p>
+        </p:txBody>
+      </p:sp>
+      <p:sp>
+        <p:nvSpPr>
+          <p:cNvPr id="7" name="Shape 5"/>
+          <p:cNvSpPr/>
+          <p:nvPr/>
+        </p:nvSpPr>
+        <p:spPr>
+          <a:xfrm>
+            <a:off x="640080" y="658368"/>
+            <a:ext cx="420624" cy="420624"/>
+          </a:xfrm>
+          <a:prstGeom prst="ellipse">
+            <a:avLst/>
+          </a:prstGeom>
+          <a:solidFill>
+            <a:srgbClr val="0068B7"/>
+          </a:solidFill>
+          <a:ln w="12700">
+            <a:solidFill>
+              <a:srgbClr val="0068B7"/>
+            </a:solidFill>
+            <a:prstDash val="solid"/>
+          </a:ln>
+        </p:spPr>
+      </p:sp>
+      <p:sp>
+        <p:nvSpPr>
+          <p:cNvPr id="8" name="Text 6"/>
+          <p:cNvSpPr/>
+          <p:nvPr/>
+        </p:nvSpPr>
+        <p:spPr>
+          <a:xfrm>
+            <a:off x="640080" y="731520"/>
+            <a:ext cx="420624" cy="164592"/>
+          </a:xfrm>
+          <a:prstGeom prst="rect">
+            <a:avLst/>
+          </a:prstGeom>
+          <a:noFill/>
+          <a:ln/>
+        </p:spPr>
+        <p:txBody>
+          <a:bodyPr wrap="square" lIns="0" tIns="0" rIns="0" bIns="0" rtlCol="0" anchor="ctr"/>
+          <a:lstStyle/>
+          <a:p>
+            <a:pPr algn="ctr" indent="0" marL="0">
+              <a:buNone/>
+            </a:pPr>
+            <a:r>
+              <a:rPr lang="en-US" sz="1100" b="1" dirty="0">
+                <a:solidFill>
+                  <a:srgbClr val="FFFFFF"/>
+                </a:solidFill>
+                <a:latin typeface="Aptos" pitchFamily="34" charset="0"/>
+                <a:ea typeface="Aptos" pitchFamily="34" charset="-122"/>
+                <a:cs typeface="Aptos" pitchFamily="34" charset="-120"/>
+              </a:rPr>
+              <a:t>15</a:t>
+            </a:r>
+            <a:endParaRPr lang="en-US" sz="1100" dirty="0"/>
+          </a:p>
+        </p:txBody>
+      </p:sp>
+      <p:sp>
+        <p:nvSpPr>
+          <p:cNvPr id="9" name="Text 7"/>
+          <p:cNvSpPr/>
+          <p:nvPr/>
+        </p:nvSpPr>
+        <p:spPr>
+          <a:xfrm>
+            <a:off x="640080" y="621792"/>
+            <a:ext cx="10881360" cy="566928"/>
+          </a:xfrm>
+          <a:prstGeom prst="rect">
+            <a:avLst/>
+          </a:prstGeom>
+          <a:noFill/>
+          <a:ln/>
+        </p:spPr>
+        <p:txBody>
+          <a:bodyPr wrap="square" lIns="0" tIns="0" rIns="0" bIns="0" rtlCol="0" anchor="ctr">
+            <a:normAutofit/>
+          </a:bodyPr>
+          <a:lstStyle/>
+          <a:p>
+            <a:pPr indent="0" marL="0">
+              <a:buNone/>
+            </a:pPr>
+            <a:r>
+              <a:rPr lang="en-US" sz="2700" b="1" dirty="0">
+                <a:solidFill>
+                  <a:srgbClr val="003A63"/>
+                </a:solidFill>
+                <a:latin typeface="Aptos Display" pitchFamily="34" charset="0"/>
+                <a:ea typeface="Aptos Display" pitchFamily="34" charset="-122"/>
+                <a:cs typeface="Aptos Display" pitchFamily="34" charset="-120"/>
+              </a:rPr>
+              <a:t>References and Resources</a:t>
+            </a:r>
+            <a:endParaRPr lang="en-US" sz="2700" dirty="0"/>
+          </a:p>
+        </p:txBody>
+      </p:sp>
+      <p:sp>
+        <p:nvSpPr>
+          <p:cNvPr id="10" name="Text 8"/>
+          <p:cNvSpPr/>
+          <p:nvPr/>
+        </p:nvSpPr>
+        <p:spPr>
+          <a:xfrm>
+            <a:off x="868680" y="1417320"/>
+            <a:ext cx="6675120" cy="4434840"/>
+          </a:xfrm>
+          <a:prstGeom prst="rect">
+            <a:avLst/>
+          </a:prstGeom>
+          <a:noFill/>
+          <a:ln/>
+        </p:spPr>
+        <p:txBody>
+          <a:bodyPr wrap="square" lIns="635" tIns="635" rIns="635" bIns="635" rtlCol="0" anchor="t">
+            <a:normAutofit/>
+          </a:bodyPr>
+          <a:lstStyle/>
+          <a:p>
+            <a:r>
+              <a:rPr lang="en-US" sz="1700" dirty="0">
+                <a:solidFill>
+                  <a:srgbClr val="17364A"/>
+                </a:solidFill>
+                <a:latin typeface="Aptos" pitchFamily="34" charset="0"/>
+                <a:ea typeface="Aptos" pitchFamily="34" charset="-122"/>
+                <a:cs typeface="Aptos" pitchFamily="34" charset="-120"/>
+              </a:rPr>
+              <a:t>NIST Artificial Intelligence Risk Management Framework (AI RMF 1.0): https://www.nist.gov/itl/ai-risk-management-framework</a:t>
+            </a:r>
+            <a:endParaRPr lang="en-US" sz="1700" dirty="0"/>
+          </a:p>
+          <a:p>
+            <a:r>
+              <a:rPr lang="en-US" sz="1700" dirty="0">
+                <a:solidFill>
+                  <a:srgbClr val="17364A"/>
+                </a:solidFill>
+                <a:latin typeface="Aptos" pitchFamily="34" charset="0"/>
+                <a:ea typeface="Aptos" pitchFamily="34" charset="-122"/>
+                <a:cs typeface="Aptos" pitchFamily="34" charset="-120"/>
+              </a:rPr>
+              <a:t>NIST Generative AI Profile:.</a:t>
+            </a:r>
+            <a:endParaRPr lang="en-US" sz="1700" dirty="0"/>
+          </a:p>
+          <a:p>
+            <a:r>
+              <a:rPr lang="en-US" sz="1700" dirty="0">
+                <a:solidFill>
+                  <a:srgbClr val="17364A"/>
+                </a:solidFill>
+                <a:latin typeface="Aptos" pitchFamily="34" charset="0"/>
+                <a:ea typeface="Aptos" pitchFamily="34" charset="-122"/>
+                <a:cs typeface="Aptos" pitchFamily="34" charset="-120"/>
+              </a:rPr>
+              <a:t>NIST Privacy Framework</a:t>
+            </a:r>
+            <a:endParaRPr lang="en-US" sz="1700" dirty="0"/>
+          </a:p>
+          <a:p>
+            <a:r>
+              <a:rPr lang="en-US" sz="1700" dirty="0">
+                <a:solidFill>
+                  <a:srgbClr val="17364A"/>
+                </a:solidFill>
+                <a:latin typeface="Aptos" pitchFamily="34" charset="0"/>
+                <a:ea typeface="Aptos" pitchFamily="34" charset="-122"/>
+                <a:cs typeface="Aptos" pitchFamily="34" charset="-120"/>
+              </a:rPr>
+              <a:t>CDC Public Health Data Strategy and Data Modernization resources:.</a:t>
+            </a:r>
+            <a:endParaRPr lang="en-US" sz="1700" dirty="0"/>
+          </a:p>
+        </p:txBody>
+      </p:sp>
+      <p:sp>
+        <p:nvSpPr>
+          <p:cNvPr id="11" name="Shape 9"/>
+          <p:cNvSpPr/>
+          <p:nvPr/>
+        </p:nvSpPr>
+        <p:spPr>
+          <a:xfrm>
+            <a:off x="7909560" y="1417320"/>
+            <a:ext cx="3154680" cy="1828800"/>
+          </a:xfrm>
+          <a:prstGeom prst="roundRect">
+            <a:avLst>
+              <a:gd name="adj" fmla="val 6000"/>
+            </a:avLst>
+          </a:prstGeom>
+          <a:solidFill>
+            <a:srgbClr val="EEF8ED"/>
+          </a:solidFill>
+          <a:ln w="12700">
+            <a:solidFill>
+              <a:srgbClr val="B9D7E6"/>
+            </a:solidFill>
+            <a:prstDash val="solid"/>
+          </a:ln>
+        </p:spPr>
+      </p:sp>
+      <p:sp>
+        <p:nvSpPr>
+          <p:cNvPr id="12" name="Text 10"/>
+          <p:cNvSpPr/>
+          <p:nvPr/>
+        </p:nvSpPr>
+        <p:spPr>
+          <a:xfrm>
+            <a:off x="8074152" y="1563624"/>
+            <a:ext cx="2825496" cy="201168"/>
+          </a:xfrm>
+          <a:prstGeom prst="rect">
+            <a:avLst/>
+          </a:prstGeom>
+          <a:noFill/>
+          <a:ln/>
+        </p:spPr>
+        <p:txBody>
+          <a:bodyPr wrap="square" lIns="0" tIns="0" rIns="0" bIns="0" rtlCol="0" anchor="ctr"/>
+          <a:lstStyle/>
+          <a:p>
+            <a:pPr indent="0" marL="0">
+              <a:buNone/>
+            </a:pPr>
+            <a:r>
+              <a:rPr lang="en-US" sz="950" b="1" dirty="0">
+                <a:solidFill>
+                  <a:srgbClr val="0068B7"/>
+                </a:solidFill>
+                <a:latin typeface="Aptos" pitchFamily="34" charset="0"/>
+                <a:ea typeface="Aptos" pitchFamily="34" charset="-122"/>
+                <a:cs typeface="Aptos" pitchFamily="34" charset="-120"/>
+              </a:rPr>
+              <a:t>Key idea</a:t>
+            </a:r>
+            <a:endParaRPr lang="en-US" sz="950" dirty="0"/>
+          </a:p>
+        </p:txBody>
+      </p:sp>
+      <p:sp>
+        <p:nvSpPr>
+          <p:cNvPr id="13" name="Text 11"/>
+          <p:cNvSpPr/>
+          <p:nvPr/>
+        </p:nvSpPr>
+        <p:spPr>
+          <a:xfrm>
+            <a:off x="8074152" y="1856232"/>
+            <a:ext cx="2825496" cy="1261872"/>
+          </a:xfrm>
+          <a:prstGeom prst="rect">
+            <a:avLst/>
+          </a:prstGeom>
+          <a:noFill/>
+          <a:ln/>
+        </p:spPr>
+        <p:txBody>
+          <a:bodyPr wrap="square" lIns="0" tIns="0" rIns="0" bIns="0" rtlCol="0" anchor="t">
+            <a:normAutofit/>
+          </a:bodyPr>
+          <a:lstStyle/>
+          <a:p>
+            <a:pPr indent="0" marL="0">
+              <a:buNone/>
+            </a:pPr>
+            <a:r>
+              <a:rPr lang="en-US" sz="1250" dirty="0">
+                <a:solidFill>
+                  <a:srgbClr val="17364A"/>
+                </a:solidFill>
+                <a:latin typeface="Aptos" pitchFamily="34" charset="0"/>
+                <a:ea typeface="Aptos" pitchFamily="34" charset="-122"/>
+                <a:cs typeface="Aptos" pitchFamily="34" charset="-120"/>
+              </a:rPr>
+              <a:t>NIST Artificial Intelligence Risk Management Framework (AI RMF 1.0): https://www.nist.gov/itl/ai-risk-management-framework</a:t>
+            </a:r>
+            <a:endParaRPr lang="en-US" sz="1250" dirty="0"/>
+          </a:p>
+        </p:txBody>
+      </p:sp>
+      <p:sp>
+        <p:nvSpPr>
+          <p:cNvPr id="14" name="Shape 12"/>
+          <p:cNvSpPr/>
+          <p:nvPr/>
+        </p:nvSpPr>
+        <p:spPr>
+          <a:xfrm>
+            <a:off x="7909560" y="3520440"/>
+            <a:ext cx="3154680" cy="1737360"/>
+          </a:xfrm>
+          <a:prstGeom prst="roundRect">
+            <a:avLst>
+              <a:gd name="adj" fmla="val 6316"/>
+            </a:avLst>
+          </a:prstGeom>
+          <a:solidFill>
+            <a:srgbClr val="EAF6F8"/>
+          </a:solidFill>
+          <a:ln w="12700">
+            <a:solidFill>
+              <a:srgbClr val="B9D7E6"/>
+            </a:solidFill>
+            <a:prstDash val="solid"/>
+          </a:ln>
+        </p:spPr>
+      </p:sp>
+      <p:sp>
+        <p:nvSpPr>
+          <p:cNvPr id="15" name="Text 13"/>
+          <p:cNvSpPr/>
+          <p:nvPr/>
+        </p:nvSpPr>
+        <p:spPr>
+          <a:xfrm>
+            <a:off x="8074152" y="3666744"/>
+            <a:ext cx="2825496" cy="201168"/>
+          </a:xfrm>
+          <a:prstGeom prst="rect">
+            <a:avLst/>
+          </a:prstGeom>
+          <a:noFill/>
+          <a:ln/>
+        </p:spPr>
+        <p:txBody>
+          <a:bodyPr wrap="square" lIns="0" tIns="0" rIns="0" bIns="0" rtlCol="0" anchor="ctr"/>
+          <a:lstStyle/>
+          <a:p>
+            <a:pPr indent="0" marL="0">
+              <a:buNone/>
+            </a:pPr>
+            <a:r>
+              <a:rPr lang="en-US" sz="950" b="1" dirty="0">
+                <a:solidFill>
+                  <a:srgbClr val="0068B7"/>
+                </a:solidFill>
+                <a:latin typeface="Aptos" pitchFamily="34" charset="0"/>
+                <a:ea typeface="Aptos" pitchFamily="34" charset="-122"/>
+                <a:cs typeface="Aptos" pitchFamily="34" charset="-120"/>
+              </a:rPr>
+              <a:t>Use this for</a:t>
+            </a:r>
+            <a:endParaRPr lang="en-US" sz="950" dirty="0"/>
+          </a:p>
+        </p:txBody>
+      </p:sp>
+      <p:sp>
+        <p:nvSpPr>
+          <p:cNvPr id="16" name="Text 14"/>
+          <p:cNvSpPr/>
+          <p:nvPr/>
+        </p:nvSpPr>
+        <p:spPr>
+          <a:xfrm>
+            <a:off x="8074152" y="3959352"/>
+            <a:ext cx="2825496" cy="1170432"/>
+          </a:xfrm>
+          <a:prstGeom prst="rect">
+            <a:avLst/>
+          </a:prstGeom>
+          <a:noFill/>
+          <a:ln/>
+        </p:spPr>
+        <p:txBody>
+          <a:bodyPr wrap="square" lIns="0" tIns="0" rIns="0" bIns="0" rtlCol="0" anchor="t">
+            <a:normAutofit/>
+          </a:bodyPr>
+          <a:lstStyle/>
+          <a:p>
+            <a:pPr indent="0" marL="0">
+              <a:buNone/>
+            </a:pPr>
+            <a:r>
+              <a:rPr lang="en-US" sz="1250" dirty="0">
+                <a:solidFill>
+                  <a:srgbClr val="17364A"/>
+                </a:solidFill>
+                <a:latin typeface="Aptos" pitchFamily="34" charset="0"/>
+                <a:ea typeface="Aptos" pitchFamily="34" charset="-122"/>
+                <a:cs typeface="Aptos" pitchFamily="34" charset="-120"/>
+              </a:rPr>
+              <a:t>Connect the concept to public health decisions, safeguards, documentation, or implementation work.</a:t>
+            </a:r>
+            <a:endParaRPr lang="en-US" sz="1250" dirty="0"/>
+          </a:p>
+        </p:txBody>
+      </p:sp>
+    </p:spTree>
+  </p:cSld>
+  <p:clrMapOvr>
+    <a:masterClrMapping/>
+  </p:clrMapOvr>
+</p:sld>
+</file>
+
+<file path=ppt/slides/slide21.xml><?xml version="1.0" encoding="utf-8"?>
+<p:sld xmlns:a="http://schemas.openxmlformats.org/drawingml/2006/main" xmlns:r="http://schemas.openxmlformats.org/officeDocument/2006/relationships" xmlns:p="http://schemas.openxmlformats.org/presentationml/2006/main">
+  <p:cSld name="Slide 21">
+    <p:bg>
+      <p:bgPr>
+        <a:solidFill>
+          <a:srgbClr val="F7FBFD"/>
+        </a:solidFill>
+      </p:bgPr>
+    </p:bg>
+    <p:spTree>
+      <p:nvGrpSpPr>
+        <p:cNvPr id="1" name=""/>
+        <p:cNvGrpSpPr/>
+        <p:nvPr/>
+      </p:nvGrpSpPr>
+      <p:grpSpPr>
+        <a:xfrm>
+          <a:off x="0" y="0"/>
+          <a:ext cx="0" cy="0"/>
+          <a:chOff x="0" y="0"/>
+          <a:chExt cx="0" cy="0"/>
+        </a:xfrm>
+      </p:grpSpPr>
+      <p:sp>
+        <p:nvSpPr>
+          <p:cNvPr id="2" name="Shape 0"/>
+          <p:cNvSpPr/>
+          <p:nvPr/>
+        </p:nvSpPr>
+        <p:spPr>
+          <a:xfrm>
+            <a:off x="0" y="0"/>
+            <a:ext cx="12191695" cy="164592"/>
+          </a:xfrm>
+          <a:prstGeom prst="rect">
+            <a:avLst/>
+          </a:prstGeom>
+          <a:solidFill>
+            <a:srgbClr val="0068B7"/>
+          </a:solidFill>
+          <a:ln w="12700">
+            <a:solidFill>
+              <a:srgbClr val="0068B7"/>
+            </a:solidFill>
+            <a:prstDash val="solid"/>
+          </a:ln>
+        </p:spPr>
+      </p:sp>
+      <p:sp>
+        <p:nvSpPr>
+          <p:cNvPr id="3" name="Shape 1"/>
+          <p:cNvSpPr/>
+          <p:nvPr/>
+        </p:nvSpPr>
+        <p:spPr>
+          <a:xfrm>
+            <a:off x="0" y="164592"/>
+            <a:ext cx="146304" cy="6693408"/>
+          </a:xfrm>
+          <a:prstGeom prst="rect">
+            <a:avLst/>
+          </a:prstGeom>
+          <a:solidFill>
+            <a:srgbClr val="2F8A28"/>
+          </a:solidFill>
+          <a:ln w="12700">
+            <a:solidFill>
+              <a:srgbClr val="2F8A28"/>
+            </a:solidFill>
+            <a:prstDash val="solid"/>
+          </a:ln>
+        </p:spPr>
+      </p:sp>
+      <p:sp>
+        <p:nvSpPr>
+          <p:cNvPr id="4" name="Text 2"/>
+          <p:cNvSpPr/>
+          <p:nvPr/>
+        </p:nvSpPr>
+        <p:spPr>
+          <a:xfrm>
+            <a:off x="502920" y="292608"/>
+            <a:ext cx="10149840" cy="256032"/>
+          </a:xfrm>
+          <a:prstGeom prst="rect">
+            <a:avLst/>
+          </a:prstGeom>
+          <a:noFill/>
+          <a:ln/>
+        </p:spPr>
+        <p:txBody>
+          <a:bodyPr wrap="square" lIns="0" tIns="0" rIns="0" bIns="0" rtlCol="0" anchor="ctr"/>
+          <a:lstStyle/>
+          <a:p>
+            <a:pPr indent="0" marL="0">
+              <a:buNone/>
+            </a:pPr>
+            <a:r>
+              <a:rPr lang="en-US" sz="900" b="1" dirty="0">
+                <a:solidFill>
+                  <a:srgbClr val="5F7181"/>
+                </a:solidFill>
+                <a:latin typeface="Aptos" pitchFamily="34" charset="0"/>
+                <a:ea typeface="Aptos" pitchFamily="34" charset="-122"/>
+                <a:cs typeface="Aptos" pitchFamily="34" charset="-120"/>
+              </a:rPr>
+              <a:t>AI Portfolio Strategy and Use Case Prioritization</a:t>
+            </a:r>
+            <a:endParaRPr lang="en-US" sz="900" dirty="0"/>
+          </a:p>
+        </p:txBody>
+      </p:sp>
+      <p:sp>
+        <p:nvSpPr>
+          <p:cNvPr id="5" name="Text 3"/>
+          <p:cNvSpPr/>
+          <p:nvPr/>
+        </p:nvSpPr>
+        <p:spPr>
+          <a:xfrm>
+            <a:off x="502920" y="6537960"/>
+            <a:ext cx="7772400" cy="201168"/>
+          </a:xfrm>
+          <a:prstGeom prst="rect">
+            <a:avLst/>
+          </a:prstGeom>
+          <a:noFill/>
+          <a:ln/>
+        </p:spPr>
+        <p:txBody>
+          <a:bodyPr wrap="square" lIns="0" tIns="0" rIns="0" bIns="0" rtlCol="0" anchor="ctr"/>
+          <a:lstStyle/>
+          <a:p>
+            <a:pPr indent="0" marL="0">
+              <a:buNone/>
+            </a:pPr>
+            <a:r>
+              <a:rPr lang="en-US" sz="800" dirty="0">
+                <a:solidFill>
+                  <a:srgbClr val="5F7181"/>
+                </a:solidFill>
+                <a:latin typeface="Aptos" pitchFamily="34" charset="0"/>
+                <a:ea typeface="Aptos" pitchFamily="34" charset="-122"/>
+                <a:cs typeface="Aptos" pitchFamily="34" charset="-120"/>
+              </a:rPr>
+              <a:t>AI Playbook and Toolkit for Public Health Departments</a:t>
+            </a:r>
+            <a:endParaRPr lang="en-US" sz="800" dirty="0"/>
+          </a:p>
+        </p:txBody>
+      </p:sp>
+      <p:sp>
+        <p:nvSpPr>
+          <p:cNvPr id="6" name="Text 4"/>
+          <p:cNvSpPr/>
+          <p:nvPr/>
+        </p:nvSpPr>
+        <p:spPr>
+          <a:xfrm>
+            <a:off x="9966960" y="6537960"/>
+            <a:ext cx="1645920" cy="201168"/>
+          </a:xfrm>
+          <a:prstGeom prst="rect">
+            <a:avLst/>
+          </a:prstGeom>
+          <a:noFill/>
+          <a:ln/>
+        </p:spPr>
+        <p:txBody>
+          <a:bodyPr wrap="square" lIns="0" tIns="0" rIns="0" bIns="0" rtlCol="0" anchor="ctr"/>
+          <a:lstStyle/>
+          <a:p>
+            <a:pPr algn="r" indent="0" marL="0">
+              <a:buNone/>
+            </a:pPr>
+            <a:r>
+              <a:rPr lang="en-US" sz="800" dirty="0">
+                <a:solidFill>
+                  <a:srgbClr val="5F7181"/>
+                </a:solidFill>
+                <a:latin typeface="Aptos" pitchFamily="34" charset="0"/>
+                <a:ea typeface="Aptos" pitchFamily="34" charset="-122"/>
+                <a:cs typeface="Aptos" pitchFamily="34" charset="-120"/>
+              </a:rPr>
+              <a:t>© Paula Soper</a:t>
+            </a:r>
+            <a:endParaRPr lang="en-US" sz="800" dirty="0"/>
+          </a:p>
+        </p:txBody>
+      </p:sp>
+      <p:sp>
+        <p:nvSpPr>
+          <p:cNvPr id="7" name="Text 5"/>
+          <p:cNvSpPr/>
+          <p:nvPr/>
+        </p:nvSpPr>
+        <p:spPr>
+          <a:xfrm>
+            <a:off x="640080" y="658368"/>
+            <a:ext cx="10881360" cy="566928"/>
+          </a:xfrm>
+          <a:prstGeom prst="rect">
+            <a:avLst/>
+          </a:prstGeom>
+          <a:noFill/>
+          <a:ln/>
+        </p:spPr>
+        <p:txBody>
+          <a:bodyPr wrap="square" lIns="0" tIns="0" rIns="0" bIns="0" rtlCol="0" anchor="ctr">
+            <a:normAutofit/>
+          </a:bodyPr>
+          <a:lstStyle/>
+          <a:p>
+            <a:pPr indent="0" marL="0">
+              <a:buNone/>
+            </a:pPr>
+            <a:r>
+              <a:rPr lang="en-US" sz="2700" b="1" dirty="0">
+                <a:solidFill>
+                  <a:srgbClr val="003A63"/>
+                </a:solidFill>
+                <a:latin typeface="Aptos Display" pitchFamily="34" charset="0"/>
+                <a:ea typeface="Aptos Display" pitchFamily="34" charset="-122"/>
+                <a:cs typeface="Aptos Display" pitchFamily="34" charset="-120"/>
+              </a:rPr>
+              <a:t>References and Resources Continued</a:t>
+            </a:r>
+            <a:endParaRPr lang="en-US" sz="2700" dirty="0"/>
+          </a:p>
+        </p:txBody>
+      </p:sp>
+      <p:sp>
+        <p:nvSpPr>
+          <p:cNvPr id="8" name="Text 6"/>
+          <p:cNvSpPr/>
+          <p:nvPr/>
+        </p:nvSpPr>
+        <p:spPr>
+          <a:xfrm>
+            <a:off x="868680" y="1417320"/>
+            <a:ext cx="6675120" cy="4434840"/>
+          </a:xfrm>
+          <a:prstGeom prst="rect">
+            <a:avLst/>
+          </a:prstGeom>
+          <a:noFill/>
+          <a:ln/>
+        </p:spPr>
+        <p:txBody>
+          <a:bodyPr wrap="square" lIns="635" tIns="635" rIns="635" bIns="635" rtlCol="0" anchor="t">
+            <a:normAutofit/>
+          </a:bodyPr>
+          <a:lstStyle/>
+          <a:p>
+            <a:r>
+              <a:rPr lang="en-US" sz="1700" dirty="0">
+                <a:solidFill>
+                  <a:srgbClr val="17364A"/>
+                </a:solidFill>
+                <a:latin typeface="Aptos" pitchFamily="34" charset="0"/>
+                <a:ea typeface="Aptos" pitchFamily="34" charset="-122"/>
+                <a:cs typeface="Aptos" pitchFamily="34" charset="-120"/>
+              </a:rPr>
+              <a:t>OMB Memorandum M-24-10 on federal AI governance, risk management, and innovation, where relevant to public-sector governance.</a:t>
+            </a:r>
+            <a:endParaRPr lang="en-US" sz="1700" dirty="0"/>
+          </a:p>
+          <a:p>
+            <a:r>
+              <a:rPr lang="en-US" sz="1700" dirty="0">
+                <a:solidFill>
+                  <a:srgbClr val="17364A"/>
+                </a:solidFill>
+                <a:latin typeface="Aptos" pitchFamily="34" charset="0"/>
+                <a:ea typeface="Aptos" pitchFamily="34" charset="-122"/>
+                <a:cs typeface="Aptos" pitchFamily="34" charset="-120"/>
+              </a:rPr>
+              <a:t>Agency strategic plans, procurement policies, privacy policies, cybersecurity policies, records policies, and equity plans</a:t>
+            </a:r>
+            <a:endParaRPr lang="en-US" sz="1700" dirty="0"/>
+          </a:p>
+        </p:txBody>
+      </p:sp>
+      <p:sp>
+        <p:nvSpPr>
+          <p:cNvPr id="9" name="Shape 7"/>
+          <p:cNvSpPr/>
+          <p:nvPr/>
+        </p:nvSpPr>
+        <p:spPr>
+          <a:xfrm>
+            <a:off x="7909560" y="1417320"/>
+            <a:ext cx="3154680" cy="1828800"/>
+          </a:xfrm>
+          <a:prstGeom prst="roundRect">
+            <a:avLst>
+              <a:gd name="adj" fmla="val 6000"/>
+            </a:avLst>
+          </a:prstGeom>
+          <a:solidFill>
+            <a:srgbClr val="EEF8ED"/>
+          </a:solidFill>
+          <a:ln w="12700">
+            <a:solidFill>
+              <a:srgbClr val="B9D7E6"/>
+            </a:solidFill>
+            <a:prstDash val="solid"/>
+          </a:ln>
+        </p:spPr>
+      </p:sp>
+      <p:sp>
+        <p:nvSpPr>
+          <p:cNvPr id="10" name="Text 8"/>
+          <p:cNvSpPr/>
+          <p:nvPr/>
+        </p:nvSpPr>
+        <p:spPr>
+          <a:xfrm>
+            <a:off x="8074152" y="1563624"/>
+            <a:ext cx="2825496" cy="201168"/>
+          </a:xfrm>
+          <a:prstGeom prst="rect">
+            <a:avLst/>
+          </a:prstGeom>
+          <a:noFill/>
+          <a:ln/>
+        </p:spPr>
+        <p:txBody>
+          <a:bodyPr wrap="square" lIns="0" tIns="0" rIns="0" bIns="0" rtlCol="0" anchor="ctr"/>
+          <a:lstStyle/>
+          <a:p>
+            <a:pPr indent="0" marL="0">
+              <a:buNone/>
+            </a:pPr>
+            <a:r>
+              <a:rPr lang="en-US" sz="950" b="1" dirty="0">
+                <a:solidFill>
+                  <a:srgbClr val="0068B7"/>
+                </a:solidFill>
+                <a:latin typeface="Aptos" pitchFamily="34" charset="0"/>
+                <a:ea typeface="Aptos" pitchFamily="34" charset="-122"/>
+                <a:cs typeface="Aptos" pitchFamily="34" charset="-120"/>
+              </a:rPr>
+              <a:t>Key idea</a:t>
+            </a:r>
+            <a:endParaRPr lang="en-US" sz="950" dirty="0"/>
+          </a:p>
+        </p:txBody>
+      </p:sp>
+      <p:sp>
+        <p:nvSpPr>
+          <p:cNvPr id="11" name="Text 9"/>
+          <p:cNvSpPr/>
+          <p:nvPr/>
+        </p:nvSpPr>
+        <p:spPr>
+          <a:xfrm>
+            <a:off x="8074152" y="1856232"/>
+            <a:ext cx="2825496" cy="1261872"/>
+          </a:xfrm>
+          <a:prstGeom prst="rect">
+            <a:avLst/>
+          </a:prstGeom>
+          <a:noFill/>
+          <a:ln/>
+        </p:spPr>
+        <p:txBody>
+          <a:bodyPr wrap="square" lIns="0" tIns="0" rIns="0" bIns="0" rtlCol="0" anchor="t">
+            <a:normAutofit/>
+          </a:bodyPr>
+          <a:lstStyle/>
+          <a:p>
+            <a:pPr indent="0" marL="0">
+              <a:buNone/>
+            </a:pPr>
+            <a:r>
+              <a:rPr lang="en-US" sz="1250" dirty="0">
+                <a:solidFill>
+                  <a:srgbClr val="17364A"/>
+                </a:solidFill>
+                <a:latin typeface="Aptos" pitchFamily="34" charset="0"/>
+                <a:ea typeface="Aptos" pitchFamily="34" charset="-122"/>
+                <a:cs typeface="Aptos" pitchFamily="34" charset="-120"/>
+              </a:rPr>
+              <a:t>OMB Memorandum M-24-10 on federal AI governance, risk management, and innovation, where relevant to public-sector governance.</a:t>
+            </a:r>
+            <a:endParaRPr lang="en-US" sz="1250" dirty="0"/>
+          </a:p>
+        </p:txBody>
+      </p:sp>
+      <p:sp>
+        <p:nvSpPr>
+          <p:cNvPr id="12" name="Shape 10"/>
+          <p:cNvSpPr/>
+          <p:nvPr/>
+        </p:nvSpPr>
+        <p:spPr>
+          <a:xfrm>
+            <a:off x="7909560" y="3520440"/>
+            <a:ext cx="3154680" cy="1737360"/>
+          </a:xfrm>
+          <a:prstGeom prst="roundRect">
+            <a:avLst>
+              <a:gd name="adj" fmla="val 6316"/>
+            </a:avLst>
+          </a:prstGeom>
+          <a:solidFill>
+            <a:srgbClr val="EAF6F8"/>
+          </a:solidFill>
+          <a:ln w="12700">
+            <a:solidFill>
+              <a:srgbClr val="B9D7E6"/>
+            </a:solidFill>
+            <a:prstDash val="solid"/>
+          </a:ln>
+        </p:spPr>
+      </p:sp>
+      <p:sp>
+        <p:nvSpPr>
+          <p:cNvPr id="13" name="Text 11"/>
+          <p:cNvSpPr/>
+          <p:nvPr/>
+        </p:nvSpPr>
+        <p:spPr>
+          <a:xfrm>
+            <a:off x="8074152" y="3666744"/>
+            <a:ext cx="2825496" cy="201168"/>
+          </a:xfrm>
+          <a:prstGeom prst="rect">
+            <a:avLst/>
+          </a:prstGeom>
+          <a:noFill/>
+          <a:ln/>
+        </p:spPr>
+        <p:txBody>
+          <a:bodyPr wrap="square" lIns="0" tIns="0" rIns="0" bIns="0" rtlCol="0" anchor="ctr"/>
+          <a:lstStyle/>
+          <a:p>
+            <a:pPr indent="0" marL="0">
+              <a:buNone/>
+            </a:pPr>
+            <a:r>
+              <a:rPr lang="en-US" sz="950" b="1" dirty="0">
+                <a:solidFill>
+                  <a:srgbClr val="0068B7"/>
+                </a:solidFill>
+                <a:latin typeface="Aptos" pitchFamily="34" charset="0"/>
+                <a:ea typeface="Aptos" pitchFamily="34" charset="-122"/>
+                <a:cs typeface="Aptos" pitchFamily="34" charset="-120"/>
+              </a:rPr>
+              <a:t>Use this for</a:t>
+            </a:r>
+            <a:endParaRPr lang="en-US" sz="950" dirty="0"/>
+          </a:p>
+        </p:txBody>
+      </p:sp>
+      <p:sp>
+        <p:nvSpPr>
+          <p:cNvPr id="14" name="Text 12"/>
+          <p:cNvSpPr/>
+          <p:nvPr/>
+        </p:nvSpPr>
+        <p:spPr>
+          <a:xfrm>
+            <a:off x="8074152" y="3959352"/>
+            <a:ext cx="2825496" cy="1170432"/>
+          </a:xfrm>
+          <a:prstGeom prst="rect">
+            <a:avLst/>
+          </a:prstGeom>
+          <a:noFill/>
+          <a:ln/>
+        </p:spPr>
+        <p:txBody>
+          <a:bodyPr wrap="square" lIns="0" tIns="0" rIns="0" bIns="0" rtlCol="0" anchor="t">
+            <a:normAutofit/>
+          </a:bodyPr>
+          <a:lstStyle/>
+          <a:p>
+            <a:pPr indent="0" marL="0">
+              <a:buNone/>
+            </a:pPr>
+            <a:r>
+              <a:rPr lang="en-US" sz="1250" dirty="0">
+                <a:solidFill>
+                  <a:srgbClr val="17364A"/>
+                </a:solidFill>
+                <a:latin typeface="Aptos" pitchFamily="34" charset="0"/>
+                <a:ea typeface="Aptos" pitchFamily="34" charset="-122"/>
+                <a:cs typeface="Aptos" pitchFamily="34" charset="-120"/>
+              </a:rPr>
+              <a:t>Connect the concept to public health decisions, safeguards, documentation, or implementation work.</a:t>
+            </a:r>
+            <a:endParaRPr lang="en-US" sz="1250" dirty="0"/>
           </a:p>
         </p:txBody>
       </p:sp>
@@ -5767,7 +10365,32 @@
       </p:sp>
       <p:sp>
         <p:nvSpPr>
-          <p:cNvPr id="3" name="Text 1"/>
+          <p:cNvPr id="3" name="Shape 1"/>
+          <p:cNvSpPr/>
+          <p:nvPr/>
+        </p:nvSpPr>
+        <p:spPr>
+          <a:xfrm>
+            <a:off x="0" y="164592"/>
+            <a:ext cx="146304" cy="6693408"/>
+          </a:xfrm>
+          <a:prstGeom prst="rect">
+            <a:avLst/>
+          </a:prstGeom>
+          <a:solidFill>
+            <a:srgbClr val="2F8A28"/>
+          </a:solidFill>
+          <a:ln w="12700">
+            <a:solidFill>
+              <a:srgbClr val="2F8A28"/>
+            </a:solidFill>
+            <a:prstDash val="solid"/>
+          </a:ln>
+        </p:spPr>
+      </p:sp>
+      <p:sp>
+        <p:nvSpPr>
+          <p:cNvPr id="4" name="Text 2"/>
           <p:cNvSpPr/>
           <p:nvPr/>
         </p:nvSpPr>
@@ -5806,7 +10429,7 @@
       </p:sp>
       <p:sp>
         <p:nvSpPr>
-          <p:cNvPr id="4" name="Text 2"/>
+          <p:cNvPr id="5" name="Text 3"/>
           <p:cNvSpPr/>
           <p:nvPr/>
         </p:nvSpPr>
@@ -5845,7 +10468,7 @@
       </p:sp>
       <p:sp>
         <p:nvSpPr>
-          <p:cNvPr id="5" name="Text 3"/>
+          <p:cNvPr id="6" name="Text 4"/>
           <p:cNvSpPr/>
           <p:nvPr/>
         </p:nvSpPr>
@@ -5884,7 +10507,7 @@
       </p:sp>
       <p:sp>
         <p:nvSpPr>
-          <p:cNvPr id="6" name="Text 4"/>
+          <p:cNvPr id="7" name="Text 5"/>
           <p:cNvSpPr/>
           <p:nvPr/>
         </p:nvSpPr>
@@ -5917,7 +10540,7 @@
                 <a:ea typeface="Aptos Display" pitchFamily="34" charset="-122"/>
                 <a:cs typeface="Aptos Display" pitchFamily="34" charset="-120"/>
               </a:rPr>
-              <a:t>Learning Objectives</a:t>
+              <a:t>How this module connects to the playbook</a:t>
             </a:r>
             <a:endParaRPr lang="en-US" sz="2700" dirty="0"/>
           </a:p>
@@ -5925,14 +10548,14 @@
       </p:sp>
       <p:sp>
         <p:nvSpPr>
-          <p:cNvPr id="7" name="Text 5"/>
-          <p:cNvSpPr/>
-          <p:nvPr/>
-        </p:nvSpPr>
-        <p:spPr>
-          <a:xfrm>
-            <a:off x="822960" y="1325880"/>
-            <a:ext cx="10378440" cy="4800600"/>
+          <p:cNvPr id="8" name="Text 6"/>
+          <p:cNvSpPr/>
+          <p:nvPr/>
+        </p:nvSpPr>
+        <p:spPr>
+          <a:xfrm>
+            <a:off x="868680" y="1417320"/>
+            <a:ext cx="6903720" cy="4480560"/>
           </a:xfrm>
           <a:prstGeom prst="rect">
             <a:avLst/>
@@ -5947,7 +10570,7 @@
           <a:lstStyle/>
           <a:p>
             <a:r>
-              <a:rPr lang="en-US" sz="1450" dirty="0">
+              <a:rPr lang="en-US" sz="1540" dirty="0">
                 <a:solidFill>
                   <a:srgbClr val="17364A"/>
                 </a:solidFill>
@@ -5955,13 +10578,13 @@
                 <a:ea typeface="Aptos" pitchFamily="34" charset="-122"/>
                 <a:cs typeface="Aptos" pitchFamily="34" charset="-120"/>
               </a:rPr>
-              <a:t>Define the purpose of an AI portfolio strategy for public health agencies.</a:t>
-            </a:r>
-            <a:endParaRPr lang="en-US" sz="1450" dirty="0"/>
-          </a:p>
-          <a:p>
-            <a:r>
-              <a:rPr lang="en-US" sz="1450" dirty="0">
+              <a:t>Play 11: Build and Deploy AI Solutions - This lesson informs Play 11 by helping learners connect the lesson topic to build and deploy.</a:t>
+            </a:r>
+            <a:endParaRPr lang="en-US" sz="1540" dirty="0"/>
+          </a:p>
+          <a:p>
+            <a:r>
+              <a:rPr lang="en-US" sz="1540" dirty="0">
                 <a:solidFill>
                   <a:srgbClr val="17364A"/>
                 </a:solidFill>
@@ -5969,13 +10592,13 @@
                 <a:ea typeface="Aptos" pitchFamily="34" charset="-122"/>
                 <a:cs typeface="Aptos" pitchFamily="34" charset="-120"/>
               </a:rPr>
-              <a:t>Develop criteria for prioritizing AI use cases based on public health value, readiness, risk, and sustainability.</a:t>
-            </a:r>
-            <a:endParaRPr lang="en-US" sz="1450" dirty="0"/>
-          </a:p>
-          <a:p>
-            <a:r>
-              <a:rPr lang="en-US" sz="1450" dirty="0">
+              <a:t>Play 7: Prioritize Use Cases - This lesson informs Play 7 by helping learners connect the lesson topic to prioritize use cases work.</a:t>
+            </a:r>
+            <a:endParaRPr lang="en-US" sz="1540" dirty="0"/>
+          </a:p>
+          <a:p>
+            <a:r>
+              <a:rPr lang="en-US" sz="1540" dirty="0">
                 <a:solidFill>
                   <a:srgbClr val="17364A"/>
                 </a:solidFill>
@@ -5983,13 +10606,13 @@
                 <a:ea typeface="Aptos" pitchFamily="34" charset="-122"/>
                 <a:cs typeface="Aptos" pitchFamily="34" charset="-120"/>
               </a:rPr>
-              <a:t>Identify use cases that should be pursued, piloted, deferred, redesigned, or rejected.</a:t>
-            </a:r>
-            <a:endParaRPr lang="en-US" sz="1450" dirty="0"/>
-          </a:p>
-          <a:p>
-            <a:r>
-              <a:rPr lang="en-US" sz="1450" dirty="0">
+              <a:t>Play 8: Develop a Funding Strategy - This lesson informs Play 8 by helping learners connect the lesson topic to develop a funding.</a:t>
+            </a:r>
+            <a:endParaRPr lang="en-US" sz="1540" dirty="0"/>
+          </a:p>
+          <a:p>
+            <a:r>
+              <a:rPr lang="en-US" sz="1540" dirty="0">
                 <a:solidFill>
                   <a:srgbClr val="17364A"/>
                 </a:solidFill>
@@ -5997,13 +10620,106 @@
                 <a:ea typeface="Aptos" pitchFamily="34" charset="-122"/>
                 <a:cs typeface="Aptos" pitchFamily="34" charset="-120"/>
               </a:rPr>
-              <a:t>Create a portfolio view that balances innovation, risk, equity, and operational capacity.</a:t>
-            </a:r>
-            <a:endParaRPr lang="en-US" sz="1450" dirty="0"/>
-          </a:p>
-          <a:p>
-            <a:r>
-              <a:rPr lang="en-US" sz="1450" dirty="0">
+              <a:t>Play 1: Vision &amp; Guardrails - This lesson informs Play 1 by helping learners connect the lesson topic to vision &amp; guardrails work in.</a:t>
+            </a:r>
+            <a:endParaRPr lang="en-US" sz="1540" dirty="0"/>
+          </a:p>
+        </p:txBody>
+      </p:sp>
+      <p:sp>
+        <p:nvSpPr>
+          <p:cNvPr id="9" name="Shape 7"/>
+          <p:cNvSpPr/>
+          <p:nvPr/>
+        </p:nvSpPr>
+        <p:spPr>
+          <a:xfrm>
+            <a:off x="8046720" y="1417320"/>
+            <a:ext cx="3063240" cy="2103120"/>
+          </a:xfrm>
+          <a:prstGeom prst="roundRect">
+            <a:avLst>
+              <a:gd name="adj" fmla="val 5217"/>
+            </a:avLst>
+          </a:prstGeom>
+          <a:solidFill>
+            <a:srgbClr val="EEF8ED"/>
+          </a:solidFill>
+          <a:ln w="12700">
+            <a:solidFill>
+              <a:srgbClr val="B9D7E6"/>
+            </a:solidFill>
+            <a:prstDash val="solid"/>
+          </a:ln>
+        </p:spPr>
+      </p:sp>
+      <p:sp>
+        <p:nvSpPr>
+          <p:cNvPr id="10" name="Text 8"/>
+          <p:cNvSpPr/>
+          <p:nvPr/>
+        </p:nvSpPr>
+        <p:spPr>
+          <a:xfrm>
+            <a:off x="8211312" y="1563624"/>
+            <a:ext cx="2734056" cy="201168"/>
+          </a:xfrm>
+          <a:prstGeom prst="rect">
+            <a:avLst/>
+          </a:prstGeom>
+          <a:noFill/>
+          <a:ln/>
+        </p:spPr>
+        <p:txBody>
+          <a:bodyPr wrap="square" lIns="0" tIns="0" rIns="0" bIns="0" rtlCol="0" anchor="ctr"/>
+          <a:lstStyle/>
+          <a:p>
+            <a:pPr indent="0" marL="0">
+              <a:buNone/>
+            </a:pPr>
+            <a:r>
+              <a:rPr lang="en-US" sz="950" b="1" dirty="0">
+                <a:solidFill>
+                  <a:srgbClr val="0068B7"/>
+                </a:solidFill>
+                <a:latin typeface="Aptos" pitchFamily="34" charset="0"/>
+                <a:ea typeface="Aptos" pitchFamily="34" charset="-122"/>
+                <a:cs typeface="Aptos" pitchFamily="34" charset="-120"/>
+              </a:rPr>
+              <a:t>Apply the lesson</a:t>
+            </a:r>
+            <a:endParaRPr lang="en-US" sz="950" dirty="0"/>
+          </a:p>
+        </p:txBody>
+      </p:sp>
+      <p:sp>
+        <p:nvSpPr>
+          <p:cNvPr id="11" name="Text 9"/>
+          <p:cNvSpPr/>
+          <p:nvPr/>
+        </p:nvSpPr>
+        <p:spPr>
+          <a:xfrm>
+            <a:off x="8211312" y="1856232"/>
+            <a:ext cx="2734056" cy="1536192"/>
+          </a:xfrm>
+          <a:prstGeom prst="rect">
+            <a:avLst/>
+          </a:prstGeom>
+          <a:noFill/>
+          <a:ln/>
+        </p:spPr>
+        <p:txBody>
+          <a:bodyPr wrap="square" lIns="0" tIns="0" rIns="0" bIns="0" rtlCol="0" anchor="t">
+            <a:normAutofit/>
+          </a:bodyPr>
+          <a:lstStyle/>
+          <a:p>
+            <a:pPr indent="0" marL="0">
+              <a:buNone/>
+            </a:pPr>
+            <a:r>
+              <a:rPr lang="en-US" sz="1250" dirty="0">
                 <a:solidFill>
                   <a:srgbClr val="17364A"/>
                 </a:solidFill>
@@ -6011,9 +10727,116 @@
                 <a:ea typeface="Aptos" pitchFamily="34" charset="-122"/>
                 <a:cs typeface="Aptos" pitchFamily="34" charset="-120"/>
               </a:rPr>
-              <a:t>Produce a use case prioritization rubric for governance or leadership review.</a:t>
-            </a:r>
-            <a:endParaRPr lang="en-US" sz="1450" dirty="0"/>
+              <a:t>Use the related plays to identify decisions, participants, timing, approvals, and documentation needed for responsible implementation.</a:t>
+            </a:r>
+            <a:endParaRPr lang="en-US" sz="1250" dirty="0"/>
+          </a:p>
+        </p:txBody>
+      </p:sp>
+      <p:sp>
+        <p:nvSpPr>
+          <p:cNvPr id="12" name="Shape 10"/>
+          <p:cNvSpPr/>
+          <p:nvPr/>
+        </p:nvSpPr>
+        <p:spPr>
+          <a:xfrm>
+            <a:off x="8046720" y="3794760"/>
+            <a:ext cx="3063240" cy="1508760"/>
+          </a:xfrm>
+          <a:prstGeom prst="roundRect">
+            <a:avLst>
+              <a:gd name="adj" fmla="val 7273"/>
+            </a:avLst>
+          </a:prstGeom>
+          <a:solidFill>
+            <a:srgbClr val="FFF4D9"/>
+          </a:solidFill>
+          <a:ln w="12700">
+            <a:solidFill>
+              <a:srgbClr val="B9D7E6"/>
+            </a:solidFill>
+            <a:prstDash val="solid"/>
+          </a:ln>
+        </p:spPr>
+      </p:sp>
+      <p:sp>
+        <p:nvSpPr>
+          <p:cNvPr id="13" name="Text 11"/>
+          <p:cNvSpPr/>
+          <p:nvPr/>
+        </p:nvSpPr>
+        <p:spPr>
+          <a:xfrm>
+            <a:off x="8211312" y="3941064"/>
+            <a:ext cx="2734056" cy="201168"/>
+          </a:xfrm>
+          <a:prstGeom prst="rect">
+            <a:avLst/>
+          </a:prstGeom>
+          <a:noFill/>
+          <a:ln/>
+        </p:spPr>
+        <p:txBody>
+          <a:bodyPr wrap="square" lIns="0" tIns="0" rIns="0" bIns="0" rtlCol="0" anchor="ctr"/>
+          <a:lstStyle/>
+          <a:p>
+            <a:pPr indent="0" marL="0">
+              <a:buNone/>
+            </a:pPr>
+            <a:r>
+              <a:rPr lang="en-US" sz="950" b="1" dirty="0">
+                <a:solidFill>
+                  <a:srgbClr val="0068B7"/>
+                </a:solidFill>
+                <a:latin typeface="Aptos" pitchFamily="34" charset="0"/>
+                <a:ea typeface="Aptos" pitchFamily="34" charset="-122"/>
+                <a:cs typeface="Aptos" pitchFamily="34" charset="-120"/>
+              </a:rPr>
+              <a:t>Keep in mind</a:t>
+            </a:r>
+            <a:endParaRPr lang="en-US" sz="950" dirty="0"/>
+          </a:p>
+        </p:txBody>
+      </p:sp>
+      <p:sp>
+        <p:nvSpPr>
+          <p:cNvPr id="14" name="Text 12"/>
+          <p:cNvSpPr/>
+          <p:nvPr/>
+        </p:nvSpPr>
+        <p:spPr>
+          <a:xfrm>
+            <a:off x="8211312" y="4233672"/>
+            <a:ext cx="2734056" cy="941832"/>
+          </a:xfrm>
+          <a:prstGeom prst="rect">
+            <a:avLst/>
+          </a:prstGeom>
+          <a:noFill/>
+          <a:ln/>
+        </p:spPr>
+        <p:txBody>
+          <a:bodyPr wrap="square" lIns="0" tIns="0" rIns="0" bIns="0" rtlCol="0" anchor="t">
+            <a:normAutofit/>
+          </a:bodyPr>
+          <a:lstStyle/>
+          <a:p>
+            <a:pPr indent="0" marL="0">
+              <a:buNone/>
+            </a:pPr>
+            <a:r>
+              <a:rPr lang="en-US" sz="1250" dirty="0">
+                <a:solidFill>
+                  <a:srgbClr val="17364A"/>
+                </a:solidFill>
+                <a:latin typeface="Aptos" pitchFamily="34" charset="0"/>
+                <a:ea typeface="Aptos" pitchFamily="34" charset="-122"/>
+                <a:cs typeface="Aptos" pitchFamily="34" charset="-120"/>
+              </a:rPr>
+              <a:t>The playbook connection helps turn training into agency work, not just individual knowledge.</a:t>
+            </a:r>
+            <a:endParaRPr lang="en-US" sz="1250" dirty="0"/>
           </a:p>
         </p:txBody>
       </p:sp>
@@ -6076,7 +10899,32 @@
       </p:sp>
       <p:sp>
         <p:nvSpPr>
-          <p:cNvPr id="3" name="Text 1"/>
+          <p:cNvPr id="3" name="Shape 1"/>
+          <p:cNvSpPr/>
+          <p:nvPr/>
+        </p:nvSpPr>
+        <p:spPr>
+          <a:xfrm>
+            <a:off x="0" y="164592"/>
+            <a:ext cx="146304" cy="6693408"/>
+          </a:xfrm>
+          <a:prstGeom prst="rect">
+            <a:avLst/>
+          </a:prstGeom>
+          <a:solidFill>
+            <a:srgbClr val="2F8A28"/>
+          </a:solidFill>
+          <a:ln w="12700">
+            <a:solidFill>
+              <a:srgbClr val="2F8A28"/>
+            </a:solidFill>
+            <a:prstDash val="solid"/>
+          </a:ln>
+        </p:spPr>
+      </p:sp>
+      <p:sp>
+        <p:nvSpPr>
+          <p:cNvPr id="4" name="Text 2"/>
           <p:cNvSpPr/>
           <p:nvPr/>
         </p:nvSpPr>
@@ -6115,7 +10963,7 @@
       </p:sp>
       <p:sp>
         <p:nvSpPr>
-          <p:cNvPr id="4" name="Text 2"/>
+          <p:cNvPr id="5" name="Text 3"/>
           <p:cNvSpPr/>
           <p:nvPr/>
         </p:nvSpPr>
@@ -6154,7 +11002,7 @@
       </p:sp>
       <p:sp>
         <p:nvSpPr>
-          <p:cNvPr id="5" name="Text 3"/>
+          <p:cNvPr id="6" name="Text 4"/>
           <p:cNvSpPr/>
           <p:nvPr/>
         </p:nvSpPr>
@@ -6193,7 +11041,7 @@
       </p:sp>
       <p:sp>
         <p:nvSpPr>
-          <p:cNvPr id="6" name="Text 4"/>
+          <p:cNvPr id="7" name="Text 5"/>
           <p:cNvSpPr/>
           <p:nvPr/>
         </p:nvSpPr>
@@ -6226,7 +11074,7 @@
                 <a:ea typeface="Aptos Display" pitchFamily="34" charset="-122"/>
                 <a:cs typeface="Aptos Display" pitchFamily="34" charset="-120"/>
               </a:rPr>
-              <a:t>Module Overview</a:t>
+              <a:t>Related toolkit resources</a:t>
             </a:r>
             <a:endParaRPr lang="en-US" sz="2700" dirty="0"/>
           </a:p>
@@ -6234,32 +11082,192 @@
       </p:sp>
       <p:sp>
         <p:nvSpPr>
-          <p:cNvPr id="7" name="Text 5"/>
-          <p:cNvSpPr/>
-          <p:nvPr/>
-        </p:nvSpPr>
-        <p:spPr>
-          <a:xfrm>
-            <a:off x="822960" y="1325880"/>
-            <a:ext cx="10378440" cy="4800600"/>
-          </a:xfrm>
-          <a:prstGeom prst="rect">
-            <a:avLst/>
-          </a:prstGeom>
-          <a:noFill/>
-          <a:ln/>
-        </p:spPr>
-        <p:txBody>
-          <a:bodyPr wrap="square" lIns="1016" tIns="1016" rIns="1016" bIns="1016" rtlCol="0" anchor="t">
+          <p:cNvPr id="8" name="Text 6"/>
+          <p:cNvSpPr/>
+          <p:nvPr/>
+        </p:nvSpPr>
+        <p:spPr>
+          <a:xfrm>
+            <a:off x="868680" y="1417320"/>
+            <a:ext cx="6903720" cy="4480560"/>
+          </a:xfrm>
+          <a:prstGeom prst="rect">
+            <a:avLst/>
+          </a:prstGeom>
+          <a:noFill/>
+          <a:ln/>
+        </p:spPr>
+        <p:txBody>
+          <a:bodyPr wrap="square" lIns="635" tIns="635" rIns="635" bIns="635" rtlCol="0" anchor="t">
             <a:normAutofit/>
           </a:bodyPr>
           <a:lstStyle/>
           <a:p>
+            <a:r>
+              <a:rPr lang="en-US" sz="1460" dirty="0">
+                <a:solidFill>
+                  <a:srgbClr val="17364A"/>
+                </a:solidFill>
+                <a:latin typeface="Aptos" pitchFamily="34" charset="0"/>
+                <a:ea typeface="Aptos" pitchFamily="34" charset="-122"/>
+                <a:cs typeface="Aptos" pitchFamily="34" charset="-120"/>
+              </a:rPr>
+              <a:t>Tool 33: Funding Strategy Checklists (Checklist) - Use this tool to complete or strengthen the practical exercise for the module.</a:t>
+            </a:r>
+            <a:endParaRPr lang="en-US" sz="1460" dirty="0"/>
+          </a:p>
+          <a:p>
+            <a:r>
+              <a:rPr lang="en-US" sz="1460" dirty="0">
+                <a:solidFill>
+                  <a:srgbClr val="17364A"/>
+                </a:solidFill>
+                <a:latin typeface="Aptos" pitchFamily="34" charset="0"/>
+                <a:ea typeface="Aptos" pitchFamily="34" charset="-122"/>
+                <a:cs typeface="Aptos" pitchFamily="34" charset="-120"/>
+              </a:rPr>
+              <a:t>Tool 35: AI Total Cost of Ownership and Sustainability Worksheet (Worksheet) - Use this tool to complete or strengthen the practical.</a:t>
+            </a:r>
+            <a:endParaRPr lang="en-US" sz="1460" dirty="0"/>
+          </a:p>
+          <a:p>
+            <a:r>
+              <a:rPr lang="en-US" sz="1460" dirty="0">
+                <a:solidFill>
+                  <a:srgbClr val="17364A"/>
+                </a:solidFill>
+                <a:latin typeface="Aptos" pitchFamily="34" charset="0"/>
+                <a:ea typeface="Aptos" pitchFamily="34" charset="-122"/>
+                <a:cs typeface="Aptos" pitchFamily="34" charset="-120"/>
+              </a:rPr>
+              <a:t>Tool 4: AI Policy Landscape Scan (Worksheet) - Use AI Policy Landscape Scan to translate this lesson into a documented public health.</a:t>
+            </a:r>
+            <a:endParaRPr lang="en-US" sz="1460" dirty="0"/>
+          </a:p>
+          <a:p>
+            <a:r>
+              <a:rPr lang="en-US" sz="1460" dirty="0">
+                <a:solidFill>
+                  <a:srgbClr val="17364A"/>
+                </a:solidFill>
+                <a:latin typeface="Aptos" pitchFamily="34" charset="0"/>
+                <a:ea typeface="Aptos" pitchFamily="34" charset="-122"/>
+                <a:cs typeface="Aptos" pitchFamily="34" charset="-120"/>
+              </a:rPr>
+              <a:t>Tool 5: AI Environmental and Resource Impact Review (Checklist) - Use this tool to complete or strengthen the practical exercise for.</a:t>
+            </a:r>
+            <a:endParaRPr lang="en-US" sz="1460" dirty="0"/>
+          </a:p>
+          <a:p>
+            <a:r>
+              <a:rPr lang="en-US" sz="1460" dirty="0">
+                <a:solidFill>
+                  <a:srgbClr val="17364A"/>
+                </a:solidFill>
+                <a:latin typeface="Aptos" pitchFamily="34" charset="0"/>
+                <a:ea typeface="Aptos" pitchFamily="34" charset="-122"/>
+                <a:cs typeface="Aptos" pitchFamily="34" charset="-120"/>
+              </a:rPr>
+              <a:t>Tool 6: Human-Centered AI Decision Rule Checklist (Checklist) - Use Human-Centered AI Decision Rule Checklist to translate this.</a:t>
+            </a:r>
+            <a:endParaRPr lang="en-US" sz="1460" dirty="0"/>
+          </a:p>
+        </p:txBody>
+      </p:sp>
+      <p:sp>
+        <p:nvSpPr>
+          <p:cNvPr id="9" name="Shape 7"/>
+          <p:cNvSpPr/>
+          <p:nvPr/>
+        </p:nvSpPr>
+        <p:spPr>
+          <a:xfrm>
+            <a:off x="8046720" y="1417320"/>
+            <a:ext cx="3063240" cy="2103120"/>
+          </a:xfrm>
+          <a:prstGeom prst="roundRect">
+            <a:avLst>
+              <a:gd name="adj" fmla="val 5217"/>
+            </a:avLst>
+          </a:prstGeom>
+          <a:solidFill>
+            <a:srgbClr val="EAF6F8"/>
+          </a:solidFill>
+          <a:ln w="12700">
+            <a:solidFill>
+              <a:srgbClr val="B9D7E6"/>
+            </a:solidFill>
+            <a:prstDash val="solid"/>
+          </a:ln>
+        </p:spPr>
+      </p:sp>
+      <p:sp>
+        <p:nvSpPr>
+          <p:cNvPr id="10" name="Text 8"/>
+          <p:cNvSpPr/>
+          <p:nvPr/>
+        </p:nvSpPr>
+        <p:spPr>
+          <a:xfrm>
+            <a:off x="8211312" y="1563624"/>
+            <a:ext cx="2734056" cy="201168"/>
+          </a:xfrm>
+          <a:prstGeom prst="rect">
+            <a:avLst/>
+          </a:prstGeom>
+          <a:noFill/>
+          <a:ln/>
+        </p:spPr>
+        <p:txBody>
+          <a:bodyPr wrap="square" lIns="0" tIns="0" rIns="0" bIns="0" rtlCol="0" anchor="ctr"/>
+          <a:lstStyle/>
+          <a:p>
             <a:pPr indent="0" marL="0">
               <a:buNone/>
             </a:pPr>
             <a:r>
-              <a:rPr lang="en-US" sz="1420" dirty="0">
+              <a:rPr lang="en-US" sz="950" b="1" dirty="0">
+                <a:solidFill>
+                  <a:srgbClr val="0068B7"/>
+                </a:solidFill>
+                <a:latin typeface="Aptos" pitchFamily="34" charset="0"/>
+                <a:ea typeface="Aptos" pitchFamily="34" charset="-122"/>
+                <a:cs typeface="Aptos" pitchFamily="34" charset="-120"/>
+              </a:rPr>
+              <a:t>Use the tools</a:t>
+            </a:r>
+            <a:endParaRPr lang="en-US" sz="950" dirty="0"/>
+          </a:p>
+        </p:txBody>
+      </p:sp>
+      <p:sp>
+        <p:nvSpPr>
+          <p:cNvPr id="11" name="Text 9"/>
+          <p:cNvSpPr/>
+          <p:nvPr/>
+        </p:nvSpPr>
+        <p:spPr>
+          <a:xfrm>
+            <a:off x="8211312" y="1856232"/>
+            <a:ext cx="2734056" cy="1536192"/>
+          </a:xfrm>
+          <a:prstGeom prst="rect">
+            <a:avLst/>
+          </a:prstGeom>
+          <a:noFill/>
+          <a:ln/>
+        </p:spPr>
+        <p:txBody>
+          <a:bodyPr wrap="square" lIns="0" tIns="0" rIns="0" bIns="0" rtlCol="0" anchor="t">
+            <a:normAutofit/>
+          </a:bodyPr>
+          <a:lstStyle/>
+          <a:p>
+            <a:pPr indent="0" marL="0">
+              <a:buNone/>
+            </a:pPr>
+            <a:r>
+              <a:rPr lang="en-US" sz="1250" dirty="0">
                 <a:solidFill>
                   <a:srgbClr val="17364A"/>
                 </a:solidFill>
@@ -6267,9 +11275,116 @@
                 <a:ea typeface="Aptos" pitchFamily="34" charset="-122"/>
                 <a:cs typeface="Aptos" pitchFamily="34" charset="-120"/>
               </a:rPr>
-              <a:t>AI opportunities can quickly exceed an agency's capacity to evaluate, implement, and sustain them. Leaders need a portfolio strategy that helps distinguish high-value public health uses from attractive but low-impact experiments. A portfolio approach organizes AI opportunities across programs, risk levels, readiness, equity impact, technical feasibility, expected benefit, and sustainability needs. This module teaches leaders how to create an AI use case intake and prioritization process. The module emphasizes that prioritization should not be based only on novelty or vendor availability. It should be based on mission alignment, public health value, data readiness, workflow fit, risk, equity, staff capacity, cost, and the ability to monitor and sustain the use case over time.</a:t>
-            </a:r>
-            <a:endParaRPr lang="en-US" sz="1420" dirty="0"/>
+              <a:t>Use linked tools when your department needs a structured worksheet, template, checklist, review process, or documentation artifact.</a:t>
+            </a:r>
+            <a:endParaRPr lang="en-US" sz="1250" dirty="0"/>
+          </a:p>
+        </p:txBody>
+      </p:sp>
+      <p:sp>
+        <p:nvSpPr>
+          <p:cNvPr id="12" name="Shape 10"/>
+          <p:cNvSpPr/>
+          <p:nvPr/>
+        </p:nvSpPr>
+        <p:spPr>
+          <a:xfrm>
+            <a:off x="8046720" y="3794760"/>
+            <a:ext cx="3063240" cy="1508760"/>
+          </a:xfrm>
+          <a:prstGeom prst="roundRect">
+            <a:avLst>
+              <a:gd name="adj" fmla="val 7273"/>
+            </a:avLst>
+          </a:prstGeom>
+          <a:solidFill>
+            <a:srgbClr val="EEF8ED"/>
+          </a:solidFill>
+          <a:ln w="12700">
+            <a:solidFill>
+              <a:srgbClr val="B9D7E6"/>
+            </a:solidFill>
+            <a:prstDash val="solid"/>
+          </a:ln>
+        </p:spPr>
+      </p:sp>
+      <p:sp>
+        <p:nvSpPr>
+          <p:cNvPr id="13" name="Text 11"/>
+          <p:cNvSpPr/>
+          <p:nvPr/>
+        </p:nvSpPr>
+        <p:spPr>
+          <a:xfrm>
+            <a:off x="8211312" y="3941064"/>
+            <a:ext cx="2734056" cy="201168"/>
+          </a:xfrm>
+          <a:prstGeom prst="rect">
+            <a:avLst/>
+          </a:prstGeom>
+          <a:noFill/>
+          <a:ln/>
+        </p:spPr>
+        <p:txBody>
+          <a:bodyPr wrap="square" lIns="0" tIns="0" rIns="0" bIns="0" rtlCol="0" anchor="ctr"/>
+          <a:lstStyle/>
+          <a:p>
+            <a:pPr indent="0" marL="0">
+              <a:buNone/>
+            </a:pPr>
+            <a:r>
+              <a:rPr lang="en-US" sz="950" b="1" dirty="0">
+                <a:solidFill>
+                  <a:srgbClr val="0068B7"/>
+                </a:solidFill>
+                <a:latin typeface="Aptos" pitchFamily="34" charset="0"/>
+                <a:ea typeface="Aptos" pitchFamily="34" charset="-122"/>
+                <a:cs typeface="Aptos" pitchFamily="34" charset="-120"/>
+              </a:rPr>
+              <a:t>Avoid duplication</a:t>
+            </a:r>
+            <a:endParaRPr lang="en-US" sz="950" dirty="0"/>
+          </a:p>
+        </p:txBody>
+      </p:sp>
+      <p:sp>
+        <p:nvSpPr>
+          <p:cNvPr id="14" name="Text 12"/>
+          <p:cNvSpPr/>
+          <p:nvPr/>
+        </p:nvSpPr>
+        <p:spPr>
+          <a:xfrm>
+            <a:off x="8211312" y="4233672"/>
+            <a:ext cx="2734056" cy="941832"/>
+          </a:xfrm>
+          <a:prstGeom prst="rect">
+            <a:avLst/>
+          </a:prstGeom>
+          <a:noFill/>
+          <a:ln/>
+        </p:spPr>
+        <p:txBody>
+          <a:bodyPr wrap="square" lIns="0" tIns="0" rIns="0" bIns="0" rtlCol="0" anchor="t">
+            <a:normAutofit/>
+          </a:bodyPr>
+          <a:lstStyle/>
+          <a:p>
+            <a:pPr indent="0" marL="0">
+              <a:buNone/>
+            </a:pPr>
+            <a:r>
+              <a:rPr lang="en-US" sz="1250" dirty="0">
+                <a:solidFill>
+                  <a:srgbClr val="17364A"/>
+                </a:solidFill>
+                <a:latin typeface="Aptos" pitchFamily="34" charset="0"/>
+                <a:ea typeface="Aptos" pitchFamily="34" charset="-122"/>
+                <a:cs typeface="Aptos" pitchFamily="34" charset="-120"/>
+              </a:rPr>
+              <a:t>If your department already has a strong equivalent tool, adapt or use the existing process instead of recreating it.</a:t>
+            </a:r>
+            <a:endParaRPr lang="en-US" sz="1250" dirty="0"/>
           </a:p>
         </p:txBody>
       </p:sp>
@@ -6332,7 +11447,32 @@
       </p:sp>
       <p:sp>
         <p:nvSpPr>
-          <p:cNvPr id="3" name="Text 1"/>
+          <p:cNvPr id="3" name="Shape 1"/>
+          <p:cNvSpPr/>
+          <p:nvPr/>
+        </p:nvSpPr>
+        <p:spPr>
+          <a:xfrm>
+            <a:off x="0" y="164592"/>
+            <a:ext cx="146304" cy="6693408"/>
+          </a:xfrm>
+          <a:prstGeom prst="rect">
+            <a:avLst/>
+          </a:prstGeom>
+          <a:solidFill>
+            <a:srgbClr val="2F8A28"/>
+          </a:solidFill>
+          <a:ln w="12700">
+            <a:solidFill>
+              <a:srgbClr val="2F8A28"/>
+            </a:solidFill>
+            <a:prstDash val="solid"/>
+          </a:ln>
+        </p:spPr>
+      </p:sp>
+      <p:sp>
+        <p:nvSpPr>
+          <p:cNvPr id="4" name="Text 2"/>
           <p:cNvSpPr/>
           <p:nvPr/>
         </p:nvSpPr>
@@ -6371,7 +11511,7 @@
       </p:sp>
       <p:sp>
         <p:nvSpPr>
-          <p:cNvPr id="4" name="Text 2"/>
+          <p:cNvPr id="5" name="Text 3"/>
           <p:cNvSpPr/>
           <p:nvPr/>
         </p:nvSpPr>
@@ -6410,7 +11550,7 @@
       </p:sp>
       <p:sp>
         <p:nvSpPr>
-          <p:cNvPr id="5" name="Text 3"/>
+          <p:cNvPr id="6" name="Text 4"/>
           <p:cNvSpPr/>
           <p:nvPr/>
         </p:nvSpPr>
@@ -6449,13 +11589,77 @@
       </p:sp>
       <p:sp>
         <p:nvSpPr>
-          <p:cNvPr id="6" name="Text 4"/>
+          <p:cNvPr id="7" name="Shape 5"/>
           <p:cNvSpPr/>
           <p:nvPr/>
         </p:nvSpPr>
         <p:spPr>
           <a:xfrm>
             <a:off x="640080" y="658368"/>
+            <a:ext cx="420624" cy="420624"/>
+          </a:xfrm>
+          <a:prstGeom prst="ellipse">
+            <a:avLst/>
+          </a:prstGeom>
+          <a:solidFill>
+            <a:srgbClr val="0068B7"/>
+          </a:solidFill>
+          <a:ln w="12700">
+            <a:solidFill>
+              <a:srgbClr val="0068B7"/>
+            </a:solidFill>
+            <a:prstDash val="solid"/>
+          </a:ln>
+        </p:spPr>
+      </p:sp>
+      <p:sp>
+        <p:nvSpPr>
+          <p:cNvPr id="8" name="Text 6"/>
+          <p:cNvSpPr/>
+          <p:nvPr/>
+        </p:nvSpPr>
+        <p:spPr>
+          <a:xfrm>
+            <a:off x="640080" y="731520"/>
+            <a:ext cx="420624" cy="164592"/>
+          </a:xfrm>
+          <a:prstGeom prst="rect">
+            <a:avLst/>
+          </a:prstGeom>
+          <a:noFill/>
+          <a:ln/>
+        </p:spPr>
+        <p:txBody>
+          <a:bodyPr wrap="square" lIns="0" tIns="0" rIns="0" bIns="0" rtlCol="0" anchor="ctr"/>
+          <a:lstStyle/>
+          <a:p>
+            <a:pPr algn="ctr" indent="0" marL="0">
+              <a:buNone/>
+            </a:pPr>
+            <a:r>
+              <a:rPr lang="en-US" sz="1100" b="1" dirty="0">
+                <a:solidFill>
+                  <a:srgbClr val="FFFFFF"/>
+                </a:solidFill>
+                <a:latin typeface="Aptos" pitchFamily="34" charset="0"/>
+                <a:ea typeface="Aptos" pitchFamily="34" charset="-122"/>
+                <a:cs typeface="Aptos" pitchFamily="34" charset="-120"/>
+              </a:rPr>
+              <a:t>1</a:t>
+            </a:r>
+            <a:endParaRPr lang="en-US" sz="1100" dirty="0"/>
+          </a:p>
+        </p:txBody>
+      </p:sp>
+      <p:sp>
+        <p:nvSpPr>
+          <p:cNvPr id="9" name="Text 7"/>
+          <p:cNvSpPr/>
+          <p:nvPr/>
+        </p:nvSpPr>
+        <p:spPr>
+          <a:xfrm>
+            <a:off x="640080" y="621792"/>
             <a:ext cx="10881360" cy="566928"/>
           </a:xfrm>
           <a:prstGeom prst="rect">
@@ -6482,7 +11686,7 @@
                 <a:ea typeface="Aptos Display" pitchFamily="34" charset="-122"/>
                 <a:cs typeface="Aptos Display" pitchFamily="34" charset="-120"/>
               </a:rPr>
-              <a:t>Jurisdiction and Agency Policy Note</a:t>
+              <a:t>Learning Objectives</a:t>
             </a:r>
             <a:endParaRPr lang="en-US" sz="2700" dirty="0"/>
           </a:p>
@@ -6490,32 +11694,178 @@
       </p:sp>
       <p:sp>
         <p:nvSpPr>
-          <p:cNvPr id="7" name="Text 5"/>
-          <p:cNvSpPr/>
-          <p:nvPr/>
-        </p:nvSpPr>
-        <p:spPr>
-          <a:xfrm>
-            <a:off x="822960" y="1325880"/>
-            <a:ext cx="10378440" cy="4800600"/>
-          </a:xfrm>
-          <a:prstGeom prst="rect">
-            <a:avLst/>
-          </a:prstGeom>
-          <a:noFill/>
-          <a:ln/>
-        </p:spPr>
-        <p:txBody>
-          <a:bodyPr wrap="square" lIns="1016" tIns="1016" rIns="1016" bIns="1016" rtlCol="0" anchor="t">
+          <p:cNvPr id="10" name="Text 8"/>
+          <p:cNvSpPr/>
+          <p:nvPr/>
+        </p:nvSpPr>
+        <p:spPr>
+          <a:xfrm>
+            <a:off x="868680" y="1417320"/>
+            <a:ext cx="6675120" cy="4434840"/>
+          </a:xfrm>
+          <a:prstGeom prst="rect">
+            <a:avLst/>
+          </a:prstGeom>
+          <a:noFill/>
+          <a:ln/>
+        </p:spPr>
+        <p:txBody>
+          <a:bodyPr wrap="square" lIns="635" tIns="635" rIns="635" bIns="635" rtlCol="0" anchor="t">
             <a:normAutofit/>
           </a:bodyPr>
           <a:lstStyle/>
           <a:p>
+            <a:r>
+              <a:rPr lang="en-US" sz="1700" dirty="0">
+                <a:solidFill>
+                  <a:srgbClr val="17364A"/>
+                </a:solidFill>
+                <a:latin typeface="Aptos" pitchFamily="34" charset="0"/>
+                <a:ea typeface="Aptos" pitchFamily="34" charset="-122"/>
+                <a:cs typeface="Aptos" pitchFamily="34" charset="-120"/>
+              </a:rPr>
+              <a:t>Define the purpose of an AI portfolio strategy for public health agencies.</a:t>
+            </a:r>
+            <a:endParaRPr lang="en-US" sz="1700" dirty="0"/>
+          </a:p>
+          <a:p>
+            <a:r>
+              <a:rPr lang="en-US" sz="1700" dirty="0">
+                <a:solidFill>
+                  <a:srgbClr val="17364A"/>
+                </a:solidFill>
+                <a:latin typeface="Aptos" pitchFamily="34" charset="0"/>
+                <a:ea typeface="Aptos" pitchFamily="34" charset="-122"/>
+                <a:cs typeface="Aptos" pitchFamily="34" charset="-120"/>
+              </a:rPr>
+              <a:t>Develop criteria for prioritizing AI use cases based on public health value, readiness, risk, and sustainability.</a:t>
+            </a:r>
+            <a:endParaRPr lang="en-US" sz="1700" dirty="0"/>
+          </a:p>
+          <a:p>
+            <a:r>
+              <a:rPr lang="en-US" sz="1700" dirty="0">
+                <a:solidFill>
+                  <a:srgbClr val="17364A"/>
+                </a:solidFill>
+                <a:latin typeface="Aptos" pitchFamily="34" charset="0"/>
+                <a:ea typeface="Aptos" pitchFamily="34" charset="-122"/>
+                <a:cs typeface="Aptos" pitchFamily="34" charset="-120"/>
+              </a:rPr>
+              <a:t>Identify use cases that should be pursued, piloted, deferred, redesigned, or rejected.</a:t>
+            </a:r>
+            <a:endParaRPr lang="en-US" sz="1700" dirty="0"/>
+          </a:p>
+          <a:p>
+            <a:r>
+              <a:rPr lang="en-US" sz="1700" dirty="0">
+                <a:solidFill>
+                  <a:srgbClr val="17364A"/>
+                </a:solidFill>
+                <a:latin typeface="Aptos" pitchFamily="34" charset="0"/>
+                <a:ea typeface="Aptos" pitchFamily="34" charset="-122"/>
+                <a:cs typeface="Aptos" pitchFamily="34" charset="-120"/>
+              </a:rPr>
+              <a:t>Create a portfolio view that balances innovation, risk, equity, and operational capacity.</a:t>
+            </a:r>
+            <a:endParaRPr lang="en-US" sz="1700" dirty="0"/>
+          </a:p>
+        </p:txBody>
+      </p:sp>
+      <p:sp>
+        <p:nvSpPr>
+          <p:cNvPr id="11" name="Shape 9"/>
+          <p:cNvSpPr/>
+          <p:nvPr/>
+        </p:nvSpPr>
+        <p:spPr>
+          <a:xfrm>
+            <a:off x="7909560" y="1417320"/>
+            <a:ext cx="3154680" cy="1828800"/>
+          </a:xfrm>
+          <a:prstGeom prst="roundRect">
+            <a:avLst>
+              <a:gd name="adj" fmla="val 6000"/>
+            </a:avLst>
+          </a:prstGeom>
+          <a:solidFill>
+            <a:srgbClr val="EEF8ED"/>
+          </a:solidFill>
+          <a:ln w="12700">
+            <a:solidFill>
+              <a:srgbClr val="B9D7E6"/>
+            </a:solidFill>
+            <a:prstDash val="solid"/>
+          </a:ln>
+        </p:spPr>
+      </p:sp>
+      <p:sp>
+        <p:nvSpPr>
+          <p:cNvPr id="12" name="Text 10"/>
+          <p:cNvSpPr/>
+          <p:nvPr/>
+        </p:nvSpPr>
+        <p:spPr>
+          <a:xfrm>
+            <a:off x="8074152" y="1563624"/>
+            <a:ext cx="2825496" cy="201168"/>
+          </a:xfrm>
+          <a:prstGeom prst="rect">
+            <a:avLst/>
+          </a:prstGeom>
+          <a:noFill/>
+          <a:ln/>
+        </p:spPr>
+        <p:txBody>
+          <a:bodyPr wrap="square" lIns="0" tIns="0" rIns="0" bIns="0" rtlCol="0" anchor="ctr"/>
+          <a:lstStyle/>
+          <a:p>
             <a:pPr indent="0" marL="0">
               <a:buNone/>
             </a:pPr>
             <a:r>
-              <a:rPr lang="en-US" sz="1420" dirty="0">
+              <a:rPr lang="en-US" sz="950" b="1" dirty="0">
+                <a:solidFill>
+                  <a:srgbClr val="0068B7"/>
+                </a:solidFill>
+                <a:latin typeface="Aptos" pitchFamily="34" charset="0"/>
+                <a:ea typeface="Aptos" pitchFamily="34" charset="-122"/>
+                <a:cs typeface="Aptos" pitchFamily="34" charset="-120"/>
+              </a:rPr>
+              <a:t>Key idea</a:t>
+            </a:r>
+            <a:endParaRPr lang="en-US" sz="950" dirty="0"/>
+          </a:p>
+        </p:txBody>
+      </p:sp>
+      <p:sp>
+        <p:nvSpPr>
+          <p:cNvPr id="13" name="Text 11"/>
+          <p:cNvSpPr/>
+          <p:nvPr/>
+        </p:nvSpPr>
+        <p:spPr>
+          <a:xfrm>
+            <a:off x="8074152" y="1856232"/>
+            <a:ext cx="2825496" cy="1261872"/>
+          </a:xfrm>
+          <a:prstGeom prst="rect">
+            <a:avLst/>
+          </a:prstGeom>
+          <a:noFill/>
+          <a:ln/>
+        </p:spPr>
+        <p:txBody>
+          <a:bodyPr wrap="square" lIns="0" tIns="0" rIns="0" bIns="0" rtlCol="0" anchor="t">
+            <a:normAutofit/>
+          </a:bodyPr>
+          <a:lstStyle/>
+          <a:p>
+            <a:pPr indent="0" marL="0">
+              <a:buNone/>
+            </a:pPr>
+            <a:r>
+              <a:rPr lang="en-US" sz="1250" dirty="0">
                 <a:solidFill>
                   <a:srgbClr val="17364A"/>
                 </a:solidFill>
@@ -6523,9 +11873,116 @@
                 <a:ea typeface="Aptos" pitchFamily="34" charset="-122"/>
                 <a:cs typeface="Aptos" pitchFamily="34" charset="-120"/>
               </a:rPr>
-              <a:t>This national-level module is intended for training and planning purposes. It does not replace legal, privacy, procurement, civil rights, records, or agency policy review. Learners should confirm applicable requirements in their own jurisdiction and organization before implementing AI-supported workflows.</a:t>
-            </a:r>
-            <a:endParaRPr lang="en-US" sz="1420" dirty="0"/>
+              <a:t>Define the purpose of an AI portfolio strategy for public health agencies.</a:t>
+            </a:r>
+            <a:endParaRPr lang="en-US" sz="1250" dirty="0"/>
+          </a:p>
+        </p:txBody>
+      </p:sp>
+      <p:sp>
+        <p:nvSpPr>
+          <p:cNvPr id="14" name="Shape 12"/>
+          <p:cNvSpPr/>
+          <p:nvPr/>
+        </p:nvSpPr>
+        <p:spPr>
+          <a:xfrm>
+            <a:off x="7909560" y="3520440"/>
+            <a:ext cx="3154680" cy="1737360"/>
+          </a:xfrm>
+          <a:prstGeom prst="roundRect">
+            <a:avLst>
+              <a:gd name="adj" fmla="val 6316"/>
+            </a:avLst>
+          </a:prstGeom>
+          <a:solidFill>
+            <a:srgbClr val="EAF6F8"/>
+          </a:solidFill>
+          <a:ln w="12700">
+            <a:solidFill>
+              <a:srgbClr val="B9D7E6"/>
+            </a:solidFill>
+            <a:prstDash val="solid"/>
+          </a:ln>
+        </p:spPr>
+      </p:sp>
+      <p:sp>
+        <p:nvSpPr>
+          <p:cNvPr id="15" name="Text 13"/>
+          <p:cNvSpPr/>
+          <p:nvPr/>
+        </p:nvSpPr>
+        <p:spPr>
+          <a:xfrm>
+            <a:off x="8074152" y="3666744"/>
+            <a:ext cx="2825496" cy="201168"/>
+          </a:xfrm>
+          <a:prstGeom prst="rect">
+            <a:avLst/>
+          </a:prstGeom>
+          <a:noFill/>
+          <a:ln/>
+        </p:spPr>
+        <p:txBody>
+          <a:bodyPr wrap="square" lIns="0" tIns="0" rIns="0" bIns="0" rtlCol="0" anchor="ctr"/>
+          <a:lstStyle/>
+          <a:p>
+            <a:pPr indent="0" marL="0">
+              <a:buNone/>
+            </a:pPr>
+            <a:r>
+              <a:rPr lang="en-US" sz="950" b="1" dirty="0">
+                <a:solidFill>
+                  <a:srgbClr val="0068B7"/>
+                </a:solidFill>
+                <a:latin typeface="Aptos" pitchFamily="34" charset="0"/>
+                <a:ea typeface="Aptos" pitchFamily="34" charset="-122"/>
+                <a:cs typeface="Aptos" pitchFamily="34" charset="-120"/>
+              </a:rPr>
+              <a:t>Use this for</a:t>
+            </a:r>
+            <a:endParaRPr lang="en-US" sz="950" dirty="0"/>
+          </a:p>
+        </p:txBody>
+      </p:sp>
+      <p:sp>
+        <p:nvSpPr>
+          <p:cNvPr id="16" name="Text 14"/>
+          <p:cNvSpPr/>
+          <p:nvPr/>
+        </p:nvSpPr>
+        <p:spPr>
+          <a:xfrm>
+            <a:off x="8074152" y="3959352"/>
+            <a:ext cx="2825496" cy="1170432"/>
+          </a:xfrm>
+          <a:prstGeom prst="rect">
+            <a:avLst/>
+          </a:prstGeom>
+          <a:noFill/>
+          <a:ln/>
+        </p:spPr>
+        <p:txBody>
+          <a:bodyPr wrap="square" lIns="0" tIns="0" rIns="0" bIns="0" rtlCol="0" anchor="t">
+            <a:normAutofit/>
+          </a:bodyPr>
+          <a:lstStyle/>
+          <a:p>
+            <a:pPr indent="0" marL="0">
+              <a:buNone/>
+            </a:pPr>
+            <a:r>
+              <a:rPr lang="en-US" sz="1250" dirty="0">
+                <a:solidFill>
+                  <a:srgbClr val="17364A"/>
+                </a:solidFill>
+                <a:latin typeface="Aptos" pitchFamily="34" charset="0"/>
+                <a:ea typeface="Aptos" pitchFamily="34" charset="-122"/>
+                <a:cs typeface="Aptos" pitchFamily="34" charset="-120"/>
+              </a:rPr>
+              <a:t>Connect the concept to public health decisions, safeguards, documentation, or implementation work.</a:t>
+            </a:r>
+            <a:endParaRPr lang="en-US" sz="1250" dirty="0"/>
           </a:p>
         </p:txBody>
       </p:sp>
@@ -6588,7 +12045,32 @@
       </p:sp>
       <p:sp>
         <p:nvSpPr>
-          <p:cNvPr id="3" name="Text 1"/>
+          <p:cNvPr id="3" name="Shape 1"/>
+          <p:cNvSpPr/>
+          <p:nvPr/>
+        </p:nvSpPr>
+        <p:spPr>
+          <a:xfrm>
+            <a:off x="0" y="164592"/>
+            <a:ext cx="146304" cy="6693408"/>
+          </a:xfrm>
+          <a:prstGeom prst="rect">
+            <a:avLst/>
+          </a:prstGeom>
+          <a:solidFill>
+            <a:srgbClr val="2F8A28"/>
+          </a:solidFill>
+          <a:ln w="12700">
+            <a:solidFill>
+              <a:srgbClr val="2F8A28"/>
+            </a:solidFill>
+            <a:prstDash val="solid"/>
+          </a:ln>
+        </p:spPr>
+      </p:sp>
+      <p:sp>
+        <p:nvSpPr>
+          <p:cNvPr id="4" name="Text 2"/>
           <p:cNvSpPr/>
           <p:nvPr/>
         </p:nvSpPr>
@@ -6627,7 +12109,7 @@
       </p:sp>
       <p:sp>
         <p:nvSpPr>
-          <p:cNvPr id="4" name="Text 2"/>
+          <p:cNvPr id="5" name="Text 3"/>
           <p:cNvSpPr/>
           <p:nvPr/>
         </p:nvSpPr>
@@ -6666,7 +12148,7 @@
       </p:sp>
       <p:sp>
         <p:nvSpPr>
-          <p:cNvPr id="5" name="Text 3"/>
+          <p:cNvPr id="6" name="Text 4"/>
           <p:cNvSpPr/>
           <p:nvPr/>
         </p:nvSpPr>
@@ -6705,13 +12187,77 @@
       </p:sp>
       <p:sp>
         <p:nvSpPr>
-          <p:cNvPr id="6" name="Text 4"/>
+          <p:cNvPr id="7" name="Shape 5"/>
           <p:cNvSpPr/>
           <p:nvPr/>
         </p:nvSpPr>
         <p:spPr>
           <a:xfrm>
             <a:off x="640080" y="658368"/>
+            <a:ext cx="420624" cy="420624"/>
+          </a:xfrm>
+          <a:prstGeom prst="ellipse">
+            <a:avLst/>
+          </a:prstGeom>
+          <a:solidFill>
+            <a:srgbClr val="0068B7"/>
+          </a:solidFill>
+          <a:ln w="12700">
+            <a:solidFill>
+              <a:srgbClr val="0068B7"/>
+            </a:solidFill>
+            <a:prstDash val="solid"/>
+          </a:ln>
+        </p:spPr>
+      </p:sp>
+      <p:sp>
+        <p:nvSpPr>
+          <p:cNvPr id="8" name="Text 6"/>
+          <p:cNvSpPr/>
+          <p:nvPr/>
+        </p:nvSpPr>
+        <p:spPr>
+          <a:xfrm>
+            <a:off x="640080" y="731520"/>
+            <a:ext cx="420624" cy="164592"/>
+          </a:xfrm>
+          <a:prstGeom prst="rect">
+            <a:avLst/>
+          </a:prstGeom>
+          <a:noFill/>
+          <a:ln/>
+        </p:spPr>
+        <p:txBody>
+          <a:bodyPr wrap="square" lIns="0" tIns="0" rIns="0" bIns="0" rtlCol="0" anchor="ctr"/>
+          <a:lstStyle/>
+          <a:p>
+            <a:pPr algn="ctr" indent="0" marL="0">
+              <a:buNone/>
+            </a:pPr>
+            <a:r>
+              <a:rPr lang="en-US" sz="1100" b="1" dirty="0">
+                <a:solidFill>
+                  <a:srgbClr val="FFFFFF"/>
+                </a:solidFill>
+                <a:latin typeface="Aptos" pitchFamily="34" charset="0"/>
+                <a:ea typeface="Aptos" pitchFamily="34" charset="-122"/>
+                <a:cs typeface="Aptos" pitchFamily="34" charset="-120"/>
+              </a:rPr>
+              <a:t>2</a:t>
+            </a:r>
+            <a:endParaRPr lang="en-US" sz="1100" dirty="0"/>
+          </a:p>
+        </p:txBody>
+      </p:sp>
+      <p:sp>
+        <p:nvSpPr>
+          <p:cNvPr id="9" name="Text 7"/>
+          <p:cNvSpPr/>
+          <p:nvPr/>
+        </p:nvSpPr>
+        <p:spPr>
+          <a:xfrm>
+            <a:off x="640080" y="621792"/>
             <a:ext cx="10881360" cy="566928"/>
           </a:xfrm>
           <a:prstGeom prst="rect">
@@ -6738,7 +12284,7 @@
                 <a:ea typeface="Aptos Display" pitchFamily="34" charset="-122"/>
                 <a:cs typeface="Aptos Display" pitchFamily="34" charset="-120"/>
               </a:rPr>
-              <a:t>Why This Topic Matters for Public Health AI</a:t>
+              <a:t>Module Overview</a:t>
             </a:r>
             <a:endParaRPr lang="en-US" sz="2700" dirty="0"/>
           </a:p>
@@ -6746,32 +12292,178 @@
       </p:sp>
       <p:sp>
         <p:nvSpPr>
-          <p:cNvPr id="7" name="Text 5"/>
-          <p:cNvSpPr/>
-          <p:nvPr/>
-        </p:nvSpPr>
-        <p:spPr>
-          <a:xfrm>
-            <a:off x="822960" y="1325880"/>
-            <a:ext cx="10378440" cy="4800600"/>
-          </a:xfrm>
-          <a:prstGeom prst="rect">
-            <a:avLst/>
-          </a:prstGeom>
-          <a:noFill/>
-          <a:ln/>
-        </p:spPr>
-        <p:txBody>
-          <a:bodyPr wrap="square" lIns="1016" tIns="1016" rIns="1016" bIns="1016" rtlCol="0" anchor="t">
+          <p:cNvPr id="10" name="Text 8"/>
+          <p:cNvSpPr/>
+          <p:nvPr/>
+        </p:nvSpPr>
+        <p:spPr>
+          <a:xfrm>
+            <a:off x="868680" y="1417320"/>
+            <a:ext cx="6675120" cy="4434840"/>
+          </a:xfrm>
+          <a:prstGeom prst="rect">
+            <a:avLst/>
+          </a:prstGeom>
+          <a:noFill/>
+          <a:ln/>
+        </p:spPr>
+        <p:txBody>
+          <a:bodyPr wrap="square" lIns="635" tIns="635" rIns="635" bIns="635" rtlCol="0" anchor="t">
             <a:normAutofit/>
           </a:bodyPr>
           <a:lstStyle/>
           <a:p>
+            <a:r>
+              <a:rPr lang="en-US" sz="1700" dirty="0">
+                <a:solidFill>
+                  <a:srgbClr val="17364A"/>
+                </a:solidFill>
+                <a:latin typeface="Aptos" pitchFamily="34" charset="0"/>
+                <a:ea typeface="Aptos" pitchFamily="34" charset="-122"/>
+                <a:cs typeface="Aptos" pitchFamily="34" charset="-120"/>
+              </a:rPr>
+              <a:t>AI opportunities can quickly exceed an agency's capacity to evaluate, implement, and sustain them.</a:t>
+            </a:r>
+            <a:endParaRPr lang="en-US" sz="1700" dirty="0"/>
+          </a:p>
+          <a:p>
+            <a:r>
+              <a:rPr lang="en-US" sz="1700" dirty="0">
+                <a:solidFill>
+                  <a:srgbClr val="17364A"/>
+                </a:solidFill>
+                <a:latin typeface="Aptos" pitchFamily="34" charset="0"/>
+                <a:ea typeface="Aptos" pitchFamily="34" charset="-122"/>
+                <a:cs typeface="Aptos" pitchFamily="34" charset="-120"/>
+              </a:rPr>
+              <a:t>Leaders need a portfolio strategy that helps distinguish high-value public health uses from attractive but low-impact.</a:t>
+            </a:r>
+            <a:endParaRPr lang="en-US" sz="1700" dirty="0"/>
+          </a:p>
+          <a:p>
+            <a:r>
+              <a:rPr lang="en-US" sz="1700" dirty="0">
+                <a:solidFill>
+                  <a:srgbClr val="17364A"/>
+                </a:solidFill>
+                <a:latin typeface="Aptos" pitchFamily="34" charset="0"/>
+                <a:ea typeface="Aptos" pitchFamily="34" charset="-122"/>
+                <a:cs typeface="Aptos" pitchFamily="34" charset="-120"/>
+              </a:rPr>
+              <a:t>A portfolio approach organizes AI opportunities across programs, risk levels, readiness, equity impact, technical.</a:t>
+            </a:r>
+            <a:endParaRPr lang="en-US" sz="1700" dirty="0"/>
+          </a:p>
+          <a:p>
+            <a:r>
+              <a:rPr lang="en-US" sz="1700" dirty="0">
+                <a:solidFill>
+                  <a:srgbClr val="17364A"/>
+                </a:solidFill>
+                <a:latin typeface="Aptos" pitchFamily="34" charset="0"/>
+                <a:ea typeface="Aptos" pitchFamily="34" charset="-122"/>
+                <a:cs typeface="Aptos" pitchFamily="34" charset="-120"/>
+              </a:rPr>
+              <a:t>This module teaches leaders how to create an AI use case intake and prioritization process.</a:t>
+            </a:r>
+            <a:endParaRPr lang="en-US" sz="1700" dirty="0"/>
+          </a:p>
+        </p:txBody>
+      </p:sp>
+      <p:sp>
+        <p:nvSpPr>
+          <p:cNvPr id="11" name="Shape 9"/>
+          <p:cNvSpPr/>
+          <p:nvPr/>
+        </p:nvSpPr>
+        <p:spPr>
+          <a:xfrm>
+            <a:off x="7909560" y="1417320"/>
+            <a:ext cx="3154680" cy="1828800"/>
+          </a:xfrm>
+          <a:prstGeom prst="roundRect">
+            <a:avLst>
+              <a:gd name="adj" fmla="val 6000"/>
+            </a:avLst>
+          </a:prstGeom>
+          <a:solidFill>
+            <a:srgbClr val="EEF8ED"/>
+          </a:solidFill>
+          <a:ln w="12700">
+            <a:solidFill>
+              <a:srgbClr val="B9D7E6"/>
+            </a:solidFill>
+            <a:prstDash val="solid"/>
+          </a:ln>
+        </p:spPr>
+      </p:sp>
+      <p:sp>
+        <p:nvSpPr>
+          <p:cNvPr id="12" name="Text 10"/>
+          <p:cNvSpPr/>
+          <p:nvPr/>
+        </p:nvSpPr>
+        <p:spPr>
+          <a:xfrm>
+            <a:off x="8074152" y="1563624"/>
+            <a:ext cx="2825496" cy="201168"/>
+          </a:xfrm>
+          <a:prstGeom prst="rect">
+            <a:avLst/>
+          </a:prstGeom>
+          <a:noFill/>
+          <a:ln/>
+        </p:spPr>
+        <p:txBody>
+          <a:bodyPr wrap="square" lIns="0" tIns="0" rIns="0" bIns="0" rtlCol="0" anchor="ctr"/>
+          <a:lstStyle/>
+          <a:p>
             <a:pPr indent="0" marL="0">
               <a:buNone/>
             </a:pPr>
             <a:r>
-              <a:rPr lang="en-US" sz="1420" dirty="0">
+              <a:rPr lang="en-US" sz="950" b="1" dirty="0">
+                <a:solidFill>
+                  <a:srgbClr val="0068B7"/>
+                </a:solidFill>
+                <a:latin typeface="Aptos" pitchFamily="34" charset="0"/>
+                <a:ea typeface="Aptos" pitchFamily="34" charset="-122"/>
+                <a:cs typeface="Aptos" pitchFamily="34" charset="-120"/>
+              </a:rPr>
+              <a:t>Key idea</a:t>
+            </a:r>
+            <a:endParaRPr lang="en-US" sz="950" dirty="0"/>
+          </a:p>
+        </p:txBody>
+      </p:sp>
+      <p:sp>
+        <p:nvSpPr>
+          <p:cNvPr id="13" name="Text 11"/>
+          <p:cNvSpPr/>
+          <p:nvPr/>
+        </p:nvSpPr>
+        <p:spPr>
+          <a:xfrm>
+            <a:off x="8074152" y="1856232"/>
+            <a:ext cx="2825496" cy="1261872"/>
+          </a:xfrm>
+          <a:prstGeom prst="rect">
+            <a:avLst/>
+          </a:prstGeom>
+          <a:noFill/>
+          <a:ln/>
+        </p:spPr>
+        <p:txBody>
+          <a:bodyPr wrap="square" lIns="0" tIns="0" rIns="0" bIns="0" rtlCol="0" anchor="t">
+            <a:normAutofit/>
+          </a:bodyPr>
+          <a:lstStyle/>
+          <a:p>
+            <a:pPr indent="0" marL="0">
+              <a:buNone/>
+            </a:pPr>
+            <a:r>
+              <a:rPr lang="en-US" sz="1250" dirty="0">
                 <a:solidFill>
                   <a:srgbClr val="17364A"/>
                 </a:solidFill>
@@ -6779,9 +12471,116 @@
                 <a:ea typeface="Aptos" pitchFamily="34" charset="-122"/>
                 <a:cs typeface="Aptos" pitchFamily="34" charset="-120"/>
               </a:rPr>
-              <a:t>Public health agencies have many possible AI use cases: summarizing case notes, analyzing call logs, drafting messages, identifying data quality gaps, forecasting demand, prioritizing inspections, supporting grants, and improving knowledge management. Without a portfolio strategy, agencies may choose projects because they are visible, easy to demonstrate, or championed by a strong vendor rather than because they advance the public health mission. A portfolio strategy protects scarce capacity. Technical teams, privacy officers, legal counsel, procurement staff, program leaders, and data stewards cannot review every idea at the same intensity. Prioritization helps the agency focus deep review on use cases with meaningful benefit and material risk while creating faster pathways for low-risk internal productivity uses.</a:t>
-            </a:r>
-            <a:endParaRPr lang="en-US" sz="1420" dirty="0"/>
+              <a:t>AI opportunities can quickly exceed an agency's capacity to evaluate, implement, and sustain them.</a:t>
+            </a:r>
+            <a:endParaRPr lang="en-US" sz="1250" dirty="0"/>
+          </a:p>
+        </p:txBody>
+      </p:sp>
+      <p:sp>
+        <p:nvSpPr>
+          <p:cNvPr id="14" name="Shape 12"/>
+          <p:cNvSpPr/>
+          <p:nvPr/>
+        </p:nvSpPr>
+        <p:spPr>
+          <a:xfrm>
+            <a:off x="7909560" y="3520440"/>
+            <a:ext cx="3154680" cy="1737360"/>
+          </a:xfrm>
+          <a:prstGeom prst="roundRect">
+            <a:avLst>
+              <a:gd name="adj" fmla="val 6316"/>
+            </a:avLst>
+          </a:prstGeom>
+          <a:solidFill>
+            <a:srgbClr val="EAF6F8"/>
+          </a:solidFill>
+          <a:ln w="12700">
+            <a:solidFill>
+              <a:srgbClr val="B9D7E6"/>
+            </a:solidFill>
+            <a:prstDash val="solid"/>
+          </a:ln>
+        </p:spPr>
+      </p:sp>
+      <p:sp>
+        <p:nvSpPr>
+          <p:cNvPr id="15" name="Text 13"/>
+          <p:cNvSpPr/>
+          <p:nvPr/>
+        </p:nvSpPr>
+        <p:spPr>
+          <a:xfrm>
+            <a:off x="8074152" y="3666744"/>
+            <a:ext cx="2825496" cy="201168"/>
+          </a:xfrm>
+          <a:prstGeom prst="rect">
+            <a:avLst/>
+          </a:prstGeom>
+          <a:noFill/>
+          <a:ln/>
+        </p:spPr>
+        <p:txBody>
+          <a:bodyPr wrap="square" lIns="0" tIns="0" rIns="0" bIns="0" rtlCol="0" anchor="ctr"/>
+          <a:lstStyle/>
+          <a:p>
+            <a:pPr indent="0" marL="0">
+              <a:buNone/>
+            </a:pPr>
+            <a:r>
+              <a:rPr lang="en-US" sz="950" b="1" dirty="0">
+                <a:solidFill>
+                  <a:srgbClr val="0068B7"/>
+                </a:solidFill>
+                <a:latin typeface="Aptos" pitchFamily="34" charset="0"/>
+                <a:ea typeface="Aptos" pitchFamily="34" charset="-122"/>
+                <a:cs typeface="Aptos" pitchFamily="34" charset="-120"/>
+              </a:rPr>
+              <a:t>Use this for</a:t>
+            </a:r>
+            <a:endParaRPr lang="en-US" sz="950" dirty="0"/>
+          </a:p>
+        </p:txBody>
+      </p:sp>
+      <p:sp>
+        <p:nvSpPr>
+          <p:cNvPr id="16" name="Text 14"/>
+          <p:cNvSpPr/>
+          <p:nvPr/>
+        </p:nvSpPr>
+        <p:spPr>
+          <a:xfrm>
+            <a:off x="8074152" y="3959352"/>
+            <a:ext cx="2825496" cy="1170432"/>
+          </a:xfrm>
+          <a:prstGeom prst="rect">
+            <a:avLst/>
+          </a:prstGeom>
+          <a:noFill/>
+          <a:ln/>
+        </p:spPr>
+        <p:txBody>
+          <a:bodyPr wrap="square" lIns="0" tIns="0" rIns="0" bIns="0" rtlCol="0" anchor="t">
+            <a:normAutofit/>
+          </a:bodyPr>
+          <a:lstStyle/>
+          <a:p>
+            <a:pPr indent="0" marL="0">
+              <a:buNone/>
+            </a:pPr>
+            <a:r>
+              <a:rPr lang="en-US" sz="1250" dirty="0">
+                <a:solidFill>
+                  <a:srgbClr val="17364A"/>
+                </a:solidFill>
+                <a:latin typeface="Aptos" pitchFamily="34" charset="0"/>
+                <a:ea typeface="Aptos" pitchFamily="34" charset="-122"/>
+                <a:cs typeface="Aptos" pitchFamily="34" charset="-120"/>
+              </a:rPr>
+              <a:t>Connect the concept to public health decisions, safeguards, documentation, or implementation work.</a:t>
+            </a:r>
+            <a:endParaRPr lang="en-US" sz="1250" dirty="0"/>
           </a:p>
         </p:txBody>
       </p:sp>
@@ -6844,7 +12643,32 @@
       </p:sp>
       <p:sp>
         <p:nvSpPr>
-          <p:cNvPr id="3" name="Text 1"/>
+          <p:cNvPr id="3" name="Shape 1"/>
+          <p:cNvSpPr/>
+          <p:nvPr/>
+        </p:nvSpPr>
+        <p:spPr>
+          <a:xfrm>
+            <a:off x="0" y="164592"/>
+            <a:ext cx="146304" cy="6693408"/>
+          </a:xfrm>
+          <a:prstGeom prst="rect">
+            <a:avLst/>
+          </a:prstGeom>
+          <a:solidFill>
+            <a:srgbClr val="2F8A28"/>
+          </a:solidFill>
+          <a:ln w="12700">
+            <a:solidFill>
+              <a:srgbClr val="2F8A28"/>
+            </a:solidFill>
+            <a:prstDash val="solid"/>
+          </a:ln>
+        </p:spPr>
+      </p:sp>
+      <p:sp>
+        <p:nvSpPr>
+          <p:cNvPr id="4" name="Text 2"/>
           <p:cNvSpPr/>
           <p:nvPr/>
         </p:nvSpPr>
@@ -6883,7 +12707,7 @@
       </p:sp>
       <p:sp>
         <p:nvSpPr>
-          <p:cNvPr id="4" name="Text 2"/>
+          <p:cNvPr id="5" name="Text 3"/>
           <p:cNvSpPr/>
           <p:nvPr/>
         </p:nvSpPr>
@@ -6922,7 +12746,7 @@
       </p:sp>
       <p:sp>
         <p:nvSpPr>
-          <p:cNvPr id="5" name="Text 3"/>
+          <p:cNvPr id="6" name="Text 4"/>
           <p:cNvSpPr/>
           <p:nvPr/>
         </p:nvSpPr>
@@ -6961,13 +12785,77 @@
       </p:sp>
       <p:sp>
         <p:nvSpPr>
-          <p:cNvPr id="6" name="Text 4"/>
+          <p:cNvPr id="7" name="Shape 5"/>
           <p:cNvSpPr/>
           <p:nvPr/>
         </p:nvSpPr>
         <p:spPr>
           <a:xfrm>
             <a:off x="640080" y="658368"/>
+            <a:ext cx="420624" cy="420624"/>
+          </a:xfrm>
+          <a:prstGeom prst="ellipse">
+            <a:avLst/>
+          </a:prstGeom>
+          <a:solidFill>
+            <a:srgbClr val="0068B7"/>
+          </a:solidFill>
+          <a:ln w="12700">
+            <a:solidFill>
+              <a:srgbClr val="0068B7"/>
+            </a:solidFill>
+            <a:prstDash val="solid"/>
+          </a:ln>
+        </p:spPr>
+      </p:sp>
+      <p:sp>
+        <p:nvSpPr>
+          <p:cNvPr id="8" name="Text 6"/>
+          <p:cNvSpPr/>
+          <p:nvPr/>
+        </p:nvSpPr>
+        <p:spPr>
+          <a:xfrm>
+            <a:off x="640080" y="731520"/>
+            <a:ext cx="420624" cy="164592"/>
+          </a:xfrm>
+          <a:prstGeom prst="rect">
+            <a:avLst/>
+          </a:prstGeom>
+          <a:noFill/>
+          <a:ln/>
+        </p:spPr>
+        <p:txBody>
+          <a:bodyPr wrap="square" lIns="0" tIns="0" rIns="0" bIns="0" rtlCol="0" anchor="ctr"/>
+          <a:lstStyle/>
+          <a:p>
+            <a:pPr algn="ctr" indent="0" marL="0">
+              <a:buNone/>
+            </a:pPr>
+            <a:r>
+              <a:rPr lang="en-US" sz="1100" b="1" dirty="0">
+                <a:solidFill>
+                  <a:srgbClr val="FFFFFF"/>
+                </a:solidFill>
+                <a:latin typeface="Aptos" pitchFamily="34" charset="0"/>
+                <a:ea typeface="Aptos" pitchFamily="34" charset="-122"/>
+                <a:cs typeface="Aptos" pitchFamily="34" charset="-120"/>
+              </a:rPr>
+              <a:t>3</a:t>
+            </a:r>
+            <a:endParaRPr lang="en-US" sz="1100" dirty="0"/>
+          </a:p>
+        </p:txBody>
+      </p:sp>
+      <p:sp>
+        <p:nvSpPr>
+          <p:cNvPr id="9" name="Text 7"/>
+          <p:cNvSpPr/>
+          <p:nvPr/>
+        </p:nvSpPr>
+        <p:spPr>
+          <a:xfrm>
+            <a:off x="640080" y="621792"/>
             <a:ext cx="10881360" cy="566928"/>
           </a:xfrm>
           <a:prstGeom prst="rect">
@@ -6994,7 +12882,7 @@
                 <a:ea typeface="Aptos Display" pitchFamily="34" charset="-122"/>
                 <a:cs typeface="Aptos Display" pitchFamily="34" charset="-120"/>
               </a:rPr>
-              <a:t>Public Health Example</a:t>
+              <a:t>Jurisdiction and Agency Policy Note</a:t>
             </a:r>
             <a:endParaRPr lang="en-US" sz="2700" dirty="0"/>
           </a:p>
@@ -7002,32 +12890,164 @@
       </p:sp>
       <p:sp>
         <p:nvSpPr>
-          <p:cNvPr id="7" name="Text 5"/>
-          <p:cNvSpPr/>
-          <p:nvPr/>
-        </p:nvSpPr>
-        <p:spPr>
-          <a:xfrm>
-            <a:off x="822960" y="1325880"/>
-            <a:ext cx="10378440" cy="4800600"/>
-          </a:xfrm>
-          <a:prstGeom prst="rect">
-            <a:avLst/>
-          </a:prstGeom>
-          <a:noFill/>
-          <a:ln/>
-        </p:spPr>
-        <p:txBody>
-          <a:bodyPr wrap="square" lIns="1016" tIns="1016" rIns="1016" bIns="1016" rtlCol="0" anchor="t">
+          <p:cNvPr id="10" name="Text 8"/>
+          <p:cNvSpPr/>
+          <p:nvPr/>
+        </p:nvSpPr>
+        <p:spPr>
+          <a:xfrm>
+            <a:off x="868680" y="1417320"/>
+            <a:ext cx="6675120" cy="4434840"/>
+          </a:xfrm>
+          <a:prstGeom prst="rect">
+            <a:avLst/>
+          </a:prstGeom>
+          <a:noFill/>
+          <a:ln/>
+        </p:spPr>
+        <p:txBody>
+          <a:bodyPr wrap="square" lIns="635" tIns="635" rIns="635" bIns="635" rtlCol="0" anchor="t">
             <a:normAutofit/>
           </a:bodyPr>
           <a:lstStyle/>
           <a:p>
+            <a:r>
+              <a:rPr lang="en-US" sz="1700" dirty="0">
+                <a:solidFill>
+                  <a:srgbClr val="17364A"/>
+                </a:solidFill>
+                <a:latin typeface="Aptos" pitchFamily="34" charset="0"/>
+                <a:ea typeface="Aptos" pitchFamily="34" charset="-122"/>
+                <a:cs typeface="Aptos" pitchFamily="34" charset="-120"/>
+              </a:rPr>
+              <a:t>This national-level module is intended for training and planning purposes.</a:t>
+            </a:r>
+            <a:endParaRPr lang="en-US" sz="1700" dirty="0"/>
+          </a:p>
+          <a:p>
+            <a:r>
+              <a:rPr lang="en-US" sz="1700" dirty="0">
+                <a:solidFill>
+                  <a:srgbClr val="17364A"/>
+                </a:solidFill>
+                <a:latin typeface="Aptos" pitchFamily="34" charset="0"/>
+                <a:ea typeface="Aptos" pitchFamily="34" charset="-122"/>
+                <a:cs typeface="Aptos" pitchFamily="34" charset="-120"/>
+              </a:rPr>
+              <a:t>It does not replace legal, privacy, procurement, civil rights, records, or agency policy review.</a:t>
+            </a:r>
+            <a:endParaRPr lang="en-US" sz="1700" dirty="0"/>
+          </a:p>
+          <a:p>
+            <a:r>
+              <a:rPr lang="en-US" sz="1700" dirty="0">
+                <a:solidFill>
+                  <a:srgbClr val="17364A"/>
+                </a:solidFill>
+                <a:latin typeface="Aptos" pitchFamily="34" charset="0"/>
+                <a:ea typeface="Aptos" pitchFamily="34" charset="-122"/>
+                <a:cs typeface="Aptos" pitchFamily="34" charset="-120"/>
+              </a:rPr>
+              <a:t>Learners should confirm applicable requirements in their own jurisdiction and organization before implementing AI-supported.</a:t>
+            </a:r>
+            <a:endParaRPr lang="en-US" sz="1700" dirty="0"/>
+          </a:p>
+        </p:txBody>
+      </p:sp>
+      <p:sp>
+        <p:nvSpPr>
+          <p:cNvPr id="11" name="Shape 9"/>
+          <p:cNvSpPr/>
+          <p:nvPr/>
+        </p:nvSpPr>
+        <p:spPr>
+          <a:xfrm>
+            <a:off x="7909560" y="1417320"/>
+            <a:ext cx="3154680" cy="1828800"/>
+          </a:xfrm>
+          <a:prstGeom prst="roundRect">
+            <a:avLst>
+              <a:gd name="adj" fmla="val 6000"/>
+            </a:avLst>
+          </a:prstGeom>
+          <a:solidFill>
+            <a:srgbClr val="EEF8ED"/>
+          </a:solidFill>
+          <a:ln w="12700">
+            <a:solidFill>
+              <a:srgbClr val="B9D7E6"/>
+            </a:solidFill>
+            <a:prstDash val="solid"/>
+          </a:ln>
+        </p:spPr>
+      </p:sp>
+      <p:sp>
+        <p:nvSpPr>
+          <p:cNvPr id="12" name="Text 10"/>
+          <p:cNvSpPr/>
+          <p:nvPr/>
+        </p:nvSpPr>
+        <p:spPr>
+          <a:xfrm>
+            <a:off x="8074152" y="1563624"/>
+            <a:ext cx="2825496" cy="201168"/>
+          </a:xfrm>
+          <a:prstGeom prst="rect">
+            <a:avLst/>
+          </a:prstGeom>
+          <a:noFill/>
+          <a:ln/>
+        </p:spPr>
+        <p:txBody>
+          <a:bodyPr wrap="square" lIns="0" tIns="0" rIns="0" bIns="0" rtlCol="0" anchor="ctr"/>
+          <a:lstStyle/>
+          <a:p>
             <a:pPr indent="0" marL="0">
               <a:buNone/>
             </a:pPr>
             <a:r>
-              <a:rPr lang="en-US" sz="1420" dirty="0">
+              <a:rPr lang="en-US" sz="950" b="1" dirty="0">
+                <a:solidFill>
+                  <a:srgbClr val="0068B7"/>
+                </a:solidFill>
+                <a:latin typeface="Aptos" pitchFamily="34" charset="0"/>
+                <a:ea typeface="Aptos" pitchFamily="34" charset="-122"/>
+                <a:cs typeface="Aptos" pitchFamily="34" charset="-120"/>
+              </a:rPr>
+              <a:t>Key idea</a:t>
+            </a:r>
+            <a:endParaRPr lang="en-US" sz="950" dirty="0"/>
+          </a:p>
+        </p:txBody>
+      </p:sp>
+      <p:sp>
+        <p:nvSpPr>
+          <p:cNvPr id="13" name="Text 11"/>
+          <p:cNvSpPr/>
+          <p:nvPr/>
+        </p:nvSpPr>
+        <p:spPr>
+          <a:xfrm>
+            <a:off x="8074152" y="1856232"/>
+            <a:ext cx="2825496" cy="1261872"/>
+          </a:xfrm>
+          <a:prstGeom prst="rect">
+            <a:avLst/>
+          </a:prstGeom>
+          <a:noFill/>
+          <a:ln/>
+        </p:spPr>
+        <p:txBody>
+          <a:bodyPr wrap="square" lIns="0" tIns="0" rIns="0" bIns="0" rtlCol="0" anchor="t">
+            <a:normAutofit/>
+          </a:bodyPr>
+          <a:lstStyle/>
+          <a:p>
+            <a:pPr indent="0" marL="0">
+              <a:buNone/>
+            </a:pPr>
+            <a:r>
+              <a:rPr lang="en-US" sz="1250" dirty="0">
                 <a:solidFill>
                   <a:srgbClr val="17364A"/>
                 </a:solidFill>
@@ -7035,9 +13055,116 @@
                 <a:ea typeface="Aptos" pitchFamily="34" charset="-122"/>
                 <a:cs typeface="Aptos" pitchFamily="34" charset="-120"/>
               </a:rPr>
-              <a:t>A health department receives proposals for five AI uses: a public chatbot, a staff policy assistant, an outbreak signal detection model, a vendor tool to summarize eCRs, and an internal tool to draft grant narratives. Each proposal has different benefits and risks. A public chatbot may be visible but high-risk if it gives health advice. A staff policy assistant may be lower risk if it uses approved internal documents. An outbreak model may be valuable but require strong data quality and validation. A portfolio review allows the agency to compare these proposals systematically. The agency may approve a low-risk internal pilot, defer the chatbot until public communication safeguards are developed, require validation planning for the outbreak model, and move the eCR summarization tool into deeper technical review. The result is a balanced portfolio rather than a series of disconnected decisions.</a:t>
-            </a:r>
-            <a:endParaRPr lang="en-US" sz="1420" dirty="0"/>
+              <a:t>This national-level module is intended for training and planning purposes.</a:t>
+            </a:r>
+            <a:endParaRPr lang="en-US" sz="1250" dirty="0"/>
+          </a:p>
+        </p:txBody>
+      </p:sp>
+      <p:sp>
+        <p:nvSpPr>
+          <p:cNvPr id="14" name="Shape 12"/>
+          <p:cNvSpPr/>
+          <p:nvPr/>
+        </p:nvSpPr>
+        <p:spPr>
+          <a:xfrm>
+            <a:off x="7909560" y="3520440"/>
+            <a:ext cx="3154680" cy="1737360"/>
+          </a:xfrm>
+          <a:prstGeom prst="roundRect">
+            <a:avLst>
+              <a:gd name="adj" fmla="val 6316"/>
+            </a:avLst>
+          </a:prstGeom>
+          <a:solidFill>
+            <a:srgbClr val="EAF6F8"/>
+          </a:solidFill>
+          <a:ln w="12700">
+            <a:solidFill>
+              <a:srgbClr val="B9D7E6"/>
+            </a:solidFill>
+            <a:prstDash val="solid"/>
+          </a:ln>
+        </p:spPr>
+      </p:sp>
+      <p:sp>
+        <p:nvSpPr>
+          <p:cNvPr id="15" name="Text 13"/>
+          <p:cNvSpPr/>
+          <p:nvPr/>
+        </p:nvSpPr>
+        <p:spPr>
+          <a:xfrm>
+            <a:off x="8074152" y="3666744"/>
+            <a:ext cx="2825496" cy="201168"/>
+          </a:xfrm>
+          <a:prstGeom prst="rect">
+            <a:avLst/>
+          </a:prstGeom>
+          <a:noFill/>
+          <a:ln/>
+        </p:spPr>
+        <p:txBody>
+          <a:bodyPr wrap="square" lIns="0" tIns="0" rIns="0" bIns="0" rtlCol="0" anchor="ctr"/>
+          <a:lstStyle/>
+          <a:p>
+            <a:pPr indent="0" marL="0">
+              <a:buNone/>
+            </a:pPr>
+            <a:r>
+              <a:rPr lang="en-US" sz="950" b="1" dirty="0">
+                <a:solidFill>
+                  <a:srgbClr val="0068B7"/>
+                </a:solidFill>
+                <a:latin typeface="Aptos" pitchFamily="34" charset="0"/>
+                <a:ea typeface="Aptos" pitchFamily="34" charset="-122"/>
+                <a:cs typeface="Aptos" pitchFamily="34" charset="-120"/>
+              </a:rPr>
+              <a:t>Use this for</a:t>
+            </a:r>
+            <a:endParaRPr lang="en-US" sz="950" dirty="0"/>
+          </a:p>
+        </p:txBody>
+      </p:sp>
+      <p:sp>
+        <p:nvSpPr>
+          <p:cNvPr id="16" name="Text 14"/>
+          <p:cNvSpPr/>
+          <p:nvPr/>
+        </p:nvSpPr>
+        <p:spPr>
+          <a:xfrm>
+            <a:off x="8074152" y="3959352"/>
+            <a:ext cx="2825496" cy="1170432"/>
+          </a:xfrm>
+          <a:prstGeom prst="rect">
+            <a:avLst/>
+          </a:prstGeom>
+          <a:noFill/>
+          <a:ln/>
+        </p:spPr>
+        <p:txBody>
+          <a:bodyPr wrap="square" lIns="0" tIns="0" rIns="0" bIns="0" rtlCol="0" anchor="t">
+            <a:normAutofit/>
+          </a:bodyPr>
+          <a:lstStyle/>
+          <a:p>
+            <a:pPr indent="0" marL="0">
+              <a:buNone/>
+            </a:pPr>
+            <a:r>
+              <a:rPr lang="en-US" sz="1250" dirty="0">
+                <a:solidFill>
+                  <a:srgbClr val="17364A"/>
+                </a:solidFill>
+                <a:latin typeface="Aptos" pitchFamily="34" charset="0"/>
+                <a:ea typeface="Aptos" pitchFamily="34" charset="-122"/>
+                <a:cs typeface="Aptos" pitchFamily="34" charset="-120"/>
+              </a:rPr>
+              <a:t>Connect the concept to public health decisions, safeguards, documentation, or implementation work.</a:t>
+            </a:r>
+            <a:endParaRPr lang="en-US" sz="1250" dirty="0"/>
           </a:p>
         </p:txBody>
       </p:sp>
@@ -7100,7 +13227,32 @@
       </p:sp>
       <p:sp>
         <p:nvSpPr>
-          <p:cNvPr id="3" name="Text 1"/>
+          <p:cNvPr id="3" name="Shape 1"/>
+          <p:cNvSpPr/>
+          <p:nvPr/>
+        </p:nvSpPr>
+        <p:spPr>
+          <a:xfrm>
+            <a:off x="0" y="164592"/>
+            <a:ext cx="146304" cy="6693408"/>
+          </a:xfrm>
+          <a:prstGeom prst="rect">
+            <a:avLst/>
+          </a:prstGeom>
+          <a:solidFill>
+            <a:srgbClr val="2F8A28"/>
+          </a:solidFill>
+          <a:ln w="12700">
+            <a:solidFill>
+              <a:srgbClr val="2F8A28"/>
+            </a:solidFill>
+            <a:prstDash val="solid"/>
+          </a:ln>
+        </p:spPr>
+      </p:sp>
+      <p:sp>
+        <p:nvSpPr>
+          <p:cNvPr id="4" name="Text 2"/>
           <p:cNvSpPr/>
           <p:nvPr/>
         </p:nvSpPr>
@@ -7139,7 +13291,7 @@
       </p:sp>
       <p:sp>
         <p:nvSpPr>
-          <p:cNvPr id="4" name="Text 2"/>
+          <p:cNvPr id="5" name="Text 3"/>
           <p:cNvSpPr/>
           <p:nvPr/>
         </p:nvSpPr>
@@ -7178,7 +13330,7 @@
       </p:sp>
       <p:sp>
         <p:nvSpPr>
-          <p:cNvPr id="5" name="Text 3"/>
+          <p:cNvPr id="6" name="Text 4"/>
           <p:cNvSpPr/>
           <p:nvPr/>
         </p:nvSpPr>
@@ -7217,13 +13369,77 @@
       </p:sp>
       <p:sp>
         <p:nvSpPr>
-          <p:cNvPr id="6" name="Text 4"/>
+          <p:cNvPr id="7" name="Shape 5"/>
           <p:cNvSpPr/>
           <p:nvPr/>
         </p:nvSpPr>
         <p:spPr>
           <a:xfrm>
             <a:off x="640080" y="658368"/>
+            <a:ext cx="420624" cy="420624"/>
+          </a:xfrm>
+          <a:prstGeom prst="ellipse">
+            <a:avLst/>
+          </a:prstGeom>
+          <a:solidFill>
+            <a:srgbClr val="0068B7"/>
+          </a:solidFill>
+          <a:ln w="12700">
+            <a:solidFill>
+              <a:srgbClr val="0068B7"/>
+            </a:solidFill>
+            <a:prstDash val="solid"/>
+          </a:ln>
+        </p:spPr>
+      </p:sp>
+      <p:sp>
+        <p:nvSpPr>
+          <p:cNvPr id="8" name="Text 6"/>
+          <p:cNvSpPr/>
+          <p:nvPr/>
+        </p:nvSpPr>
+        <p:spPr>
+          <a:xfrm>
+            <a:off x="640080" y="731520"/>
+            <a:ext cx="420624" cy="164592"/>
+          </a:xfrm>
+          <a:prstGeom prst="rect">
+            <a:avLst/>
+          </a:prstGeom>
+          <a:noFill/>
+          <a:ln/>
+        </p:spPr>
+        <p:txBody>
+          <a:bodyPr wrap="square" lIns="0" tIns="0" rIns="0" bIns="0" rtlCol="0" anchor="ctr"/>
+          <a:lstStyle/>
+          <a:p>
+            <a:pPr algn="ctr" indent="0" marL="0">
+              <a:buNone/>
+            </a:pPr>
+            <a:r>
+              <a:rPr lang="en-US" sz="1100" b="1" dirty="0">
+                <a:solidFill>
+                  <a:srgbClr val="FFFFFF"/>
+                </a:solidFill>
+                <a:latin typeface="Aptos" pitchFamily="34" charset="0"/>
+                <a:ea typeface="Aptos" pitchFamily="34" charset="-122"/>
+                <a:cs typeface="Aptos" pitchFamily="34" charset="-120"/>
+              </a:rPr>
+              <a:t>4</a:t>
+            </a:r>
+            <a:endParaRPr lang="en-US" sz="1100" dirty="0"/>
+          </a:p>
+        </p:txBody>
+      </p:sp>
+      <p:sp>
+        <p:nvSpPr>
+          <p:cNvPr id="9" name="Text 7"/>
+          <p:cNvSpPr/>
+          <p:nvPr/>
+        </p:nvSpPr>
+        <p:spPr>
+          <a:xfrm>
+            <a:off x="640080" y="621792"/>
             <a:ext cx="10881360" cy="566928"/>
           </a:xfrm>
           <a:prstGeom prst="rect">
@@ -7250,7 +13466,7 @@
                 <a:ea typeface="Aptos Display" pitchFamily="34" charset="-122"/>
                 <a:cs typeface="Aptos Display" pitchFamily="34" charset="-120"/>
               </a:rPr>
-              <a:t>Technical and Governance Deep Dive</a:t>
+              <a:t>Why This Topic Matters for Public Health AI</a:t>
             </a:r>
             <a:endParaRPr lang="en-US" sz="2700" dirty="0"/>
           </a:p>
@@ -7258,32 +13474,178 @@
       </p:sp>
       <p:sp>
         <p:nvSpPr>
-          <p:cNvPr id="7" name="Text 5"/>
-          <p:cNvSpPr/>
-          <p:nvPr/>
-        </p:nvSpPr>
-        <p:spPr>
-          <a:xfrm>
-            <a:off x="822960" y="1325880"/>
-            <a:ext cx="10378440" cy="4800600"/>
-          </a:xfrm>
-          <a:prstGeom prst="rect">
-            <a:avLst/>
-          </a:prstGeom>
-          <a:noFill/>
-          <a:ln/>
-        </p:spPr>
-        <p:txBody>
-          <a:bodyPr wrap="square" lIns="1016" tIns="1016" rIns="1016" bIns="1016" rtlCol="0" anchor="t">
+          <p:cNvPr id="10" name="Text 8"/>
+          <p:cNvSpPr/>
+          <p:nvPr/>
+        </p:nvSpPr>
+        <p:spPr>
+          <a:xfrm>
+            <a:off x="868680" y="1417320"/>
+            <a:ext cx="6675120" cy="4434840"/>
+          </a:xfrm>
+          <a:prstGeom prst="rect">
+            <a:avLst/>
+          </a:prstGeom>
+          <a:noFill/>
+          <a:ln/>
+        </p:spPr>
+        <p:txBody>
+          <a:bodyPr wrap="square" lIns="635" tIns="635" rIns="635" bIns="635" rtlCol="0" anchor="t">
             <a:normAutofit/>
           </a:bodyPr>
           <a:lstStyle/>
           <a:p>
+            <a:r>
+              <a:rPr lang="en-US" sz="1700" dirty="0">
+                <a:solidFill>
+                  <a:srgbClr val="17364A"/>
+                </a:solidFill>
+                <a:latin typeface="Aptos" pitchFamily="34" charset="0"/>
+                <a:ea typeface="Aptos" pitchFamily="34" charset="-122"/>
+                <a:cs typeface="Aptos" pitchFamily="34" charset="-120"/>
+              </a:rPr>
+              <a:t>Public health agencies have many possible AI use cases: summarizing case notes, analyzing call logs, drafting messages,.</a:t>
+            </a:r>
+            <a:endParaRPr lang="en-US" sz="1700" dirty="0"/>
+          </a:p>
+          <a:p>
+            <a:r>
+              <a:rPr lang="en-US" sz="1700" dirty="0">
+                <a:solidFill>
+                  <a:srgbClr val="17364A"/>
+                </a:solidFill>
+                <a:latin typeface="Aptos" pitchFamily="34" charset="0"/>
+                <a:ea typeface="Aptos" pitchFamily="34" charset="-122"/>
+                <a:cs typeface="Aptos" pitchFamily="34" charset="-120"/>
+              </a:rPr>
+              <a:t>Without a portfolio strategy, agencies may choose projects because they are visible, easy to demonstrate, or championed by.</a:t>
+            </a:r>
+            <a:endParaRPr lang="en-US" sz="1700" dirty="0"/>
+          </a:p>
+          <a:p>
+            <a:r>
+              <a:rPr lang="en-US" sz="1700" dirty="0">
+                <a:solidFill>
+                  <a:srgbClr val="17364A"/>
+                </a:solidFill>
+                <a:latin typeface="Aptos" pitchFamily="34" charset="0"/>
+                <a:ea typeface="Aptos" pitchFamily="34" charset="-122"/>
+                <a:cs typeface="Aptos" pitchFamily="34" charset="-120"/>
+              </a:rPr>
+              <a:t>A portfolio strategy protects scarce capacity.</a:t>
+            </a:r>
+            <a:endParaRPr lang="en-US" sz="1700" dirty="0"/>
+          </a:p>
+          <a:p>
+            <a:r>
+              <a:rPr lang="en-US" sz="1700" dirty="0">
+                <a:solidFill>
+                  <a:srgbClr val="17364A"/>
+                </a:solidFill>
+                <a:latin typeface="Aptos" pitchFamily="34" charset="0"/>
+                <a:ea typeface="Aptos" pitchFamily="34" charset="-122"/>
+                <a:cs typeface="Aptos" pitchFamily="34" charset="-120"/>
+              </a:rPr>
+              <a:t>Technical teams, privacy officers, legal counsel, procurement staff, program leaders, and data stewards cannot review every.</a:t>
+            </a:r>
+            <a:endParaRPr lang="en-US" sz="1700" dirty="0"/>
+          </a:p>
+        </p:txBody>
+      </p:sp>
+      <p:sp>
+        <p:nvSpPr>
+          <p:cNvPr id="11" name="Shape 9"/>
+          <p:cNvSpPr/>
+          <p:nvPr/>
+        </p:nvSpPr>
+        <p:spPr>
+          <a:xfrm>
+            <a:off x="7909560" y="1417320"/>
+            <a:ext cx="3154680" cy="1828800"/>
+          </a:xfrm>
+          <a:prstGeom prst="roundRect">
+            <a:avLst>
+              <a:gd name="adj" fmla="val 6000"/>
+            </a:avLst>
+          </a:prstGeom>
+          <a:solidFill>
+            <a:srgbClr val="EEF8ED"/>
+          </a:solidFill>
+          <a:ln w="12700">
+            <a:solidFill>
+              <a:srgbClr val="B9D7E6"/>
+            </a:solidFill>
+            <a:prstDash val="solid"/>
+          </a:ln>
+        </p:spPr>
+      </p:sp>
+      <p:sp>
+        <p:nvSpPr>
+          <p:cNvPr id="12" name="Text 10"/>
+          <p:cNvSpPr/>
+          <p:nvPr/>
+        </p:nvSpPr>
+        <p:spPr>
+          <a:xfrm>
+            <a:off x="8074152" y="1563624"/>
+            <a:ext cx="2825496" cy="201168"/>
+          </a:xfrm>
+          <a:prstGeom prst="rect">
+            <a:avLst/>
+          </a:prstGeom>
+          <a:noFill/>
+          <a:ln/>
+        </p:spPr>
+        <p:txBody>
+          <a:bodyPr wrap="square" lIns="0" tIns="0" rIns="0" bIns="0" rtlCol="0" anchor="ctr"/>
+          <a:lstStyle/>
+          <a:p>
             <a:pPr indent="0" marL="0">
               <a:buNone/>
             </a:pPr>
             <a:r>
-              <a:rPr lang="en-US" sz="1420" dirty="0">
+              <a:rPr lang="en-US" sz="950" b="1" dirty="0">
+                <a:solidFill>
+                  <a:srgbClr val="0068B7"/>
+                </a:solidFill>
+                <a:latin typeface="Aptos" pitchFamily="34" charset="0"/>
+                <a:ea typeface="Aptos" pitchFamily="34" charset="-122"/>
+                <a:cs typeface="Aptos" pitchFamily="34" charset="-120"/>
+              </a:rPr>
+              <a:t>Key idea</a:t>
+            </a:r>
+            <a:endParaRPr lang="en-US" sz="950" dirty="0"/>
+          </a:p>
+        </p:txBody>
+      </p:sp>
+      <p:sp>
+        <p:nvSpPr>
+          <p:cNvPr id="13" name="Text 11"/>
+          <p:cNvSpPr/>
+          <p:nvPr/>
+        </p:nvSpPr>
+        <p:spPr>
+          <a:xfrm>
+            <a:off x="8074152" y="1856232"/>
+            <a:ext cx="2825496" cy="1261872"/>
+          </a:xfrm>
+          <a:prstGeom prst="rect">
+            <a:avLst/>
+          </a:prstGeom>
+          <a:noFill/>
+          <a:ln/>
+        </p:spPr>
+        <p:txBody>
+          <a:bodyPr wrap="square" lIns="0" tIns="0" rIns="0" bIns="0" rtlCol="0" anchor="t">
+            <a:normAutofit/>
+          </a:bodyPr>
+          <a:lstStyle/>
+          <a:p>
+            <a:pPr indent="0" marL="0">
+              <a:buNone/>
+            </a:pPr>
+            <a:r>
+              <a:rPr lang="en-US" sz="1250" dirty="0">
                 <a:solidFill>
                   <a:srgbClr val="17364A"/>
                 </a:solidFill>
@@ -7291,9 +13653,116 @@
                 <a:ea typeface="Aptos" pitchFamily="34" charset="-122"/>
                 <a:cs typeface="Aptos" pitchFamily="34" charset="-120"/>
               </a:rPr>
-              <a:t>A useful portfolio strategy begins with categories. Agencies can classify AI opportunities by function, such as internal productivity, knowledge management, surveillance support, decision support, communication, automation, research, or public-facing service. They can also classify by risk, such as low, moderate, high, or prohibited. These categories help leadership understand where AI activity is concentrated and whether the portfolio reflects agency priorities. Prioritization criteria should include mission alignment, expected public health benefit, workflow burden reduction, data readiness, legal authority, privacy sensitivity, equity impact, technical feasibility, implementation complexity, vendor dependency, cost, sustainability, and monitoring feasibility. A use case with high potential benefit but weak data readiness may be deferred until modernization work improves. A use case with moderate benefit and low risk may be an appropriate early pilot. Portfolio governance should include regular review. Some use cases should move from idea to pilot, from pilot to operational use, or from operational use to retirement. Others should be stopped because they lack value, create unacceptable risk, duplicate another effort, or depend on unsustainable funding. A living portfolio helps leadership make these decisions transparently.</a:t>
-            </a:r>
-            <a:endParaRPr lang="en-US" sz="1420" dirty="0"/>
+              <a:t>Public health agencies have many possible AI use cases: summarizing case notes, analyzing call logs, drafting messages,.</a:t>
+            </a:r>
+            <a:endParaRPr lang="en-US" sz="1250" dirty="0"/>
+          </a:p>
+        </p:txBody>
+      </p:sp>
+      <p:sp>
+        <p:nvSpPr>
+          <p:cNvPr id="14" name="Shape 12"/>
+          <p:cNvSpPr/>
+          <p:nvPr/>
+        </p:nvSpPr>
+        <p:spPr>
+          <a:xfrm>
+            <a:off x="7909560" y="3520440"/>
+            <a:ext cx="3154680" cy="1737360"/>
+          </a:xfrm>
+          <a:prstGeom prst="roundRect">
+            <a:avLst>
+              <a:gd name="adj" fmla="val 6316"/>
+            </a:avLst>
+          </a:prstGeom>
+          <a:solidFill>
+            <a:srgbClr val="EAF6F8"/>
+          </a:solidFill>
+          <a:ln w="12700">
+            <a:solidFill>
+              <a:srgbClr val="B9D7E6"/>
+            </a:solidFill>
+            <a:prstDash val="solid"/>
+          </a:ln>
+        </p:spPr>
+      </p:sp>
+      <p:sp>
+        <p:nvSpPr>
+          <p:cNvPr id="15" name="Text 13"/>
+          <p:cNvSpPr/>
+          <p:nvPr/>
+        </p:nvSpPr>
+        <p:spPr>
+          <a:xfrm>
+            <a:off x="8074152" y="3666744"/>
+            <a:ext cx="2825496" cy="201168"/>
+          </a:xfrm>
+          <a:prstGeom prst="rect">
+            <a:avLst/>
+          </a:prstGeom>
+          <a:noFill/>
+          <a:ln/>
+        </p:spPr>
+        <p:txBody>
+          <a:bodyPr wrap="square" lIns="0" tIns="0" rIns="0" bIns="0" rtlCol="0" anchor="ctr"/>
+          <a:lstStyle/>
+          <a:p>
+            <a:pPr indent="0" marL="0">
+              <a:buNone/>
+            </a:pPr>
+            <a:r>
+              <a:rPr lang="en-US" sz="950" b="1" dirty="0">
+                <a:solidFill>
+                  <a:srgbClr val="0068B7"/>
+                </a:solidFill>
+                <a:latin typeface="Aptos" pitchFamily="34" charset="0"/>
+                <a:ea typeface="Aptos" pitchFamily="34" charset="-122"/>
+                <a:cs typeface="Aptos" pitchFamily="34" charset="-120"/>
+              </a:rPr>
+              <a:t>Use this for</a:t>
+            </a:r>
+            <a:endParaRPr lang="en-US" sz="950" dirty="0"/>
+          </a:p>
+        </p:txBody>
+      </p:sp>
+      <p:sp>
+        <p:nvSpPr>
+          <p:cNvPr id="16" name="Text 14"/>
+          <p:cNvSpPr/>
+          <p:nvPr/>
+        </p:nvSpPr>
+        <p:spPr>
+          <a:xfrm>
+            <a:off x="8074152" y="3959352"/>
+            <a:ext cx="2825496" cy="1170432"/>
+          </a:xfrm>
+          <a:prstGeom prst="rect">
+            <a:avLst/>
+          </a:prstGeom>
+          <a:noFill/>
+          <a:ln/>
+        </p:spPr>
+        <p:txBody>
+          <a:bodyPr wrap="square" lIns="0" tIns="0" rIns="0" bIns="0" rtlCol="0" anchor="t">
+            <a:normAutofit/>
+          </a:bodyPr>
+          <a:lstStyle/>
+          <a:p>
+            <a:pPr indent="0" marL="0">
+              <a:buNone/>
+            </a:pPr>
+            <a:r>
+              <a:rPr lang="en-US" sz="1250" dirty="0">
+                <a:solidFill>
+                  <a:srgbClr val="17364A"/>
+                </a:solidFill>
+                <a:latin typeface="Aptos" pitchFamily="34" charset="0"/>
+                <a:ea typeface="Aptos" pitchFamily="34" charset="-122"/>
+                <a:cs typeface="Aptos" pitchFamily="34" charset="-120"/>
+              </a:rPr>
+              <a:t>Connect the concept to public health decisions, safeguards, documentation, or implementation work.</a:t>
+            </a:r>
+            <a:endParaRPr lang="en-US" sz="1250" dirty="0"/>
           </a:p>
         </p:txBody>
       </p:sp>
@@ -7356,7 +13825,32 @@
       </p:sp>
       <p:sp>
         <p:nvSpPr>
-          <p:cNvPr id="3" name="Text 1"/>
+          <p:cNvPr id="3" name="Shape 1"/>
+          <p:cNvSpPr/>
+          <p:nvPr/>
+        </p:nvSpPr>
+        <p:spPr>
+          <a:xfrm>
+            <a:off x="0" y="164592"/>
+            <a:ext cx="146304" cy="6693408"/>
+          </a:xfrm>
+          <a:prstGeom prst="rect">
+            <a:avLst/>
+          </a:prstGeom>
+          <a:solidFill>
+            <a:srgbClr val="2F8A28"/>
+          </a:solidFill>
+          <a:ln w="12700">
+            <a:solidFill>
+              <a:srgbClr val="2F8A28"/>
+            </a:solidFill>
+            <a:prstDash val="solid"/>
+          </a:ln>
+        </p:spPr>
+      </p:sp>
+      <p:sp>
+        <p:nvSpPr>
+          <p:cNvPr id="4" name="Text 2"/>
           <p:cNvSpPr/>
           <p:nvPr/>
         </p:nvSpPr>
@@ -7395,7 +13889,7 @@
       </p:sp>
       <p:sp>
         <p:nvSpPr>
-          <p:cNvPr id="4" name="Text 2"/>
+          <p:cNvPr id="5" name="Text 3"/>
           <p:cNvSpPr/>
           <p:nvPr/>
         </p:nvSpPr>
@@ -7434,7 +13928,7 @@
       </p:sp>
       <p:sp>
         <p:nvSpPr>
-          <p:cNvPr id="5" name="Text 3"/>
+          <p:cNvPr id="6" name="Text 4"/>
           <p:cNvSpPr/>
           <p:nvPr/>
         </p:nvSpPr>
@@ -7473,13 +13967,77 @@
       </p:sp>
       <p:sp>
         <p:nvSpPr>
-          <p:cNvPr id="6" name="Text 4"/>
+          <p:cNvPr id="7" name="Shape 5"/>
           <p:cNvSpPr/>
           <p:nvPr/>
         </p:nvSpPr>
         <p:spPr>
           <a:xfrm>
             <a:off x="640080" y="658368"/>
+            <a:ext cx="420624" cy="420624"/>
+          </a:xfrm>
+          <a:prstGeom prst="ellipse">
+            <a:avLst/>
+          </a:prstGeom>
+          <a:solidFill>
+            <a:srgbClr val="0068B7"/>
+          </a:solidFill>
+          <a:ln w="12700">
+            <a:solidFill>
+              <a:srgbClr val="0068B7"/>
+            </a:solidFill>
+            <a:prstDash val="solid"/>
+          </a:ln>
+        </p:spPr>
+      </p:sp>
+      <p:sp>
+        <p:nvSpPr>
+          <p:cNvPr id="8" name="Text 6"/>
+          <p:cNvSpPr/>
+          <p:nvPr/>
+        </p:nvSpPr>
+        <p:spPr>
+          <a:xfrm>
+            <a:off x="640080" y="731520"/>
+            <a:ext cx="420624" cy="164592"/>
+          </a:xfrm>
+          <a:prstGeom prst="rect">
+            <a:avLst/>
+          </a:prstGeom>
+          <a:noFill/>
+          <a:ln/>
+        </p:spPr>
+        <p:txBody>
+          <a:bodyPr wrap="square" lIns="0" tIns="0" rIns="0" bIns="0" rtlCol="0" anchor="ctr"/>
+          <a:lstStyle/>
+          <a:p>
+            <a:pPr algn="ctr" indent="0" marL="0">
+              <a:buNone/>
+            </a:pPr>
+            <a:r>
+              <a:rPr lang="en-US" sz="1100" b="1" dirty="0">
+                <a:solidFill>
+                  <a:srgbClr val="FFFFFF"/>
+                </a:solidFill>
+                <a:latin typeface="Aptos" pitchFamily="34" charset="0"/>
+                <a:ea typeface="Aptos" pitchFamily="34" charset="-122"/>
+                <a:cs typeface="Aptos" pitchFamily="34" charset="-120"/>
+              </a:rPr>
+              <a:t>5</a:t>
+            </a:r>
+            <a:endParaRPr lang="en-US" sz="1100" dirty="0"/>
+          </a:p>
+        </p:txBody>
+      </p:sp>
+      <p:sp>
+        <p:nvSpPr>
+          <p:cNvPr id="9" name="Text 7"/>
+          <p:cNvSpPr/>
+          <p:nvPr/>
+        </p:nvSpPr>
+        <p:spPr>
+          <a:xfrm>
+            <a:off x="640080" y="621792"/>
             <a:ext cx="10881360" cy="566928"/>
           </a:xfrm>
           <a:prstGeom prst="rect">
@@ -7506,7 +14064,7 @@
                 <a:ea typeface="Aptos Display" pitchFamily="34" charset="-122"/>
                 <a:cs typeface="Aptos Display" pitchFamily="34" charset="-120"/>
               </a:rPr>
-              <a:t>Risks, Failure Modes, and Guardrails</a:t>
+              <a:t>Public Health Example</a:t>
             </a:r>
             <a:endParaRPr lang="en-US" sz="2700" dirty="0"/>
           </a:p>
@@ -7514,32 +14072,178 @@
       </p:sp>
       <p:sp>
         <p:nvSpPr>
-          <p:cNvPr id="7" name="Text 5"/>
-          <p:cNvSpPr/>
-          <p:nvPr/>
-        </p:nvSpPr>
-        <p:spPr>
-          <a:xfrm>
-            <a:off x="822960" y="1325880"/>
-            <a:ext cx="10378440" cy="4800600"/>
-          </a:xfrm>
-          <a:prstGeom prst="rect">
-            <a:avLst/>
-          </a:prstGeom>
-          <a:noFill/>
-          <a:ln/>
-        </p:spPr>
-        <p:txBody>
-          <a:bodyPr wrap="square" lIns="1016" tIns="1016" rIns="1016" bIns="1016" rtlCol="0" anchor="t">
+          <p:cNvPr id="10" name="Text 8"/>
+          <p:cNvSpPr/>
+          <p:nvPr/>
+        </p:nvSpPr>
+        <p:spPr>
+          <a:xfrm>
+            <a:off x="868680" y="1417320"/>
+            <a:ext cx="6675120" cy="4434840"/>
+          </a:xfrm>
+          <a:prstGeom prst="rect">
+            <a:avLst/>
+          </a:prstGeom>
+          <a:noFill/>
+          <a:ln/>
+        </p:spPr>
+        <p:txBody>
+          <a:bodyPr wrap="square" lIns="635" tIns="635" rIns="635" bIns="635" rtlCol="0" anchor="t">
             <a:normAutofit/>
           </a:bodyPr>
           <a:lstStyle/>
           <a:p>
+            <a:r>
+              <a:rPr lang="en-US" sz="1700" dirty="0">
+                <a:solidFill>
+                  <a:srgbClr val="17364A"/>
+                </a:solidFill>
+                <a:latin typeface="Aptos" pitchFamily="34" charset="0"/>
+                <a:ea typeface="Aptos" pitchFamily="34" charset="-122"/>
+                <a:cs typeface="Aptos" pitchFamily="34" charset="-120"/>
+              </a:rPr>
+              <a:t>A health department receives proposals for five AI uses: a public chatbot, a staff policy assistant, an outbreak signal.</a:t>
+            </a:r>
+            <a:endParaRPr lang="en-US" sz="1700" dirty="0"/>
+          </a:p>
+          <a:p>
+            <a:r>
+              <a:rPr lang="en-US" sz="1700" dirty="0">
+                <a:solidFill>
+                  <a:srgbClr val="17364A"/>
+                </a:solidFill>
+                <a:latin typeface="Aptos" pitchFamily="34" charset="0"/>
+                <a:ea typeface="Aptos" pitchFamily="34" charset="-122"/>
+                <a:cs typeface="Aptos" pitchFamily="34" charset="-120"/>
+              </a:rPr>
+              <a:t>Each proposal has different benefits and risks.</a:t>
+            </a:r>
+            <a:endParaRPr lang="en-US" sz="1700" dirty="0"/>
+          </a:p>
+          <a:p>
+            <a:r>
+              <a:rPr lang="en-US" sz="1700" dirty="0">
+                <a:solidFill>
+                  <a:srgbClr val="17364A"/>
+                </a:solidFill>
+                <a:latin typeface="Aptos" pitchFamily="34" charset="0"/>
+                <a:ea typeface="Aptos" pitchFamily="34" charset="-122"/>
+                <a:cs typeface="Aptos" pitchFamily="34" charset="-120"/>
+              </a:rPr>
+              <a:t>A public chatbot may be visible but high-risk if it gives health advice.</a:t>
+            </a:r>
+            <a:endParaRPr lang="en-US" sz="1700" dirty="0"/>
+          </a:p>
+          <a:p>
+            <a:r>
+              <a:rPr lang="en-US" sz="1700" dirty="0">
+                <a:solidFill>
+                  <a:srgbClr val="17364A"/>
+                </a:solidFill>
+                <a:latin typeface="Aptos" pitchFamily="34" charset="0"/>
+                <a:ea typeface="Aptos" pitchFamily="34" charset="-122"/>
+                <a:cs typeface="Aptos" pitchFamily="34" charset="-120"/>
+              </a:rPr>
+              <a:t>A staff policy assistant may be lower risk if it uses approved internal documents.</a:t>
+            </a:r>
+            <a:endParaRPr lang="en-US" sz="1700" dirty="0"/>
+          </a:p>
+        </p:txBody>
+      </p:sp>
+      <p:sp>
+        <p:nvSpPr>
+          <p:cNvPr id="11" name="Shape 9"/>
+          <p:cNvSpPr/>
+          <p:nvPr/>
+        </p:nvSpPr>
+        <p:spPr>
+          <a:xfrm>
+            <a:off x="7909560" y="1417320"/>
+            <a:ext cx="3154680" cy="1828800"/>
+          </a:xfrm>
+          <a:prstGeom prst="roundRect">
+            <a:avLst>
+              <a:gd name="adj" fmla="val 6000"/>
+            </a:avLst>
+          </a:prstGeom>
+          <a:solidFill>
+            <a:srgbClr val="EEF8ED"/>
+          </a:solidFill>
+          <a:ln w="12700">
+            <a:solidFill>
+              <a:srgbClr val="B9D7E6"/>
+            </a:solidFill>
+            <a:prstDash val="solid"/>
+          </a:ln>
+        </p:spPr>
+      </p:sp>
+      <p:sp>
+        <p:nvSpPr>
+          <p:cNvPr id="12" name="Text 10"/>
+          <p:cNvSpPr/>
+          <p:nvPr/>
+        </p:nvSpPr>
+        <p:spPr>
+          <a:xfrm>
+            <a:off x="8074152" y="1563624"/>
+            <a:ext cx="2825496" cy="201168"/>
+          </a:xfrm>
+          <a:prstGeom prst="rect">
+            <a:avLst/>
+          </a:prstGeom>
+          <a:noFill/>
+          <a:ln/>
+        </p:spPr>
+        <p:txBody>
+          <a:bodyPr wrap="square" lIns="0" tIns="0" rIns="0" bIns="0" rtlCol="0" anchor="ctr"/>
+          <a:lstStyle/>
+          <a:p>
             <a:pPr indent="0" marL="0">
               <a:buNone/>
             </a:pPr>
             <a:r>
-              <a:rPr lang="en-US" sz="1420" dirty="0">
+              <a:rPr lang="en-US" sz="950" b="1" dirty="0">
+                <a:solidFill>
+                  <a:srgbClr val="0068B7"/>
+                </a:solidFill>
+                <a:latin typeface="Aptos" pitchFamily="34" charset="0"/>
+                <a:ea typeface="Aptos" pitchFamily="34" charset="-122"/>
+                <a:cs typeface="Aptos" pitchFamily="34" charset="-120"/>
+              </a:rPr>
+              <a:t>Key idea</a:t>
+            </a:r>
+            <a:endParaRPr lang="en-US" sz="950" dirty="0"/>
+          </a:p>
+        </p:txBody>
+      </p:sp>
+      <p:sp>
+        <p:nvSpPr>
+          <p:cNvPr id="13" name="Text 11"/>
+          <p:cNvSpPr/>
+          <p:nvPr/>
+        </p:nvSpPr>
+        <p:spPr>
+          <a:xfrm>
+            <a:off x="8074152" y="1856232"/>
+            <a:ext cx="2825496" cy="1261872"/>
+          </a:xfrm>
+          <a:prstGeom prst="rect">
+            <a:avLst/>
+          </a:prstGeom>
+          <a:noFill/>
+          <a:ln/>
+        </p:spPr>
+        <p:txBody>
+          <a:bodyPr wrap="square" lIns="0" tIns="0" rIns="0" bIns="0" rtlCol="0" anchor="t">
+            <a:normAutofit/>
+          </a:bodyPr>
+          <a:lstStyle/>
+          <a:p>
+            <a:pPr indent="0" marL="0">
+              <a:buNone/>
+            </a:pPr>
+            <a:r>
+              <a:rPr lang="en-US" sz="1250" dirty="0">
                 <a:solidFill>
                   <a:srgbClr val="17364A"/>
                 </a:solidFill>
@@ -7547,9 +14251,116 @@
                 <a:ea typeface="Aptos" pitchFamily="34" charset="-122"/>
                 <a:cs typeface="Aptos" pitchFamily="34" charset="-120"/>
               </a:rPr>
-              <a:t>A major risk is pilot proliferation. Agencies may launch many small AI pilots without a pathway to scale, evaluate, sustain, or retire them. A guardrail is to require every pilot to define success criteria, evaluation evidence, funding assumptions, and an end point. Another risk is inequitable prioritization. Projects serving better-resourced programs may advance faster than projects addressing underserved communities. A guardrail is to include equity impact and community benefit in the prioritization rubric.</a:t>
-            </a:r>
-            <a:endParaRPr lang="en-US" sz="1420" dirty="0"/>
+              <a:t>A health department receives proposals for five AI uses: a public chatbot, a staff policy assistant, an outbreak signal.</a:t>
+            </a:r>
+            <a:endParaRPr lang="en-US" sz="1250" dirty="0"/>
+          </a:p>
+        </p:txBody>
+      </p:sp>
+      <p:sp>
+        <p:nvSpPr>
+          <p:cNvPr id="14" name="Shape 12"/>
+          <p:cNvSpPr/>
+          <p:nvPr/>
+        </p:nvSpPr>
+        <p:spPr>
+          <a:xfrm>
+            <a:off x="7909560" y="3520440"/>
+            <a:ext cx="3154680" cy="1737360"/>
+          </a:xfrm>
+          <a:prstGeom prst="roundRect">
+            <a:avLst>
+              <a:gd name="adj" fmla="val 6316"/>
+            </a:avLst>
+          </a:prstGeom>
+          <a:solidFill>
+            <a:srgbClr val="EAF6F8"/>
+          </a:solidFill>
+          <a:ln w="12700">
+            <a:solidFill>
+              <a:srgbClr val="B9D7E6"/>
+            </a:solidFill>
+            <a:prstDash val="solid"/>
+          </a:ln>
+        </p:spPr>
+      </p:sp>
+      <p:sp>
+        <p:nvSpPr>
+          <p:cNvPr id="15" name="Text 13"/>
+          <p:cNvSpPr/>
+          <p:nvPr/>
+        </p:nvSpPr>
+        <p:spPr>
+          <a:xfrm>
+            <a:off x="8074152" y="3666744"/>
+            <a:ext cx="2825496" cy="201168"/>
+          </a:xfrm>
+          <a:prstGeom prst="rect">
+            <a:avLst/>
+          </a:prstGeom>
+          <a:noFill/>
+          <a:ln/>
+        </p:spPr>
+        <p:txBody>
+          <a:bodyPr wrap="square" lIns="0" tIns="0" rIns="0" bIns="0" rtlCol="0" anchor="ctr"/>
+          <a:lstStyle/>
+          <a:p>
+            <a:pPr indent="0" marL="0">
+              <a:buNone/>
+            </a:pPr>
+            <a:r>
+              <a:rPr lang="en-US" sz="950" b="1" dirty="0">
+                <a:solidFill>
+                  <a:srgbClr val="0068B7"/>
+                </a:solidFill>
+                <a:latin typeface="Aptos" pitchFamily="34" charset="0"/>
+                <a:ea typeface="Aptos" pitchFamily="34" charset="-122"/>
+                <a:cs typeface="Aptos" pitchFamily="34" charset="-120"/>
+              </a:rPr>
+              <a:t>Use this for</a:t>
+            </a:r>
+            <a:endParaRPr lang="en-US" sz="950" dirty="0"/>
+          </a:p>
+        </p:txBody>
+      </p:sp>
+      <p:sp>
+        <p:nvSpPr>
+          <p:cNvPr id="16" name="Text 14"/>
+          <p:cNvSpPr/>
+          <p:nvPr/>
+        </p:nvSpPr>
+        <p:spPr>
+          <a:xfrm>
+            <a:off x="8074152" y="3959352"/>
+            <a:ext cx="2825496" cy="1170432"/>
+          </a:xfrm>
+          <a:prstGeom prst="rect">
+            <a:avLst/>
+          </a:prstGeom>
+          <a:noFill/>
+          <a:ln/>
+        </p:spPr>
+        <p:txBody>
+          <a:bodyPr wrap="square" lIns="0" tIns="0" rIns="0" bIns="0" rtlCol="0" anchor="t">
+            <a:normAutofit/>
+          </a:bodyPr>
+          <a:lstStyle/>
+          <a:p>
+            <a:pPr indent="0" marL="0">
+              <a:buNone/>
+            </a:pPr>
+            <a:r>
+              <a:rPr lang="en-US" sz="1250" dirty="0">
+                <a:solidFill>
+                  <a:srgbClr val="17364A"/>
+                </a:solidFill>
+                <a:latin typeface="Aptos" pitchFamily="34" charset="0"/>
+                <a:ea typeface="Aptos" pitchFamily="34" charset="-122"/>
+                <a:cs typeface="Aptos" pitchFamily="34" charset="-120"/>
+              </a:rPr>
+              <a:t>Connect the concept to public health decisions, safeguards, documentation, or implementation work.</a:t>
+            </a:r>
+            <a:endParaRPr lang="en-US" sz="1250" dirty="0"/>
           </a:p>
         </p:txBody>
       </p:sp>

--- a/downloads/presentations/modules/lesson-33-ai-portfolio-strategy-and-use-case-prioritization.pptx
+++ b/downloads/presentations/modules/lesson-33-ai-portfolio-strategy-and-use-case-prioritization.pptx
@@ -2900,6 +2900,45 @@
           </a:p>
         </p:txBody>
       </p:sp>
+      <p:sp>
+        <p:nvSpPr>
+          <p:cNvPr id="8" name="Text 5"/>
+          <p:cNvSpPr/>
+          <p:nvPr/>
+        </p:nvSpPr>
+        <p:spPr>
+          <a:xfrm>
+            <a:off x="11137392" y="6510528"/>
+            <a:ext cx="411480" cy="201168"/>
+          </a:xfrm>
+          <a:prstGeom prst="rect">
+            <a:avLst/>
+          </a:prstGeom>
+          <a:noFill/>
+          <a:ln/>
+        </p:spPr>
+        <p:txBody>
+          <a:bodyPr wrap="square" lIns="0" tIns="0" rIns="0" bIns="0" rtlCol="0" anchor="ctr"/>
+          <a:lstStyle/>
+          <a:p>
+            <a:pPr algn="r" indent="0" marL="0">
+              <a:buNone/>
+            </a:pPr>
+            <a:r>
+              <a:rPr lang="en-US" sz="900" dirty="0">
+                <a:solidFill>
+                  <a:srgbClr val="5F7181"/>
+                </a:solidFill>
+                <a:latin typeface="Aptos" pitchFamily="34" charset="0"/>
+                <a:ea typeface="Aptos" pitchFamily="34" charset="-122"/>
+                <a:cs typeface="Aptos" pitchFamily="34" charset="-120"/>
+              </a:rPr>
+              <a:t>1</a:t>
+            </a:r>
+            <a:endParaRPr lang="en-US" sz="900" dirty="0"/>
+          </a:p>
+        </p:txBody>
+      </p:sp>
     </p:spTree>
   </p:cSld>
   <p:clrMapOvr>
@@ -3093,7 +3132,7 @@
                 <a:ea typeface="Aptos" pitchFamily="34" charset="-122"/>
                 <a:cs typeface="Aptos" pitchFamily="34" charset="-120"/>
               </a:rPr>
-              <a:t>© Paula Soper</a:t>
+              <a:t>Â© Paula Soper</a:t>
             </a:r>
             <a:endParaRPr lang="en-US" sz="800" dirty="0"/>
           </a:p>
@@ -3101,7 +3140,46 @@
       </p:sp>
       <p:sp>
         <p:nvSpPr>
-          <p:cNvPr id="7" name="Shape 5"/>
+          <p:cNvPr id="7" name="Text 5"/>
+          <p:cNvSpPr/>
+          <p:nvPr/>
+        </p:nvSpPr>
+        <p:spPr>
+          <a:xfrm>
+            <a:off x="11137392" y="6510528"/>
+            <a:ext cx="411480" cy="201168"/>
+          </a:xfrm>
+          <a:prstGeom prst="rect">
+            <a:avLst/>
+          </a:prstGeom>
+          <a:noFill/>
+          <a:ln/>
+        </p:spPr>
+        <p:txBody>
+          <a:bodyPr wrap="square" lIns="0" tIns="0" rIns="0" bIns="0" rtlCol="0" anchor="ctr"/>
+          <a:lstStyle/>
+          <a:p>
+            <a:pPr algn="r" indent="0" marL="0">
+              <a:buNone/>
+            </a:pPr>
+            <a:r>
+              <a:rPr lang="en-US" sz="900" dirty="0">
+                <a:solidFill>
+                  <a:srgbClr val="5F7181"/>
+                </a:solidFill>
+                <a:latin typeface="Aptos" pitchFamily="34" charset="0"/>
+                <a:ea typeface="Aptos" pitchFamily="34" charset="-122"/>
+                <a:cs typeface="Aptos" pitchFamily="34" charset="-120"/>
+              </a:rPr>
+              <a:t>10</a:t>
+            </a:r>
+            <a:endParaRPr lang="en-US" sz="900" dirty="0"/>
+          </a:p>
+        </p:txBody>
+      </p:sp>
+      <p:sp>
+        <p:nvSpPr>
+          <p:cNvPr id="8" name="Shape 6"/>
           <p:cNvSpPr/>
           <p:nvPr/>
         </p:nvSpPr>
@@ -3126,7 +3204,7 @@
       </p:sp>
       <p:sp>
         <p:nvSpPr>
-          <p:cNvPr id="8" name="Text 6"/>
+          <p:cNvPr id="9" name="Text 7"/>
           <p:cNvSpPr/>
           <p:nvPr/>
         </p:nvSpPr>
@@ -3165,14 +3243,14 @@
       </p:sp>
       <p:sp>
         <p:nvSpPr>
-          <p:cNvPr id="9" name="Text 7"/>
+          <p:cNvPr id="10" name="Text 8"/>
           <p:cNvSpPr/>
           <p:nvPr/>
         </p:nvSpPr>
         <p:spPr>
           <a:xfrm>
             <a:off x="640080" y="621792"/>
-            <a:ext cx="10881360" cy="566928"/>
+            <a:ext cx="10881360" cy="713232"/>
           </a:xfrm>
           <a:prstGeom prst="rect">
             <a:avLst/>
@@ -3190,7 +3268,7 @@
               <a:buNone/>
             </a:pPr>
             <a:r>
-              <a:rPr lang="en-US" sz="2700" b="1" dirty="0">
+              <a:rPr lang="en-US" sz="3400" b="1" dirty="0">
                 <a:solidFill>
                   <a:srgbClr val="003A63"/>
                 </a:solidFill>
@@ -3200,20 +3278,20 @@
               </a:rPr>
               <a:t>Technical and Governance Deep Dive</a:t>
             </a:r>
-            <a:endParaRPr lang="en-US" sz="2700" dirty="0"/>
-          </a:p>
-        </p:txBody>
-      </p:sp>
-      <p:sp>
-        <p:nvSpPr>
-          <p:cNvPr id="10" name="Text 8"/>
-          <p:cNvSpPr/>
-          <p:nvPr/>
-        </p:nvSpPr>
-        <p:spPr>
-          <a:xfrm>
-            <a:off x="868680" y="1417320"/>
-            <a:ext cx="6675120" cy="4434840"/>
+            <a:endParaRPr lang="en-US" sz="3400" dirty="0"/>
+          </a:p>
+        </p:txBody>
+      </p:sp>
+      <p:sp>
+        <p:nvSpPr>
+          <p:cNvPr id="11" name="Text 9"/>
+          <p:cNvSpPr/>
+          <p:nvPr/>
+        </p:nvSpPr>
+        <p:spPr>
+          <a:xfrm>
+            <a:off x="868680" y="1508760"/>
+            <a:ext cx="6537960" cy="4160520"/>
           </a:xfrm>
           <a:prstGeom prst="rect">
             <a:avLst/>
@@ -3228,7 +3306,7 @@
           <a:lstStyle/>
           <a:p>
             <a:r>
-              <a:rPr lang="en-US" sz="1700" dirty="0">
+              <a:rPr lang="en-US" sz="2100" dirty="0">
                 <a:solidFill>
                   <a:srgbClr val="17364A"/>
                 </a:solidFill>
@@ -3238,11 +3316,11 @@
               </a:rPr>
               <a:t>A useful portfolio strategy begins with categories.</a:t>
             </a:r>
-            <a:endParaRPr lang="en-US" sz="1700" dirty="0"/>
-          </a:p>
-          <a:p>
-            <a:r>
-              <a:rPr lang="en-US" sz="1700" dirty="0">
+            <a:endParaRPr lang="en-US" sz="2100" dirty="0"/>
+          </a:p>
+          <a:p>
+            <a:r>
+              <a:rPr lang="en-US" sz="2100" dirty="0">
                 <a:solidFill>
                   <a:srgbClr val="17364A"/>
                 </a:solidFill>
@@ -3250,13 +3328,13 @@
                 <a:ea typeface="Aptos" pitchFamily="34" charset="-122"/>
                 <a:cs typeface="Aptos" pitchFamily="34" charset="-120"/>
               </a:rPr>
-              <a:t>Agencies can classify AI opportunities by function, such as internal productivity, knowledge management, surveillance.</a:t>
-            </a:r>
-            <a:endParaRPr lang="en-US" sz="1700" dirty="0"/>
-          </a:p>
-          <a:p>
-            <a:r>
-              <a:rPr lang="en-US" sz="1700" dirty="0">
+              <a:t>Agencies can classify AI opportunities by function, such as internal productivity, knowledge.</a:t>
+            </a:r>
+            <a:endParaRPr lang="en-US" sz="2100" dirty="0"/>
+          </a:p>
+          <a:p>
+            <a:r>
+              <a:rPr lang="en-US" sz="2100" dirty="0">
                 <a:solidFill>
                   <a:srgbClr val="17364A"/>
                 </a:solidFill>
@@ -3266,27 +3344,13 @@
               </a:rPr>
               <a:t>They can also classify by risk, such as low, moderate, high, or prohibited.</a:t>
             </a:r>
-            <a:endParaRPr lang="en-US" sz="1700" dirty="0"/>
-          </a:p>
-          <a:p>
-            <a:r>
-              <a:rPr lang="en-US" sz="1700" dirty="0">
-                <a:solidFill>
-                  <a:srgbClr val="17364A"/>
-                </a:solidFill>
-                <a:latin typeface="Aptos" pitchFamily="34" charset="0"/>
-                <a:ea typeface="Aptos" pitchFamily="34" charset="-122"/>
-                <a:cs typeface="Aptos" pitchFamily="34" charset="-120"/>
-              </a:rPr>
-              <a:t>These categories help leadership understand where AI activity is concentrated and whether the portfolio reflects agency.</a:t>
-            </a:r>
-            <a:endParaRPr lang="en-US" sz="1700" dirty="0"/>
-          </a:p>
-        </p:txBody>
-      </p:sp>
-      <p:sp>
-        <p:nvSpPr>
-          <p:cNvPr id="11" name="Shape 9"/>
+            <a:endParaRPr lang="en-US" sz="2100" dirty="0"/>
+          </a:p>
+        </p:txBody>
+      </p:sp>
+      <p:sp>
+        <p:nvSpPr>
+          <p:cNvPr id="12" name="Shape 10"/>
           <p:cNvSpPr/>
           <p:nvPr/>
         </p:nvSpPr>
@@ -3313,14 +3377,14 @@
       </p:sp>
       <p:sp>
         <p:nvSpPr>
-          <p:cNvPr id="12" name="Text 10"/>
+          <p:cNvPr id="13" name="Text 11"/>
           <p:cNvSpPr/>
           <p:nvPr/>
         </p:nvSpPr>
         <p:spPr>
           <a:xfrm>
             <a:off x="8074152" y="1563624"/>
-            <a:ext cx="2825496" cy="201168"/>
+            <a:ext cx="2825496" cy="256032"/>
           </a:xfrm>
           <a:prstGeom prst="rect">
             <a:avLst/>
@@ -3336,7 +3400,7 @@
               <a:buNone/>
             </a:pPr>
             <a:r>
-              <a:rPr lang="en-US" sz="950" b="1" dirty="0">
+              <a:rPr lang="en-US" sz="1300" b="1" dirty="0">
                 <a:solidFill>
                   <a:srgbClr val="0068B7"/>
                 </a:solidFill>
@@ -3346,20 +3410,20 @@
               </a:rPr>
               <a:t>Key idea</a:t>
             </a:r>
-            <a:endParaRPr lang="en-US" sz="950" dirty="0"/>
-          </a:p>
-        </p:txBody>
-      </p:sp>
-      <p:sp>
-        <p:nvSpPr>
-          <p:cNvPr id="13" name="Text 11"/>
-          <p:cNvSpPr/>
-          <p:nvPr/>
-        </p:nvSpPr>
-        <p:spPr>
-          <a:xfrm>
-            <a:off x="8074152" y="1856232"/>
-            <a:ext cx="2825496" cy="1261872"/>
+            <a:endParaRPr lang="en-US" sz="1300" dirty="0"/>
+          </a:p>
+        </p:txBody>
+      </p:sp>
+      <p:sp>
+        <p:nvSpPr>
+          <p:cNvPr id="14" name="Text 12"/>
+          <p:cNvSpPr/>
+          <p:nvPr/>
+        </p:nvSpPr>
+        <p:spPr>
+          <a:xfrm>
+            <a:off x="8074152" y="1920240"/>
+            <a:ext cx="2825496" cy="1188720"/>
           </a:xfrm>
           <a:prstGeom prst="rect">
             <a:avLst/>
@@ -3377,7 +3441,7 @@
               <a:buNone/>
             </a:pPr>
             <a:r>
-              <a:rPr lang="en-US" sz="1250" dirty="0">
+              <a:rPr lang="en-US" sz="1550" dirty="0">
                 <a:solidFill>
                   <a:srgbClr val="17364A"/>
                 </a:solidFill>
@@ -3387,13 +3451,13 @@
               </a:rPr>
               <a:t>A useful portfolio strategy begins with categories.</a:t>
             </a:r>
-            <a:endParaRPr lang="en-US" sz="1250" dirty="0"/>
-          </a:p>
-        </p:txBody>
-      </p:sp>
-      <p:sp>
-        <p:nvSpPr>
-          <p:cNvPr id="14" name="Shape 12"/>
+            <a:endParaRPr lang="en-US" sz="1550" dirty="0"/>
+          </a:p>
+        </p:txBody>
+      </p:sp>
+      <p:sp>
+        <p:nvSpPr>
+          <p:cNvPr id="15" name="Shape 13"/>
           <p:cNvSpPr/>
           <p:nvPr/>
         </p:nvSpPr>
@@ -3420,14 +3484,14 @@
       </p:sp>
       <p:sp>
         <p:nvSpPr>
-          <p:cNvPr id="15" name="Text 13"/>
+          <p:cNvPr id="16" name="Text 14"/>
           <p:cNvSpPr/>
           <p:nvPr/>
         </p:nvSpPr>
         <p:spPr>
           <a:xfrm>
             <a:off x="8074152" y="3666744"/>
-            <a:ext cx="2825496" cy="201168"/>
+            <a:ext cx="2825496" cy="256032"/>
           </a:xfrm>
           <a:prstGeom prst="rect">
             <a:avLst/>
@@ -3443,7 +3507,7 @@
               <a:buNone/>
             </a:pPr>
             <a:r>
-              <a:rPr lang="en-US" sz="950" b="1" dirty="0">
+              <a:rPr lang="en-US" sz="1300" b="1" dirty="0">
                 <a:solidFill>
                   <a:srgbClr val="0068B7"/>
                 </a:solidFill>
@@ -3453,20 +3517,20 @@
               </a:rPr>
               <a:t>Use this for</a:t>
             </a:r>
-            <a:endParaRPr lang="en-US" sz="950" dirty="0"/>
-          </a:p>
-        </p:txBody>
-      </p:sp>
-      <p:sp>
-        <p:nvSpPr>
-          <p:cNvPr id="16" name="Text 14"/>
-          <p:cNvSpPr/>
-          <p:nvPr/>
-        </p:nvSpPr>
-        <p:spPr>
-          <a:xfrm>
-            <a:off x="8074152" y="3959352"/>
-            <a:ext cx="2825496" cy="1170432"/>
+            <a:endParaRPr lang="en-US" sz="1300" dirty="0"/>
+          </a:p>
+        </p:txBody>
+      </p:sp>
+      <p:sp>
+        <p:nvSpPr>
+          <p:cNvPr id="17" name="Text 15"/>
+          <p:cNvSpPr/>
+          <p:nvPr/>
+        </p:nvSpPr>
+        <p:spPr>
+          <a:xfrm>
+            <a:off x="8074152" y="4023360"/>
+            <a:ext cx="2825496" cy="1097280"/>
           </a:xfrm>
           <a:prstGeom prst="rect">
             <a:avLst/>
@@ -3484,7 +3548,7 @@
               <a:buNone/>
             </a:pPr>
             <a:r>
-              <a:rPr lang="en-US" sz="1250" dirty="0">
+              <a:rPr lang="en-US" sz="1550" dirty="0">
                 <a:solidFill>
                   <a:srgbClr val="17364A"/>
                 </a:solidFill>
@@ -3494,7 +3558,7 @@
               </a:rPr>
               <a:t>Connect the concept to public health decisions, safeguards, documentation, or implementation work.</a:t>
             </a:r>
-            <a:endParaRPr lang="en-US" sz="1250" dirty="0"/>
+            <a:endParaRPr lang="en-US" sz="1550" dirty="0"/>
           </a:p>
         </p:txBody>
       </p:sp>
@@ -3691,7 +3755,7 @@
                 <a:ea typeface="Aptos" pitchFamily="34" charset="-122"/>
                 <a:cs typeface="Aptos" pitchFamily="34" charset="-120"/>
               </a:rPr>
-              <a:t>© Paula Soper</a:t>
+              <a:t>Â© Paula Soper</a:t>
             </a:r>
             <a:endParaRPr lang="en-US" sz="800" dirty="0"/>
           </a:p>
@@ -3699,7 +3763,46 @@
       </p:sp>
       <p:sp>
         <p:nvSpPr>
-          <p:cNvPr id="7" name="Shape 5"/>
+          <p:cNvPr id="7" name="Text 5"/>
+          <p:cNvSpPr/>
+          <p:nvPr/>
+        </p:nvSpPr>
+        <p:spPr>
+          <a:xfrm>
+            <a:off x="11137392" y="6510528"/>
+            <a:ext cx="411480" cy="201168"/>
+          </a:xfrm>
+          <a:prstGeom prst="rect">
+            <a:avLst/>
+          </a:prstGeom>
+          <a:noFill/>
+          <a:ln/>
+        </p:spPr>
+        <p:txBody>
+          <a:bodyPr wrap="square" lIns="0" tIns="0" rIns="0" bIns="0" rtlCol="0" anchor="ctr"/>
+          <a:lstStyle/>
+          <a:p>
+            <a:pPr algn="r" indent="0" marL="0">
+              <a:buNone/>
+            </a:pPr>
+            <a:r>
+              <a:rPr lang="en-US" sz="900" dirty="0">
+                <a:solidFill>
+                  <a:srgbClr val="5F7181"/>
+                </a:solidFill>
+                <a:latin typeface="Aptos" pitchFamily="34" charset="0"/>
+                <a:ea typeface="Aptos" pitchFamily="34" charset="-122"/>
+                <a:cs typeface="Aptos" pitchFamily="34" charset="-120"/>
+              </a:rPr>
+              <a:t>11</a:t>
+            </a:r>
+            <a:endParaRPr lang="en-US" sz="900" dirty="0"/>
+          </a:p>
+        </p:txBody>
+      </p:sp>
+      <p:sp>
+        <p:nvSpPr>
+          <p:cNvPr id="8" name="Shape 6"/>
           <p:cNvSpPr/>
           <p:nvPr/>
         </p:nvSpPr>
@@ -3724,7 +3827,7 @@
       </p:sp>
       <p:sp>
         <p:nvSpPr>
-          <p:cNvPr id="8" name="Text 6"/>
+          <p:cNvPr id="9" name="Text 7"/>
           <p:cNvSpPr/>
           <p:nvPr/>
         </p:nvSpPr>
@@ -3763,14 +3866,14 @@
       </p:sp>
       <p:sp>
         <p:nvSpPr>
-          <p:cNvPr id="9" name="Text 7"/>
+          <p:cNvPr id="10" name="Text 8"/>
           <p:cNvSpPr/>
           <p:nvPr/>
         </p:nvSpPr>
         <p:spPr>
           <a:xfrm>
             <a:off x="640080" y="621792"/>
-            <a:ext cx="10881360" cy="566928"/>
+            <a:ext cx="10881360" cy="713232"/>
           </a:xfrm>
           <a:prstGeom prst="rect">
             <a:avLst/>
@@ -3788,7 +3891,7 @@
               <a:buNone/>
             </a:pPr>
             <a:r>
-              <a:rPr lang="en-US" sz="2700" b="1" dirty="0">
+              <a:rPr lang="en-US" sz="3400" b="1" dirty="0">
                 <a:solidFill>
                   <a:srgbClr val="003A63"/>
                 </a:solidFill>
@@ -3798,20 +3901,20 @@
               </a:rPr>
               <a:t>Risks, Failure Modes, and Guardrails</a:t>
             </a:r>
-            <a:endParaRPr lang="en-US" sz="2700" dirty="0"/>
-          </a:p>
-        </p:txBody>
-      </p:sp>
-      <p:sp>
-        <p:nvSpPr>
-          <p:cNvPr id="10" name="Text 8"/>
-          <p:cNvSpPr/>
-          <p:nvPr/>
-        </p:nvSpPr>
-        <p:spPr>
-          <a:xfrm>
-            <a:off x="868680" y="1417320"/>
-            <a:ext cx="6675120" cy="4434840"/>
+            <a:endParaRPr lang="en-US" sz="3400" dirty="0"/>
+          </a:p>
+        </p:txBody>
+      </p:sp>
+      <p:sp>
+        <p:nvSpPr>
+          <p:cNvPr id="11" name="Text 9"/>
+          <p:cNvSpPr/>
+          <p:nvPr/>
+        </p:nvSpPr>
+        <p:spPr>
+          <a:xfrm>
+            <a:off x="868680" y="1508760"/>
+            <a:ext cx="6537960" cy="4160520"/>
           </a:xfrm>
           <a:prstGeom prst="rect">
             <a:avLst/>
@@ -3826,7 +3929,7 @@
           <a:lstStyle/>
           <a:p>
             <a:r>
-              <a:rPr lang="en-US" sz="1700" dirty="0">
+              <a:rPr lang="en-US" sz="2100" dirty="0">
                 <a:solidFill>
                   <a:srgbClr val="17364A"/>
                 </a:solidFill>
@@ -3836,11 +3939,11 @@
               </a:rPr>
               <a:t>A major risk is pilot proliferation.</a:t>
             </a:r>
-            <a:endParaRPr lang="en-US" sz="1700" dirty="0"/>
-          </a:p>
-          <a:p>
-            <a:r>
-              <a:rPr lang="en-US" sz="1700" dirty="0">
+            <a:endParaRPr lang="en-US" sz="2100" dirty="0"/>
+          </a:p>
+          <a:p>
+            <a:r>
+              <a:rPr lang="en-US" sz="2100" dirty="0">
                 <a:solidFill>
                   <a:srgbClr val="17364A"/>
                 </a:solidFill>
@@ -3850,11 +3953,11 @@
               </a:rPr>
               <a:t>Agencies may launch many small AI pilots without a pathway to scale, evaluate, sustain, or retire them.</a:t>
             </a:r>
-            <a:endParaRPr lang="en-US" sz="1700" dirty="0"/>
-          </a:p>
-          <a:p>
-            <a:r>
-              <a:rPr lang="en-US" sz="1700" dirty="0">
+            <a:endParaRPr lang="en-US" sz="2100" dirty="0"/>
+          </a:p>
+          <a:p>
+            <a:r>
+              <a:rPr lang="en-US" sz="2100" dirty="0">
                 <a:solidFill>
                   <a:srgbClr val="17364A"/>
                 </a:solidFill>
@@ -3862,29 +3965,15 @@
                 <a:ea typeface="Aptos" pitchFamily="34" charset="-122"/>
                 <a:cs typeface="Aptos" pitchFamily="34" charset="-120"/>
               </a:rPr>
-              <a:t>A guardrail is to require every pilot to define success criteria, evaluation evidence, funding assumptions, and an end point.</a:t>
-            </a:r>
-            <a:endParaRPr lang="en-US" sz="1700" dirty="0"/>
-          </a:p>
-          <a:p>
-            <a:r>
-              <a:rPr lang="en-US" sz="1700" dirty="0">
-                <a:solidFill>
-                  <a:srgbClr val="17364A"/>
-                </a:solidFill>
-                <a:latin typeface="Aptos" pitchFamily="34" charset="0"/>
-                <a:ea typeface="Aptos" pitchFamily="34" charset="-122"/>
-                <a:cs typeface="Aptos" pitchFamily="34" charset="-120"/>
-              </a:rPr>
-              <a:t>Another risk is inequitable prioritization.</a:t>
-            </a:r>
-            <a:endParaRPr lang="en-US" sz="1700" dirty="0"/>
-          </a:p>
-        </p:txBody>
-      </p:sp>
-      <p:sp>
-        <p:nvSpPr>
-          <p:cNvPr id="11" name="Shape 9"/>
+              <a:t>A guardrail is to require every pilot to define success criteria, evaluation evidence, funding.</a:t>
+            </a:r>
+            <a:endParaRPr lang="en-US" sz="2100" dirty="0"/>
+          </a:p>
+        </p:txBody>
+      </p:sp>
+      <p:sp>
+        <p:nvSpPr>
+          <p:cNvPr id="12" name="Shape 10"/>
           <p:cNvSpPr/>
           <p:nvPr/>
         </p:nvSpPr>
@@ -3911,14 +4000,14 @@
       </p:sp>
       <p:sp>
         <p:nvSpPr>
-          <p:cNvPr id="12" name="Text 10"/>
+          <p:cNvPr id="13" name="Text 11"/>
           <p:cNvSpPr/>
           <p:nvPr/>
         </p:nvSpPr>
         <p:spPr>
           <a:xfrm>
             <a:off x="8074152" y="1563624"/>
-            <a:ext cx="2825496" cy="201168"/>
+            <a:ext cx="2825496" cy="256032"/>
           </a:xfrm>
           <a:prstGeom prst="rect">
             <a:avLst/>
@@ -3934,7 +4023,7 @@
               <a:buNone/>
             </a:pPr>
             <a:r>
-              <a:rPr lang="en-US" sz="950" b="1" dirty="0">
+              <a:rPr lang="en-US" sz="1300" b="1" dirty="0">
                 <a:solidFill>
                   <a:srgbClr val="0068B7"/>
                 </a:solidFill>
@@ -3944,20 +4033,20 @@
               </a:rPr>
               <a:t>Key idea</a:t>
             </a:r>
-            <a:endParaRPr lang="en-US" sz="950" dirty="0"/>
-          </a:p>
-        </p:txBody>
-      </p:sp>
-      <p:sp>
-        <p:nvSpPr>
-          <p:cNvPr id="13" name="Text 11"/>
-          <p:cNvSpPr/>
-          <p:nvPr/>
-        </p:nvSpPr>
-        <p:spPr>
-          <a:xfrm>
-            <a:off x="8074152" y="1856232"/>
-            <a:ext cx="2825496" cy="1261872"/>
+            <a:endParaRPr lang="en-US" sz="1300" dirty="0"/>
+          </a:p>
+        </p:txBody>
+      </p:sp>
+      <p:sp>
+        <p:nvSpPr>
+          <p:cNvPr id="14" name="Text 12"/>
+          <p:cNvSpPr/>
+          <p:nvPr/>
+        </p:nvSpPr>
+        <p:spPr>
+          <a:xfrm>
+            <a:off x="8074152" y="1920240"/>
+            <a:ext cx="2825496" cy="1188720"/>
           </a:xfrm>
           <a:prstGeom prst="rect">
             <a:avLst/>
@@ -3975,7 +4064,7 @@
               <a:buNone/>
             </a:pPr>
             <a:r>
-              <a:rPr lang="en-US" sz="1250" dirty="0">
+              <a:rPr lang="en-US" sz="1550" dirty="0">
                 <a:solidFill>
                   <a:srgbClr val="17364A"/>
                 </a:solidFill>
@@ -3985,13 +4074,13 @@
               </a:rPr>
               <a:t>A major risk is pilot proliferation.</a:t>
             </a:r>
-            <a:endParaRPr lang="en-US" sz="1250" dirty="0"/>
-          </a:p>
-        </p:txBody>
-      </p:sp>
-      <p:sp>
-        <p:nvSpPr>
-          <p:cNvPr id="14" name="Shape 12"/>
+            <a:endParaRPr lang="en-US" sz="1550" dirty="0"/>
+          </a:p>
+        </p:txBody>
+      </p:sp>
+      <p:sp>
+        <p:nvSpPr>
+          <p:cNvPr id="15" name="Shape 13"/>
           <p:cNvSpPr/>
           <p:nvPr/>
         </p:nvSpPr>
@@ -4018,14 +4107,14 @@
       </p:sp>
       <p:sp>
         <p:nvSpPr>
-          <p:cNvPr id="15" name="Text 13"/>
+          <p:cNvPr id="16" name="Text 14"/>
           <p:cNvSpPr/>
           <p:nvPr/>
         </p:nvSpPr>
         <p:spPr>
           <a:xfrm>
             <a:off x="8074152" y="3666744"/>
-            <a:ext cx="2825496" cy="201168"/>
+            <a:ext cx="2825496" cy="256032"/>
           </a:xfrm>
           <a:prstGeom prst="rect">
             <a:avLst/>
@@ -4041,7 +4130,7 @@
               <a:buNone/>
             </a:pPr>
             <a:r>
-              <a:rPr lang="en-US" sz="950" b="1" dirty="0">
+              <a:rPr lang="en-US" sz="1300" b="1" dirty="0">
                 <a:solidFill>
                   <a:srgbClr val="0068B7"/>
                 </a:solidFill>
@@ -4051,20 +4140,20 @@
               </a:rPr>
               <a:t>Use this for</a:t>
             </a:r>
-            <a:endParaRPr lang="en-US" sz="950" dirty="0"/>
-          </a:p>
-        </p:txBody>
-      </p:sp>
-      <p:sp>
-        <p:nvSpPr>
-          <p:cNvPr id="16" name="Text 14"/>
-          <p:cNvSpPr/>
-          <p:nvPr/>
-        </p:nvSpPr>
-        <p:spPr>
-          <a:xfrm>
-            <a:off x="8074152" y="3959352"/>
-            <a:ext cx="2825496" cy="1170432"/>
+            <a:endParaRPr lang="en-US" sz="1300" dirty="0"/>
+          </a:p>
+        </p:txBody>
+      </p:sp>
+      <p:sp>
+        <p:nvSpPr>
+          <p:cNvPr id="17" name="Text 15"/>
+          <p:cNvSpPr/>
+          <p:nvPr/>
+        </p:nvSpPr>
+        <p:spPr>
+          <a:xfrm>
+            <a:off x="8074152" y="4023360"/>
+            <a:ext cx="2825496" cy="1097280"/>
           </a:xfrm>
           <a:prstGeom prst="rect">
             <a:avLst/>
@@ -4082,7 +4171,7 @@
               <a:buNone/>
             </a:pPr>
             <a:r>
-              <a:rPr lang="en-US" sz="1250" dirty="0">
+              <a:rPr lang="en-US" sz="1550" dirty="0">
                 <a:solidFill>
                   <a:srgbClr val="17364A"/>
                 </a:solidFill>
@@ -4092,7 +4181,7 @@
               </a:rPr>
               <a:t>Connect the concept to public health decisions, safeguards, documentation, or implementation work.</a:t>
             </a:r>
-            <a:endParaRPr lang="en-US" sz="1250" dirty="0"/>
+            <a:endParaRPr lang="en-US" sz="1550" dirty="0"/>
           </a:p>
         </p:txBody>
       </p:sp>
@@ -4289,7 +4378,7 @@
                 <a:ea typeface="Aptos" pitchFamily="34" charset="-122"/>
                 <a:cs typeface="Aptos" pitchFamily="34" charset="-120"/>
               </a:rPr>
-              <a:t>© Paula Soper</a:t>
+              <a:t>Â© Paula Soper</a:t>
             </a:r>
             <a:endParaRPr lang="en-US" sz="800" dirty="0"/>
           </a:p>
@@ -4297,7 +4386,46 @@
       </p:sp>
       <p:sp>
         <p:nvSpPr>
-          <p:cNvPr id="7" name="Shape 5"/>
+          <p:cNvPr id="7" name="Text 5"/>
+          <p:cNvSpPr/>
+          <p:nvPr/>
+        </p:nvSpPr>
+        <p:spPr>
+          <a:xfrm>
+            <a:off x="11137392" y="6510528"/>
+            <a:ext cx="411480" cy="201168"/>
+          </a:xfrm>
+          <a:prstGeom prst="rect">
+            <a:avLst/>
+          </a:prstGeom>
+          <a:noFill/>
+          <a:ln/>
+        </p:spPr>
+        <p:txBody>
+          <a:bodyPr wrap="square" lIns="0" tIns="0" rIns="0" bIns="0" rtlCol="0" anchor="ctr"/>
+          <a:lstStyle/>
+          <a:p>
+            <a:pPr algn="r" indent="0" marL="0">
+              <a:buNone/>
+            </a:pPr>
+            <a:r>
+              <a:rPr lang="en-US" sz="900" dirty="0">
+                <a:solidFill>
+                  <a:srgbClr val="5F7181"/>
+                </a:solidFill>
+                <a:latin typeface="Aptos" pitchFamily="34" charset="0"/>
+                <a:ea typeface="Aptos" pitchFamily="34" charset="-122"/>
+                <a:cs typeface="Aptos" pitchFamily="34" charset="-120"/>
+              </a:rPr>
+              <a:t>12</a:t>
+            </a:r>
+            <a:endParaRPr lang="en-US" sz="900" dirty="0"/>
+          </a:p>
+        </p:txBody>
+      </p:sp>
+      <p:sp>
+        <p:nvSpPr>
+          <p:cNvPr id="8" name="Shape 6"/>
           <p:cNvSpPr/>
           <p:nvPr/>
         </p:nvSpPr>
@@ -4322,7 +4450,7 @@
       </p:sp>
       <p:sp>
         <p:nvSpPr>
-          <p:cNvPr id="8" name="Text 6"/>
+          <p:cNvPr id="9" name="Text 7"/>
           <p:cNvSpPr/>
           <p:nvPr/>
         </p:nvSpPr>
@@ -4361,14 +4489,14 @@
       </p:sp>
       <p:sp>
         <p:nvSpPr>
-          <p:cNvPr id="9" name="Text 7"/>
+          <p:cNvPr id="10" name="Text 8"/>
           <p:cNvSpPr/>
           <p:nvPr/>
         </p:nvSpPr>
         <p:spPr>
           <a:xfrm>
             <a:off x="640080" y="621792"/>
-            <a:ext cx="10881360" cy="566928"/>
+            <a:ext cx="10881360" cy="713232"/>
           </a:xfrm>
           <a:prstGeom prst="rect">
             <a:avLst/>
@@ -4386,7 +4514,7 @@
               <a:buNone/>
             </a:pPr>
             <a:r>
-              <a:rPr lang="en-US" sz="2700" b="1" dirty="0">
+              <a:rPr lang="en-US" sz="3400" b="1" dirty="0">
                 <a:solidFill>
                   <a:srgbClr val="003A63"/>
                 </a:solidFill>
@@ -4396,20 +4524,20 @@
               </a:rPr>
               <a:t>Application to AI-Supported Workflows</a:t>
             </a:r>
-            <a:endParaRPr lang="en-US" sz="2700" dirty="0"/>
-          </a:p>
-        </p:txBody>
-      </p:sp>
-      <p:sp>
-        <p:nvSpPr>
-          <p:cNvPr id="10" name="Text 8"/>
-          <p:cNvSpPr/>
-          <p:nvPr/>
-        </p:nvSpPr>
-        <p:spPr>
-          <a:xfrm>
-            <a:off x="868680" y="1417320"/>
-            <a:ext cx="6675120" cy="4434840"/>
+            <a:endParaRPr lang="en-US" sz="3400" dirty="0"/>
+          </a:p>
+        </p:txBody>
+      </p:sp>
+      <p:sp>
+        <p:nvSpPr>
+          <p:cNvPr id="11" name="Text 9"/>
+          <p:cNvSpPr/>
+          <p:nvPr/>
+        </p:nvSpPr>
+        <p:spPr>
+          <a:xfrm>
+            <a:off x="868680" y="1508760"/>
+            <a:ext cx="6537960" cy="4160520"/>
           </a:xfrm>
           <a:prstGeom prst="rect">
             <a:avLst/>
@@ -4424,7 +4552,7 @@
           <a:lstStyle/>
           <a:p>
             <a:r>
-              <a:rPr lang="en-US" sz="1700" dirty="0">
+              <a:rPr lang="en-US" sz="2100" dirty="0">
                 <a:solidFill>
                   <a:srgbClr val="17364A"/>
                 </a:solidFill>
@@ -4434,11 +4562,11 @@
               </a:rPr>
               <a:t>Generative AI projects may be prioritized for internal knowledge management before public-facing use.</a:t>
             </a:r>
-            <a:endParaRPr lang="en-US" sz="1700" dirty="0"/>
-          </a:p>
-          <a:p>
-            <a:r>
-              <a:rPr lang="en-US" sz="1700" dirty="0">
+            <a:endParaRPr lang="en-US" sz="2100" dirty="0"/>
+          </a:p>
+          <a:p>
+            <a:r>
+              <a:rPr lang="en-US" sz="2100" dirty="0">
                 <a:solidFill>
                   <a:srgbClr val="17364A"/>
                 </a:solidFill>
@@ -4448,11 +4576,11 @@
               </a:rPr>
               <a:t>Predictive analytics projects may be prioritized only when data and validation plans are mature.</a:t>
             </a:r>
-            <a:endParaRPr lang="en-US" sz="1700" dirty="0"/>
-          </a:p>
-          <a:p>
-            <a:r>
-              <a:rPr lang="en-US" sz="1700" dirty="0">
+            <a:endParaRPr lang="en-US" sz="2100" dirty="0"/>
+          </a:p>
+          <a:p>
+            <a:r>
+              <a:rPr lang="en-US" sz="2100" dirty="0">
                 <a:solidFill>
                   <a:srgbClr val="17364A"/>
                 </a:solidFill>
@@ -4460,29 +4588,15 @@
                 <a:ea typeface="Aptos" pitchFamily="34" charset="-122"/>
                 <a:cs typeface="Aptos" pitchFamily="34" charset="-120"/>
               </a:rPr>
-              <a:t>Agentic workflows may be deferred until governance has defined decision rights, access controls, and rollback procedures.</a:t>
-            </a:r>
-            <a:endParaRPr lang="en-US" sz="1700" dirty="0"/>
-          </a:p>
-          <a:p>
-            <a:r>
-              <a:rPr lang="en-US" sz="1700" dirty="0">
-                <a:solidFill>
-                  <a:srgbClr val="17364A"/>
-                </a:solidFill>
-                <a:latin typeface="Aptos" pitchFamily="34" charset="0"/>
-                <a:ea typeface="Aptos" pitchFamily="34" charset="-122"/>
-                <a:cs typeface="Aptos" pitchFamily="34" charset="-120"/>
-              </a:rPr>
-              <a:t>Portfolio strategy helps leaders sequence AI adoption responsibly.</a:t>
-            </a:r>
-            <a:endParaRPr lang="en-US" sz="1700" dirty="0"/>
-          </a:p>
-        </p:txBody>
-      </p:sp>
-      <p:sp>
-        <p:nvSpPr>
-          <p:cNvPr id="11" name="Shape 9"/>
+              <a:t>Agentic workflows may be deferred until governance has defined decision rights, access controls, and.</a:t>
+            </a:r>
+            <a:endParaRPr lang="en-US" sz="2100" dirty="0"/>
+          </a:p>
+        </p:txBody>
+      </p:sp>
+      <p:sp>
+        <p:nvSpPr>
+          <p:cNvPr id="12" name="Shape 10"/>
           <p:cNvSpPr/>
           <p:nvPr/>
         </p:nvSpPr>
@@ -4509,14 +4623,14 @@
       </p:sp>
       <p:sp>
         <p:nvSpPr>
-          <p:cNvPr id="12" name="Text 10"/>
+          <p:cNvPr id="13" name="Text 11"/>
           <p:cNvSpPr/>
           <p:nvPr/>
         </p:nvSpPr>
         <p:spPr>
           <a:xfrm>
             <a:off x="8074152" y="1563624"/>
-            <a:ext cx="2825496" cy="201168"/>
+            <a:ext cx="2825496" cy="256032"/>
           </a:xfrm>
           <a:prstGeom prst="rect">
             <a:avLst/>
@@ -4532,7 +4646,7 @@
               <a:buNone/>
             </a:pPr>
             <a:r>
-              <a:rPr lang="en-US" sz="950" b="1" dirty="0">
+              <a:rPr lang="en-US" sz="1300" b="1" dirty="0">
                 <a:solidFill>
                   <a:srgbClr val="0068B7"/>
                 </a:solidFill>
@@ -4542,20 +4656,20 @@
               </a:rPr>
               <a:t>Key idea</a:t>
             </a:r>
-            <a:endParaRPr lang="en-US" sz="950" dirty="0"/>
-          </a:p>
-        </p:txBody>
-      </p:sp>
-      <p:sp>
-        <p:nvSpPr>
-          <p:cNvPr id="13" name="Text 11"/>
-          <p:cNvSpPr/>
-          <p:nvPr/>
-        </p:nvSpPr>
-        <p:spPr>
-          <a:xfrm>
-            <a:off x="8074152" y="1856232"/>
-            <a:ext cx="2825496" cy="1261872"/>
+            <a:endParaRPr lang="en-US" sz="1300" dirty="0"/>
+          </a:p>
+        </p:txBody>
+      </p:sp>
+      <p:sp>
+        <p:nvSpPr>
+          <p:cNvPr id="14" name="Text 12"/>
+          <p:cNvSpPr/>
+          <p:nvPr/>
+        </p:nvSpPr>
+        <p:spPr>
+          <a:xfrm>
+            <a:off x="8074152" y="1920240"/>
+            <a:ext cx="2825496" cy="1188720"/>
           </a:xfrm>
           <a:prstGeom prst="rect">
             <a:avLst/>
@@ -4573,7 +4687,7 @@
               <a:buNone/>
             </a:pPr>
             <a:r>
-              <a:rPr lang="en-US" sz="1250" dirty="0">
+              <a:rPr lang="en-US" sz="1550" dirty="0">
                 <a:solidFill>
                   <a:srgbClr val="17364A"/>
                 </a:solidFill>
@@ -4583,13 +4697,13 @@
               </a:rPr>
               <a:t>Generative AI projects may be prioritized for internal knowledge management before public-facing use.</a:t>
             </a:r>
-            <a:endParaRPr lang="en-US" sz="1250" dirty="0"/>
-          </a:p>
-        </p:txBody>
-      </p:sp>
-      <p:sp>
-        <p:nvSpPr>
-          <p:cNvPr id="14" name="Shape 12"/>
+            <a:endParaRPr lang="en-US" sz="1550" dirty="0"/>
+          </a:p>
+        </p:txBody>
+      </p:sp>
+      <p:sp>
+        <p:nvSpPr>
+          <p:cNvPr id="15" name="Shape 13"/>
           <p:cNvSpPr/>
           <p:nvPr/>
         </p:nvSpPr>
@@ -4616,14 +4730,14 @@
       </p:sp>
       <p:sp>
         <p:nvSpPr>
-          <p:cNvPr id="15" name="Text 13"/>
+          <p:cNvPr id="16" name="Text 14"/>
           <p:cNvSpPr/>
           <p:nvPr/>
         </p:nvSpPr>
         <p:spPr>
           <a:xfrm>
             <a:off x="8074152" y="3666744"/>
-            <a:ext cx="2825496" cy="201168"/>
+            <a:ext cx="2825496" cy="256032"/>
           </a:xfrm>
           <a:prstGeom prst="rect">
             <a:avLst/>
@@ -4639,7 +4753,7 @@
               <a:buNone/>
             </a:pPr>
             <a:r>
-              <a:rPr lang="en-US" sz="950" b="1" dirty="0">
+              <a:rPr lang="en-US" sz="1300" b="1" dirty="0">
                 <a:solidFill>
                   <a:srgbClr val="0068B7"/>
                 </a:solidFill>
@@ -4649,20 +4763,20 @@
               </a:rPr>
               <a:t>Use this for</a:t>
             </a:r>
-            <a:endParaRPr lang="en-US" sz="950" dirty="0"/>
-          </a:p>
-        </p:txBody>
-      </p:sp>
-      <p:sp>
-        <p:nvSpPr>
-          <p:cNvPr id="16" name="Text 14"/>
-          <p:cNvSpPr/>
-          <p:nvPr/>
-        </p:nvSpPr>
-        <p:spPr>
-          <a:xfrm>
-            <a:off x="8074152" y="3959352"/>
-            <a:ext cx="2825496" cy="1170432"/>
+            <a:endParaRPr lang="en-US" sz="1300" dirty="0"/>
+          </a:p>
+        </p:txBody>
+      </p:sp>
+      <p:sp>
+        <p:nvSpPr>
+          <p:cNvPr id="17" name="Text 15"/>
+          <p:cNvSpPr/>
+          <p:nvPr/>
+        </p:nvSpPr>
+        <p:spPr>
+          <a:xfrm>
+            <a:off x="8074152" y="4023360"/>
+            <a:ext cx="2825496" cy="1097280"/>
           </a:xfrm>
           <a:prstGeom prst="rect">
             <a:avLst/>
@@ -4680,7 +4794,7 @@
               <a:buNone/>
             </a:pPr>
             <a:r>
-              <a:rPr lang="en-US" sz="1250" dirty="0">
+              <a:rPr lang="en-US" sz="1550" dirty="0">
                 <a:solidFill>
                   <a:srgbClr val="17364A"/>
                 </a:solidFill>
@@ -4690,7 +4804,7 @@
               </a:rPr>
               <a:t>Connect the concept to public health decisions, safeguards, documentation, or implementation work.</a:t>
             </a:r>
-            <a:endParaRPr lang="en-US" sz="1250" dirty="0"/>
+            <a:endParaRPr lang="en-US" sz="1550" dirty="0"/>
           </a:p>
         </p:txBody>
       </p:sp>
@@ -4887,7 +5001,7 @@
                 <a:ea typeface="Aptos" pitchFamily="34" charset="-122"/>
                 <a:cs typeface="Aptos" pitchFamily="34" charset="-120"/>
               </a:rPr>
-              <a:t>© Paula Soper</a:t>
+              <a:t>Â© Paula Soper</a:t>
             </a:r>
             <a:endParaRPr lang="en-US" sz="800" dirty="0"/>
           </a:p>
@@ -4895,7 +5009,46 @@
       </p:sp>
       <p:sp>
         <p:nvSpPr>
-          <p:cNvPr id="7" name="Shape 5"/>
+          <p:cNvPr id="7" name="Text 5"/>
+          <p:cNvSpPr/>
+          <p:nvPr/>
+        </p:nvSpPr>
+        <p:spPr>
+          <a:xfrm>
+            <a:off x="11137392" y="6510528"/>
+            <a:ext cx="411480" cy="201168"/>
+          </a:xfrm>
+          <a:prstGeom prst="rect">
+            <a:avLst/>
+          </a:prstGeom>
+          <a:noFill/>
+          <a:ln/>
+        </p:spPr>
+        <p:txBody>
+          <a:bodyPr wrap="square" lIns="0" tIns="0" rIns="0" bIns="0" rtlCol="0" anchor="ctr"/>
+          <a:lstStyle/>
+          <a:p>
+            <a:pPr algn="r" indent="0" marL="0">
+              <a:buNone/>
+            </a:pPr>
+            <a:r>
+              <a:rPr lang="en-US" sz="900" dirty="0">
+                <a:solidFill>
+                  <a:srgbClr val="5F7181"/>
+                </a:solidFill>
+                <a:latin typeface="Aptos" pitchFamily="34" charset="0"/>
+                <a:ea typeface="Aptos" pitchFamily="34" charset="-122"/>
+                <a:cs typeface="Aptos" pitchFamily="34" charset="-120"/>
+              </a:rPr>
+              <a:t>13</a:t>
+            </a:r>
+            <a:endParaRPr lang="en-US" sz="900" dirty="0"/>
+          </a:p>
+        </p:txBody>
+      </p:sp>
+      <p:sp>
+        <p:nvSpPr>
+          <p:cNvPr id="8" name="Shape 6"/>
           <p:cNvSpPr/>
           <p:nvPr/>
         </p:nvSpPr>
@@ -4920,7 +5073,7 @@
       </p:sp>
       <p:sp>
         <p:nvSpPr>
-          <p:cNvPr id="8" name="Text 6"/>
+          <p:cNvPr id="9" name="Text 7"/>
           <p:cNvSpPr/>
           <p:nvPr/>
         </p:nvSpPr>
@@ -4959,14 +5112,14 @@
       </p:sp>
       <p:sp>
         <p:nvSpPr>
-          <p:cNvPr id="9" name="Text 7"/>
+          <p:cNvPr id="10" name="Text 8"/>
           <p:cNvSpPr/>
           <p:nvPr/>
         </p:nvSpPr>
         <p:spPr>
           <a:xfrm>
             <a:off x="640080" y="621792"/>
-            <a:ext cx="10881360" cy="566928"/>
+            <a:ext cx="10881360" cy="713232"/>
           </a:xfrm>
           <a:prstGeom prst="rect">
             <a:avLst/>
@@ -4984,7 +5137,7 @@
               <a:buNone/>
             </a:pPr>
             <a:r>
-              <a:rPr lang="en-US" sz="2700" b="1" dirty="0">
+              <a:rPr lang="en-US" sz="3400" b="1" dirty="0">
                 <a:solidFill>
                   <a:srgbClr val="003A63"/>
                 </a:solidFill>
@@ -4994,20 +5147,20 @@
               </a:rPr>
               <a:t>Reflection Questions</a:t>
             </a:r>
-            <a:endParaRPr lang="en-US" sz="2700" dirty="0"/>
-          </a:p>
-        </p:txBody>
-      </p:sp>
-      <p:sp>
-        <p:nvSpPr>
-          <p:cNvPr id="10" name="Text 8"/>
-          <p:cNvSpPr/>
-          <p:nvPr/>
-        </p:nvSpPr>
-        <p:spPr>
-          <a:xfrm>
-            <a:off x="868680" y="1417320"/>
-            <a:ext cx="6675120" cy="4434840"/>
+            <a:endParaRPr lang="en-US" sz="3400" dirty="0"/>
+          </a:p>
+        </p:txBody>
+      </p:sp>
+      <p:sp>
+        <p:nvSpPr>
+          <p:cNvPr id="11" name="Text 9"/>
+          <p:cNvSpPr/>
+          <p:nvPr/>
+        </p:nvSpPr>
+        <p:spPr>
+          <a:xfrm>
+            <a:off x="868680" y="1508760"/>
+            <a:ext cx="6537960" cy="4160520"/>
           </a:xfrm>
           <a:prstGeom prst="rect">
             <a:avLst/>
@@ -5022,7 +5175,7 @@
           <a:lstStyle/>
           <a:p>
             <a:r>
-              <a:rPr lang="en-US" sz="1700" dirty="0">
+              <a:rPr lang="en-US" sz="2100" dirty="0">
                 <a:solidFill>
                   <a:srgbClr val="17364A"/>
                 </a:solidFill>
@@ -5030,13 +5183,13 @@
                 <a:ea typeface="Aptos" pitchFamily="34" charset="-122"/>
                 <a:cs typeface="Aptos" pitchFamily="34" charset="-120"/>
               </a:rPr>
-              <a:t>Which current or proposed AI use case in your agency raises this leadership or governance issue most clearly?</a:t>
-            </a:r>
-            <a:endParaRPr lang="en-US" sz="1700" dirty="0"/>
-          </a:p>
-          <a:p>
-            <a:r>
-              <a:rPr lang="en-US" sz="1700" dirty="0">
+              <a:t>Which current or proposed AI use case in your agency raises this leadership or governance issue most.</a:t>
+            </a:r>
+            <a:endParaRPr lang="en-US" sz="2100" dirty="0"/>
+          </a:p>
+          <a:p>
+            <a:r>
+              <a:rPr lang="en-US" sz="2100" dirty="0">
                 <a:solidFill>
                   <a:srgbClr val="17364A"/>
                 </a:solidFill>
@@ -5046,11 +5199,11 @@
               </a:rPr>
               <a:t>Who currently has authority to make decisions about this issue, and is that authority documented?</a:t>
             </a:r>
-            <a:endParaRPr lang="en-US" sz="1700" dirty="0"/>
-          </a:p>
-          <a:p>
-            <a:r>
-              <a:rPr lang="en-US" sz="1700" dirty="0">
+            <a:endParaRPr lang="en-US" sz="2100" dirty="0"/>
+          </a:p>
+          <a:p>
+            <a:r>
+              <a:rPr lang="en-US" sz="2100" dirty="0">
                 <a:solidFill>
                   <a:srgbClr val="17364A"/>
                 </a:solidFill>
@@ -5060,13 +5213,13 @@
               </a:rPr>
               <a:t>What evidence would governance or leadership need before approving the use case?</a:t>
             </a:r>
-            <a:endParaRPr lang="en-US" sz="1700" dirty="0"/>
-          </a:p>
-        </p:txBody>
-      </p:sp>
-      <p:sp>
-        <p:nvSpPr>
-          <p:cNvPr id="11" name="Shape 9"/>
+            <a:endParaRPr lang="en-US" sz="2100" dirty="0"/>
+          </a:p>
+        </p:txBody>
+      </p:sp>
+      <p:sp>
+        <p:nvSpPr>
+          <p:cNvPr id="12" name="Shape 10"/>
           <p:cNvSpPr/>
           <p:nvPr/>
         </p:nvSpPr>
@@ -5093,14 +5246,14 @@
       </p:sp>
       <p:sp>
         <p:nvSpPr>
-          <p:cNvPr id="12" name="Text 10"/>
+          <p:cNvPr id="13" name="Text 11"/>
           <p:cNvSpPr/>
           <p:nvPr/>
         </p:nvSpPr>
         <p:spPr>
           <a:xfrm>
             <a:off x="8074152" y="1563624"/>
-            <a:ext cx="2825496" cy="201168"/>
+            <a:ext cx="2825496" cy="256032"/>
           </a:xfrm>
           <a:prstGeom prst="rect">
             <a:avLst/>
@@ -5116,7 +5269,7 @@
               <a:buNone/>
             </a:pPr>
             <a:r>
-              <a:rPr lang="en-US" sz="950" b="1" dirty="0">
+              <a:rPr lang="en-US" sz="1300" b="1" dirty="0">
                 <a:solidFill>
                   <a:srgbClr val="0068B7"/>
                 </a:solidFill>
@@ -5126,20 +5279,20 @@
               </a:rPr>
               <a:t>Key idea</a:t>
             </a:r>
-            <a:endParaRPr lang="en-US" sz="950" dirty="0"/>
-          </a:p>
-        </p:txBody>
-      </p:sp>
-      <p:sp>
-        <p:nvSpPr>
-          <p:cNvPr id="13" name="Text 11"/>
-          <p:cNvSpPr/>
-          <p:nvPr/>
-        </p:nvSpPr>
-        <p:spPr>
-          <a:xfrm>
-            <a:off x="8074152" y="1856232"/>
-            <a:ext cx="2825496" cy="1261872"/>
+            <a:endParaRPr lang="en-US" sz="1300" dirty="0"/>
+          </a:p>
+        </p:txBody>
+      </p:sp>
+      <p:sp>
+        <p:nvSpPr>
+          <p:cNvPr id="14" name="Text 12"/>
+          <p:cNvSpPr/>
+          <p:nvPr/>
+        </p:nvSpPr>
+        <p:spPr>
+          <a:xfrm>
+            <a:off x="8074152" y="1920240"/>
+            <a:ext cx="2825496" cy="1188720"/>
           </a:xfrm>
           <a:prstGeom prst="rect">
             <a:avLst/>
@@ -5157,7 +5310,7 @@
               <a:buNone/>
             </a:pPr>
             <a:r>
-              <a:rPr lang="en-US" sz="1250" dirty="0">
+              <a:rPr lang="en-US" sz="1550" dirty="0">
                 <a:solidFill>
                   <a:srgbClr val="17364A"/>
                 </a:solidFill>
@@ -5165,15 +5318,15 @@
                 <a:ea typeface="Aptos" pitchFamily="34" charset="-122"/>
                 <a:cs typeface="Aptos" pitchFamily="34" charset="-120"/>
               </a:rPr>
-              <a:t>Which current or proposed AI use case in your agency raises this leadership or governance issue most clearly?</a:t>
-            </a:r>
-            <a:endParaRPr lang="en-US" sz="1250" dirty="0"/>
-          </a:p>
-        </p:txBody>
-      </p:sp>
-      <p:sp>
-        <p:nvSpPr>
-          <p:cNvPr id="14" name="Shape 12"/>
+              <a:t>Which current or proposed AI use case in your agency raises this leadership or governance issue most.</a:t>
+            </a:r>
+            <a:endParaRPr lang="en-US" sz="1550" dirty="0"/>
+          </a:p>
+        </p:txBody>
+      </p:sp>
+      <p:sp>
+        <p:nvSpPr>
+          <p:cNvPr id="15" name="Shape 13"/>
           <p:cNvSpPr/>
           <p:nvPr/>
         </p:nvSpPr>
@@ -5200,14 +5353,14 @@
       </p:sp>
       <p:sp>
         <p:nvSpPr>
-          <p:cNvPr id="15" name="Text 13"/>
+          <p:cNvPr id="16" name="Text 14"/>
           <p:cNvSpPr/>
           <p:nvPr/>
         </p:nvSpPr>
         <p:spPr>
           <a:xfrm>
             <a:off x="8074152" y="3666744"/>
-            <a:ext cx="2825496" cy="201168"/>
+            <a:ext cx="2825496" cy="256032"/>
           </a:xfrm>
           <a:prstGeom prst="rect">
             <a:avLst/>
@@ -5223,7 +5376,7 @@
               <a:buNone/>
             </a:pPr>
             <a:r>
-              <a:rPr lang="en-US" sz="950" b="1" dirty="0">
+              <a:rPr lang="en-US" sz="1300" b="1" dirty="0">
                 <a:solidFill>
                   <a:srgbClr val="0068B7"/>
                 </a:solidFill>
@@ -5233,20 +5386,20 @@
               </a:rPr>
               <a:t>Use this for</a:t>
             </a:r>
-            <a:endParaRPr lang="en-US" sz="950" dirty="0"/>
-          </a:p>
-        </p:txBody>
-      </p:sp>
-      <p:sp>
-        <p:nvSpPr>
-          <p:cNvPr id="16" name="Text 14"/>
-          <p:cNvSpPr/>
-          <p:nvPr/>
-        </p:nvSpPr>
-        <p:spPr>
-          <a:xfrm>
-            <a:off x="8074152" y="3959352"/>
-            <a:ext cx="2825496" cy="1170432"/>
+            <a:endParaRPr lang="en-US" sz="1300" dirty="0"/>
+          </a:p>
+        </p:txBody>
+      </p:sp>
+      <p:sp>
+        <p:nvSpPr>
+          <p:cNvPr id="17" name="Text 15"/>
+          <p:cNvSpPr/>
+          <p:nvPr/>
+        </p:nvSpPr>
+        <p:spPr>
+          <a:xfrm>
+            <a:off x="8074152" y="4023360"/>
+            <a:ext cx="2825496" cy="1097280"/>
           </a:xfrm>
           <a:prstGeom prst="rect">
             <a:avLst/>
@@ -5264,7 +5417,7 @@
               <a:buNone/>
             </a:pPr>
             <a:r>
-              <a:rPr lang="en-US" sz="1250" dirty="0">
+              <a:rPr lang="en-US" sz="1550" dirty="0">
                 <a:solidFill>
                   <a:srgbClr val="17364A"/>
                 </a:solidFill>
@@ -5274,7 +5427,7 @@
               </a:rPr>
               <a:t>Connect the concept to public health decisions, safeguards, documentation, or implementation work.</a:t>
             </a:r>
-            <a:endParaRPr lang="en-US" sz="1250" dirty="0"/>
+            <a:endParaRPr lang="en-US" sz="1550" dirty="0"/>
           </a:p>
         </p:txBody>
       </p:sp>
@@ -5471,7 +5624,7 @@
                 <a:ea typeface="Aptos" pitchFamily="34" charset="-122"/>
                 <a:cs typeface="Aptos" pitchFamily="34" charset="-120"/>
               </a:rPr>
-              <a:t>© Paula Soper</a:t>
+              <a:t>Â© Paula Soper</a:t>
             </a:r>
             <a:endParaRPr lang="en-US" sz="800" dirty="0"/>
           </a:p>
@@ -5485,8 +5638,47 @@
         </p:nvSpPr>
         <p:spPr>
           <a:xfrm>
+            <a:off x="11137392" y="6510528"/>
+            <a:ext cx="411480" cy="201168"/>
+          </a:xfrm>
+          <a:prstGeom prst="rect">
+            <a:avLst/>
+          </a:prstGeom>
+          <a:noFill/>
+          <a:ln/>
+        </p:spPr>
+        <p:txBody>
+          <a:bodyPr wrap="square" lIns="0" tIns="0" rIns="0" bIns="0" rtlCol="0" anchor="ctr"/>
+          <a:lstStyle/>
+          <a:p>
+            <a:pPr algn="r" indent="0" marL="0">
+              <a:buNone/>
+            </a:pPr>
+            <a:r>
+              <a:rPr lang="en-US" sz="900" dirty="0">
+                <a:solidFill>
+                  <a:srgbClr val="5F7181"/>
+                </a:solidFill>
+                <a:latin typeface="Aptos" pitchFamily="34" charset="0"/>
+                <a:ea typeface="Aptos" pitchFamily="34" charset="-122"/>
+                <a:cs typeface="Aptos" pitchFamily="34" charset="-120"/>
+              </a:rPr>
+              <a:t>14</a:t>
+            </a:r>
+            <a:endParaRPr lang="en-US" sz="900" dirty="0"/>
+          </a:p>
+        </p:txBody>
+      </p:sp>
+      <p:sp>
+        <p:nvSpPr>
+          <p:cNvPr id="8" name="Text 6"/>
+          <p:cNvSpPr/>
+          <p:nvPr/>
+        </p:nvSpPr>
+        <p:spPr>
+          <a:xfrm>
             <a:off x="640080" y="658368"/>
-            <a:ext cx="10881360" cy="566928"/>
+            <a:ext cx="10881360" cy="713232"/>
           </a:xfrm>
           <a:prstGeom prst="rect">
             <a:avLst/>
@@ -5504,7 +5696,7 @@
               <a:buNone/>
             </a:pPr>
             <a:r>
-              <a:rPr lang="en-US" sz="2700" b="1" dirty="0">
+              <a:rPr lang="en-US" sz="3400" b="1" dirty="0">
                 <a:solidFill>
                   <a:srgbClr val="003A63"/>
                 </a:solidFill>
@@ -5514,20 +5706,20 @@
               </a:rPr>
               <a:t>Reflection Questions Continued</a:t>
             </a:r>
-            <a:endParaRPr lang="en-US" sz="2700" dirty="0"/>
-          </a:p>
-        </p:txBody>
-      </p:sp>
-      <p:sp>
-        <p:nvSpPr>
-          <p:cNvPr id="8" name="Text 6"/>
-          <p:cNvSpPr/>
-          <p:nvPr/>
-        </p:nvSpPr>
-        <p:spPr>
-          <a:xfrm>
-            <a:off x="868680" y="1417320"/>
-            <a:ext cx="6675120" cy="4434840"/>
+            <a:endParaRPr lang="en-US" sz="3400" dirty="0"/>
+          </a:p>
+        </p:txBody>
+      </p:sp>
+      <p:sp>
+        <p:nvSpPr>
+          <p:cNvPr id="9" name="Text 7"/>
+          <p:cNvSpPr/>
+          <p:nvPr/>
+        </p:nvSpPr>
+        <p:spPr>
+          <a:xfrm>
+            <a:off x="868680" y="1508760"/>
+            <a:ext cx="6537960" cy="4160520"/>
           </a:xfrm>
           <a:prstGeom prst="rect">
             <a:avLst/>
@@ -5542,7 +5734,7 @@
           <a:lstStyle/>
           <a:p>
             <a:r>
-              <a:rPr lang="en-US" sz="1700" dirty="0">
+              <a:rPr lang="en-US" sz="2100" dirty="0">
                 <a:solidFill>
                   <a:srgbClr val="17364A"/>
                 </a:solidFill>
@@ -5552,11 +5744,11 @@
               </a:rPr>
               <a:t>Which staff, partners, or communities would be affected if this issue were handled poorly?</a:t>
             </a:r>
-            <a:endParaRPr lang="en-US" sz="1700" dirty="0"/>
-          </a:p>
-          <a:p>
-            <a:r>
-              <a:rPr lang="en-US" sz="1700" dirty="0">
+            <a:endParaRPr lang="en-US" sz="2100" dirty="0"/>
+          </a:p>
+          <a:p>
+            <a:r>
+              <a:rPr lang="en-US" sz="2100" dirty="0">
                 <a:solidFill>
                   <a:srgbClr val="17364A"/>
                 </a:solidFill>
@@ -5566,13 +5758,13 @@
               </a:rPr>
               <a:t>What policy, process, or artifact should be created or updated after this module?</a:t>
             </a:r>
-            <a:endParaRPr lang="en-US" sz="1700" dirty="0"/>
-          </a:p>
-        </p:txBody>
-      </p:sp>
-      <p:sp>
-        <p:nvSpPr>
-          <p:cNvPr id="9" name="Shape 7"/>
+            <a:endParaRPr lang="en-US" sz="2100" dirty="0"/>
+          </a:p>
+        </p:txBody>
+      </p:sp>
+      <p:sp>
+        <p:nvSpPr>
+          <p:cNvPr id="10" name="Shape 8"/>
           <p:cNvSpPr/>
           <p:nvPr/>
         </p:nvSpPr>
@@ -5599,14 +5791,14 @@
       </p:sp>
       <p:sp>
         <p:nvSpPr>
-          <p:cNvPr id="10" name="Text 8"/>
+          <p:cNvPr id="11" name="Text 9"/>
           <p:cNvSpPr/>
           <p:nvPr/>
         </p:nvSpPr>
         <p:spPr>
           <a:xfrm>
             <a:off x="8074152" y="1563624"/>
-            <a:ext cx="2825496" cy="201168"/>
+            <a:ext cx="2825496" cy="256032"/>
           </a:xfrm>
           <a:prstGeom prst="rect">
             <a:avLst/>
@@ -5622,7 +5814,7 @@
               <a:buNone/>
             </a:pPr>
             <a:r>
-              <a:rPr lang="en-US" sz="950" b="1" dirty="0">
+              <a:rPr lang="en-US" sz="1300" b="1" dirty="0">
                 <a:solidFill>
                   <a:srgbClr val="0068B7"/>
                 </a:solidFill>
@@ -5632,20 +5824,20 @@
               </a:rPr>
               <a:t>Key idea</a:t>
             </a:r>
-            <a:endParaRPr lang="en-US" sz="950" dirty="0"/>
-          </a:p>
-        </p:txBody>
-      </p:sp>
-      <p:sp>
-        <p:nvSpPr>
-          <p:cNvPr id="11" name="Text 9"/>
-          <p:cNvSpPr/>
-          <p:nvPr/>
-        </p:nvSpPr>
-        <p:spPr>
-          <a:xfrm>
-            <a:off x="8074152" y="1856232"/>
-            <a:ext cx="2825496" cy="1261872"/>
+            <a:endParaRPr lang="en-US" sz="1300" dirty="0"/>
+          </a:p>
+        </p:txBody>
+      </p:sp>
+      <p:sp>
+        <p:nvSpPr>
+          <p:cNvPr id="12" name="Text 10"/>
+          <p:cNvSpPr/>
+          <p:nvPr/>
+        </p:nvSpPr>
+        <p:spPr>
+          <a:xfrm>
+            <a:off x="8074152" y="1920240"/>
+            <a:ext cx="2825496" cy="1188720"/>
           </a:xfrm>
           <a:prstGeom prst="rect">
             <a:avLst/>
@@ -5663,7 +5855,7 @@
               <a:buNone/>
             </a:pPr>
             <a:r>
-              <a:rPr lang="en-US" sz="1250" dirty="0">
+              <a:rPr lang="en-US" sz="1550" dirty="0">
                 <a:solidFill>
                   <a:srgbClr val="17364A"/>
                 </a:solidFill>
@@ -5673,13 +5865,13 @@
               </a:rPr>
               <a:t>Which staff, partners, or communities would be affected if this issue were handled poorly?</a:t>
             </a:r>
-            <a:endParaRPr lang="en-US" sz="1250" dirty="0"/>
-          </a:p>
-        </p:txBody>
-      </p:sp>
-      <p:sp>
-        <p:nvSpPr>
-          <p:cNvPr id="12" name="Shape 10"/>
+            <a:endParaRPr lang="en-US" sz="1550" dirty="0"/>
+          </a:p>
+        </p:txBody>
+      </p:sp>
+      <p:sp>
+        <p:nvSpPr>
+          <p:cNvPr id="13" name="Shape 11"/>
           <p:cNvSpPr/>
           <p:nvPr/>
         </p:nvSpPr>
@@ -5706,14 +5898,14 @@
       </p:sp>
       <p:sp>
         <p:nvSpPr>
-          <p:cNvPr id="13" name="Text 11"/>
+          <p:cNvPr id="14" name="Text 12"/>
           <p:cNvSpPr/>
           <p:nvPr/>
         </p:nvSpPr>
         <p:spPr>
           <a:xfrm>
             <a:off x="8074152" y="3666744"/>
-            <a:ext cx="2825496" cy="201168"/>
+            <a:ext cx="2825496" cy="256032"/>
           </a:xfrm>
           <a:prstGeom prst="rect">
             <a:avLst/>
@@ -5729,7 +5921,7 @@
               <a:buNone/>
             </a:pPr>
             <a:r>
-              <a:rPr lang="en-US" sz="950" b="1" dirty="0">
+              <a:rPr lang="en-US" sz="1300" b="1" dirty="0">
                 <a:solidFill>
                   <a:srgbClr val="0068B7"/>
                 </a:solidFill>
@@ -5739,20 +5931,20 @@
               </a:rPr>
               <a:t>Use this for</a:t>
             </a:r>
-            <a:endParaRPr lang="en-US" sz="950" dirty="0"/>
-          </a:p>
-        </p:txBody>
-      </p:sp>
-      <p:sp>
-        <p:nvSpPr>
-          <p:cNvPr id="14" name="Text 12"/>
-          <p:cNvSpPr/>
-          <p:nvPr/>
-        </p:nvSpPr>
-        <p:spPr>
-          <a:xfrm>
-            <a:off x="8074152" y="3959352"/>
-            <a:ext cx="2825496" cy="1170432"/>
+            <a:endParaRPr lang="en-US" sz="1300" dirty="0"/>
+          </a:p>
+        </p:txBody>
+      </p:sp>
+      <p:sp>
+        <p:nvSpPr>
+          <p:cNvPr id="15" name="Text 13"/>
+          <p:cNvSpPr/>
+          <p:nvPr/>
+        </p:nvSpPr>
+        <p:spPr>
+          <a:xfrm>
+            <a:off x="8074152" y="4023360"/>
+            <a:ext cx="2825496" cy="1097280"/>
           </a:xfrm>
           <a:prstGeom prst="rect">
             <a:avLst/>
@@ -5770,7 +5962,7 @@
               <a:buNone/>
             </a:pPr>
             <a:r>
-              <a:rPr lang="en-US" sz="1250" dirty="0">
+              <a:rPr lang="en-US" sz="1550" dirty="0">
                 <a:solidFill>
                   <a:srgbClr val="17364A"/>
                 </a:solidFill>
@@ -5780,7 +5972,7 @@
               </a:rPr>
               <a:t>Connect the concept to public health decisions, safeguards, documentation, or implementation work.</a:t>
             </a:r>
-            <a:endParaRPr lang="en-US" sz="1250" dirty="0"/>
+            <a:endParaRPr lang="en-US" sz="1550" dirty="0"/>
           </a:p>
         </p:txBody>
       </p:sp>
@@ -5977,7 +6169,7 @@
                 <a:ea typeface="Aptos" pitchFamily="34" charset="-122"/>
                 <a:cs typeface="Aptos" pitchFamily="34" charset="-120"/>
               </a:rPr>
-              <a:t>© Paula Soper</a:t>
+              <a:t>Â© Paula Soper</a:t>
             </a:r>
             <a:endParaRPr lang="en-US" sz="800" dirty="0"/>
           </a:p>
@@ -5985,7 +6177,46 @@
       </p:sp>
       <p:sp>
         <p:nvSpPr>
-          <p:cNvPr id="7" name="Shape 5"/>
+          <p:cNvPr id="7" name="Text 5"/>
+          <p:cNvSpPr/>
+          <p:nvPr/>
+        </p:nvSpPr>
+        <p:spPr>
+          <a:xfrm>
+            <a:off x="11137392" y="6510528"/>
+            <a:ext cx="411480" cy="201168"/>
+          </a:xfrm>
+          <a:prstGeom prst="rect">
+            <a:avLst/>
+          </a:prstGeom>
+          <a:noFill/>
+          <a:ln/>
+        </p:spPr>
+        <p:txBody>
+          <a:bodyPr wrap="square" lIns="0" tIns="0" rIns="0" bIns="0" rtlCol="0" anchor="ctr"/>
+          <a:lstStyle/>
+          <a:p>
+            <a:pPr algn="r" indent="0" marL="0">
+              <a:buNone/>
+            </a:pPr>
+            <a:r>
+              <a:rPr lang="en-US" sz="900" dirty="0">
+                <a:solidFill>
+                  <a:srgbClr val="5F7181"/>
+                </a:solidFill>
+                <a:latin typeface="Aptos" pitchFamily="34" charset="0"/>
+                <a:ea typeface="Aptos" pitchFamily="34" charset="-122"/>
+                <a:cs typeface="Aptos" pitchFamily="34" charset="-120"/>
+              </a:rPr>
+              <a:t>15</a:t>
+            </a:r>
+            <a:endParaRPr lang="en-US" sz="900" dirty="0"/>
+          </a:p>
+        </p:txBody>
+      </p:sp>
+      <p:sp>
+        <p:nvSpPr>
+          <p:cNvPr id="8" name="Shape 6"/>
           <p:cNvSpPr/>
           <p:nvPr/>
         </p:nvSpPr>
@@ -6010,7 +6241,7 @@
       </p:sp>
       <p:sp>
         <p:nvSpPr>
-          <p:cNvPr id="8" name="Text 6"/>
+          <p:cNvPr id="9" name="Text 7"/>
           <p:cNvSpPr/>
           <p:nvPr/>
         </p:nvSpPr>
@@ -6049,14 +6280,14 @@
       </p:sp>
       <p:sp>
         <p:nvSpPr>
-          <p:cNvPr id="9" name="Text 7"/>
+          <p:cNvPr id="10" name="Text 8"/>
           <p:cNvSpPr/>
           <p:nvPr/>
         </p:nvSpPr>
         <p:spPr>
           <a:xfrm>
             <a:off x="640080" y="621792"/>
-            <a:ext cx="10881360" cy="566928"/>
+            <a:ext cx="10881360" cy="713232"/>
           </a:xfrm>
           <a:prstGeom prst="rect">
             <a:avLst/>
@@ -6074,7 +6305,7 @@
               <a:buNone/>
             </a:pPr>
             <a:r>
-              <a:rPr lang="en-US" sz="2700" b="1" dirty="0">
+              <a:rPr lang="en-US" sz="3400" b="1" dirty="0">
                 <a:solidFill>
                   <a:srgbClr val="003A63"/>
                 </a:solidFill>
@@ -6084,20 +6315,20 @@
               </a:rPr>
               <a:t>Practical Exercise</a:t>
             </a:r>
-            <a:endParaRPr lang="en-US" sz="2700" dirty="0"/>
-          </a:p>
-        </p:txBody>
-      </p:sp>
-      <p:sp>
-        <p:nvSpPr>
-          <p:cNvPr id="10" name="Text 8"/>
-          <p:cNvSpPr/>
-          <p:nvPr/>
-        </p:nvSpPr>
-        <p:spPr>
-          <a:xfrm>
-            <a:off x="868680" y="1417320"/>
-            <a:ext cx="6675120" cy="4434840"/>
+            <a:endParaRPr lang="en-US" sz="3400" dirty="0"/>
+          </a:p>
+        </p:txBody>
+      </p:sp>
+      <p:sp>
+        <p:nvSpPr>
+          <p:cNvPr id="11" name="Text 9"/>
+          <p:cNvSpPr/>
+          <p:nvPr/>
+        </p:nvSpPr>
+        <p:spPr>
+          <a:xfrm>
+            <a:off x="868680" y="1508760"/>
+            <a:ext cx="6537960" cy="4160520"/>
           </a:xfrm>
           <a:prstGeom prst="rect">
             <a:avLst/>
@@ -6112,7 +6343,7 @@
           <a:lstStyle/>
           <a:p>
             <a:r>
-              <a:rPr lang="en-US" sz="1700" dirty="0">
+              <a:rPr lang="en-US" sz="2100" dirty="0">
                 <a:solidFill>
                   <a:srgbClr val="17364A"/>
                 </a:solidFill>
@@ -6120,15 +6351,15 @@
                 <a:ea typeface="Aptos" pitchFamily="34" charset="-122"/>
                 <a:cs typeface="Aptos" pitchFamily="34" charset="-120"/>
               </a:rPr>
-              <a:t>Develop an AI use case prioritization rubric with criteria, scoring levels, required evidence, and decision categories such.</a:t>
-            </a:r>
-            <a:endParaRPr lang="en-US" sz="1700" dirty="0"/>
-          </a:p>
-        </p:txBody>
-      </p:sp>
-      <p:sp>
-        <p:nvSpPr>
-          <p:cNvPr id="11" name="Shape 9"/>
+              <a:t>Develop an AI use case prioritization rubric with criteria, scoring levels, required evidence, and.</a:t>
+            </a:r>
+            <a:endParaRPr lang="en-US" sz="2100" dirty="0"/>
+          </a:p>
+        </p:txBody>
+      </p:sp>
+      <p:sp>
+        <p:nvSpPr>
+          <p:cNvPr id="12" name="Shape 10"/>
           <p:cNvSpPr/>
           <p:nvPr/>
         </p:nvSpPr>
@@ -6155,14 +6386,14 @@
       </p:sp>
       <p:sp>
         <p:nvSpPr>
-          <p:cNvPr id="12" name="Text 10"/>
+          <p:cNvPr id="13" name="Text 11"/>
           <p:cNvSpPr/>
           <p:nvPr/>
         </p:nvSpPr>
         <p:spPr>
           <a:xfrm>
             <a:off x="8074152" y="1563624"/>
-            <a:ext cx="2825496" cy="201168"/>
+            <a:ext cx="2825496" cy="256032"/>
           </a:xfrm>
           <a:prstGeom prst="rect">
             <a:avLst/>
@@ -6178,7 +6409,7 @@
               <a:buNone/>
             </a:pPr>
             <a:r>
-              <a:rPr lang="en-US" sz="950" b="1" dirty="0">
+              <a:rPr lang="en-US" sz="1300" b="1" dirty="0">
                 <a:solidFill>
                   <a:srgbClr val="0068B7"/>
                 </a:solidFill>
@@ -6188,20 +6419,20 @@
               </a:rPr>
               <a:t>Key idea</a:t>
             </a:r>
-            <a:endParaRPr lang="en-US" sz="950" dirty="0"/>
-          </a:p>
-        </p:txBody>
-      </p:sp>
-      <p:sp>
-        <p:nvSpPr>
-          <p:cNvPr id="13" name="Text 11"/>
-          <p:cNvSpPr/>
-          <p:nvPr/>
-        </p:nvSpPr>
-        <p:spPr>
-          <a:xfrm>
-            <a:off x="8074152" y="1856232"/>
-            <a:ext cx="2825496" cy="1261872"/>
+            <a:endParaRPr lang="en-US" sz="1300" dirty="0"/>
+          </a:p>
+        </p:txBody>
+      </p:sp>
+      <p:sp>
+        <p:nvSpPr>
+          <p:cNvPr id="14" name="Text 12"/>
+          <p:cNvSpPr/>
+          <p:nvPr/>
+        </p:nvSpPr>
+        <p:spPr>
+          <a:xfrm>
+            <a:off x="8074152" y="1920240"/>
+            <a:ext cx="2825496" cy="1188720"/>
           </a:xfrm>
           <a:prstGeom prst="rect">
             <a:avLst/>
@@ -6219,7 +6450,7 @@
               <a:buNone/>
             </a:pPr>
             <a:r>
-              <a:rPr lang="en-US" sz="1250" dirty="0">
+              <a:rPr lang="en-US" sz="1550" dirty="0">
                 <a:solidFill>
                   <a:srgbClr val="17364A"/>
                 </a:solidFill>
@@ -6227,15 +6458,15 @@
                 <a:ea typeface="Aptos" pitchFamily="34" charset="-122"/>
                 <a:cs typeface="Aptos" pitchFamily="34" charset="-120"/>
               </a:rPr>
-              <a:t>Develop an AI use case prioritization rubric with criteria, scoring levels, required evidence, and decision categories such.</a:t>
-            </a:r>
-            <a:endParaRPr lang="en-US" sz="1250" dirty="0"/>
-          </a:p>
-        </p:txBody>
-      </p:sp>
-      <p:sp>
-        <p:nvSpPr>
-          <p:cNvPr id="14" name="Shape 12"/>
+              <a:t>Develop an AI use case prioritization rubric with criteria, scoring levels, required evidence, and.</a:t>
+            </a:r>
+            <a:endParaRPr lang="en-US" sz="1550" dirty="0"/>
+          </a:p>
+        </p:txBody>
+      </p:sp>
+      <p:sp>
+        <p:nvSpPr>
+          <p:cNvPr id="15" name="Shape 13"/>
           <p:cNvSpPr/>
           <p:nvPr/>
         </p:nvSpPr>
@@ -6262,14 +6493,14 @@
       </p:sp>
       <p:sp>
         <p:nvSpPr>
-          <p:cNvPr id="15" name="Text 13"/>
+          <p:cNvPr id="16" name="Text 14"/>
           <p:cNvSpPr/>
           <p:nvPr/>
         </p:nvSpPr>
         <p:spPr>
           <a:xfrm>
             <a:off x="8074152" y="3666744"/>
-            <a:ext cx="2825496" cy="201168"/>
+            <a:ext cx="2825496" cy="256032"/>
           </a:xfrm>
           <a:prstGeom prst="rect">
             <a:avLst/>
@@ -6285,7 +6516,7 @@
               <a:buNone/>
             </a:pPr>
             <a:r>
-              <a:rPr lang="en-US" sz="950" b="1" dirty="0">
+              <a:rPr lang="en-US" sz="1300" b="1" dirty="0">
                 <a:solidFill>
                   <a:srgbClr val="0068B7"/>
                 </a:solidFill>
@@ -6295,20 +6526,20 @@
               </a:rPr>
               <a:t>Use this for</a:t>
             </a:r>
-            <a:endParaRPr lang="en-US" sz="950" dirty="0"/>
-          </a:p>
-        </p:txBody>
-      </p:sp>
-      <p:sp>
-        <p:nvSpPr>
-          <p:cNvPr id="16" name="Text 14"/>
-          <p:cNvSpPr/>
-          <p:nvPr/>
-        </p:nvSpPr>
-        <p:spPr>
-          <a:xfrm>
-            <a:off x="8074152" y="3959352"/>
-            <a:ext cx="2825496" cy="1170432"/>
+            <a:endParaRPr lang="en-US" sz="1300" dirty="0"/>
+          </a:p>
+        </p:txBody>
+      </p:sp>
+      <p:sp>
+        <p:nvSpPr>
+          <p:cNvPr id="17" name="Text 15"/>
+          <p:cNvSpPr/>
+          <p:nvPr/>
+        </p:nvSpPr>
+        <p:spPr>
+          <a:xfrm>
+            <a:off x="8074152" y="4023360"/>
+            <a:ext cx="2825496" cy="1097280"/>
           </a:xfrm>
           <a:prstGeom prst="rect">
             <a:avLst/>
@@ -6326,7 +6557,7 @@
               <a:buNone/>
             </a:pPr>
             <a:r>
-              <a:rPr lang="en-US" sz="1250" dirty="0">
+              <a:rPr lang="en-US" sz="1550" dirty="0">
                 <a:solidFill>
                   <a:srgbClr val="17364A"/>
                 </a:solidFill>
@@ -6336,7 +6567,7 @@
               </a:rPr>
               <a:t>Connect the concept to public health decisions, safeguards, documentation, or implementation work.</a:t>
             </a:r>
-            <a:endParaRPr lang="en-US" sz="1250" dirty="0"/>
+            <a:endParaRPr lang="en-US" sz="1550" dirty="0"/>
           </a:p>
         </p:txBody>
       </p:sp>
@@ -6533,7 +6764,7 @@
                 <a:ea typeface="Aptos" pitchFamily="34" charset="-122"/>
                 <a:cs typeface="Aptos" pitchFamily="34" charset="-120"/>
               </a:rPr>
-              <a:t>© Paula Soper</a:t>
+              <a:t>Â© Paula Soper</a:t>
             </a:r>
             <a:endParaRPr lang="en-US" sz="800" dirty="0"/>
           </a:p>
@@ -6541,7 +6772,46 @@
       </p:sp>
       <p:sp>
         <p:nvSpPr>
-          <p:cNvPr id="7" name="Shape 5"/>
+          <p:cNvPr id="7" name="Text 5"/>
+          <p:cNvSpPr/>
+          <p:nvPr/>
+        </p:nvSpPr>
+        <p:spPr>
+          <a:xfrm>
+            <a:off x="11137392" y="6510528"/>
+            <a:ext cx="411480" cy="201168"/>
+          </a:xfrm>
+          <a:prstGeom prst="rect">
+            <a:avLst/>
+          </a:prstGeom>
+          <a:noFill/>
+          <a:ln/>
+        </p:spPr>
+        <p:txBody>
+          <a:bodyPr wrap="square" lIns="0" tIns="0" rIns="0" bIns="0" rtlCol="0" anchor="ctr"/>
+          <a:lstStyle/>
+          <a:p>
+            <a:pPr algn="r" indent="0" marL="0">
+              <a:buNone/>
+            </a:pPr>
+            <a:r>
+              <a:rPr lang="en-US" sz="900" dirty="0">
+                <a:solidFill>
+                  <a:srgbClr val="5F7181"/>
+                </a:solidFill>
+                <a:latin typeface="Aptos" pitchFamily="34" charset="0"/>
+                <a:ea typeface="Aptos" pitchFamily="34" charset="-122"/>
+                <a:cs typeface="Aptos" pitchFamily="34" charset="-120"/>
+              </a:rPr>
+              <a:t>16</a:t>
+            </a:r>
+            <a:endParaRPr lang="en-US" sz="900" dirty="0"/>
+          </a:p>
+        </p:txBody>
+      </p:sp>
+      <p:sp>
+        <p:nvSpPr>
+          <p:cNvPr id="8" name="Shape 6"/>
           <p:cNvSpPr/>
           <p:nvPr/>
         </p:nvSpPr>
@@ -6566,7 +6836,7 @@
       </p:sp>
       <p:sp>
         <p:nvSpPr>
-          <p:cNvPr id="8" name="Text 6"/>
+          <p:cNvPr id="9" name="Text 7"/>
           <p:cNvSpPr/>
           <p:nvPr/>
         </p:nvSpPr>
@@ -6605,14 +6875,14 @@
       </p:sp>
       <p:sp>
         <p:nvSpPr>
-          <p:cNvPr id="9" name="Text 7"/>
+          <p:cNvPr id="10" name="Text 8"/>
           <p:cNvSpPr/>
           <p:nvPr/>
         </p:nvSpPr>
         <p:spPr>
           <a:xfrm>
             <a:off x="640080" y="621792"/>
-            <a:ext cx="10881360" cy="566928"/>
+            <a:ext cx="10881360" cy="713232"/>
           </a:xfrm>
           <a:prstGeom prst="rect">
             <a:avLst/>
@@ -6630,7 +6900,7 @@
               <a:buNone/>
             </a:pPr>
             <a:r>
-              <a:rPr lang="en-US" sz="2700" b="1" dirty="0">
+              <a:rPr lang="en-US" sz="3400" b="1" dirty="0">
                 <a:solidFill>
                   <a:srgbClr val="003A63"/>
                 </a:solidFill>
@@ -6640,20 +6910,20 @@
               </a:rPr>
               <a:t>Before You Begin</a:t>
             </a:r>
-            <a:endParaRPr lang="en-US" sz="2700" dirty="0"/>
-          </a:p>
-        </p:txBody>
-      </p:sp>
-      <p:sp>
-        <p:nvSpPr>
-          <p:cNvPr id="10" name="Text 8"/>
-          <p:cNvSpPr/>
-          <p:nvPr/>
-        </p:nvSpPr>
-        <p:spPr>
-          <a:xfrm>
-            <a:off x="868680" y="1417320"/>
-            <a:ext cx="6675120" cy="4434840"/>
+            <a:endParaRPr lang="en-US" sz="3400" dirty="0"/>
+          </a:p>
+        </p:txBody>
+      </p:sp>
+      <p:sp>
+        <p:nvSpPr>
+          <p:cNvPr id="11" name="Text 9"/>
+          <p:cNvSpPr/>
+          <p:nvPr/>
+        </p:nvSpPr>
+        <p:spPr>
+          <a:xfrm>
+            <a:off x="868680" y="1508760"/>
+            <a:ext cx="6537960" cy="4160520"/>
           </a:xfrm>
           <a:prstGeom prst="rect">
             <a:avLst/>
@@ -6668,7 +6938,7 @@
           <a:lstStyle/>
           <a:p>
             <a:r>
-              <a:rPr lang="en-US" sz="1700" dirty="0">
+              <a:rPr lang="en-US" sz="2100" dirty="0">
                 <a:solidFill>
                   <a:srgbClr val="17364A"/>
                 </a:solidFill>
@@ -6678,11 +6948,11 @@
               </a:rPr>
               <a:t>Choose a real or realistic public health AI use case.</a:t>
             </a:r>
-            <a:endParaRPr lang="en-US" sz="1700" dirty="0"/>
-          </a:p>
-          <a:p>
-            <a:r>
-              <a:rPr lang="en-US" sz="1700" dirty="0">
+            <a:endParaRPr lang="en-US" sz="2100" dirty="0"/>
+          </a:p>
+          <a:p>
+            <a:r>
+              <a:rPr lang="en-US" sz="2100" dirty="0">
                 <a:solidFill>
                   <a:srgbClr val="17364A"/>
                 </a:solidFill>
@@ -6690,13 +6960,13 @@
                 <a:ea typeface="Aptos" pitchFamily="34" charset="-122"/>
                 <a:cs typeface="Aptos" pitchFamily="34" charset="-120"/>
               </a:rPr>
-              <a:t>Document assumptions, unresolved questions, and which agency roles would need to review the artifact before it is adopted.</a:t>
-            </a:r>
-            <a:endParaRPr lang="en-US" sz="1700" dirty="0"/>
-          </a:p>
-          <a:p>
-            <a:r>
-              <a:rPr lang="en-US" sz="1700" dirty="0">
+              <a:t>Document assumptions, unresolved questions, and which agency roles would need to review the artifact.</a:t>
+            </a:r>
+            <a:endParaRPr lang="en-US" sz="2100" dirty="0"/>
+          </a:p>
+          <a:p>
+            <a:r>
+              <a:rPr lang="en-US" sz="2100" dirty="0">
                 <a:solidFill>
                   <a:srgbClr val="17364A"/>
                 </a:solidFill>
@@ -6704,15 +6974,15 @@
                 <a:ea typeface="Aptos" pitchFamily="34" charset="-122"/>
                 <a:cs typeface="Aptos" pitchFamily="34" charset="-120"/>
               </a:rPr>
-              <a:t>The exercise should produce a work product that could support governance review, leadership discussion, implementation.</a:t>
-            </a:r>
-            <a:endParaRPr lang="en-US" sz="1700" dirty="0"/>
-          </a:p>
-        </p:txBody>
-      </p:sp>
-      <p:sp>
-        <p:nvSpPr>
-          <p:cNvPr id="11" name="Shape 9"/>
+              <a:t>The exercise should produce a work product that could support governance review, leadership discussion,.</a:t>
+            </a:r>
+            <a:endParaRPr lang="en-US" sz="2100" dirty="0"/>
+          </a:p>
+        </p:txBody>
+      </p:sp>
+      <p:sp>
+        <p:nvSpPr>
+          <p:cNvPr id="12" name="Shape 10"/>
           <p:cNvSpPr/>
           <p:nvPr/>
         </p:nvSpPr>
@@ -6739,14 +7009,14 @@
       </p:sp>
       <p:sp>
         <p:nvSpPr>
-          <p:cNvPr id="12" name="Text 10"/>
+          <p:cNvPr id="13" name="Text 11"/>
           <p:cNvSpPr/>
           <p:nvPr/>
         </p:nvSpPr>
         <p:spPr>
           <a:xfrm>
             <a:off x="8074152" y="1563624"/>
-            <a:ext cx="2825496" cy="201168"/>
+            <a:ext cx="2825496" cy="256032"/>
           </a:xfrm>
           <a:prstGeom prst="rect">
             <a:avLst/>
@@ -6762,7 +7032,7 @@
               <a:buNone/>
             </a:pPr>
             <a:r>
-              <a:rPr lang="en-US" sz="950" b="1" dirty="0">
+              <a:rPr lang="en-US" sz="1300" b="1" dirty="0">
                 <a:solidFill>
                   <a:srgbClr val="0068B7"/>
                 </a:solidFill>
@@ -6772,20 +7042,20 @@
               </a:rPr>
               <a:t>Key idea</a:t>
             </a:r>
-            <a:endParaRPr lang="en-US" sz="950" dirty="0"/>
-          </a:p>
-        </p:txBody>
-      </p:sp>
-      <p:sp>
-        <p:nvSpPr>
-          <p:cNvPr id="13" name="Text 11"/>
-          <p:cNvSpPr/>
-          <p:nvPr/>
-        </p:nvSpPr>
-        <p:spPr>
-          <a:xfrm>
-            <a:off x="8074152" y="1856232"/>
-            <a:ext cx="2825496" cy="1261872"/>
+            <a:endParaRPr lang="en-US" sz="1300" dirty="0"/>
+          </a:p>
+        </p:txBody>
+      </p:sp>
+      <p:sp>
+        <p:nvSpPr>
+          <p:cNvPr id="14" name="Text 12"/>
+          <p:cNvSpPr/>
+          <p:nvPr/>
+        </p:nvSpPr>
+        <p:spPr>
+          <a:xfrm>
+            <a:off x="8074152" y="1920240"/>
+            <a:ext cx="2825496" cy="1188720"/>
           </a:xfrm>
           <a:prstGeom prst="rect">
             <a:avLst/>
@@ -6803,7 +7073,7 @@
               <a:buNone/>
             </a:pPr>
             <a:r>
-              <a:rPr lang="en-US" sz="1250" dirty="0">
+              <a:rPr lang="en-US" sz="1550" dirty="0">
                 <a:solidFill>
                   <a:srgbClr val="17364A"/>
                 </a:solidFill>
@@ -6813,13 +7083,13 @@
               </a:rPr>
               <a:t>Choose a real or realistic public health AI use case.</a:t>
             </a:r>
-            <a:endParaRPr lang="en-US" sz="1250" dirty="0"/>
-          </a:p>
-        </p:txBody>
-      </p:sp>
-      <p:sp>
-        <p:nvSpPr>
-          <p:cNvPr id="14" name="Shape 12"/>
+            <a:endParaRPr lang="en-US" sz="1550" dirty="0"/>
+          </a:p>
+        </p:txBody>
+      </p:sp>
+      <p:sp>
+        <p:nvSpPr>
+          <p:cNvPr id="15" name="Shape 13"/>
           <p:cNvSpPr/>
           <p:nvPr/>
         </p:nvSpPr>
@@ -6846,14 +7116,14 @@
       </p:sp>
       <p:sp>
         <p:nvSpPr>
-          <p:cNvPr id="15" name="Text 13"/>
+          <p:cNvPr id="16" name="Text 14"/>
           <p:cNvSpPr/>
           <p:nvPr/>
         </p:nvSpPr>
         <p:spPr>
           <a:xfrm>
             <a:off x="8074152" y="3666744"/>
-            <a:ext cx="2825496" cy="201168"/>
+            <a:ext cx="2825496" cy="256032"/>
           </a:xfrm>
           <a:prstGeom prst="rect">
             <a:avLst/>
@@ -6869,7 +7139,7 @@
               <a:buNone/>
             </a:pPr>
             <a:r>
-              <a:rPr lang="en-US" sz="950" b="1" dirty="0">
+              <a:rPr lang="en-US" sz="1300" b="1" dirty="0">
                 <a:solidFill>
                   <a:srgbClr val="0068B7"/>
                 </a:solidFill>
@@ -6879,20 +7149,20 @@
               </a:rPr>
               <a:t>Use this for</a:t>
             </a:r>
-            <a:endParaRPr lang="en-US" sz="950" dirty="0"/>
-          </a:p>
-        </p:txBody>
-      </p:sp>
-      <p:sp>
-        <p:nvSpPr>
-          <p:cNvPr id="16" name="Text 14"/>
-          <p:cNvSpPr/>
-          <p:nvPr/>
-        </p:nvSpPr>
-        <p:spPr>
-          <a:xfrm>
-            <a:off x="8074152" y="3959352"/>
-            <a:ext cx="2825496" cy="1170432"/>
+            <a:endParaRPr lang="en-US" sz="1300" dirty="0"/>
+          </a:p>
+        </p:txBody>
+      </p:sp>
+      <p:sp>
+        <p:nvSpPr>
+          <p:cNvPr id="17" name="Text 15"/>
+          <p:cNvSpPr/>
+          <p:nvPr/>
+        </p:nvSpPr>
+        <p:spPr>
+          <a:xfrm>
+            <a:off x="8074152" y="4023360"/>
+            <a:ext cx="2825496" cy="1097280"/>
           </a:xfrm>
           <a:prstGeom prst="rect">
             <a:avLst/>
@@ -6910,7 +7180,7 @@
               <a:buNone/>
             </a:pPr>
             <a:r>
-              <a:rPr lang="en-US" sz="1250" dirty="0">
+              <a:rPr lang="en-US" sz="1550" dirty="0">
                 <a:solidFill>
                   <a:srgbClr val="17364A"/>
                 </a:solidFill>
@@ -6920,7 +7190,7 @@
               </a:rPr>
               <a:t>Connect the concept to public health decisions, safeguards, documentation, or implementation work.</a:t>
             </a:r>
-            <a:endParaRPr lang="en-US" sz="1250" dirty="0"/>
+            <a:endParaRPr lang="en-US" sz="1550" dirty="0"/>
           </a:p>
         </p:txBody>
       </p:sp>
@@ -7117,7 +7387,7 @@
                 <a:ea typeface="Aptos" pitchFamily="34" charset="-122"/>
                 <a:cs typeface="Aptos" pitchFamily="34" charset="-120"/>
               </a:rPr>
-              <a:t>© Paula Soper</a:t>
+              <a:t>Â© Paula Soper</a:t>
             </a:r>
             <a:endParaRPr lang="en-US" sz="800" dirty="0"/>
           </a:p>
@@ -7125,7 +7395,46 @@
       </p:sp>
       <p:sp>
         <p:nvSpPr>
-          <p:cNvPr id="7" name="Shape 5"/>
+          <p:cNvPr id="7" name="Text 5"/>
+          <p:cNvSpPr/>
+          <p:nvPr/>
+        </p:nvSpPr>
+        <p:spPr>
+          <a:xfrm>
+            <a:off x="11137392" y="6510528"/>
+            <a:ext cx="411480" cy="201168"/>
+          </a:xfrm>
+          <a:prstGeom prst="rect">
+            <a:avLst/>
+          </a:prstGeom>
+          <a:noFill/>
+          <a:ln/>
+        </p:spPr>
+        <p:txBody>
+          <a:bodyPr wrap="square" lIns="0" tIns="0" rIns="0" bIns="0" rtlCol="0" anchor="ctr"/>
+          <a:lstStyle/>
+          <a:p>
+            <a:pPr algn="r" indent="0" marL="0">
+              <a:buNone/>
+            </a:pPr>
+            <a:r>
+              <a:rPr lang="en-US" sz="900" dirty="0">
+                <a:solidFill>
+                  <a:srgbClr val="5F7181"/>
+                </a:solidFill>
+                <a:latin typeface="Aptos" pitchFamily="34" charset="0"/>
+                <a:ea typeface="Aptos" pitchFamily="34" charset="-122"/>
+                <a:cs typeface="Aptos" pitchFamily="34" charset="-120"/>
+              </a:rPr>
+              <a:t>17</a:t>
+            </a:r>
+            <a:endParaRPr lang="en-US" sz="900" dirty="0"/>
+          </a:p>
+        </p:txBody>
+      </p:sp>
+      <p:sp>
+        <p:nvSpPr>
+          <p:cNvPr id="8" name="Shape 6"/>
           <p:cNvSpPr/>
           <p:nvPr/>
         </p:nvSpPr>
@@ -7150,7 +7459,7 @@
       </p:sp>
       <p:sp>
         <p:nvSpPr>
-          <p:cNvPr id="8" name="Text 6"/>
+          <p:cNvPr id="9" name="Text 7"/>
           <p:cNvSpPr/>
           <p:nvPr/>
         </p:nvSpPr>
@@ -7189,14 +7498,14 @@
       </p:sp>
       <p:sp>
         <p:nvSpPr>
-          <p:cNvPr id="9" name="Text 7"/>
+          <p:cNvPr id="10" name="Text 8"/>
           <p:cNvSpPr/>
           <p:nvPr/>
         </p:nvSpPr>
         <p:spPr>
           <a:xfrm>
             <a:off x="640080" y="621792"/>
-            <a:ext cx="10881360" cy="566928"/>
+            <a:ext cx="10881360" cy="713232"/>
           </a:xfrm>
           <a:prstGeom prst="rect">
             <a:avLst/>
@@ -7214,7 +7523,7 @@
               <a:buNone/>
             </a:pPr>
             <a:r>
-              <a:rPr lang="en-US" sz="2700" b="1" dirty="0">
+              <a:rPr lang="en-US" sz="3400" b="1" dirty="0">
                 <a:solidFill>
                   <a:srgbClr val="003A63"/>
                 </a:solidFill>
@@ -7224,20 +7533,20 @@
               </a:rPr>
               <a:t>Expected Artifact or Evidence</a:t>
             </a:r>
-            <a:endParaRPr lang="en-US" sz="2700" dirty="0"/>
-          </a:p>
-        </p:txBody>
-      </p:sp>
-      <p:sp>
-        <p:nvSpPr>
-          <p:cNvPr id="10" name="Text 8"/>
-          <p:cNvSpPr/>
-          <p:nvPr/>
-        </p:nvSpPr>
-        <p:spPr>
-          <a:xfrm>
-            <a:off x="868680" y="1417320"/>
-            <a:ext cx="6675120" cy="4434840"/>
+            <a:endParaRPr lang="en-US" sz="3400" dirty="0"/>
+          </a:p>
+        </p:txBody>
+      </p:sp>
+      <p:sp>
+        <p:nvSpPr>
+          <p:cNvPr id="11" name="Text 9"/>
+          <p:cNvSpPr/>
+          <p:nvPr/>
+        </p:nvSpPr>
+        <p:spPr>
+          <a:xfrm>
+            <a:off x="868680" y="1508760"/>
+            <a:ext cx="6537960" cy="4160520"/>
           </a:xfrm>
           <a:prstGeom prst="rect">
             <a:avLst/>
@@ -7252,7 +7561,7 @@
           <a:lstStyle/>
           <a:p>
             <a:r>
-              <a:rPr lang="en-US" sz="1700" dirty="0">
+              <a:rPr lang="en-US" sz="2100" dirty="0">
                 <a:solidFill>
                   <a:srgbClr val="17364A"/>
                 </a:solidFill>
@@ -7262,13 +7571,13 @@
               </a:rPr>
               <a:t>Use case intake form; prioritization rubric; sample portfolio view; decision category definitions.</a:t>
             </a:r>
-            <a:endParaRPr lang="en-US" sz="1700" dirty="0"/>
-          </a:p>
-        </p:txBody>
-      </p:sp>
-      <p:sp>
-        <p:nvSpPr>
-          <p:cNvPr id="11" name="Shape 9"/>
+            <a:endParaRPr lang="en-US" sz="2100" dirty="0"/>
+          </a:p>
+        </p:txBody>
+      </p:sp>
+      <p:sp>
+        <p:nvSpPr>
+          <p:cNvPr id="12" name="Shape 10"/>
           <p:cNvSpPr/>
           <p:nvPr/>
         </p:nvSpPr>
@@ -7295,14 +7604,14 @@
       </p:sp>
       <p:sp>
         <p:nvSpPr>
-          <p:cNvPr id="12" name="Text 10"/>
+          <p:cNvPr id="13" name="Text 11"/>
           <p:cNvSpPr/>
           <p:nvPr/>
         </p:nvSpPr>
         <p:spPr>
           <a:xfrm>
             <a:off x="8074152" y="1563624"/>
-            <a:ext cx="2825496" cy="201168"/>
+            <a:ext cx="2825496" cy="256032"/>
           </a:xfrm>
           <a:prstGeom prst="rect">
             <a:avLst/>
@@ -7318,7 +7627,7 @@
               <a:buNone/>
             </a:pPr>
             <a:r>
-              <a:rPr lang="en-US" sz="950" b="1" dirty="0">
+              <a:rPr lang="en-US" sz="1300" b="1" dirty="0">
                 <a:solidFill>
                   <a:srgbClr val="0068B7"/>
                 </a:solidFill>
@@ -7328,20 +7637,20 @@
               </a:rPr>
               <a:t>Key idea</a:t>
             </a:r>
-            <a:endParaRPr lang="en-US" sz="950" dirty="0"/>
-          </a:p>
-        </p:txBody>
-      </p:sp>
-      <p:sp>
-        <p:nvSpPr>
-          <p:cNvPr id="13" name="Text 11"/>
-          <p:cNvSpPr/>
-          <p:nvPr/>
-        </p:nvSpPr>
-        <p:spPr>
-          <a:xfrm>
-            <a:off x="8074152" y="1856232"/>
-            <a:ext cx="2825496" cy="1261872"/>
+            <a:endParaRPr lang="en-US" sz="1300" dirty="0"/>
+          </a:p>
+        </p:txBody>
+      </p:sp>
+      <p:sp>
+        <p:nvSpPr>
+          <p:cNvPr id="14" name="Text 12"/>
+          <p:cNvSpPr/>
+          <p:nvPr/>
+        </p:nvSpPr>
+        <p:spPr>
+          <a:xfrm>
+            <a:off x="8074152" y="1920240"/>
+            <a:ext cx="2825496" cy="1188720"/>
           </a:xfrm>
           <a:prstGeom prst="rect">
             <a:avLst/>
@@ -7359,7 +7668,7 @@
               <a:buNone/>
             </a:pPr>
             <a:r>
-              <a:rPr lang="en-US" sz="1250" dirty="0">
+              <a:rPr lang="en-US" sz="1550" dirty="0">
                 <a:solidFill>
                   <a:srgbClr val="17364A"/>
                 </a:solidFill>
@@ -7369,13 +7678,13 @@
               </a:rPr>
               <a:t>Use case intake form; prioritization rubric; sample portfolio view; decision category definitions.</a:t>
             </a:r>
-            <a:endParaRPr lang="en-US" sz="1250" dirty="0"/>
-          </a:p>
-        </p:txBody>
-      </p:sp>
-      <p:sp>
-        <p:nvSpPr>
-          <p:cNvPr id="14" name="Shape 12"/>
+            <a:endParaRPr lang="en-US" sz="1550" dirty="0"/>
+          </a:p>
+        </p:txBody>
+      </p:sp>
+      <p:sp>
+        <p:nvSpPr>
+          <p:cNvPr id="15" name="Shape 13"/>
           <p:cNvSpPr/>
           <p:nvPr/>
         </p:nvSpPr>
@@ -7402,14 +7711,14 @@
       </p:sp>
       <p:sp>
         <p:nvSpPr>
-          <p:cNvPr id="15" name="Text 13"/>
+          <p:cNvPr id="16" name="Text 14"/>
           <p:cNvSpPr/>
           <p:nvPr/>
         </p:nvSpPr>
         <p:spPr>
           <a:xfrm>
             <a:off x="8074152" y="3666744"/>
-            <a:ext cx="2825496" cy="201168"/>
+            <a:ext cx="2825496" cy="256032"/>
           </a:xfrm>
           <a:prstGeom prst="rect">
             <a:avLst/>
@@ -7425,7 +7734,7 @@
               <a:buNone/>
             </a:pPr>
             <a:r>
-              <a:rPr lang="en-US" sz="950" b="1" dirty="0">
+              <a:rPr lang="en-US" sz="1300" b="1" dirty="0">
                 <a:solidFill>
                   <a:srgbClr val="0068B7"/>
                 </a:solidFill>
@@ -7435,20 +7744,20 @@
               </a:rPr>
               <a:t>Use this for</a:t>
             </a:r>
-            <a:endParaRPr lang="en-US" sz="950" dirty="0"/>
-          </a:p>
-        </p:txBody>
-      </p:sp>
-      <p:sp>
-        <p:nvSpPr>
-          <p:cNvPr id="16" name="Text 14"/>
-          <p:cNvSpPr/>
-          <p:nvPr/>
-        </p:nvSpPr>
-        <p:spPr>
-          <a:xfrm>
-            <a:off x="8074152" y="3959352"/>
-            <a:ext cx="2825496" cy="1170432"/>
+            <a:endParaRPr lang="en-US" sz="1300" dirty="0"/>
+          </a:p>
+        </p:txBody>
+      </p:sp>
+      <p:sp>
+        <p:nvSpPr>
+          <p:cNvPr id="17" name="Text 15"/>
+          <p:cNvSpPr/>
+          <p:nvPr/>
+        </p:nvSpPr>
+        <p:spPr>
+          <a:xfrm>
+            <a:off x="8074152" y="4023360"/>
+            <a:ext cx="2825496" cy="1097280"/>
           </a:xfrm>
           <a:prstGeom prst="rect">
             <a:avLst/>
@@ -7466,7 +7775,7 @@
               <a:buNone/>
             </a:pPr>
             <a:r>
-              <a:rPr lang="en-US" sz="1250" dirty="0">
+              <a:rPr lang="en-US" sz="1550" dirty="0">
                 <a:solidFill>
                   <a:srgbClr val="17364A"/>
                 </a:solidFill>
@@ -7476,7 +7785,7 @@
               </a:rPr>
               <a:t>Connect the concept to public health decisions, safeguards, documentation, or implementation work.</a:t>
             </a:r>
-            <a:endParaRPr lang="en-US" sz="1250" dirty="0"/>
+            <a:endParaRPr lang="en-US" sz="1550" dirty="0"/>
           </a:p>
         </p:txBody>
       </p:sp>
@@ -7673,7 +7982,7 @@
                 <a:ea typeface="Aptos" pitchFamily="34" charset="-122"/>
                 <a:cs typeface="Aptos" pitchFamily="34" charset="-120"/>
               </a:rPr>
-              <a:t>© Paula Soper</a:t>
+              <a:t>Â© Paula Soper</a:t>
             </a:r>
             <a:endParaRPr lang="en-US" sz="800" dirty="0"/>
           </a:p>
@@ -7681,7 +7990,46 @@
       </p:sp>
       <p:sp>
         <p:nvSpPr>
-          <p:cNvPr id="7" name="Shape 5"/>
+          <p:cNvPr id="7" name="Text 5"/>
+          <p:cNvSpPr/>
+          <p:nvPr/>
+        </p:nvSpPr>
+        <p:spPr>
+          <a:xfrm>
+            <a:off x="11137392" y="6510528"/>
+            <a:ext cx="411480" cy="201168"/>
+          </a:xfrm>
+          <a:prstGeom prst="rect">
+            <a:avLst/>
+          </a:prstGeom>
+          <a:noFill/>
+          <a:ln/>
+        </p:spPr>
+        <p:txBody>
+          <a:bodyPr wrap="square" lIns="0" tIns="0" rIns="0" bIns="0" rtlCol="0" anchor="ctr"/>
+          <a:lstStyle/>
+          <a:p>
+            <a:pPr algn="r" indent="0" marL="0">
+              <a:buNone/>
+            </a:pPr>
+            <a:r>
+              <a:rPr lang="en-US" sz="900" dirty="0">
+                <a:solidFill>
+                  <a:srgbClr val="5F7181"/>
+                </a:solidFill>
+                <a:latin typeface="Aptos" pitchFamily="34" charset="0"/>
+                <a:ea typeface="Aptos" pitchFamily="34" charset="-122"/>
+                <a:cs typeface="Aptos" pitchFamily="34" charset="-120"/>
+              </a:rPr>
+              <a:t>18</a:t>
+            </a:r>
+            <a:endParaRPr lang="en-US" sz="900" dirty="0"/>
+          </a:p>
+        </p:txBody>
+      </p:sp>
+      <p:sp>
+        <p:nvSpPr>
+          <p:cNvPr id="8" name="Shape 6"/>
           <p:cNvSpPr/>
           <p:nvPr/>
         </p:nvSpPr>
@@ -7706,7 +8054,7 @@
       </p:sp>
       <p:sp>
         <p:nvSpPr>
-          <p:cNvPr id="8" name="Text 6"/>
+          <p:cNvPr id="9" name="Text 7"/>
           <p:cNvSpPr/>
           <p:nvPr/>
         </p:nvSpPr>
@@ -7745,14 +8093,14 @@
       </p:sp>
       <p:sp>
         <p:nvSpPr>
-          <p:cNvPr id="9" name="Text 7"/>
+          <p:cNvPr id="10" name="Text 8"/>
           <p:cNvSpPr/>
           <p:nvPr/>
         </p:nvSpPr>
         <p:spPr>
           <a:xfrm>
             <a:off x="640080" y="621792"/>
-            <a:ext cx="10881360" cy="566928"/>
+            <a:ext cx="10881360" cy="713232"/>
           </a:xfrm>
           <a:prstGeom prst="rect">
             <a:avLst/>
@@ -7770,7 +8118,7 @@
               <a:buNone/>
             </a:pPr>
             <a:r>
-              <a:rPr lang="en-US" sz="2700" b="1" dirty="0">
+              <a:rPr lang="en-US" sz="3400" b="1" dirty="0">
                 <a:solidFill>
                   <a:srgbClr val="003A63"/>
                 </a:solidFill>
@@ -7780,20 +8128,20 @@
               </a:rPr>
               <a:t>Expected Assignment</a:t>
             </a:r>
-            <a:endParaRPr lang="en-US" sz="2700" dirty="0"/>
-          </a:p>
-        </p:txBody>
-      </p:sp>
-      <p:sp>
-        <p:nvSpPr>
-          <p:cNvPr id="10" name="Text 8"/>
-          <p:cNvSpPr/>
-          <p:nvPr/>
-        </p:nvSpPr>
-        <p:spPr>
-          <a:xfrm>
-            <a:off x="868680" y="1417320"/>
-            <a:ext cx="6675120" cy="4434840"/>
+            <a:endParaRPr lang="en-US" sz="3400" dirty="0"/>
+          </a:p>
+        </p:txBody>
+      </p:sp>
+      <p:sp>
+        <p:nvSpPr>
+          <p:cNvPr id="11" name="Text 9"/>
+          <p:cNvSpPr/>
+          <p:nvPr/>
+        </p:nvSpPr>
+        <p:spPr>
+          <a:xfrm>
+            <a:off x="868680" y="1508760"/>
+            <a:ext cx="6537960" cy="4160520"/>
           </a:xfrm>
           <a:prstGeom prst="rect">
             <a:avLst/>
@@ -7808,7 +8156,7 @@
           <a:lstStyle/>
           <a:p>
             <a:r>
-              <a:rPr lang="en-US" sz="1700" dirty="0">
+              <a:rPr lang="en-US" sz="2100" dirty="0">
                 <a:solidFill>
                   <a:srgbClr val="17364A"/>
                 </a:solidFill>
@@ -7818,13 +8166,13 @@
               </a:rPr>
               <a:t>Use case intake form; prioritization rubric; sample portfolio view; decision category definitions.</a:t>
             </a:r>
-            <a:endParaRPr lang="en-US" sz="1700" dirty="0"/>
-          </a:p>
-        </p:txBody>
-      </p:sp>
-      <p:sp>
-        <p:nvSpPr>
-          <p:cNvPr id="11" name="Shape 9"/>
+            <a:endParaRPr lang="en-US" sz="2100" dirty="0"/>
+          </a:p>
+        </p:txBody>
+      </p:sp>
+      <p:sp>
+        <p:nvSpPr>
+          <p:cNvPr id="12" name="Shape 10"/>
           <p:cNvSpPr/>
           <p:nvPr/>
         </p:nvSpPr>
@@ -7851,14 +8199,14 @@
       </p:sp>
       <p:sp>
         <p:nvSpPr>
-          <p:cNvPr id="12" name="Text 10"/>
+          <p:cNvPr id="13" name="Text 11"/>
           <p:cNvSpPr/>
           <p:nvPr/>
         </p:nvSpPr>
         <p:spPr>
           <a:xfrm>
             <a:off x="8074152" y="1563624"/>
-            <a:ext cx="2825496" cy="201168"/>
+            <a:ext cx="2825496" cy="256032"/>
           </a:xfrm>
           <a:prstGeom prst="rect">
             <a:avLst/>
@@ -7874,7 +8222,7 @@
               <a:buNone/>
             </a:pPr>
             <a:r>
-              <a:rPr lang="en-US" sz="950" b="1" dirty="0">
+              <a:rPr lang="en-US" sz="1300" b="1" dirty="0">
                 <a:solidFill>
                   <a:srgbClr val="0068B7"/>
                 </a:solidFill>
@@ -7884,20 +8232,20 @@
               </a:rPr>
               <a:t>Key idea</a:t>
             </a:r>
-            <a:endParaRPr lang="en-US" sz="950" dirty="0"/>
-          </a:p>
-        </p:txBody>
-      </p:sp>
-      <p:sp>
-        <p:nvSpPr>
-          <p:cNvPr id="13" name="Text 11"/>
-          <p:cNvSpPr/>
-          <p:nvPr/>
-        </p:nvSpPr>
-        <p:spPr>
-          <a:xfrm>
-            <a:off x="8074152" y="1856232"/>
-            <a:ext cx="2825496" cy="1261872"/>
+            <a:endParaRPr lang="en-US" sz="1300" dirty="0"/>
+          </a:p>
+        </p:txBody>
+      </p:sp>
+      <p:sp>
+        <p:nvSpPr>
+          <p:cNvPr id="14" name="Text 12"/>
+          <p:cNvSpPr/>
+          <p:nvPr/>
+        </p:nvSpPr>
+        <p:spPr>
+          <a:xfrm>
+            <a:off x="8074152" y="1920240"/>
+            <a:ext cx="2825496" cy="1188720"/>
           </a:xfrm>
           <a:prstGeom prst="rect">
             <a:avLst/>
@@ -7915,7 +8263,7 @@
               <a:buNone/>
             </a:pPr>
             <a:r>
-              <a:rPr lang="en-US" sz="1250" dirty="0">
+              <a:rPr lang="en-US" sz="1550" dirty="0">
                 <a:solidFill>
                   <a:srgbClr val="17364A"/>
                 </a:solidFill>
@@ -7925,13 +8273,13 @@
               </a:rPr>
               <a:t>Use case intake form; prioritization rubric; sample portfolio view; decision category definitions.</a:t>
             </a:r>
-            <a:endParaRPr lang="en-US" sz="1250" dirty="0"/>
-          </a:p>
-        </p:txBody>
-      </p:sp>
-      <p:sp>
-        <p:nvSpPr>
-          <p:cNvPr id="14" name="Shape 12"/>
+            <a:endParaRPr lang="en-US" sz="1550" dirty="0"/>
+          </a:p>
+        </p:txBody>
+      </p:sp>
+      <p:sp>
+        <p:nvSpPr>
+          <p:cNvPr id="15" name="Shape 13"/>
           <p:cNvSpPr/>
           <p:nvPr/>
         </p:nvSpPr>
@@ -7958,14 +8306,14 @@
       </p:sp>
       <p:sp>
         <p:nvSpPr>
-          <p:cNvPr id="15" name="Text 13"/>
+          <p:cNvPr id="16" name="Text 14"/>
           <p:cNvSpPr/>
           <p:nvPr/>
         </p:nvSpPr>
         <p:spPr>
           <a:xfrm>
             <a:off x="8074152" y="3666744"/>
-            <a:ext cx="2825496" cy="201168"/>
+            <a:ext cx="2825496" cy="256032"/>
           </a:xfrm>
           <a:prstGeom prst="rect">
             <a:avLst/>
@@ -7981,7 +8329,7 @@
               <a:buNone/>
             </a:pPr>
             <a:r>
-              <a:rPr lang="en-US" sz="950" b="1" dirty="0">
+              <a:rPr lang="en-US" sz="1300" b="1" dirty="0">
                 <a:solidFill>
                   <a:srgbClr val="0068B7"/>
                 </a:solidFill>
@@ -7991,20 +8339,20 @@
               </a:rPr>
               <a:t>Use this for</a:t>
             </a:r>
-            <a:endParaRPr lang="en-US" sz="950" dirty="0"/>
-          </a:p>
-        </p:txBody>
-      </p:sp>
-      <p:sp>
-        <p:nvSpPr>
-          <p:cNvPr id="16" name="Text 14"/>
-          <p:cNvSpPr/>
-          <p:nvPr/>
-        </p:nvSpPr>
-        <p:spPr>
-          <a:xfrm>
-            <a:off x="8074152" y="3959352"/>
-            <a:ext cx="2825496" cy="1170432"/>
+            <a:endParaRPr lang="en-US" sz="1300" dirty="0"/>
+          </a:p>
+        </p:txBody>
+      </p:sp>
+      <p:sp>
+        <p:nvSpPr>
+          <p:cNvPr id="17" name="Text 15"/>
+          <p:cNvSpPr/>
+          <p:nvPr/>
+        </p:nvSpPr>
+        <p:spPr>
+          <a:xfrm>
+            <a:off x="8074152" y="4023360"/>
+            <a:ext cx="2825496" cy="1097280"/>
           </a:xfrm>
           <a:prstGeom prst="rect">
             <a:avLst/>
@@ -8022,7 +8370,7 @@
               <a:buNone/>
             </a:pPr>
             <a:r>
-              <a:rPr lang="en-US" sz="1250" dirty="0">
+              <a:rPr lang="en-US" sz="1550" dirty="0">
                 <a:solidFill>
                   <a:srgbClr val="17364A"/>
                 </a:solidFill>
@@ -8032,7 +8380,7 @@
               </a:rPr>
               <a:t>Connect the concept to public health decisions, safeguards, documentation, or implementation work.</a:t>
             </a:r>
-            <a:endParaRPr lang="en-US" sz="1250" dirty="0"/>
+            <a:endParaRPr lang="en-US" sz="1550" dirty="0"/>
           </a:p>
         </p:txBody>
       </p:sp>
@@ -8229,7 +8577,7 @@
                 <a:ea typeface="Aptos" pitchFamily="34" charset="-122"/>
                 <a:cs typeface="Aptos" pitchFamily="34" charset="-120"/>
               </a:rPr>
-              <a:t>© Paula Soper</a:t>
+              <a:t>Â© Paula Soper</a:t>
             </a:r>
             <a:endParaRPr lang="en-US" sz="800" dirty="0"/>
           </a:p>
@@ -8237,7 +8585,46 @@
       </p:sp>
       <p:sp>
         <p:nvSpPr>
-          <p:cNvPr id="7" name="Shape 5"/>
+          <p:cNvPr id="7" name="Text 5"/>
+          <p:cNvSpPr/>
+          <p:nvPr/>
+        </p:nvSpPr>
+        <p:spPr>
+          <a:xfrm>
+            <a:off x="11137392" y="6510528"/>
+            <a:ext cx="411480" cy="201168"/>
+          </a:xfrm>
+          <a:prstGeom prst="rect">
+            <a:avLst/>
+          </a:prstGeom>
+          <a:noFill/>
+          <a:ln/>
+        </p:spPr>
+        <p:txBody>
+          <a:bodyPr wrap="square" lIns="0" tIns="0" rIns="0" bIns="0" rtlCol="0" anchor="ctr"/>
+          <a:lstStyle/>
+          <a:p>
+            <a:pPr algn="r" indent="0" marL="0">
+              <a:buNone/>
+            </a:pPr>
+            <a:r>
+              <a:rPr lang="en-US" sz="900" dirty="0">
+                <a:solidFill>
+                  <a:srgbClr val="5F7181"/>
+                </a:solidFill>
+                <a:latin typeface="Aptos" pitchFamily="34" charset="0"/>
+                <a:ea typeface="Aptos" pitchFamily="34" charset="-122"/>
+                <a:cs typeface="Aptos" pitchFamily="34" charset="-120"/>
+              </a:rPr>
+              <a:t>19</a:t>
+            </a:r>
+            <a:endParaRPr lang="en-US" sz="900" dirty="0"/>
+          </a:p>
+        </p:txBody>
+      </p:sp>
+      <p:sp>
+        <p:nvSpPr>
+          <p:cNvPr id="8" name="Shape 6"/>
           <p:cNvSpPr/>
           <p:nvPr/>
         </p:nvSpPr>
@@ -8262,7 +8649,7 @@
       </p:sp>
       <p:sp>
         <p:nvSpPr>
-          <p:cNvPr id="8" name="Text 6"/>
+          <p:cNvPr id="9" name="Text 7"/>
           <p:cNvSpPr/>
           <p:nvPr/>
         </p:nvSpPr>
@@ -8301,14 +8688,14 @@
       </p:sp>
       <p:sp>
         <p:nvSpPr>
-          <p:cNvPr id="9" name="Text 7"/>
+          <p:cNvPr id="10" name="Text 8"/>
           <p:cNvSpPr/>
           <p:nvPr/>
         </p:nvSpPr>
         <p:spPr>
           <a:xfrm>
             <a:off x="640080" y="621792"/>
-            <a:ext cx="10881360" cy="566928"/>
+            <a:ext cx="10881360" cy="713232"/>
           </a:xfrm>
           <a:prstGeom prst="rect">
             <a:avLst/>
@@ -8326,7 +8713,7 @@
               <a:buNone/>
             </a:pPr>
             <a:r>
-              <a:rPr lang="en-US" sz="2700" b="1" dirty="0">
+              <a:rPr lang="en-US" sz="3400" b="1" dirty="0">
                 <a:solidFill>
                   <a:srgbClr val="003A63"/>
                 </a:solidFill>
@@ -8336,20 +8723,20 @@
               </a:rPr>
               <a:t>Knowledge Check</a:t>
             </a:r>
-            <a:endParaRPr lang="en-US" sz="2700" dirty="0"/>
-          </a:p>
-        </p:txBody>
-      </p:sp>
-      <p:sp>
-        <p:nvSpPr>
-          <p:cNvPr id="10" name="Text 8"/>
-          <p:cNvSpPr/>
-          <p:nvPr/>
-        </p:nvSpPr>
-        <p:spPr>
-          <a:xfrm>
-            <a:off x="868680" y="1417320"/>
-            <a:ext cx="6675120" cy="4434840"/>
+            <a:endParaRPr lang="en-US" sz="3400" dirty="0"/>
+          </a:p>
+        </p:txBody>
+      </p:sp>
+      <p:sp>
+        <p:nvSpPr>
+          <p:cNvPr id="11" name="Text 9"/>
+          <p:cNvSpPr/>
+          <p:nvPr/>
+        </p:nvSpPr>
+        <p:spPr>
+          <a:xfrm>
+            <a:off x="868680" y="1508760"/>
+            <a:ext cx="6537960" cy="4160520"/>
           </a:xfrm>
           <a:prstGeom prst="rect">
             <a:avLst/>
@@ -8364,7 +8751,7 @@
           <a:lstStyle/>
           <a:p>
             <a:r>
-              <a:rPr lang="en-US" sz="1700" dirty="0">
+              <a:rPr lang="en-US" sz="2100" dirty="0">
                 <a:solidFill>
                   <a:srgbClr val="17364A"/>
                 </a:solidFill>
@@ -8374,11 +8761,11 @@
               </a:rPr>
               <a:t>1. What is the strongest reason this module topic belongs in AI leadership and governance training?</a:t>
             </a:r>
-            <a:endParaRPr lang="en-US" sz="1700" dirty="0"/>
-          </a:p>
-          <a:p>
-            <a:r>
-              <a:rPr lang="en-US" sz="1700" dirty="0">
+            <a:endParaRPr lang="en-US" sz="2100" dirty="0"/>
+          </a:p>
+          <a:p>
+            <a:r>
+              <a:rPr lang="en-US" sz="2100" dirty="0">
                 <a:solidFill>
                   <a:srgbClr val="17364A"/>
                 </a:solidFill>
@@ -8388,11 +8775,11 @@
               </a:rPr>
               <a:t>2. Which practice best supports accountable public health AI governance?</a:t>
             </a:r>
-            <a:endParaRPr lang="en-US" sz="1700" dirty="0"/>
-          </a:p>
-          <a:p>
-            <a:r>
-              <a:rPr lang="en-US" sz="1700" dirty="0">
+            <a:endParaRPr lang="en-US" sz="2100" dirty="0"/>
+          </a:p>
+          <a:p>
+            <a:r>
+              <a:rPr lang="en-US" sz="2100" dirty="0">
                 <a:solidFill>
                   <a:srgbClr val="17364A"/>
                 </a:solidFill>
@@ -8402,27 +8789,13 @@
               </a:rPr>
               <a:t>3. When should an AI use case be escalated for leadership or governance review?</a:t>
             </a:r>
-            <a:endParaRPr lang="en-US" sz="1700" dirty="0"/>
-          </a:p>
-          <a:p>
-            <a:r>
-              <a:rPr lang="en-US" sz="1700" dirty="0">
-                <a:solidFill>
-                  <a:srgbClr val="17364A"/>
-                </a:solidFill>
-                <a:latin typeface="Aptos" pitchFamily="34" charset="0"/>
-                <a:ea typeface="Aptos" pitchFamily="34" charset="-122"/>
-                <a:cs typeface="Aptos" pitchFamily="34" charset="-120"/>
-              </a:rPr>
-              <a:t>4. What is weak evidence of completion for a leadership and governance module?</a:t>
-            </a:r>
-            <a:endParaRPr lang="en-US" sz="1700" dirty="0"/>
-          </a:p>
-        </p:txBody>
-      </p:sp>
-      <p:sp>
-        <p:nvSpPr>
-          <p:cNvPr id="11" name="Shape 9"/>
+            <a:endParaRPr lang="en-US" sz="2100" dirty="0"/>
+          </a:p>
+        </p:txBody>
+      </p:sp>
+      <p:sp>
+        <p:nvSpPr>
+          <p:cNvPr id="12" name="Shape 10"/>
           <p:cNvSpPr/>
           <p:nvPr/>
         </p:nvSpPr>
@@ -8449,14 +8822,14 @@
       </p:sp>
       <p:sp>
         <p:nvSpPr>
-          <p:cNvPr id="12" name="Text 10"/>
+          <p:cNvPr id="13" name="Text 11"/>
           <p:cNvSpPr/>
           <p:nvPr/>
         </p:nvSpPr>
         <p:spPr>
           <a:xfrm>
             <a:off x="8074152" y="1563624"/>
-            <a:ext cx="2825496" cy="201168"/>
+            <a:ext cx="2825496" cy="256032"/>
           </a:xfrm>
           <a:prstGeom prst="rect">
             <a:avLst/>
@@ -8472,7 +8845,7 @@
               <a:buNone/>
             </a:pPr>
             <a:r>
-              <a:rPr lang="en-US" sz="950" b="1" dirty="0">
+              <a:rPr lang="en-US" sz="1300" b="1" dirty="0">
                 <a:solidFill>
                   <a:srgbClr val="0068B7"/>
                 </a:solidFill>
@@ -8482,20 +8855,20 @@
               </a:rPr>
               <a:t>Key idea</a:t>
             </a:r>
-            <a:endParaRPr lang="en-US" sz="950" dirty="0"/>
-          </a:p>
-        </p:txBody>
-      </p:sp>
-      <p:sp>
-        <p:nvSpPr>
-          <p:cNvPr id="13" name="Text 11"/>
-          <p:cNvSpPr/>
-          <p:nvPr/>
-        </p:nvSpPr>
-        <p:spPr>
-          <a:xfrm>
-            <a:off x="8074152" y="1856232"/>
-            <a:ext cx="2825496" cy="1261872"/>
+            <a:endParaRPr lang="en-US" sz="1300" dirty="0"/>
+          </a:p>
+        </p:txBody>
+      </p:sp>
+      <p:sp>
+        <p:nvSpPr>
+          <p:cNvPr id="14" name="Text 12"/>
+          <p:cNvSpPr/>
+          <p:nvPr/>
+        </p:nvSpPr>
+        <p:spPr>
+          <a:xfrm>
+            <a:off x="8074152" y="1920240"/>
+            <a:ext cx="2825496" cy="1188720"/>
           </a:xfrm>
           <a:prstGeom prst="rect">
             <a:avLst/>
@@ -8513,7 +8886,7 @@
               <a:buNone/>
             </a:pPr>
             <a:r>
-              <a:rPr lang="en-US" sz="1250" dirty="0">
+              <a:rPr lang="en-US" sz="1550" dirty="0">
                 <a:solidFill>
                   <a:srgbClr val="17364A"/>
                 </a:solidFill>
@@ -8523,13 +8896,13 @@
               </a:rPr>
               <a:t>1. What is the strongest reason this module topic belongs in AI leadership and governance training?</a:t>
             </a:r>
-            <a:endParaRPr lang="en-US" sz="1250" dirty="0"/>
-          </a:p>
-        </p:txBody>
-      </p:sp>
-      <p:sp>
-        <p:nvSpPr>
-          <p:cNvPr id="14" name="Shape 12"/>
+            <a:endParaRPr lang="en-US" sz="1550" dirty="0"/>
+          </a:p>
+        </p:txBody>
+      </p:sp>
+      <p:sp>
+        <p:nvSpPr>
+          <p:cNvPr id="15" name="Shape 13"/>
           <p:cNvSpPr/>
           <p:nvPr/>
         </p:nvSpPr>
@@ -8556,14 +8929,14 @@
       </p:sp>
       <p:sp>
         <p:nvSpPr>
-          <p:cNvPr id="15" name="Text 13"/>
+          <p:cNvPr id="16" name="Text 14"/>
           <p:cNvSpPr/>
           <p:nvPr/>
         </p:nvSpPr>
         <p:spPr>
           <a:xfrm>
             <a:off x="8074152" y="3666744"/>
-            <a:ext cx="2825496" cy="201168"/>
+            <a:ext cx="2825496" cy="256032"/>
           </a:xfrm>
           <a:prstGeom prst="rect">
             <a:avLst/>
@@ -8579,7 +8952,7 @@
               <a:buNone/>
             </a:pPr>
             <a:r>
-              <a:rPr lang="en-US" sz="950" b="1" dirty="0">
+              <a:rPr lang="en-US" sz="1300" b="1" dirty="0">
                 <a:solidFill>
                   <a:srgbClr val="0068B7"/>
                 </a:solidFill>
@@ -8589,20 +8962,20 @@
               </a:rPr>
               <a:t>Use this for</a:t>
             </a:r>
-            <a:endParaRPr lang="en-US" sz="950" dirty="0"/>
-          </a:p>
-        </p:txBody>
-      </p:sp>
-      <p:sp>
-        <p:nvSpPr>
-          <p:cNvPr id="16" name="Text 14"/>
-          <p:cNvSpPr/>
-          <p:nvPr/>
-        </p:nvSpPr>
-        <p:spPr>
-          <a:xfrm>
-            <a:off x="8074152" y="3959352"/>
-            <a:ext cx="2825496" cy="1170432"/>
+            <a:endParaRPr lang="en-US" sz="1300" dirty="0"/>
+          </a:p>
+        </p:txBody>
+      </p:sp>
+      <p:sp>
+        <p:nvSpPr>
+          <p:cNvPr id="17" name="Text 15"/>
+          <p:cNvSpPr/>
+          <p:nvPr/>
+        </p:nvSpPr>
+        <p:spPr>
+          <a:xfrm>
+            <a:off x="8074152" y="4023360"/>
+            <a:ext cx="2825496" cy="1097280"/>
           </a:xfrm>
           <a:prstGeom prst="rect">
             <a:avLst/>
@@ -8620,7 +8993,7 @@
               <a:buNone/>
             </a:pPr>
             <a:r>
-              <a:rPr lang="en-US" sz="1250" dirty="0">
+              <a:rPr lang="en-US" sz="1550" dirty="0">
                 <a:solidFill>
                   <a:srgbClr val="17364A"/>
                 </a:solidFill>
@@ -8630,7 +9003,7 @@
               </a:rPr>
               <a:t>Connect the concept to public health decisions, safeguards, documentation, or implementation work.</a:t>
             </a:r>
-            <a:endParaRPr lang="en-US" sz="1250" dirty="0"/>
+            <a:endParaRPr lang="en-US" sz="1550" dirty="0"/>
           </a:p>
         </p:txBody>
       </p:sp>
@@ -8827,7 +9200,7 @@
                 <a:ea typeface="Aptos" pitchFamily="34" charset="-122"/>
                 <a:cs typeface="Aptos" pitchFamily="34" charset="-120"/>
               </a:rPr>
-              <a:t>© Paula Soper</a:t>
+              <a:t>Â© Paula Soper</a:t>
             </a:r>
             <a:endParaRPr lang="en-US" sz="800" dirty="0"/>
           </a:p>
@@ -8841,8 +9214,47 @@
         </p:nvSpPr>
         <p:spPr>
           <a:xfrm>
+            <a:off x="11137392" y="6510528"/>
+            <a:ext cx="411480" cy="201168"/>
+          </a:xfrm>
+          <a:prstGeom prst="rect">
+            <a:avLst/>
+          </a:prstGeom>
+          <a:noFill/>
+          <a:ln/>
+        </p:spPr>
+        <p:txBody>
+          <a:bodyPr wrap="square" lIns="0" tIns="0" rIns="0" bIns="0" rtlCol="0" anchor="ctr"/>
+          <a:lstStyle/>
+          <a:p>
+            <a:pPr algn="r" indent="0" marL="0">
+              <a:buNone/>
+            </a:pPr>
+            <a:r>
+              <a:rPr lang="en-US" sz="900" dirty="0">
+                <a:solidFill>
+                  <a:srgbClr val="5F7181"/>
+                </a:solidFill>
+                <a:latin typeface="Aptos" pitchFamily="34" charset="0"/>
+                <a:ea typeface="Aptos" pitchFamily="34" charset="-122"/>
+                <a:cs typeface="Aptos" pitchFamily="34" charset="-120"/>
+              </a:rPr>
+              <a:t>2</a:t>
+            </a:r>
+            <a:endParaRPr lang="en-US" sz="900" dirty="0"/>
+          </a:p>
+        </p:txBody>
+      </p:sp>
+      <p:sp>
+        <p:nvSpPr>
+          <p:cNvPr id="8" name="Text 6"/>
+          <p:cNvSpPr/>
+          <p:nvPr/>
+        </p:nvSpPr>
+        <p:spPr>
+          <a:xfrm>
             <a:off x="640080" y="658368"/>
-            <a:ext cx="10881360" cy="566928"/>
+            <a:ext cx="10881360" cy="713232"/>
           </a:xfrm>
           <a:prstGeom prst="rect">
             <a:avLst/>
@@ -8860,7 +9272,7 @@
               <a:buNone/>
             </a:pPr>
             <a:r>
-              <a:rPr lang="en-US" sz="2700" b="1" dirty="0">
+              <a:rPr lang="en-US" sz="3400" b="1" dirty="0">
                 <a:solidFill>
                   <a:srgbClr val="003A63"/>
                 </a:solidFill>
@@ -8870,20 +9282,20 @@
               </a:rPr>
               <a:t>What this module helps you do</a:t>
             </a:r>
-            <a:endParaRPr lang="en-US" sz="2700" dirty="0"/>
-          </a:p>
-        </p:txBody>
-      </p:sp>
-      <p:sp>
-        <p:nvSpPr>
-          <p:cNvPr id="8" name="Text 6"/>
-          <p:cNvSpPr/>
-          <p:nvPr/>
-        </p:nvSpPr>
-        <p:spPr>
-          <a:xfrm>
-            <a:off x="868680" y="1417320"/>
-            <a:ext cx="6675120" cy="3291840"/>
+            <a:endParaRPr lang="en-US" sz="3400" dirty="0"/>
+          </a:p>
+        </p:txBody>
+      </p:sp>
+      <p:sp>
+        <p:nvSpPr>
+          <p:cNvPr id="9" name="Text 7"/>
+          <p:cNvSpPr/>
+          <p:nvPr/>
+        </p:nvSpPr>
+        <p:spPr>
+          <a:xfrm>
+            <a:off x="868680" y="1508760"/>
+            <a:ext cx="6446520" cy="2926080"/>
           </a:xfrm>
           <a:prstGeom prst="rect">
             <a:avLst/>
@@ -8898,7 +9310,7 @@
           <a:lstStyle/>
           <a:p>
             <a:r>
-              <a:rPr lang="en-US" sz="1700" dirty="0">
+              <a:rPr lang="en-US" sz="2100" dirty="0">
                 <a:solidFill>
                   <a:srgbClr val="17364A"/>
                 </a:solidFill>
@@ -8908,11 +9320,11 @@
               </a:rPr>
               <a:t>AI opportunities can quickly exceed an agency's capacity to evaluate, implement, and sustain them.</a:t>
             </a:r>
-            <a:endParaRPr lang="en-US" sz="1700" dirty="0"/>
-          </a:p>
-          <a:p>
-            <a:r>
-              <a:rPr lang="en-US" sz="1700" dirty="0">
+            <a:endParaRPr lang="en-US" sz="2100" dirty="0"/>
+          </a:p>
+          <a:p>
+            <a:r>
+              <a:rPr lang="en-US" sz="2100" dirty="0">
                 <a:solidFill>
                   <a:srgbClr val="17364A"/>
                 </a:solidFill>
@@ -8920,13 +9332,13 @@
                 <a:ea typeface="Aptos" pitchFamily="34" charset="-122"/>
                 <a:cs typeface="Aptos" pitchFamily="34" charset="-120"/>
               </a:rPr>
-              <a:t>Leaders need a portfolio strategy that helps distinguish high-value public health uses from attractive but low-impact experiments.</a:t>
-            </a:r>
-            <a:endParaRPr lang="en-US" sz="1700" dirty="0"/>
-          </a:p>
-          <a:p>
-            <a:r>
-              <a:rPr lang="en-US" sz="1700" dirty="0">
+              <a:t>Leaders need a portfolio strategy that helps distinguish high-value public health uses from attractive but.</a:t>
+            </a:r>
+            <a:endParaRPr lang="en-US" sz="2100" dirty="0"/>
+          </a:p>
+          <a:p>
+            <a:r>
+              <a:rPr lang="en-US" sz="2100" dirty="0">
                 <a:solidFill>
                   <a:srgbClr val="17364A"/>
                 </a:solidFill>
@@ -8934,29 +9346,15 @@
                 <a:ea typeface="Aptos" pitchFamily="34" charset="-122"/>
                 <a:cs typeface="Aptos" pitchFamily="34" charset="-120"/>
               </a:rPr>
-              <a:t>A portfolio approach organizes AI opportunities across programs, risk levels, readiness, equity impact, technical feasibility, expected benefit, and.</a:t>
-            </a:r>
-            <a:endParaRPr lang="en-US" sz="1700" dirty="0"/>
-          </a:p>
-          <a:p>
-            <a:r>
-              <a:rPr lang="en-US" sz="1700" dirty="0">
-                <a:solidFill>
-                  <a:srgbClr val="17364A"/>
-                </a:solidFill>
-                <a:latin typeface="Aptos" pitchFamily="34" charset="0"/>
-                <a:ea typeface="Aptos" pitchFamily="34" charset="-122"/>
-                <a:cs typeface="Aptos" pitchFamily="34" charset="-120"/>
-              </a:rPr>
-              <a:t>This module teaches leaders how to create an AI use case intake and prioritization process.</a:t>
-            </a:r>
-            <a:endParaRPr lang="en-US" sz="1700" dirty="0"/>
-          </a:p>
-        </p:txBody>
-      </p:sp>
-      <p:sp>
-        <p:nvSpPr>
-          <p:cNvPr id="9" name="Shape 7"/>
+              <a:t>A portfolio approach organizes AI opportunities across programs, risk levels, readiness, equity impact, technical.</a:t>
+            </a:r>
+            <a:endParaRPr lang="en-US" sz="2100" dirty="0"/>
+          </a:p>
+        </p:txBody>
+      </p:sp>
+      <p:sp>
+        <p:nvSpPr>
+          <p:cNvPr id="10" name="Shape 8"/>
           <p:cNvSpPr/>
           <p:nvPr/>
         </p:nvSpPr>
@@ -8983,14 +9381,14 @@
       </p:sp>
       <p:sp>
         <p:nvSpPr>
-          <p:cNvPr id="10" name="Text 8"/>
+          <p:cNvPr id="11" name="Text 9"/>
           <p:cNvSpPr/>
           <p:nvPr/>
         </p:nvSpPr>
         <p:spPr>
           <a:xfrm>
             <a:off x="8074152" y="1563624"/>
-            <a:ext cx="2825496" cy="201168"/>
+            <a:ext cx="2825496" cy="256032"/>
           </a:xfrm>
           <a:prstGeom prst="rect">
             <a:avLst/>
@@ -9006,7 +9404,7 @@
               <a:buNone/>
             </a:pPr>
             <a:r>
-              <a:rPr lang="en-US" sz="950" b="1" dirty="0">
+              <a:rPr lang="en-US" sz="1300" b="1" dirty="0">
                 <a:solidFill>
                   <a:srgbClr val="0068B7"/>
                 </a:solidFill>
@@ -9016,20 +9414,20 @@
               </a:rPr>
               <a:t>Module details</a:t>
             </a:r>
-            <a:endParaRPr lang="en-US" sz="950" dirty="0"/>
-          </a:p>
-        </p:txBody>
-      </p:sp>
-      <p:sp>
-        <p:nvSpPr>
-          <p:cNvPr id="11" name="Text 9"/>
-          <p:cNvSpPr/>
-          <p:nvPr/>
-        </p:nvSpPr>
-        <p:spPr>
-          <a:xfrm>
-            <a:off x="8074152" y="1856232"/>
-            <a:ext cx="2825496" cy="1353312"/>
+            <a:endParaRPr lang="en-US" sz="1300" dirty="0"/>
+          </a:p>
+        </p:txBody>
+      </p:sp>
+      <p:sp>
+        <p:nvSpPr>
+          <p:cNvPr id="12" name="Text 10"/>
+          <p:cNvSpPr/>
+          <p:nvPr/>
+        </p:nvSpPr>
+        <p:spPr>
+          <a:xfrm>
+            <a:off x="8074152" y="1920240"/>
+            <a:ext cx="2825496" cy="1280160"/>
           </a:xfrm>
           <a:prstGeom prst="rect">
             <a:avLst/>
@@ -9047,7 +9445,7 @@
               <a:buNone/>
             </a:pPr>
             <a:r>
-              <a:rPr lang="en-US" sz="1250" dirty="0">
+              <a:rPr lang="en-US" sz="1550" dirty="0">
                 <a:solidFill>
                   <a:srgbClr val="17364A"/>
                 </a:solidFill>
@@ -9057,14 +9455,14 @@
               </a:rPr>
               <a:t>Level: advanced/leadership</a:t>
             </a:r>
-            <a:endParaRPr lang="en-US" sz="1250" dirty="0"/>
+            <a:endParaRPr lang="en-US" sz="1550" dirty="0"/>
           </a:p>
           <a:p>
             <a:pPr indent="0" marL="0">
               <a:buNone/>
             </a:pPr>
             <a:r>
-              <a:rPr lang="en-US" sz="1250" dirty="0">
+              <a:rPr lang="en-US" sz="1550" dirty="0">
                 <a:solidFill>
                   <a:srgbClr val="17364A"/>
                 </a:solidFill>
@@ -9074,14 +9472,14 @@
               </a:rPr>
               <a:t>Primary track: Public Health Executive Leadership Track</a:t>
             </a:r>
-            <a:endParaRPr lang="en-US" sz="1250" dirty="0"/>
+            <a:endParaRPr lang="en-US" sz="1550" dirty="0"/>
           </a:p>
           <a:p>
             <a:pPr indent="0" marL="0">
               <a:buNone/>
             </a:pPr>
             <a:r>
-              <a:rPr lang="en-US" sz="1250" dirty="0">
+              <a:rPr lang="en-US" sz="1550" dirty="0">
                 <a:solidFill>
                   <a:srgbClr val="17364A"/>
                 </a:solidFill>
@@ -9091,32 +9489,32 @@
               </a:rPr>
               <a:t>Appears in tracks: governance-security</a:t>
             </a:r>
-            <a:endParaRPr lang="en-US" sz="1250" dirty="0"/>
-          </a:p>
-        </p:txBody>
-      </p:sp>
-      <p:sp>
-        <p:nvSpPr>
-          <p:cNvPr id="12" name="Shape 10"/>
-          <p:cNvSpPr/>
-          <p:nvPr/>
-        </p:nvSpPr>
-        <p:spPr>
-          <a:xfrm>
-            <a:off x="7909560" y="3611880"/>
-            <a:ext cx="3154680" cy="1783080"/>
+            <a:endParaRPr lang="en-US" sz="1550" dirty="0"/>
+          </a:p>
+        </p:txBody>
+      </p:sp>
+      <p:sp>
+        <p:nvSpPr>
+          <p:cNvPr id="13" name="Shape 11"/>
+          <p:cNvSpPr/>
+          <p:nvPr/>
+        </p:nvSpPr>
+        <p:spPr>
+          <a:xfrm>
+            <a:off x="7635240" y="3730752"/>
+            <a:ext cx="1033272" cy="749808"/>
           </a:xfrm>
           <a:prstGeom prst="roundRect">
             <a:avLst>
-              <a:gd name="adj" fmla="val 6154"/>
+              <a:gd name="adj" fmla="val 14634"/>
             </a:avLst>
           </a:prstGeom>
           <a:solidFill>
-            <a:srgbClr val="EEF8ED"/>
+            <a:srgbClr val="0068B7"/>
           </a:solidFill>
           <a:ln w="12700">
             <a:solidFill>
-              <a:srgbClr val="B9D7E6"/>
+              <a:srgbClr val="0068B7"/>
             </a:solidFill>
             <a:prstDash val="solid"/>
           </a:ln>
@@ -9124,81 +9522,256 @@
       </p:sp>
       <p:sp>
         <p:nvSpPr>
-          <p:cNvPr id="13" name="Text 11"/>
-          <p:cNvSpPr/>
-          <p:nvPr/>
-        </p:nvSpPr>
-        <p:spPr>
-          <a:xfrm>
-            <a:off x="8074152" y="3758184"/>
-            <a:ext cx="2825496" cy="201168"/>
-          </a:xfrm>
-          <a:prstGeom prst="rect">
-            <a:avLst/>
-          </a:prstGeom>
-          <a:noFill/>
-          <a:ln/>
-        </p:spPr>
-        <p:txBody>
-          <a:bodyPr wrap="square" lIns="0" tIns="0" rIns="0" bIns="0" rtlCol="0" anchor="ctr"/>
-          <a:lstStyle/>
-          <a:p>
-            <a:pPr indent="0" marL="0">
-              <a:buNone/>
-            </a:pPr>
-            <a:r>
-              <a:rPr lang="en-US" sz="950" b="1" dirty="0">
-                <a:solidFill>
-                  <a:srgbClr val="0068B7"/>
-                </a:solidFill>
-                <a:latin typeface="Aptos" pitchFamily="34" charset="0"/>
-                <a:ea typeface="Aptos" pitchFamily="34" charset="-122"/>
-                <a:cs typeface="Aptos" pitchFamily="34" charset="-120"/>
-              </a:rPr>
-              <a:t>Learning approach</a:t>
-            </a:r>
-            <a:endParaRPr lang="en-US" sz="950" dirty="0"/>
-          </a:p>
-        </p:txBody>
-      </p:sp>
-      <p:sp>
-        <p:nvSpPr>
           <p:cNvPr id="14" name="Text 12"/>
           <p:cNvSpPr/>
           <p:nvPr/>
         </p:nvSpPr>
         <p:spPr>
           <a:xfrm>
-            <a:off x="8074152" y="4050792"/>
-            <a:ext cx="2825496" cy="1216152"/>
-          </a:xfrm>
-          <a:prstGeom prst="rect">
-            <a:avLst/>
-          </a:prstGeom>
-          <a:noFill/>
-          <a:ln/>
-        </p:spPr>
-        <p:txBody>
-          <a:bodyPr wrap="square" lIns="0" tIns="0" rIns="0" bIns="0" rtlCol="0" anchor="t">
+            <a:off x="7708392" y="3922776"/>
+            <a:ext cx="886968" cy="310896"/>
+          </a:xfrm>
+          <a:prstGeom prst="rect">
+            <a:avLst/>
+          </a:prstGeom>
+          <a:noFill/>
+          <a:ln/>
+        </p:spPr>
+        <p:txBody>
+          <a:bodyPr wrap="square" lIns="0" tIns="0" rIns="0" bIns="0" rtlCol="0" anchor="ctr">
             <a:normAutofit/>
           </a:bodyPr>
           <a:lstStyle/>
           <a:p>
-            <a:pPr indent="0" marL="0">
-              <a:buNone/>
-            </a:pPr>
-            <a:r>
-              <a:rPr lang="en-US" sz="1250" dirty="0">
-                <a:solidFill>
-                  <a:srgbClr val="17364A"/>
-                </a:solidFill>
-                <a:latin typeface="Aptos" pitchFamily="34" charset="0"/>
-                <a:ea typeface="Aptos" pitchFamily="34" charset="-122"/>
-                <a:cs typeface="Aptos" pitchFamily="34" charset="-120"/>
-              </a:rPr>
-              <a:t>Review the core ideas, complete the practical exercise, check your understanding, and use the related plays and tools to apply the lesson.</a:t>
-            </a:r>
-            <a:endParaRPr lang="en-US" sz="1250" dirty="0"/>
+            <a:pPr algn="ctr" indent="0" marL="0">
+              <a:buNone/>
+            </a:pPr>
+            <a:r>
+              <a:rPr lang="en-US" sz="1500" b="1" dirty="0">
+                <a:solidFill>
+                  <a:srgbClr val="FFFFFF"/>
+                </a:solidFill>
+                <a:latin typeface="Aptos" pitchFamily="34" charset="0"/>
+                <a:ea typeface="Aptos" pitchFamily="34" charset="-122"/>
+                <a:cs typeface="Aptos" pitchFamily="34" charset="-120"/>
+              </a:rPr>
+              <a:t>Learn</a:t>
+            </a:r>
+            <a:endParaRPr lang="en-US" sz="1500" dirty="0"/>
+          </a:p>
+        </p:txBody>
+      </p:sp>
+      <p:sp>
+        <p:nvSpPr>
+          <p:cNvPr id="15" name="Text 13"/>
+          <p:cNvSpPr/>
+          <p:nvPr/>
+        </p:nvSpPr>
+        <p:spPr>
+          <a:xfrm>
+            <a:off x="8695944" y="3941064"/>
+            <a:ext cx="201168" cy="256032"/>
+          </a:xfrm>
+          <a:prstGeom prst="rect">
+            <a:avLst/>
+          </a:prstGeom>
+          <a:noFill/>
+          <a:ln/>
+        </p:spPr>
+        <p:txBody>
+          <a:bodyPr wrap="square" lIns="0" tIns="0" rIns="0" bIns="0" rtlCol="0" anchor="ctr"/>
+          <a:lstStyle/>
+          <a:p>
+            <a:pPr algn="ctr" indent="0" marL="0">
+              <a:buNone/>
+            </a:pPr>
+            <a:r>
+              <a:rPr lang="en-US" sz="1800" b="1" dirty="0">
+                <a:solidFill>
+                  <a:srgbClr val="0068B7"/>
+                </a:solidFill>
+                <a:latin typeface="Aptos" pitchFamily="34" charset="0"/>
+                <a:ea typeface="Aptos" pitchFamily="34" charset="-122"/>
+                <a:cs typeface="Aptos" pitchFamily="34" charset="-120"/>
+              </a:rPr>
+              <a:t>â†’</a:t>
+            </a:r>
+            <a:endParaRPr lang="en-US" sz="1800" dirty="0"/>
+          </a:p>
+        </p:txBody>
+      </p:sp>
+      <p:sp>
+        <p:nvSpPr>
+          <p:cNvPr id="16" name="Shape 14"/>
+          <p:cNvSpPr/>
+          <p:nvPr/>
+        </p:nvSpPr>
+        <p:spPr>
+          <a:xfrm>
+            <a:off x="8924544" y="3730752"/>
+            <a:ext cx="1033272" cy="749808"/>
+          </a:xfrm>
+          <a:prstGeom prst="roundRect">
+            <a:avLst>
+              <a:gd name="adj" fmla="val 14634"/>
+            </a:avLst>
+          </a:prstGeom>
+          <a:solidFill>
+            <a:srgbClr val="2F8A28"/>
+          </a:solidFill>
+          <a:ln w="12700">
+            <a:solidFill>
+              <a:srgbClr val="2F8A28"/>
+            </a:solidFill>
+            <a:prstDash val="solid"/>
+          </a:ln>
+        </p:spPr>
+      </p:sp>
+      <p:sp>
+        <p:nvSpPr>
+          <p:cNvPr id="17" name="Text 15"/>
+          <p:cNvSpPr/>
+          <p:nvPr/>
+        </p:nvSpPr>
+        <p:spPr>
+          <a:xfrm>
+            <a:off x="8997696" y="3922776"/>
+            <a:ext cx="886968" cy="310896"/>
+          </a:xfrm>
+          <a:prstGeom prst="rect">
+            <a:avLst/>
+          </a:prstGeom>
+          <a:noFill/>
+          <a:ln/>
+        </p:spPr>
+        <p:txBody>
+          <a:bodyPr wrap="square" lIns="0" tIns="0" rIns="0" bIns="0" rtlCol="0" anchor="ctr">
+            <a:normAutofit/>
+          </a:bodyPr>
+          <a:lstStyle/>
+          <a:p>
+            <a:pPr algn="ctr" indent="0" marL="0">
+              <a:buNone/>
+            </a:pPr>
+            <a:r>
+              <a:rPr lang="en-US" sz="1500" b="1" dirty="0">
+                <a:solidFill>
+                  <a:srgbClr val="FFFFFF"/>
+                </a:solidFill>
+                <a:latin typeface="Aptos" pitchFamily="34" charset="0"/>
+                <a:ea typeface="Aptos" pitchFamily="34" charset="-122"/>
+                <a:cs typeface="Aptos" pitchFamily="34" charset="-120"/>
+              </a:rPr>
+              <a:t>Apply</a:t>
+            </a:r>
+            <a:endParaRPr lang="en-US" sz="1500" dirty="0"/>
+          </a:p>
+        </p:txBody>
+      </p:sp>
+      <p:sp>
+        <p:nvSpPr>
+          <p:cNvPr id="18" name="Text 16"/>
+          <p:cNvSpPr/>
+          <p:nvPr/>
+        </p:nvSpPr>
+        <p:spPr>
+          <a:xfrm>
+            <a:off x="9985248" y="3941064"/>
+            <a:ext cx="201168" cy="256032"/>
+          </a:xfrm>
+          <a:prstGeom prst="rect">
+            <a:avLst/>
+          </a:prstGeom>
+          <a:noFill/>
+          <a:ln/>
+        </p:spPr>
+        <p:txBody>
+          <a:bodyPr wrap="square" lIns="0" tIns="0" rIns="0" bIns="0" rtlCol="0" anchor="ctr"/>
+          <a:lstStyle/>
+          <a:p>
+            <a:pPr algn="ctr" indent="0" marL="0">
+              <a:buNone/>
+            </a:pPr>
+            <a:r>
+              <a:rPr lang="en-US" sz="1800" b="1" dirty="0">
+                <a:solidFill>
+                  <a:srgbClr val="0068B7"/>
+                </a:solidFill>
+                <a:latin typeface="Aptos" pitchFamily="34" charset="0"/>
+                <a:ea typeface="Aptos" pitchFamily="34" charset="-122"/>
+                <a:cs typeface="Aptos" pitchFamily="34" charset="-120"/>
+              </a:rPr>
+              <a:t>â†’</a:t>
+            </a:r>
+            <a:endParaRPr lang="en-US" sz="1800" dirty="0"/>
+          </a:p>
+        </p:txBody>
+      </p:sp>
+      <p:sp>
+        <p:nvSpPr>
+          <p:cNvPr id="19" name="Shape 17"/>
+          <p:cNvSpPr/>
+          <p:nvPr/>
+        </p:nvSpPr>
+        <p:spPr>
+          <a:xfrm>
+            <a:off x="10213848" y="3730752"/>
+            <a:ext cx="1033272" cy="749808"/>
+          </a:xfrm>
+          <a:prstGeom prst="roundRect">
+            <a:avLst>
+              <a:gd name="adj" fmla="val 14634"/>
+            </a:avLst>
+          </a:prstGeom>
+          <a:solidFill>
+            <a:srgbClr val="6A4CA3"/>
+          </a:solidFill>
+          <a:ln w="12700">
+            <a:solidFill>
+              <a:srgbClr val="6A4CA3"/>
+            </a:solidFill>
+            <a:prstDash val="solid"/>
+          </a:ln>
+        </p:spPr>
+      </p:sp>
+      <p:sp>
+        <p:nvSpPr>
+          <p:cNvPr id="20" name="Text 18"/>
+          <p:cNvSpPr/>
+          <p:nvPr/>
+        </p:nvSpPr>
+        <p:spPr>
+          <a:xfrm>
+            <a:off x="10287000" y="3922776"/>
+            <a:ext cx="886968" cy="310896"/>
+          </a:xfrm>
+          <a:prstGeom prst="rect">
+            <a:avLst/>
+          </a:prstGeom>
+          <a:noFill/>
+          <a:ln/>
+        </p:spPr>
+        <p:txBody>
+          <a:bodyPr wrap="square" lIns="0" tIns="0" rIns="0" bIns="0" rtlCol="0" anchor="ctr">
+            <a:normAutofit/>
+          </a:bodyPr>
+          <a:lstStyle/>
+          <a:p>
+            <a:pPr algn="ctr" indent="0" marL="0">
+              <a:buNone/>
+            </a:pPr>
+            <a:r>
+              <a:rPr lang="en-US" sz="1500" b="1" dirty="0">
+                <a:solidFill>
+                  <a:srgbClr val="FFFFFF"/>
+                </a:solidFill>
+                <a:latin typeface="Aptos" pitchFamily="34" charset="0"/>
+                <a:ea typeface="Aptos" pitchFamily="34" charset="-122"/>
+                <a:cs typeface="Aptos" pitchFamily="34" charset="-120"/>
+              </a:rPr>
+              <a:t>Document</a:t>
+            </a:r>
+            <a:endParaRPr lang="en-US" sz="1500" dirty="0"/>
           </a:p>
         </p:txBody>
       </p:sp>
@@ -9395,7 +9968,7 @@
                 <a:ea typeface="Aptos" pitchFamily="34" charset="-122"/>
                 <a:cs typeface="Aptos" pitchFamily="34" charset="-120"/>
               </a:rPr>
-              <a:t>© Paula Soper</a:t>
+              <a:t>Â© Paula Soper</a:t>
             </a:r>
             <a:endParaRPr lang="en-US" sz="800" dirty="0"/>
           </a:p>
@@ -9403,7 +9976,46 @@
       </p:sp>
       <p:sp>
         <p:nvSpPr>
-          <p:cNvPr id="7" name="Shape 5"/>
+          <p:cNvPr id="7" name="Text 5"/>
+          <p:cNvSpPr/>
+          <p:nvPr/>
+        </p:nvSpPr>
+        <p:spPr>
+          <a:xfrm>
+            <a:off x="11137392" y="6510528"/>
+            <a:ext cx="411480" cy="201168"/>
+          </a:xfrm>
+          <a:prstGeom prst="rect">
+            <a:avLst/>
+          </a:prstGeom>
+          <a:noFill/>
+          <a:ln/>
+        </p:spPr>
+        <p:txBody>
+          <a:bodyPr wrap="square" lIns="0" tIns="0" rIns="0" bIns="0" rtlCol="0" anchor="ctr"/>
+          <a:lstStyle/>
+          <a:p>
+            <a:pPr algn="r" indent="0" marL="0">
+              <a:buNone/>
+            </a:pPr>
+            <a:r>
+              <a:rPr lang="en-US" sz="900" dirty="0">
+                <a:solidFill>
+                  <a:srgbClr val="5F7181"/>
+                </a:solidFill>
+                <a:latin typeface="Aptos" pitchFamily="34" charset="0"/>
+                <a:ea typeface="Aptos" pitchFamily="34" charset="-122"/>
+                <a:cs typeface="Aptos" pitchFamily="34" charset="-120"/>
+              </a:rPr>
+              <a:t>20</a:t>
+            </a:r>
+            <a:endParaRPr lang="en-US" sz="900" dirty="0"/>
+          </a:p>
+        </p:txBody>
+      </p:sp>
+      <p:sp>
+        <p:nvSpPr>
+          <p:cNvPr id="8" name="Shape 6"/>
           <p:cNvSpPr/>
           <p:nvPr/>
         </p:nvSpPr>
@@ -9428,7 +10040,7 @@
       </p:sp>
       <p:sp>
         <p:nvSpPr>
-          <p:cNvPr id="8" name="Text 6"/>
+          <p:cNvPr id="9" name="Text 7"/>
           <p:cNvSpPr/>
           <p:nvPr/>
         </p:nvSpPr>
@@ -9467,14 +10079,14 @@
       </p:sp>
       <p:sp>
         <p:nvSpPr>
-          <p:cNvPr id="9" name="Text 7"/>
+          <p:cNvPr id="10" name="Text 8"/>
           <p:cNvSpPr/>
           <p:nvPr/>
         </p:nvSpPr>
         <p:spPr>
           <a:xfrm>
             <a:off x="640080" y="621792"/>
-            <a:ext cx="10881360" cy="566928"/>
+            <a:ext cx="10881360" cy="713232"/>
           </a:xfrm>
           <a:prstGeom prst="rect">
             <a:avLst/>
@@ -9492,7 +10104,7 @@
               <a:buNone/>
             </a:pPr>
             <a:r>
-              <a:rPr lang="en-US" sz="2700" b="1" dirty="0">
+              <a:rPr lang="en-US" sz="3400" b="1" dirty="0">
                 <a:solidFill>
                   <a:srgbClr val="003A63"/>
                 </a:solidFill>
@@ -9502,20 +10114,20 @@
               </a:rPr>
               <a:t>References and Resources</a:t>
             </a:r>
-            <a:endParaRPr lang="en-US" sz="2700" dirty="0"/>
-          </a:p>
-        </p:txBody>
-      </p:sp>
-      <p:sp>
-        <p:nvSpPr>
-          <p:cNvPr id="10" name="Text 8"/>
-          <p:cNvSpPr/>
-          <p:nvPr/>
-        </p:nvSpPr>
-        <p:spPr>
-          <a:xfrm>
-            <a:off x="868680" y="1417320"/>
-            <a:ext cx="6675120" cy="4434840"/>
+            <a:endParaRPr lang="en-US" sz="3400" dirty="0"/>
+          </a:p>
+        </p:txBody>
+      </p:sp>
+      <p:sp>
+        <p:nvSpPr>
+          <p:cNvPr id="11" name="Text 9"/>
+          <p:cNvSpPr/>
+          <p:nvPr/>
+        </p:nvSpPr>
+        <p:spPr>
+          <a:xfrm>
+            <a:off x="868680" y="1508760"/>
+            <a:ext cx="6537960" cy="4160520"/>
           </a:xfrm>
           <a:prstGeom prst="rect">
             <a:avLst/>
@@ -9530,7 +10142,7 @@
           <a:lstStyle/>
           <a:p>
             <a:r>
-              <a:rPr lang="en-US" sz="1700" dirty="0">
+              <a:rPr lang="en-US" sz="2100" dirty="0">
                 <a:solidFill>
                   <a:srgbClr val="17364A"/>
                 </a:solidFill>
@@ -9538,13 +10150,13 @@
                 <a:ea typeface="Aptos" pitchFamily="34" charset="-122"/>
                 <a:cs typeface="Aptos" pitchFamily="34" charset="-120"/>
               </a:rPr>
-              <a:t>NIST Artificial Intelligence Risk Management Framework (AI RMF 1.0): https://www.nist.gov/itl/ai-risk-management-framework</a:t>
-            </a:r>
-            <a:endParaRPr lang="en-US" sz="1700" dirty="0"/>
-          </a:p>
-          <a:p>
-            <a:r>
-              <a:rPr lang="en-US" sz="1700" dirty="0">
+              <a:t>NIST Artificial Intelligence Risk Management Framework (AI RMF 1.0):.</a:t>
+            </a:r>
+            <a:endParaRPr lang="en-US" sz="2100" dirty="0"/>
+          </a:p>
+          <a:p>
+            <a:r>
+              <a:rPr lang="en-US" sz="2100" dirty="0">
                 <a:solidFill>
                   <a:srgbClr val="17364A"/>
                 </a:solidFill>
@@ -9554,11 +10166,11 @@
               </a:rPr>
               <a:t>NIST Generative AI Profile:.</a:t>
             </a:r>
-            <a:endParaRPr lang="en-US" sz="1700" dirty="0"/>
-          </a:p>
-          <a:p>
-            <a:r>
-              <a:rPr lang="en-US" sz="1700" dirty="0">
+            <a:endParaRPr lang="en-US" sz="2100" dirty="0"/>
+          </a:p>
+          <a:p>
+            <a:r>
+              <a:rPr lang="en-US" sz="2100" dirty="0">
                 <a:solidFill>
                   <a:srgbClr val="17364A"/>
                 </a:solidFill>
@@ -9568,27 +10180,13 @@
               </a:rPr>
               <a:t>NIST Privacy Framework</a:t>
             </a:r>
-            <a:endParaRPr lang="en-US" sz="1700" dirty="0"/>
-          </a:p>
-          <a:p>
-            <a:r>
-              <a:rPr lang="en-US" sz="1700" dirty="0">
-                <a:solidFill>
-                  <a:srgbClr val="17364A"/>
-                </a:solidFill>
-                <a:latin typeface="Aptos" pitchFamily="34" charset="0"/>
-                <a:ea typeface="Aptos" pitchFamily="34" charset="-122"/>
-                <a:cs typeface="Aptos" pitchFamily="34" charset="-120"/>
-              </a:rPr>
-              <a:t>CDC Public Health Data Strategy and Data Modernization resources:.</a:t>
-            </a:r>
-            <a:endParaRPr lang="en-US" sz="1700" dirty="0"/>
-          </a:p>
-        </p:txBody>
-      </p:sp>
-      <p:sp>
-        <p:nvSpPr>
-          <p:cNvPr id="11" name="Shape 9"/>
+            <a:endParaRPr lang="en-US" sz="2100" dirty="0"/>
+          </a:p>
+        </p:txBody>
+      </p:sp>
+      <p:sp>
+        <p:nvSpPr>
+          <p:cNvPr id="12" name="Shape 10"/>
           <p:cNvSpPr/>
           <p:nvPr/>
         </p:nvSpPr>
@@ -9615,14 +10213,14 @@
       </p:sp>
       <p:sp>
         <p:nvSpPr>
-          <p:cNvPr id="12" name="Text 10"/>
+          <p:cNvPr id="13" name="Text 11"/>
           <p:cNvSpPr/>
           <p:nvPr/>
         </p:nvSpPr>
         <p:spPr>
           <a:xfrm>
             <a:off x="8074152" y="1563624"/>
-            <a:ext cx="2825496" cy="201168"/>
+            <a:ext cx="2825496" cy="256032"/>
           </a:xfrm>
           <a:prstGeom prst="rect">
             <a:avLst/>
@@ -9638,7 +10236,7 @@
               <a:buNone/>
             </a:pPr>
             <a:r>
-              <a:rPr lang="en-US" sz="950" b="1" dirty="0">
+              <a:rPr lang="en-US" sz="1300" b="1" dirty="0">
                 <a:solidFill>
                   <a:srgbClr val="0068B7"/>
                 </a:solidFill>
@@ -9648,20 +10246,20 @@
               </a:rPr>
               <a:t>Key idea</a:t>
             </a:r>
-            <a:endParaRPr lang="en-US" sz="950" dirty="0"/>
-          </a:p>
-        </p:txBody>
-      </p:sp>
-      <p:sp>
-        <p:nvSpPr>
-          <p:cNvPr id="13" name="Text 11"/>
-          <p:cNvSpPr/>
-          <p:nvPr/>
-        </p:nvSpPr>
-        <p:spPr>
-          <a:xfrm>
-            <a:off x="8074152" y="1856232"/>
-            <a:ext cx="2825496" cy="1261872"/>
+            <a:endParaRPr lang="en-US" sz="1300" dirty="0"/>
+          </a:p>
+        </p:txBody>
+      </p:sp>
+      <p:sp>
+        <p:nvSpPr>
+          <p:cNvPr id="14" name="Text 12"/>
+          <p:cNvSpPr/>
+          <p:nvPr/>
+        </p:nvSpPr>
+        <p:spPr>
+          <a:xfrm>
+            <a:off x="8074152" y="1920240"/>
+            <a:ext cx="2825496" cy="1188720"/>
           </a:xfrm>
           <a:prstGeom prst="rect">
             <a:avLst/>
@@ -9679,7 +10277,7 @@
               <a:buNone/>
             </a:pPr>
             <a:r>
-              <a:rPr lang="en-US" sz="1250" dirty="0">
+              <a:rPr lang="en-US" sz="1550" dirty="0">
                 <a:solidFill>
                   <a:srgbClr val="17364A"/>
                 </a:solidFill>
@@ -9687,15 +10285,15 @@
                 <a:ea typeface="Aptos" pitchFamily="34" charset="-122"/>
                 <a:cs typeface="Aptos" pitchFamily="34" charset="-120"/>
               </a:rPr>
-              <a:t>NIST Artificial Intelligence Risk Management Framework (AI RMF 1.0): https://www.nist.gov/itl/ai-risk-management-framework</a:t>
-            </a:r>
-            <a:endParaRPr lang="en-US" sz="1250" dirty="0"/>
-          </a:p>
-        </p:txBody>
-      </p:sp>
-      <p:sp>
-        <p:nvSpPr>
-          <p:cNvPr id="14" name="Shape 12"/>
+              <a:t>NIST Artificial Intelligence Risk Management Framework (AI RMF 1.0):.</a:t>
+            </a:r>
+            <a:endParaRPr lang="en-US" sz="1550" dirty="0"/>
+          </a:p>
+        </p:txBody>
+      </p:sp>
+      <p:sp>
+        <p:nvSpPr>
+          <p:cNvPr id="15" name="Shape 13"/>
           <p:cNvSpPr/>
           <p:nvPr/>
         </p:nvSpPr>
@@ -9722,14 +10320,14 @@
       </p:sp>
       <p:sp>
         <p:nvSpPr>
-          <p:cNvPr id="15" name="Text 13"/>
+          <p:cNvPr id="16" name="Text 14"/>
           <p:cNvSpPr/>
           <p:nvPr/>
         </p:nvSpPr>
         <p:spPr>
           <a:xfrm>
             <a:off x="8074152" y="3666744"/>
-            <a:ext cx="2825496" cy="201168"/>
+            <a:ext cx="2825496" cy="256032"/>
           </a:xfrm>
           <a:prstGeom prst="rect">
             <a:avLst/>
@@ -9745,7 +10343,7 @@
               <a:buNone/>
             </a:pPr>
             <a:r>
-              <a:rPr lang="en-US" sz="950" b="1" dirty="0">
+              <a:rPr lang="en-US" sz="1300" b="1" dirty="0">
                 <a:solidFill>
                   <a:srgbClr val="0068B7"/>
                 </a:solidFill>
@@ -9755,20 +10353,20 @@
               </a:rPr>
               <a:t>Use this for</a:t>
             </a:r>
-            <a:endParaRPr lang="en-US" sz="950" dirty="0"/>
-          </a:p>
-        </p:txBody>
-      </p:sp>
-      <p:sp>
-        <p:nvSpPr>
-          <p:cNvPr id="16" name="Text 14"/>
-          <p:cNvSpPr/>
-          <p:nvPr/>
-        </p:nvSpPr>
-        <p:spPr>
-          <a:xfrm>
-            <a:off x="8074152" y="3959352"/>
-            <a:ext cx="2825496" cy="1170432"/>
+            <a:endParaRPr lang="en-US" sz="1300" dirty="0"/>
+          </a:p>
+        </p:txBody>
+      </p:sp>
+      <p:sp>
+        <p:nvSpPr>
+          <p:cNvPr id="17" name="Text 15"/>
+          <p:cNvSpPr/>
+          <p:nvPr/>
+        </p:nvSpPr>
+        <p:spPr>
+          <a:xfrm>
+            <a:off x="8074152" y="4023360"/>
+            <a:ext cx="2825496" cy="1097280"/>
           </a:xfrm>
           <a:prstGeom prst="rect">
             <a:avLst/>
@@ -9786,7 +10384,7 @@
               <a:buNone/>
             </a:pPr>
             <a:r>
-              <a:rPr lang="en-US" sz="1250" dirty="0">
+              <a:rPr lang="en-US" sz="1550" dirty="0">
                 <a:solidFill>
                   <a:srgbClr val="17364A"/>
                 </a:solidFill>
@@ -9796,7 +10394,7 @@
               </a:rPr>
               <a:t>Connect the concept to public health decisions, safeguards, documentation, or implementation work.</a:t>
             </a:r>
-            <a:endParaRPr lang="en-US" sz="1250" dirty="0"/>
+            <a:endParaRPr lang="en-US" sz="1550" dirty="0"/>
           </a:p>
         </p:txBody>
       </p:sp>
@@ -9993,7 +10591,7 @@
                 <a:ea typeface="Aptos" pitchFamily="34" charset="-122"/>
                 <a:cs typeface="Aptos" pitchFamily="34" charset="-120"/>
               </a:rPr>
-              <a:t>© Paula Soper</a:t>
+              <a:t>Â© Paula Soper</a:t>
             </a:r>
             <a:endParaRPr lang="en-US" sz="800" dirty="0"/>
           </a:p>
@@ -10007,8 +10605,47 @@
         </p:nvSpPr>
         <p:spPr>
           <a:xfrm>
+            <a:off x="11137392" y="6510528"/>
+            <a:ext cx="411480" cy="201168"/>
+          </a:xfrm>
+          <a:prstGeom prst="rect">
+            <a:avLst/>
+          </a:prstGeom>
+          <a:noFill/>
+          <a:ln/>
+        </p:spPr>
+        <p:txBody>
+          <a:bodyPr wrap="square" lIns="0" tIns="0" rIns="0" bIns="0" rtlCol="0" anchor="ctr"/>
+          <a:lstStyle/>
+          <a:p>
+            <a:pPr algn="r" indent="0" marL="0">
+              <a:buNone/>
+            </a:pPr>
+            <a:r>
+              <a:rPr lang="en-US" sz="900" dirty="0">
+                <a:solidFill>
+                  <a:srgbClr val="5F7181"/>
+                </a:solidFill>
+                <a:latin typeface="Aptos" pitchFamily="34" charset="0"/>
+                <a:ea typeface="Aptos" pitchFamily="34" charset="-122"/>
+                <a:cs typeface="Aptos" pitchFamily="34" charset="-120"/>
+              </a:rPr>
+              <a:t>21</a:t>
+            </a:r>
+            <a:endParaRPr lang="en-US" sz="900" dirty="0"/>
+          </a:p>
+        </p:txBody>
+      </p:sp>
+      <p:sp>
+        <p:nvSpPr>
+          <p:cNvPr id="8" name="Text 6"/>
+          <p:cNvSpPr/>
+          <p:nvPr/>
+        </p:nvSpPr>
+        <p:spPr>
+          <a:xfrm>
             <a:off x="640080" y="658368"/>
-            <a:ext cx="10881360" cy="566928"/>
+            <a:ext cx="10881360" cy="713232"/>
           </a:xfrm>
           <a:prstGeom prst="rect">
             <a:avLst/>
@@ -10026,7 +10663,7 @@
               <a:buNone/>
             </a:pPr>
             <a:r>
-              <a:rPr lang="en-US" sz="2700" b="1" dirty="0">
+              <a:rPr lang="en-US" sz="3400" b="1" dirty="0">
                 <a:solidFill>
                   <a:srgbClr val="003A63"/>
                 </a:solidFill>
@@ -10036,20 +10673,20 @@
               </a:rPr>
               <a:t>References and Resources Continued</a:t>
             </a:r>
-            <a:endParaRPr lang="en-US" sz="2700" dirty="0"/>
-          </a:p>
-        </p:txBody>
-      </p:sp>
-      <p:sp>
-        <p:nvSpPr>
-          <p:cNvPr id="8" name="Text 6"/>
-          <p:cNvSpPr/>
-          <p:nvPr/>
-        </p:nvSpPr>
-        <p:spPr>
-          <a:xfrm>
-            <a:off x="868680" y="1417320"/>
-            <a:ext cx="6675120" cy="4434840"/>
+            <a:endParaRPr lang="en-US" sz="3400" dirty="0"/>
+          </a:p>
+        </p:txBody>
+      </p:sp>
+      <p:sp>
+        <p:nvSpPr>
+          <p:cNvPr id="9" name="Text 7"/>
+          <p:cNvSpPr/>
+          <p:nvPr/>
+        </p:nvSpPr>
+        <p:spPr>
+          <a:xfrm>
+            <a:off x="868680" y="1508760"/>
+            <a:ext cx="6537960" cy="4160520"/>
           </a:xfrm>
           <a:prstGeom prst="rect">
             <a:avLst/>
@@ -10064,7 +10701,7 @@
           <a:lstStyle/>
           <a:p>
             <a:r>
-              <a:rPr lang="en-US" sz="1700" dirty="0">
+              <a:rPr lang="en-US" sz="2100" dirty="0">
                 <a:solidFill>
                   <a:srgbClr val="17364A"/>
                 </a:solidFill>
@@ -10072,13 +10709,13 @@
                 <a:ea typeface="Aptos" pitchFamily="34" charset="-122"/>
                 <a:cs typeface="Aptos" pitchFamily="34" charset="-120"/>
               </a:rPr>
-              <a:t>OMB Memorandum M-24-10 on federal AI governance, risk management, and innovation, where relevant to public-sector governance.</a:t>
-            </a:r>
-            <a:endParaRPr lang="en-US" sz="1700" dirty="0"/>
-          </a:p>
-          <a:p>
-            <a:r>
-              <a:rPr lang="en-US" sz="1700" dirty="0">
+              <a:t>OMB Memorandum M-24-10 on federal AI governance, risk management, and innovation, where relevant to.</a:t>
+            </a:r>
+            <a:endParaRPr lang="en-US" sz="2100" dirty="0"/>
+          </a:p>
+          <a:p>
+            <a:r>
+              <a:rPr lang="en-US" sz="2100" dirty="0">
                 <a:solidFill>
                   <a:srgbClr val="17364A"/>
                 </a:solidFill>
@@ -10086,15 +10723,15 @@
                 <a:ea typeface="Aptos" pitchFamily="34" charset="-122"/>
                 <a:cs typeface="Aptos" pitchFamily="34" charset="-120"/>
               </a:rPr>
-              <a:t>Agency strategic plans, procurement policies, privacy policies, cybersecurity policies, records policies, and equity plans</a:t>
-            </a:r>
-            <a:endParaRPr lang="en-US" sz="1700" dirty="0"/>
-          </a:p>
-        </p:txBody>
-      </p:sp>
-      <p:sp>
-        <p:nvSpPr>
-          <p:cNvPr id="9" name="Shape 7"/>
+              <a:t>Agency strategic plans, procurement policies, privacy policies, cybersecurity policies, records.</a:t>
+            </a:r>
+            <a:endParaRPr lang="en-US" sz="2100" dirty="0"/>
+          </a:p>
+        </p:txBody>
+      </p:sp>
+      <p:sp>
+        <p:nvSpPr>
+          <p:cNvPr id="10" name="Shape 8"/>
           <p:cNvSpPr/>
           <p:nvPr/>
         </p:nvSpPr>
@@ -10121,14 +10758,14 @@
       </p:sp>
       <p:sp>
         <p:nvSpPr>
-          <p:cNvPr id="10" name="Text 8"/>
+          <p:cNvPr id="11" name="Text 9"/>
           <p:cNvSpPr/>
           <p:nvPr/>
         </p:nvSpPr>
         <p:spPr>
           <a:xfrm>
             <a:off x="8074152" y="1563624"/>
-            <a:ext cx="2825496" cy="201168"/>
+            <a:ext cx="2825496" cy="256032"/>
           </a:xfrm>
           <a:prstGeom prst="rect">
             <a:avLst/>
@@ -10144,7 +10781,7 @@
               <a:buNone/>
             </a:pPr>
             <a:r>
-              <a:rPr lang="en-US" sz="950" b="1" dirty="0">
+              <a:rPr lang="en-US" sz="1300" b="1" dirty="0">
                 <a:solidFill>
                   <a:srgbClr val="0068B7"/>
                 </a:solidFill>
@@ -10154,20 +10791,20 @@
               </a:rPr>
               <a:t>Key idea</a:t>
             </a:r>
-            <a:endParaRPr lang="en-US" sz="950" dirty="0"/>
-          </a:p>
-        </p:txBody>
-      </p:sp>
-      <p:sp>
-        <p:nvSpPr>
-          <p:cNvPr id="11" name="Text 9"/>
-          <p:cNvSpPr/>
-          <p:nvPr/>
-        </p:nvSpPr>
-        <p:spPr>
-          <a:xfrm>
-            <a:off x="8074152" y="1856232"/>
-            <a:ext cx="2825496" cy="1261872"/>
+            <a:endParaRPr lang="en-US" sz="1300" dirty="0"/>
+          </a:p>
+        </p:txBody>
+      </p:sp>
+      <p:sp>
+        <p:nvSpPr>
+          <p:cNvPr id="12" name="Text 10"/>
+          <p:cNvSpPr/>
+          <p:nvPr/>
+        </p:nvSpPr>
+        <p:spPr>
+          <a:xfrm>
+            <a:off x="8074152" y="1920240"/>
+            <a:ext cx="2825496" cy="1188720"/>
           </a:xfrm>
           <a:prstGeom prst="rect">
             <a:avLst/>
@@ -10185,7 +10822,7 @@
               <a:buNone/>
             </a:pPr>
             <a:r>
-              <a:rPr lang="en-US" sz="1250" dirty="0">
+              <a:rPr lang="en-US" sz="1550" dirty="0">
                 <a:solidFill>
                   <a:srgbClr val="17364A"/>
                 </a:solidFill>
@@ -10193,15 +10830,15 @@
                 <a:ea typeface="Aptos" pitchFamily="34" charset="-122"/>
                 <a:cs typeface="Aptos" pitchFamily="34" charset="-120"/>
               </a:rPr>
-              <a:t>OMB Memorandum M-24-10 on federal AI governance, risk management, and innovation, where relevant to public-sector governance.</a:t>
-            </a:r>
-            <a:endParaRPr lang="en-US" sz="1250" dirty="0"/>
-          </a:p>
-        </p:txBody>
-      </p:sp>
-      <p:sp>
-        <p:nvSpPr>
-          <p:cNvPr id="12" name="Shape 10"/>
+              <a:t>OMB Memorandum M-24-10 on federal AI governance, risk management, and innovation, where relevant to.</a:t>
+            </a:r>
+            <a:endParaRPr lang="en-US" sz="1550" dirty="0"/>
+          </a:p>
+        </p:txBody>
+      </p:sp>
+      <p:sp>
+        <p:nvSpPr>
+          <p:cNvPr id="13" name="Shape 11"/>
           <p:cNvSpPr/>
           <p:nvPr/>
         </p:nvSpPr>
@@ -10228,14 +10865,14 @@
       </p:sp>
       <p:sp>
         <p:nvSpPr>
-          <p:cNvPr id="13" name="Text 11"/>
+          <p:cNvPr id="14" name="Text 12"/>
           <p:cNvSpPr/>
           <p:nvPr/>
         </p:nvSpPr>
         <p:spPr>
           <a:xfrm>
             <a:off x="8074152" y="3666744"/>
-            <a:ext cx="2825496" cy="201168"/>
+            <a:ext cx="2825496" cy="256032"/>
           </a:xfrm>
           <a:prstGeom prst="rect">
             <a:avLst/>
@@ -10251,7 +10888,7 @@
               <a:buNone/>
             </a:pPr>
             <a:r>
-              <a:rPr lang="en-US" sz="950" b="1" dirty="0">
+              <a:rPr lang="en-US" sz="1300" b="1" dirty="0">
                 <a:solidFill>
                   <a:srgbClr val="0068B7"/>
                 </a:solidFill>
@@ -10261,20 +10898,20 @@
               </a:rPr>
               <a:t>Use this for</a:t>
             </a:r>
-            <a:endParaRPr lang="en-US" sz="950" dirty="0"/>
-          </a:p>
-        </p:txBody>
-      </p:sp>
-      <p:sp>
-        <p:nvSpPr>
-          <p:cNvPr id="14" name="Text 12"/>
-          <p:cNvSpPr/>
-          <p:nvPr/>
-        </p:nvSpPr>
-        <p:spPr>
-          <a:xfrm>
-            <a:off x="8074152" y="3959352"/>
-            <a:ext cx="2825496" cy="1170432"/>
+            <a:endParaRPr lang="en-US" sz="1300" dirty="0"/>
+          </a:p>
+        </p:txBody>
+      </p:sp>
+      <p:sp>
+        <p:nvSpPr>
+          <p:cNvPr id="15" name="Text 13"/>
+          <p:cNvSpPr/>
+          <p:nvPr/>
+        </p:nvSpPr>
+        <p:spPr>
+          <a:xfrm>
+            <a:off x="8074152" y="4023360"/>
+            <a:ext cx="2825496" cy="1097280"/>
           </a:xfrm>
           <a:prstGeom prst="rect">
             <a:avLst/>
@@ -10292,7 +10929,7 @@
               <a:buNone/>
             </a:pPr>
             <a:r>
-              <a:rPr lang="en-US" sz="1250" dirty="0">
+              <a:rPr lang="en-US" sz="1550" dirty="0">
                 <a:solidFill>
                   <a:srgbClr val="17364A"/>
                 </a:solidFill>
@@ -10302,7 +10939,7 @@
               </a:rPr>
               <a:t>Connect the concept to public health decisions, safeguards, documentation, or implementation work.</a:t>
             </a:r>
-            <a:endParaRPr lang="en-US" sz="1250" dirty="0"/>
+            <a:endParaRPr lang="en-US" sz="1550" dirty="0"/>
           </a:p>
         </p:txBody>
       </p:sp>
@@ -10499,7 +11136,7 @@
                 <a:ea typeface="Aptos" pitchFamily="34" charset="-122"/>
                 <a:cs typeface="Aptos" pitchFamily="34" charset="-120"/>
               </a:rPr>
-              <a:t>© Paula Soper</a:t>
+              <a:t>Â© Paula Soper</a:t>
             </a:r>
             <a:endParaRPr lang="en-US" sz="800" dirty="0"/>
           </a:p>
@@ -10513,8 +11150,47 @@
         </p:nvSpPr>
         <p:spPr>
           <a:xfrm>
+            <a:off x="11137392" y="6510528"/>
+            <a:ext cx="411480" cy="201168"/>
+          </a:xfrm>
+          <a:prstGeom prst="rect">
+            <a:avLst/>
+          </a:prstGeom>
+          <a:noFill/>
+          <a:ln/>
+        </p:spPr>
+        <p:txBody>
+          <a:bodyPr wrap="square" lIns="0" tIns="0" rIns="0" bIns="0" rtlCol="0" anchor="ctr"/>
+          <a:lstStyle/>
+          <a:p>
+            <a:pPr algn="r" indent="0" marL="0">
+              <a:buNone/>
+            </a:pPr>
+            <a:r>
+              <a:rPr lang="en-US" sz="900" dirty="0">
+                <a:solidFill>
+                  <a:srgbClr val="5F7181"/>
+                </a:solidFill>
+                <a:latin typeface="Aptos" pitchFamily="34" charset="0"/>
+                <a:ea typeface="Aptos" pitchFamily="34" charset="-122"/>
+                <a:cs typeface="Aptos" pitchFamily="34" charset="-120"/>
+              </a:rPr>
+              <a:t>3</a:t>
+            </a:r>
+            <a:endParaRPr lang="en-US" sz="900" dirty="0"/>
+          </a:p>
+        </p:txBody>
+      </p:sp>
+      <p:sp>
+        <p:nvSpPr>
+          <p:cNvPr id="8" name="Text 6"/>
+          <p:cNvSpPr/>
+          <p:nvPr/>
+        </p:nvSpPr>
+        <p:spPr>
+          <a:xfrm>
             <a:off x="640080" y="658368"/>
-            <a:ext cx="10881360" cy="566928"/>
+            <a:ext cx="10881360" cy="713232"/>
           </a:xfrm>
           <a:prstGeom prst="rect">
             <a:avLst/>
@@ -10532,7 +11208,7 @@
               <a:buNone/>
             </a:pPr>
             <a:r>
-              <a:rPr lang="en-US" sz="2700" b="1" dirty="0">
+              <a:rPr lang="en-US" sz="3400" b="1" dirty="0">
                 <a:solidFill>
                   <a:srgbClr val="003A63"/>
                 </a:solidFill>
@@ -10542,20 +11218,20 @@
               </a:rPr>
               <a:t>How this module connects to the playbook</a:t>
             </a:r>
-            <a:endParaRPr lang="en-US" sz="2700" dirty="0"/>
-          </a:p>
-        </p:txBody>
-      </p:sp>
-      <p:sp>
-        <p:nvSpPr>
-          <p:cNvPr id="8" name="Text 6"/>
-          <p:cNvSpPr/>
-          <p:nvPr/>
-        </p:nvSpPr>
-        <p:spPr>
-          <a:xfrm>
-            <a:off x="868680" y="1417320"/>
-            <a:ext cx="6903720" cy="4480560"/>
+            <a:endParaRPr lang="en-US" sz="3400" dirty="0"/>
+          </a:p>
+        </p:txBody>
+      </p:sp>
+      <p:sp>
+        <p:nvSpPr>
+          <p:cNvPr id="9" name="Text 7"/>
+          <p:cNvSpPr/>
+          <p:nvPr/>
+        </p:nvSpPr>
+        <p:spPr>
+          <a:xfrm>
+            <a:off x="868680" y="1508760"/>
+            <a:ext cx="6812280" cy="3977640"/>
           </a:xfrm>
           <a:prstGeom prst="rect">
             <a:avLst/>
@@ -10570,7 +11246,7 @@
           <a:lstStyle/>
           <a:p>
             <a:r>
-              <a:rPr lang="en-US" sz="1540" dirty="0">
+              <a:rPr lang="en-US" sz="1900" dirty="0">
                 <a:solidFill>
                   <a:srgbClr val="17364A"/>
                 </a:solidFill>
@@ -10578,13 +11254,13 @@
                 <a:ea typeface="Aptos" pitchFamily="34" charset="-122"/>
                 <a:cs typeface="Aptos" pitchFamily="34" charset="-120"/>
               </a:rPr>
-              <a:t>Play 11: Build and Deploy AI Solutions - This lesson informs Play 11 by helping learners connect the lesson topic to build and deploy.</a:t>
-            </a:r>
-            <a:endParaRPr lang="en-US" sz="1540" dirty="0"/>
-          </a:p>
-          <a:p>
-            <a:r>
-              <a:rPr lang="en-US" sz="1540" dirty="0">
+              <a:t>Play 11: Build and Deploy AI Solutions - This lesson informs Play 11 by helping learners connect the lesson.</a:t>
+            </a:r>
+            <a:endParaRPr lang="en-US" sz="1900" dirty="0"/>
+          </a:p>
+          <a:p>
+            <a:r>
+              <a:rPr lang="en-US" sz="1900" dirty="0">
                 <a:solidFill>
                   <a:srgbClr val="17364A"/>
                 </a:solidFill>
@@ -10592,13 +11268,13 @@
                 <a:ea typeface="Aptos" pitchFamily="34" charset="-122"/>
                 <a:cs typeface="Aptos" pitchFamily="34" charset="-120"/>
               </a:rPr>
-              <a:t>Play 7: Prioritize Use Cases - This lesson informs Play 7 by helping learners connect the lesson topic to prioritize use cases work.</a:t>
-            </a:r>
-            <a:endParaRPr lang="en-US" sz="1540" dirty="0"/>
-          </a:p>
-          <a:p>
-            <a:r>
-              <a:rPr lang="en-US" sz="1540" dirty="0">
+              <a:t>Play 7: Prioritize Use Cases - This lesson informs Play 7 by helping learners connect the lesson topic to.</a:t>
+            </a:r>
+            <a:endParaRPr lang="en-US" sz="1900" dirty="0"/>
+          </a:p>
+          <a:p>
+            <a:r>
+              <a:rPr lang="en-US" sz="1900" dirty="0">
                 <a:solidFill>
                   <a:srgbClr val="17364A"/>
                 </a:solidFill>
@@ -10606,13 +11282,13 @@
                 <a:ea typeface="Aptos" pitchFamily="34" charset="-122"/>
                 <a:cs typeface="Aptos" pitchFamily="34" charset="-120"/>
               </a:rPr>
-              <a:t>Play 8: Develop a Funding Strategy - This lesson informs Play 8 by helping learners connect the lesson topic to develop a funding.</a:t>
-            </a:r>
-            <a:endParaRPr lang="en-US" sz="1540" dirty="0"/>
-          </a:p>
-          <a:p>
-            <a:r>
-              <a:rPr lang="en-US" sz="1540" dirty="0">
+              <a:t>Play 8: Develop a Funding Strategy - This lesson informs Play 8 by helping learners connect the lesson topic.</a:t>
+            </a:r>
+            <a:endParaRPr lang="en-US" sz="1900" dirty="0"/>
+          </a:p>
+          <a:p>
+            <a:r>
+              <a:rPr lang="en-US" sz="1900" dirty="0">
                 <a:solidFill>
                   <a:srgbClr val="17364A"/>
                 </a:solidFill>
@@ -10620,15 +11296,15 @@
                 <a:ea typeface="Aptos" pitchFamily="34" charset="-122"/>
                 <a:cs typeface="Aptos" pitchFamily="34" charset="-120"/>
               </a:rPr>
-              <a:t>Play 1: Vision &amp; Guardrails - This lesson informs Play 1 by helping learners connect the lesson topic to vision &amp; guardrails work in.</a:t>
-            </a:r>
-            <a:endParaRPr lang="en-US" sz="1540" dirty="0"/>
-          </a:p>
-        </p:txBody>
-      </p:sp>
-      <p:sp>
-        <p:nvSpPr>
-          <p:cNvPr id="9" name="Shape 7"/>
+              <a:t>Play 1: Vision &amp; Guardrails - This lesson informs Play 1 by helping learners connect the lesson topic to.</a:t>
+            </a:r>
+            <a:endParaRPr lang="en-US" sz="1900" dirty="0"/>
+          </a:p>
+        </p:txBody>
+      </p:sp>
+      <p:sp>
+        <p:nvSpPr>
+          <p:cNvPr id="10" name="Shape 8"/>
           <p:cNvSpPr/>
           <p:nvPr/>
         </p:nvSpPr>
@@ -10655,14 +11331,14 @@
       </p:sp>
       <p:sp>
         <p:nvSpPr>
-          <p:cNvPr id="10" name="Text 8"/>
+          <p:cNvPr id="11" name="Text 9"/>
           <p:cNvSpPr/>
           <p:nvPr/>
         </p:nvSpPr>
         <p:spPr>
           <a:xfrm>
             <a:off x="8211312" y="1563624"/>
-            <a:ext cx="2734056" cy="201168"/>
+            <a:ext cx="2734056" cy="256032"/>
           </a:xfrm>
           <a:prstGeom prst="rect">
             <a:avLst/>
@@ -10678,7 +11354,7 @@
               <a:buNone/>
             </a:pPr>
             <a:r>
-              <a:rPr lang="en-US" sz="950" b="1" dirty="0">
+              <a:rPr lang="en-US" sz="1300" b="1" dirty="0">
                 <a:solidFill>
                   <a:srgbClr val="0068B7"/>
                 </a:solidFill>
@@ -10688,20 +11364,20 @@
               </a:rPr>
               <a:t>Apply the lesson</a:t>
             </a:r>
-            <a:endParaRPr lang="en-US" sz="950" dirty="0"/>
-          </a:p>
-        </p:txBody>
-      </p:sp>
-      <p:sp>
-        <p:nvSpPr>
-          <p:cNvPr id="11" name="Text 9"/>
-          <p:cNvSpPr/>
-          <p:nvPr/>
-        </p:nvSpPr>
-        <p:spPr>
-          <a:xfrm>
-            <a:off x="8211312" y="1856232"/>
-            <a:ext cx="2734056" cy="1536192"/>
+            <a:endParaRPr lang="en-US" sz="1300" dirty="0"/>
+          </a:p>
+        </p:txBody>
+      </p:sp>
+      <p:sp>
+        <p:nvSpPr>
+          <p:cNvPr id="12" name="Text 10"/>
+          <p:cNvSpPr/>
+          <p:nvPr/>
+        </p:nvSpPr>
+        <p:spPr>
+          <a:xfrm>
+            <a:off x="8211312" y="1920240"/>
+            <a:ext cx="2734056" cy="1463040"/>
           </a:xfrm>
           <a:prstGeom prst="rect">
             <a:avLst/>
@@ -10719,7 +11395,7 @@
               <a:buNone/>
             </a:pPr>
             <a:r>
-              <a:rPr lang="en-US" sz="1250" dirty="0">
+              <a:rPr lang="en-US" sz="1550" dirty="0">
                 <a:solidFill>
                   <a:srgbClr val="17364A"/>
                 </a:solidFill>
@@ -10729,32 +11405,32 @@
               </a:rPr>
               <a:t>Use the related plays to identify decisions, participants, timing, approvals, and documentation needed for responsible implementation.</a:t>
             </a:r>
-            <a:endParaRPr lang="en-US" sz="1250" dirty="0"/>
-          </a:p>
-        </p:txBody>
-      </p:sp>
-      <p:sp>
-        <p:nvSpPr>
-          <p:cNvPr id="12" name="Shape 10"/>
-          <p:cNvSpPr/>
-          <p:nvPr/>
-        </p:nvSpPr>
-        <p:spPr>
-          <a:xfrm>
-            <a:off x="8046720" y="3794760"/>
-            <a:ext cx="3063240" cy="1508760"/>
+            <a:endParaRPr lang="en-US" sz="1550" dirty="0"/>
+          </a:p>
+        </p:txBody>
+      </p:sp>
+      <p:sp>
+        <p:nvSpPr>
+          <p:cNvPr id="13" name="Shape 11"/>
+          <p:cNvSpPr/>
+          <p:nvPr/>
+        </p:nvSpPr>
+        <p:spPr>
+          <a:xfrm>
+            <a:off x="7818120" y="3977640"/>
+            <a:ext cx="972312" cy="749808"/>
           </a:xfrm>
           <a:prstGeom prst="roundRect">
             <a:avLst>
-              <a:gd name="adj" fmla="val 7273"/>
+              <a:gd name="adj" fmla="val 14634"/>
             </a:avLst>
           </a:prstGeom>
           <a:solidFill>
-            <a:srgbClr val="FFF4D9"/>
+            <a:srgbClr val="0068B7"/>
           </a:solidFill>
           <a:ln w="12700">
             <a:solidFill>
-              <a:srgbClr val="B9D7E6"/>
+              <a:srgbClr val="0068B7"/>
             </a:solidFill>
             <a:prstDash val="solid"/>
           </a:ln>
@@ -10762,81 +11438,256 @@
       </p:sp>
       <p:sp>
         <p:nvSpPr>
-          <p:cNvPr id="13" name="Text 11"/>
-          <p:cNvSpPr/>
-          <p:nvPr/>
-        </p:nvSpPr>
-        <p:spPr>
-          <a:xfrm>
-            <a:off x="8211312" y="3941064"/>
-            <a:ext cx="2734056" cy="201168"/>
-          </a:xfrm>
-          <a:prstGeom prst="rect">
-            <a:avLst/>
-          </a:prstGeom>
-          <a:noFill/>
-          <a:ln/>
-        </p:spPr>
-        <p:txBody>
-          <a:bodyPr wrap="square" lIns="0" tIns="0" rIns="0" bIns="0" rtlCol="0" anchor="ctr"/>
-          <a:lstStyle/>
-          <a:p>
-            <a:pPr indent="0" marL="0">
-              <a:buNone/>
-            </a:pPr>
-            <a:r>
-              <a:rPr lang="en-US" sz="950" b="1" dirty="0">
-                <a:solidFill>
-                  <a:srgbClr val="0068B7"/>
-                </a:solidFill>
-                <a:latin typeface="Aptos" pitchFamily="34" charset="0"/>
-                <a:ea typeface="Aptos" pitchFamily="34" charset="-122"/>
-                <a:cs typeface="Aptos" pitchFamily="34" charset="-120"/>
-              </a:rPr>
-              <a:t>Keep in mind</a:t>
-            </a:r>
-            <a:endParaRPr lang="en-US" sz="950" dirty="0"/>
-          </a:p>
-        </p:txBody>
-      </p:sp>
-      <p:sp>
-        <p:nvSpPr>
           <p:cNvPr id="14" name="Text 12"/>
           <p:cNvSpPr/>
           <p:nvPr/>
         </p:nvSpPr>
         <p:spPr>
           <a:xfrm>
-            <a:off x="8211312" y="4233672"/>
-            <a:ext cx="2734056" cy="941832"/>
-          </a:xfrm>
-          <a:prstGeom prst="rect">
-            <a:avLst/>
-          </a:prstGeom>
-          <a:noFill/>
-          <a:ln/>
-        </p:spPr>
-        <p:txBody>
-          <a:bodyPr wrap="square" lIns="0" tIns="0" rIns="0" bIns="0" rtlCol="0" anchor="t">
+            <a:off x="7891272" y="4169664"/>
+            <a:ext cx="826008" cy="310896"/>
+          </a:xfrm>
+          <a:prstGeom prst="rect">
+            <a:avLst/>
+          </a:prstGeom>
+          <a:noFill/>
+          <a:ln/>
+        </p:spPr>
+        <p:txBody>
+          <a:bodyPr wrap="square" lIns="0" tIns="0" rIns="0" bIns="0" rtlCol="0" anchor="ctr">
             <a:normAutofit/>
           </a:bodyPr>
           <a:lstStyle/>
           <a:p>
-            <a:pPr indent="0" marL="0">
-              <a:buNone/>
-            </a:pPr>
-            <a:r>
-              <a:rPr lang="en-US" sz="1250" dirty="0">
-                <a:solidFill>
-                  <a:srgbClr val="17364A"/>
-                </a:solidFill>
-                <a:latin typeface="Aptos" pitchFamily="34" charset="0"/>
-                <a:ea typeface="Aptos" pitchFamily="34" charset="-122"/>
-                <a:cs typeface="Aptos" pitchFamily="34" charset="-120"/>
-              </a:rPr>
-              <a:t>The playbook connection helps turn training into agency work, not just individual knowledge.</a:t>
-            </a:r>
-            <a:endParaRPr lang="en-US" sz="1250" dirty="0"/>
+            <a:pPr algn="ctr" indent="0" marL="0">
+              <a:buNone/>
+            </a:pPr>
+            <a:r>
+              <a:rPr lang="en-US" sz="1500" b="1" dirty="0">
+                <a:solidFill>
+                  <a:srgbClr val="FFFFFF"/>
+                </a:solidFill>
+                <a:latin typeface="Aptos" pitchFamily="34" charset="0"/>
+                <a:ea typeface="Aptos" pitchFamily="34" charset="-122"/>
+                <a:cs typeface="Aptos" pitchFamily="34" charset="-120"/>
+              </a:rPr>
+              <a:t>Lesson</a:t>
+            </a:r>
+            <a:endParaRPr lang="en-US" sz="1500" dirty="0"/>
+          </a:p>
+        </p:txBody>
+      </p:sp>
+      <p:sp>
+        <p:nvSpPr>
+          <p:cNvPr id="15" name="Text 13"/>
+          <p:cNvSpPr/>
+          <p:nvPr/>
+        </p:nvSpPr>
+        <p:spPr>
+          <a:xfrm>
+            <a:off x="8817864" y="4187952"/>
+            <a:ext cx="201168" cy="256032"/>
+          </a:xfrm>
+          <a:prstGeom prst="rect">
+            <a:avLst/>
+          </a:prstGeom>
+          <a:noFill/>
+          <a:ln/>
+        </p:spPr>
+        <p:txBody>
+          <a:bodyPr wrap="square" lIns="0" tIns="0" rIns="0" bIns="0" rtlCol="0" anchor="ctr"/>
+          <a:lstStyle/>
+          <a:p>
+            <a:pPr algn="ctr" indent="0" marL="0">
+              <a:buNone/>
+            </a:pPr>
+            <a:r>
+              <a:rPr lang="en-US" sz="1800" b="1" dirty="0">
+                <a:solidFill>
+                  <a:srgbClr val="0068B7"/>
+                </a:solidFill>
+                <a:latin typeface="Aptos" pitchFamily="34" charset="0"/>
+                <a:ea typeface="Aptos" pitchFamily="34" charset="-122"/>
+                <a:cs typeface="Aptos" pitchFamily="34" charset="-120"/>
+              </a:rPr>
+              <a:t>â†’</a:t>
+            </a:r>
+            <a:endParaRPr lang="en-US" sz="1800" dirty="0"/>
+          </a:p>
+        </p:txBody>
+      </p:sp>
+      <p:sp>
+        <p:nvSpPr>
+          <p:cNvPr id="16" name="Shape 14"/>
+          <p:cNvSpPr/>
+          <p:nvPr/>
+        </p:nvSpPr>
+        <p:spPr>
+          <a:xfrm>
+            <a:off x="9046464" y="3977640"/>
+            <a:ext cx="972312" cy="749808"/>
+          </a:xfrm>
+          <a:prstGeom prst="roundRect">
+            <a:avLst>
+              <a:gd name="adj" fmla="val 14634"/>
+            </a:avLst>
+          </a:prstGeom>
+          <a:solidFill>
+            <a:srgbClr val="2F8A28"/>
+          </a:solidFill>
+          <a:ln w="12700">
+            <a:solidFill>
+              <a:srgbClr val="2F8A28"/>
+            </a:solidFill>
+            <a:prstDash val="solid"/>
+          </a:ln>
+        </p:spPr>
+      </p:sp>
+      <p:sp>
+        <p:nvSpPr>
+          <p:cNvPr id="17" name="Text 15"/>
+          <p:cNvSpPr/>
+          <p:nvPr/>
+        </p:nvSpPr>
+        <p:spPr>
+          <a:xfrm>
+            <a:off x="9119616" y="4169664"/>
+            <a:ext cx="826008" cy="310896"/>
+          </a:xfrm>
+          <a:prstGeom prst="rect">
+            <a:avLst/>
+          </a:prstGeom>
+          <a:noFill/>
+          <a:ln/>
+        </p:spPr>
+        <p:txBody>
+          <a:bodyPr wrap="square" lIns="0" tIns="0" rIns="0" bIns="0" rtlCol="0" anchor="ctr">
+            <a:normAutofit/>
+          </a:bodyPr>
+          <a:lstStyle/>
+          <a:p>
+            <a:pPr algn="ctr" indent="0" marL="0">
+              <a:buNone/>
+            </a:pPr>
+            <a:r>
+              <a:rPr lang="en-US" sz="1500" b="1" dirty="0">
+                <a:solidFill>
+                  <a:srgbClr val="FFFFFF"/>
+                </a:solidFill>
+                <a:latin typeface="Aptos" pitchFamily="34" charset="0"/>
+                <a:ea typeface="Aptos" pitchFamily="34" charset="-122"/>
+                <a:cs typeface="Aptos" pitchFamily="34" charset="-120"/>
+              </a:rPr>
+              <a:t>Plays</a:t>
+            </a:r>
+            <a:endParaRPr lang="en-US" sz="1500" dirty="0"/>
+          </a:p>
+        </p:txBody>
+      </p:sp>
+      <p:sp>
+        <p:nvSpPr>
+          <p:cNvPr id="18" name="Text 16"/>
+          <p:cNvSpPr/>
+          <p:nvPr/>
+        </p:nvSpPr>
+        <p:spPr>
+          <a:xfrm>
+            <a:off x="10046208" y="4187952"/>
+            <a:ext cx="201168" cy="256032"/>
+          </a:xfrm>
+          <a:prstGeom prst="rect">
+            <a:avLst/>
+          </a:prstGeom>
+          <a:noFill/>
+          <a:ln/>
+        </p:spPr>
+        <p:txBody>
+          <a:bodyPr wrap="square" lIns="0" tIns="0" rIns="0" bIns="0" rtlCol="0" anchor="ctr"/>
+          <a:lstStyle/>
+          <a:p>
+            <a:pPr algn="ctr" indent="0" marL="0">
+              <a:buNone/>
+            </a:pPr>
+            <a:r>
+              <a:rPr lang="en-US" sz="1800" b="1" dirty="0">
+                <a:solidFill>
+                  <a:srgbClr val="0068B7"/>
+                </a:solidFill>
+                <a:latin typeface="Aptos" pitchFamily="34" charset="0"/>
+                <a:ea typeface="Aptos" pitchFamily="34" charset="-122"/>
+                <a:cs typeface="Aptos" pitchFamily="34" charset="-120"/>
+              </a:rPr>
+              <a:t>â†’</a:t>
+            </a:r>
+            <a:endParaRPr lang="en-US" sz="1800" dirty="0"/>
+          </a:p>
+        </p:txBody>
+      </p:sp>
+      <p:sp>
+        <p:nvSpPr>
+          <p:cNvPr id="19" name="Shape 17"/>
+          <p:cNvSpPr/>
+          <p:nvPr/>
+        </p:nvSpPr>
+        <p:spPr>
+          <a:xfrm>
+            <a:off x="10274808" y="3977640"/>
+            <a:ext cx="972312" cy="749808"/>
+          </a:xfrm>
+          <a:prstGeom prst="roundRect">
+            <a:avLst>
+              <a:gd name="adj" fmla="val 14634"/>
+            </a:avLst>
+          </a:prstGeom>
+          <a:solidFill>
+            <a:srgbClr val="6A4CA3"/>
+          </a:solidFill>
+          <a:ln w="12700">
+            <a:solidFill>
+              <a:srgbClr val="6A4CA3"/>
+            </a:solidFill>
+            <a:prstDash val="solid"/>
+          </a:ln>
+        </p:spPr>
+      </p:sp>
+      <p:sp>
+        <p:nvSpPr>
+          <p:cNvPr id="20" name="Text 18"/>
+          <p:cNvSpPr/>
+          <p:nvPr/>
+        </p:nvSpPr>
+        <p:spPr>
+          <a:xfrm>
+            <a:off x="10347960" y="4169664"/>
+            <a:ext cx="826008" cy="310896"/>
+          </a:xfrm>
+          <a:prstGeom prst="rect">
+            <a:avLst/>
+          </a:prstGeom>
+          <a:noFill/>
+          <a:ln/>
+        </p:spPr>
+        <p:txBody>
+          <a:bodyPr wrap="square" lIns="0" tIns="0" rIns="0" bIns="0" rtlCol="0" anchor="ctr">
+            <a:normAutofit/>
+          </a:bodyPr>
+          <a:lstStyle/>
+          <a:p>
+            <a:pPr algn="ctr" indent="0" marL="0">
+              <a:buNone/>
+            </a:pPr>
+            <a:r>
+              <a:rPr lang="en-US" sz="1500" b="1" dirty="0">
+                <a:solidFill>
+                  <a:srgbClr val="FFFFFF"/>
+                </a:solidFill>
+                <a:latin typeface="Aptos" pitchFamily="34" charset="0"/>
+                <a:ea typeface="Aptos" pitchFamily="34" charset="-122"/>
+                <a:cs typeface="Aptos" pitchFamily="34" charset="-120"/>
+              </a:rPr>
+              <a:t>Action</a:t>
+            </a:r>
+            <a:endParaRPr lang="en-US" sz="1500" dirty="0"/>
           </a:p>
         </p:txBody>
       </p:sp>
@@ -11033,7 +11884,7 @@
                 <a:ea typeface="Aptos" pitchFamily="34" charset="-122"/>
                 <a:cs typeface="Aptos" pitchFamily="34" charset="-120"/>
               </a:rPr>
-              <a:t>© Paula Soper</a:t>
+              <a:t>Â© Paula Soper</a:t>
             </a:r>
             <a:endParaRPr lang="en-US" sz="800" dirty="0"/>
           </a:p>
@@ -11047,8 +11898,47 @@
         </p:nvSpPr>
         <p:spPr>
           <a:xfrm>
+            <a:off x="11137392" y="6510528"/>
+            <a:ext cx="411480" cy="201168"/>
+          </a:xfrm>
+          <a:prstGeom prst="rect">
+            <a:avLst/>
+          </a:prstGeom>
+          <a:noFill/>
+          <a:ln/>
+        </p:spPr>
+        <p:txBody>
+          <a:bodyPr wrap="square" lIns="0" tIns="0" rIns="0" bIns="0" rtlCol="0" anchor="ctr"/>
+          <a:lstStyle/>
+          <a:p>
+            <a:pPr algn="r" indent="0" marL="0">
+              <a:buNone/>
+            </a:pPr>
+            <a:r>
+              <a:rPr lang="en-US" sz="900" dirty="0">
+                <a:solidFill>
+                  <a:srgbClr val="5F7181"/>
+                </a:solidFill>
+                <a:latin typeface="Aptos" pitchFamily="34" charset="0"/>
+                <a:ea typeface="Aptos" pitchFamily="34" charset="-122"/>
+                <a:cs typeface="Aptos" pitchFamily="34" charset="-120"/>
+              </a:rPr>
+              <a:t>4</a:t>
+            </a:r>
+            <a:endParaRPr lang="en-US" sz="900" dirty="0"/>
+          </a:p>
+        </p:txBody>
+      </p:sp>
+      <p:sp>
+        <p:nvSpPr>
+          <p:cNvPr id="8" name="Text 6"/>
+          <p:cNvSpPr/>
+          <p:nvPr/>
+        </p:nvSpPr>
+        <p:spPr>
+          <a:xfrm>
             <a:off x="640080" y="658368"/>
-            <a:ext cx="10881360" cy="566928"/>
+            <a:ext cx="10881360" cy="713232"/>
           </a:xfrm>
           <a:prstGeom prst="rect">
             <a:avLst/>
@@ -11066,7 +11956,7 @@
               <a:buNone/>
             </a:pPr>
             <a:r>
-              <a:rPr lang="en-US" sz="2700" b="1" dirty="0">
+              <a:rPr lang="en-US" sz="3400" b="1" dirty="0">
                 <a:solidFill>
                   <a:srgbClr val="003A63"/>
                 </a:solidFill>
@@ -11076,20 +11966,20 @@
               </a:rPr>
               <a:t>Related toolkit resources</a:t>
             </a:r>
-            <a:endParaRPr lang="en-US" sz="2700" dirty="0"/>
-          </a:p>
-        </p:txBody>
-      </p:sp>
-      <p:sp>
-        <p:nvSpPr>
-          <p:cNvPr id="8" name="Text 6"/>
-          <p:cNvSpPr/>
-          <p:nvPr/>
-        </p:nvSpPr>
-        <p:spPr>
-          <a:xfrm>
-            <a:off x="868680" y="1417320"/>
-            <a:ext cx="6903720" cy="4480560"/>
+            <a:endParaRPr lang="en-US" sz="3400" dirty="0"/>
+          </a:p>
+        </p:txBody>
+      </p:sp>
+      <p:sp>
+        <p:nvSpPr>
+          <p:cNvPr id="9" name="Text 7"/>
+          <p:cNvSpPr/>
+          <p:nvPr/>
+        </p:nvSpPr>
+        <p:spPr>
+          <a:xfrm>
+            <a:off x="868680" y="1508760"/>
+            <a:ext cx="6812280" cy="3977640"/>
           </a:xfrm>
           <a:prstGeom prst="rect">
             <a:avLst/>
@@ -11104,7 +11994,7 @@
           <a:lstStyle/>
           <a:p>
             <a:r>
-              <a:rPr lang="en-US" sz="1460" dirty="0">
+              <a:rPr lang="en-US" sz="1850" dirty="0">
                 <a:solidFill>
                   <a:srgbClr val="17364A"/>
                 </a:solidFill>
@@ -11112,13 +12002,13 @@
                 <a:ea typeface="Aptos" pitchFamily="34" charset="-122"/>
                 <a:cs typeface="Aptos" pitchFamily="34" charset="-120"/>
               </a:rPr>
-              <a:t>Tool 33: Funding Strategy Checklists (Checklist) - Use this tool to complete or strengthen the practical exercise for the module.</a:t>
-            </a:r>
-            <a:endParaRPr lang="en-US" sz="1460" dirty="0"/>
-          </a:p>
-          <a:p>
-            <a:r>
-              <a:rPr lang="en-US" sz="1460" dirty="0">
+              <a:t>Tool 33: Funding Strategy Checklists (Checklist) - Use this tool to complete or strengthen the practical.</a:t>
+            </a:r>
+            <a:endParaRPr lang="en-US" sz="1850" dirty="0"/>
+          </a:p>
+          <a:p>
+            <a:r>
+              <a:rPr lang="en-US" sz="1850" dirty="0">
                 <a:solidFill>
                   <a:srgbClr val="17364A"/>
                 </a:solidFill>
@@ -11126,13 +12016,13 @@
                 <a:ea typeface="Aptos" pitchFamily="34" charset="-122"/>
                 <a:cs typeface="Aptos" pitchFamily="34" charset="-120"/>
               </a:rPr>
-              <a:t>Tool 35: AI Total Cost of Ownership and Sustainability Worksheet (Worksheet) - Use this tool to complete or strengthen the practical.</a:t>
-            </a:r>
-            <a:endParaRPr lang="en-US" sz="1460" dirty="0"/>
-          </a:p>
-          <a:p>
-            <a:r>
-              <a:rPr lang="en-US" sz="1460" dirty="0">
+              <a:t>Tool 35: AI Total Cost of Ownership and Sustainability Worksheet (Worksheet) - Use this tool to complete or.</a:t>
+            </a:r>
+            <a:endParaRPr lang="en-US" sz="1850" dirty="0"/>
+          </a:p>
+          <a:p>
+            <a:r>
+              <a:rPr lang="en-US" sz="1850" dirty="0">
                 <a:solidFill>
                   <a:srgbClr val="17364A"/>
                 </a:solidFill>
@@ -11140,13 +12030,13 @@
                 <a:ea typeface="Aptos" pitchFamily="34" charset="-122"/>
                 <a:cs typeface="Aptos" pitchFamily="34" charset="-120"/>
               </a:rPr>
-              <a:t>Tool 4: AI Policy Landscape Scan (Worksheet) - Use AI Policy Landscape Scan to translate this lesson into a documented public health.</a:t>
-            </a:r>
-            <a:endParaRPr lang="en-US" sz="1460" dirty="0"/>
-          </a:p>
-          <a:p>
-            <a:r>
-              <a:rPr lang="en-US" sz="1460" dirty="0">
+              <a:t>Tool 4: AI Policy Landscape Scan (Worksheet) - Use AI Policy Landscape Scan to translate this lesson into a.</a:t>
+            </a:r>
+            <a:endParaRPr lang="en-US" sz="1850" dirty="0"/>
+          </a:p>
+          <a:p>
+            <a:r>
+              <a:rPr lang="en-US" sz="1850" dirty="0">
                 <a:solidFill>
                   <a:srgbClr val="17364A"/>
                 </a:solidFill>
@@ -11154,29 +12044,15 @@
                 <a:ea typeface="Aptos" pitchFamily="34" charset="-122"/>
                 <a:cs typeface="Aptos" pitchFamily="34" charset="-120"/>
               </a:rPr>
-              <a:t>Tool 5: AI Environmental and Resource Impact Review (Checklist) - Use this tool to complete or strengthen the practical exercise for.</a:t>
-            </a:r>
-            <a:endParaRPr lang="en-US" sz="1460" dirty="0"/>
-          </a:p>
-          <a:p>
-            <a:r>
-              <a:rPr lang="en-US" sz="1460" dirty="0">
-                <a:solidFill>
-                  <a:srgbClr val="17364A"/>
-                </a:solidFill>
-                <a:latin typeface="Aptos" pitchFamily="34" charset="0"/>
-                <a:ea typeface="Aptos" pitchFamily="34" charset="-122"/>
-                <a:cs typeface="Aptos" pitchFamily="34" charset="-120"/>
-              </a:rPr>
-              <a:t>Tool 6: Human-Centered AI Decision Rule Checklist (Checklist) - Use Human-Centered AI Decision Rule Checklist to translate this.</a:t>
-            </a:r>
-            <a:endParaRPr lang="en-US" sz="1460" dirty="0"/>
-          </a:p>
-        </p:txBody>
-      </p:sp>
-      <p:sp>
-        <p:nvSpPr>
-          <p:cNvPr id="9" name="Shape 7"/>
+              <a:t>Tool 5: AI Environmental and Resource Impact Review (Checklist) - Use this tool to complete or strengthen.</a:t>
+            </a:r>
+            <a:endParaRPr lang="en-US" sz="1850" dirty="0"/>
+          </a:p>
+        </p:txBody>
+      </p:sp>
+      <p:sp>
+        <p:nvSpPr>
+          <p:cNvPr id="10" name="Shape 8"/>
           <p:cNvSpPr/>
           <p:nvPr/>
         </p:nvSpPr>
@@ -11203,14 +12079,14 @@
       </p:sp>
       <p:sp>
         <p:nvSpPr>
-          <p:cNvPr id="10" name="Text 8"/>
+          <p:cNvPr id="11" name="Text 9"/>
           <p:cNvSpPr/>
           <p:nvPr/>
         </p:nvSpPr>
         <p:spPr>
           <a:xfrm>
             <a:off x="8211312" y="1563624"/>
-            <a:ext cx="2734056" cy="201168"/>
+            <a:ext cx="2734056" cy="256032"/>
           </a:xfrm>
           <a:prstGeom prst="rect">
             <a:avLst/>
@@ -11226,7 +12102,7 @@
               <a:buNone/>
             </a:pPr>
             <a:r>
-              <a:rPr lang="en-US" sz="950" b="1" dirty="0">
+              <a:rPr lang="en-US" sz="1300" b="1" dirty="0">
                 <a:solidFill>
                   <a:srgbClr val="0068B7"/>
                 </a:solidFill>
@@ -11236,20 +12112,20 @@
               </a:rPr>
               <a:t>Use the tools</a:t>
             </a:r>
-            <a:endParaRPr lang="en-US" sz="950" dirty="0"/>
-          </a:p>
-        </p:txBody>
-      </p:sp>
-      <p:sp>
-        <p:nvSpPr>
-          <p:cNvPr id="11" name="Text 9"/>
-          <p:cNvSpPr/>
-          <p:nvPr/>
-        </p:nvSpPr>
-        <p:spPr>
-          <a:xfrm>
-            <a:off x="8211312" y="1856232"/>
-            <a:ext cx="2734056" cy="1536192"/>
+            <a:endParaRPr lang="en-US" sz="1300" dirty="0"/>
+          </a:p>
+        </p:txBody>
+      </p:sp>
+      <p:sp>
+        <p:nvSpPr>
+          <p:cNvPr id="12" name="Text 10"/>
+          <p:cNvSpPr/>
+          <p:nvPr/>
+        </p:nvSpPr>
+        <p:spPr>
+          <a:xfrm>
+            <a:off x="8211312" y="1920240"/>
+            <a:ext cx="2734056" cy="1463040"/>
           </a:xfrm>
           <a:prstGeom prst="rect">
             <a:avLst/>
@@ -11267,7 +12143,7 @@
               <a:buNone/>
             </a:pPr>
             <a:r>
-              <a:rPr lang="en-US" sz="1250" dirty="0">
+              <a:rPr lang="en-US" sz="1550" dirty="0">
                 <a:solidFill>
                   <a:srgbClr val="17364A"/>
                 </a:solidFill>
@@ -11277,32 +12153,32 @@
               </a:rPr>
               <a:t>Use linked tools when your department needs a structured worksheet, template, checklist, review process, or documentation artifact.</a:t>
             </a:r>
-            <a:endParaRPr lang="en-US" sz="1250" dirty="0"/>
-          </a:p>
-        </p:txBody>
-      </p:sp>
-      <p:sp>
-        <p:nvSpPr>
-          <p:cNvPr id="12" name="Shape 10"/>
-          <p:cNvSpPr/>
-          <p:nvPr/>
-        </p:nvSpPr>
-        <p:spPr>
-          <a:xfrm>
-            <a:off x="8046720" y="3794760"/>
-            <a:ext cx="3063240" cy="1508760"/>
+            <a:endParaRPr lang="en-US" sz="1550" dirty="0"/>
+          </a:p>
+        </p:txBody>
+      </p:sp>
+      <p:sp>
+        <p:nvSpPr>
+          <p:cNvPr id="13" name="Shape 11"/>
+          <p:cNvSpPr/>
+          <p:nvPr/>
+        </p:nvSpPr>
+        <p:spPr>
+          <a:xfrm>
+            <a:off x="7818120" y="3977640"/>
+            <a:ext cx="972312" cy="749808"/>
           </a:xfrm>
           <a:prstGeom prst="roundRect">
             <a:avLst>
-              <a:gd name="adj" fmla="val 7273"/>
+              <a:gd name="adj" fmla="val 14634"/>
             </a:avLst>
           </a:prstGeom>
           <a:solidFill>
-            <a:srgbClr val="EEF8ED"/>
+            <a:srgbClr val="0068B7"/>
           </a:solidFill>
           <a:ln w="12700">
             <a:solidFill>
-              <a:srgbClr val="B9D7E6"/>
+              <a:srgbClr val="0068B7"/>
             </a:solidFill>
             <a:prstDash val="solid"/>
           </a:ln>
@@ -11310,81 +12186,256 @@
       </p:sp>
       <p:sp>
         <p:nvSpPr>
-          <p:cNvPr id="13" name="Text 11"/>
-          <p:cNvSpPr/>
-          <p:nvPr/>
-        </p:nvSpPr>
-        <p:spPr>
-          <a:xfrm>
-            <a:off x="8211312" y="3941064"/>
-            <a:ext cx="2734056" cy="201168"/>
-          </a:xfrm>
-          <a:prstGeom prst="rect">
-            <a:avLst/>
-          </a:prstGeom>
-          <a:noFill/>
-          <a:ln/>
-        </p:spPr>
-        <p:txBody>
-          <a:bodyPr wrap="square" lIns="0" tIns="0" rIns="0" bIns="0" rtlCol="0" anchor="ctr"/>
-          <a:lstStyle/>
-          <a:p>
-            <a:pPr indent="0" marL="0">
-              <a:buNone/>
-            </a:pPr>
-            <a:r>
-              <a:rPr lang="en-US" sz="950" b="1" dirty="0">
-                <a:solidFill>
-                  <a:srgbClr val="0068B7"/>
-                </a:solidFill>
-                <a:latin typeface="Aptos" pitchFamily="34" charset="0"/>
-                <a:ea typeface="Aptos" pitchFamily="34" charset="-122"/>
-                <a:cs typeface="Aptos" pitchFamily="34" charset="-120"/>
-              </a:rPr>
-              <a:t>Avoid duplication</a:t>
-            </a:r>
-            <a:endParaRPr lang="en-US" sz="950" dirty="0"/>
-          </a:p>
-        </p:txBody>
-      </p:sp>
-      <p:sp>
-        <p:nvSpPr>
           <p:cNvPr id="14" name="Text 12"/>
           <p:cNvSpPr/>
           <p:nvPr/>
         </p:nvSpPr>
         <p:spPr>
           <a:xfrm>
-            <a:off x="8211312" y="4233672"/>
-            <a:ext cx="2734056" cy="941832"/>
-          </a:xfrm>
-          <a:prstGeom prst="rect">
-            <a:avLst/>
-          </a:prstGeom>
-          <a:noFill/>
-          <a:ln/>
-        </p:spPr>
-        <p:txBody>
-          <a:bodyPr wrap="square" lIns="0" tIns="0" rIns="0" bIns="0" rtlCol="0" anchor="t">
+            <a:off x="7891272" y="4169664"/>
+            <a:ext cx="826008" cy="310896"/>
+          </a:xfrm>
+          <a:prstGeom prst="rect">
+            <a:avLst/>
+          </a:prstGeom>
+          <a:noFill/>
+          <a:ln/>
+        </p:spPr>
+        <p:txBody>
+          <a:bodyPr wrap="square" lIns="0" tIns="0" rIns="0" bIns="0" rtlCol="0" anchor="ctr">
             <a:normAutofit/>
           </a:bodyPr>
           <a:lstStyle/>
           <a:p>
-            <a:pPr indent="0" marL="0">
-              <a:buNone/>
-            </a:pPr>
-            <a:r>
-              <a:rPr lang="en-US" sz="1250" dirty="0">
-                <a:solidFill>
-                  <a:srgbClr val="17364A"/>
-                </a:solidFill>
-                <a:latin typeface="Aptos" pitchFamily="34" charset="0"/>
-                <a:ea typeface="Aptos" pitchFamily="34" charset="-122"/>
-                <a:cs typeface="Aptos" pitchFamily="34" charset="-120"/>
-              </a:rPr>
-              <a:t>If your department already has a strong equivalent tool, adapt or use the existing process instead of recreating it.</a:t>
-            </a:r>
-            <a:endParaRPr lang="en-US" sz="1250" dirty="0"/>
+            <a:pPr algn="ctr" indent="0" marL="0">
+              <a:buNone/>
+            </a:pPr>
+            <a:r>
+              <a:rPr lang="en-US" sz="1500" b="1" dirty="0">
+                <a:solidFill>
+                  <a:srgbClr val="FFFFFF"/>
+                </a:solidFill>
+                <a:latin typeface="Aptos" pitchFamily="34" charset="0"/>
+                <a:ea typeface="Aptos" pitchFamily="34" charset="-122"/>
+                <a:cs typeface="Aptos" pitchFamily="34" charset="-120"/>
+              </a:rPr>
+              <a:t>Concept</a:t>
+            </a:r>
+            <a:endParaRPr lang="en-US" sz="1500" dirty="0"/>
+          </a:p>
+        </p:txBody>
+      </p:sp>
+      <p:sp>
+        <p:nvSpPr>
+          <p:cNvPr id="15" name="Text 13"/>
+          <p:cNvSpPr/>
+          <p:nvPr/>
+        </p:nvSpPr>
+        <p:spPr>
+          <a:xfrm>
+            <a:off x="8817864" y="4187952"/>
+            <a:ext cx="201168" cy="256032"/>
+          </a:xfrm>
+          <a:prstGeom prst="rect">
+            <a:avLst/>
+          </a:prstGeom>
+          <a:noFill/>
+          <a:ln/>
+        </p:spPr>
+        <p:txBody>
+          <a:bodyPr wrap="square" lIns="0" tIns="0" rIns="0" bIns="0" rtlCol="0" anchor="ctr"/>
+          <a:lstStyle/>
+          <a:p>
+            <a:pPr algn="ctr" indent="0" marL="0">
+              <a:buNone/>
+            </a:pPr>
+            <a:r>
+              <a:rPr lang="en-US" sz="1800" b="1" dirty="0">
+                <a:solidFill>
+                  <a:srgbClr val="0068B7"/>
+                </a:solidFill>
+                <a:latin typeface="Aptos" pitchFamily="34" charset="0"/>
+                <a:ea typeface="Aptos" pitchFamily="34" charset="-122"/>
+                <a:cs typeface="Aptos" pitchFamily="34" charset="-120"/>
+              </a:rPr>
+              <a:t>â†’</a:t>
+            </a:r>
+            <a:endParaRPr lang="en-US" sz="1800" dirty="0"/>
+          </a:p>
+        </p:txBody>
+      </p:sp>
+      <p:sp>
+        <p:nvSpPr>
+          <p:cNvPr id="16" name="Shape 14"/>
+          <p:cNvSpPr/>
+          <p:nvPr/>
+        </p:nvSpPr>
+        <p:spPr>
+          <a:xfrm>
+            <a:off x="9046464" y="3977640"/>
+            <a:ext cx="972312" cy="749808"/>
+          </a:xfrm>
+          <a:prstGeom prst="roundRect">
+            <a:avLst>
+              <a:gd name="adj" fmla="val 14634"/>
+            </a:avLst>
+          </a:prstGeom>
+          <a:solidFill>
+            <a:srgbClr val="2F8A28"/>
+          </a:solidFill>
+          <a:ln w="12700">
+            <a:solidFill>
+              <a:srgbClr val="2F8A28"/>
+            </a:solidFill>
+            <a:prstDash val="solid"/>
+          </a:ln>
+        </p:spPr>
+      </p:sp>
+      <p:sp>
+        <p:nvSpPr>
+          <p:cNvPr id="17" name="Text 15"/>
+          <p:cNvSpPr/>
+          <p:nvPr/>
+        </p:nvSpPr>
+        <p:spPr>
+          <a:xfrm>
+            <a:off x="9119616" y="4169664"/>
+            <a:ext cx="826008" cy="310896"/>
+          </a:xfrm>
+          <a:prstGeom prst="rect">
+            <a:avLst/>
+          </a:prstGeom>
+          <a:noFill/>
+          <a:ln/>
+        </p:spPr>
+        <p:txBody>
+          <a:bodyPr wrap="square" lIns="0" tIns="0" rIns="0" bIns="0" rtlCol="0" anchor="ctr">
+            <a:normAutofit/>
+          </a:bodyPr>
+          <a:lstStyle/>
+          <a:p>
+            <a:pPr algn="ctr" indent="0" marL="0">
+              <a:buNone/>
+            </a:pPr>
+            <a:r>
+              <a:rPr lang="en-US" sz="1500" b="1" dirty="0">
+                <a:solidFill>
+                  <a:srgbClr val="FFFFFF"/>
+                </a:solidFill>
+                <a:latin typeface="Aptos" pitchFamily="34" charset="0"/>
+                <a:ea typeface="Aptos" pitchFamily="34" charset="-122"/>
+                <a:cs typeface="Aptos" pitchFamily="34" charset="-120"/>
+              </a:rPr>
+              <a:t>Tool</a:t>
+            </a:r>
+            <a:endParaRPr lang="en-US" sz="1500" dirty="0"/>
+          </a:p>
+        </p:txBody>
+      </p:sp>
+      <p:sp>
+        <p:nvSpPr>
+          <p:cNvPr id="18" name="Text 16"/>
+          <p:cNvSpPr/>
+          <p:nvPr/>
+        </p:nvSpPr>
+        <p:spPr>
+          <a:xfrm>
+            <a:off x="10046208" y="4187952"/>
+            <a:ext cx="201168" cy="256032"/>
+          </a:xfrm>
+          <a:prstGeom prst="rect">
+            <a:avLst/>
+          </a:prstGeom>
+          <a:noFill/>
+          <a:ln/>
+        </p:spPr>
+        <p:txBody>
+          <a:bodyPr wrap="square" lIns="0" tIns="0" rIns="0" bIns="0" rtlCol="0" anchor="ctr"/>
+          <a:lstStyle/>
+          <a:p>
+            <a:pPr algn="ctr" indent="0" marL="0">
+              <a:buNone/>
+            </a:pPr>
+            <a:r>
+              <a:rPr lang="en-US" sz="1800" b="1" dirty="0">
+                <a:solidFill>
+                  <a:srgbClr val="0068B7"/>
+                </a:solidFill>
+                <a:latin typeface="Aptos" pitchFamily="34" charset="0"/>
+                <a:ea typeface="Aptos" pitchFamily="34" charset="-122"/>
+                <a:cs typeface="Aptos" pitchFamily="34" charset="-120"/>
+              </a:rPr>
+              <a:t>â†’</a:t>
+            </a:r>
+            <a:endParaRPr lang="en-US" sz="1800" dirty="0"/>
+          </a:p>
+        </p:txBody>
+      </p:sp>
+      <p:sp>
+        <p:nvSpPr>
+          <p:cNvPr id="19" name="Shape 17"/>
+          <p:cNvSpPr/>
+          <p:nvPr/>
+        </p:nvSpPr>
+        <p:spPr>
+          <a:xfrm>
+            <a:off x="10274808" y="3977640"/>
+            <a:ext cx="972312" cy="749808"/>
+          </a:xfrm>
+          <a:prstGeom prst="roundRect">
+            <a:avLst>
+              <a:gd name="adj" fmla="val 14634"/>
+            </a:avLst>
+          </a:prstGeom>
+          <a:solidFill>
+            <a:srgbClr val="D69A2D"/>
+          </a:solidFill>
+          <a:ln w="12700">
+            <a:solidFill>
+              <a:srgbClr val="D69A2D"/>
+            </a:solidFill>
+            <a:prstDash val="solid"/>
+          </a:ln>
+        </p:spPr>
+      </p:sp>
+      <p:sp>
+        <p:nvSpPr>
+          <p:cNvPr id="20" name="Text 18"/>
+          <p:cNvSpPr/>
+          <p:nvPr/>
+        </p:nvSpPr>
+        <p:spPr>
+          <a:xfrm>
+            <a:off x="10347960" y="4169664"/>
+            <a:ext cx="826008" cy="310896"/>
+          </a:xfrm>
+          <a:prstGeom prst="rect">
+            <a:avLst/>
+          </a:prstGeom>
+          <a:noFill/>
+          <a:ln/>
+        </p:spPr>
+        <p:txBody>
+          <a:bodyPr wrap="square" lIns="0" tIns="0" rIns="0" bIns="0" rtlCol="0" anchor="ctr">
+            <a:normAutofit/>
+          </a:bodyPr>
+          <a:lstStyle/>
+          <a:p>
+            <a:pPr algn="ctr" indent="0" marL="0">
+              <a:buNone/>
+            </a:pPr>
+            <a:r>
+              <a:rPr lang="en-US" sz="1500" b="1" dirty="0">
+                <a:solidFill>
+                  <a:srgbClr val="FFFFFF"/>
+                </a:solidFill>
+                <a:latin typeface="Aptos" pitchFamily="34" charset="0"/>
+                <a:ea typeface="Aptos" pitchFamily="34" charset="-122"/>
+                <a:cs typeface="Aptos" pitchFamily="34" charset="-120"/>
+              </a:rPr>
+              <a:t>Artifact</a:t>
+            </a:r>
+            <a:endParaRPr lang="en-US" sz="1500" dirty="0"/>
           </a:p>
         </p:txBody>
       </p:sp>
@@ -11581,7 +12632,7 @@
                 <a:ea typeface="Aptos" pitchFamily="34" charset="-122"/>
                 <a:cs typeface="Aptos" pitchFamily="34" charset="-120"/>
               </a:rPr>
-              <a:t>© Paula Soper</a:t>
+              <a:t>Â© Paula Soper</a:t>
             </a:r>
             <a:endParaRPr lang="en-US" sz="800" dirty="0"/>
           </a:p>
@@ -11589,7 +12640,46 @@
       </p:sp>
       <p:sp>
         <p:nvSpPr>
-          <p:cNvPr id="7" name="Shape 5"/>
+          <p:cNvPr id="7" name="Text 5"/>
+          <p:cNvSpPr/>
+          <p:nvPr/>
+        </p:nvSpPr>
+        <p:spPr>
+          <a:xfrm>
+            <a:off x="11137392" y="6510528"/>
+            <a:ext cx="411480" cy="201168"/>
+          </a:xfrm>
+          <a:prstGeom prst="rect">
+            <a:avLst/>
+          </a:prstGeom>
+          <a:noFill/>
+          <a:ln/>
+        </p:spPr>
+        <p:txBody>
+          <a:bodyPr wrap="square" lIns="0" tIns="0" rIns="0" bIns="0" rtlCol="0" anchor="ctr"/>
+          <a:lstStyle/>
+          <a:p>
+            <a:pPr algn="r" indent="0" marL="0">
+              <a:buNone/>
+            </a:pPr>
+            <a:r>
+              <a:rPr lang="en-US" sz="900" dirty="0">
+                <a:solidFill>
+                  <a:srgbClr val="5F7181"/>
+                </a:solidFill>
+                <a:latin typeface="Aptos" pitchFamily="34" charset="0"/>
+                <a:ea typeface="Aptos" pitchFamily="34" charset="-122"/>
+                <a:cs typeface="Aptos" pitchFamily="34" charset="-120"/>
+              </a:rPr>
+              <a:t>5</a:t>
+            </a:r>
+            <a:endParaRPr lang="en-US" sz="900" dirty="0"/>
+          </a:p>
+        </p:txBody>
+      </p:sp>
+      <p:sp>
+        <p:nvSpPr>
+          <p:cNvPr id="8" name="Shape 6"/>
           <p:cNvSpPr/>
           <p:nvPr/>
         </p:nvSpPr>
@@ -11614,7 +12704,7 @@
       </p:sp>
       <p:sp>
         <p:nvSpPr>
-          <p:cNvPr id="8" name="Text 6"/>
+          <p:cNvPr id="9" name="Text 7"/>
           <p:cNvSpPr/>
           <p:nvPr/>
         </p:nvSpPr>
@@ -11653,14 +12743,14 @@
       </p:sp>
       <p:sp>
         <p:nvSpPr>
-          <p:cNvPr id="9" name="Text 7"/>
+          <p:cNvPr id="10" name="Text 8"/>
           <p:cNvSpPr/>
           <p:nvPr/>
         </p:nvSpPr>
         <p:spPr>
           <a:xfrm>
             <a:off x="640080" y="621792"/>
-            <a:ext cx="10881360" cy="566928"/>
+            <a:ext cx="10881360" cy="713232"/>
           </a:xfrm>
           <a:prstGeom prst="rect">
             <a:avLst/>
@@ -11678,7 +12768,7 @@
               <a:buNone/>
             </a:pPr>
             <a:r>
-              <a:rPr lang="en-US" sz="2700" b="1" dirty="0">
+              <a:rPr lang="en-US" sz="3400" b="1" dirty="0">
                 <a:solidFill>
                   <a:srgbClr val="003A63"/>
                 </a:solidFill>
@@ -11688,20 +12778,20 @@
               </a:rPr>
               <a:t>Learning Objectives</a:t>
             </a:r>
-            <a:endParaRPr lang="en-US" sz="2700" dirty="0"/>
-          </a:p>
-        </p:txBody>
-      </p:sp>
-      <p:sp>
-        <p:nvSpPr>
-          <p:cNvPr id="10" name="Text 8"/>
-          <p:cNvSpPr/>
-          <p:nvPr/>
-        </p:nvSpPr>
-        <p:spPr>
-          <a:xfrm>
-            <a:off x="868680" y="1417320"/>
-            <a:ext cx="6675120" cy="4434840"/>
+            <a:endParaRPr lang="en-US" sz="3400" dirty="0"/>
+          </a:p>
+        </p:txBody>
+      </p:sp>
+      <p:sp>
+        <p:nvSpPr>
+          <p:cNvPr id="11" name="Text 9"/>
+          <p:cNvSpPr/>
+          <p:nvPr/>
+        </p:nvSpPr>
+        <p:spPr>
+          <a:xfrm>
+            <a:off x="868680" y="1508760"/>
+            <a:ext cx="6537960" cy="4160520"/>
           </a:xfrm>
           <a:prstGeom prst="rect">
             <a:avLst/>
@@ -11716,7 +12806,7 @@
           <a:lstStyle/>
           <a:p>
             <a:r>
-              <a:rPr lang="en-US" sz="1700" dirty="0">
+              <a:rPr lang="en-US" sz="2100" dirty="0">
                 <a:solidFill>
                   <a:srgbClr val="17364A"/>
                 </a:solidFill>
@@ -11726,11 +12816,11 @@
               </a:rPr>
               <a:t>Define the purpose of an AI portfolio strategy for public health agencies.</a:t>
             </a:r>
-            <a:endParaRPr lang="en-US" sz="1700" dirty="0"/>
-          </a:p>
-          <a:p>
-            <a:r>
-              <a:rPr lang="en-US" sz="1700" dirty="0">
+            <a:endParaRPr lang="en-US" sz="2100" dirty="0"/>
+          </a:p>
+          <a:p>
+            <a:r>
+              <a:rPr lang="en-US" sz="2100" dirty="0">
                 <a:solidFill>
                   <a:srgbClr val="17364A"/>
                 </a:solidFill>
@@ -11738,13 +12828,13 @@
                 <a:ea typeface="Aptos" pitchFamily="34" charset="-122"/>
                 <a:cs typeface="Aptos" pitchFamily="34" charset="-120"/>
               </a:rPr>
-              <a:t>Develop criteria for prioritizing AI use cases based on public health value, readiness, risk, and sustainability.</a:t>
-            </a:r>
-            <a:endParaRPr lang="en-US" sz="1700" dirty="0"/>
-          </a:p>
-          <a:p>
-            <a:r>
-              <a:rPr lang="en-US" sz="1700" dirty="0">
+              <a:t>Develop criteria for prioritizing AI use cases based on public health value, readiness, risk, and.</a:t>
+            </a:r>
+            <a:endParaRPr lang="en-US" sz="2100" dirty="0"/>
+          </a:p>
+          <a:p>
+            <a:r>
+              <a:rPr lang="en-US" sz="2100" dirty="0">
                 <a:solidFill>
                   <a:srgbClr val="17364A"/>
                 </a:solidFill>
@@ -11754,27 +12844,13 @@
               </a:rPr>
               <a:t>Identify use cases that should be pursued, piloted, deferred, redesigned, or rejected.</a:t>
             </a:r>
-            <a:endParaRPr lang="en-US" sz="1700" dirty="0"/>
-          </a:p>
-          <a:p>
-            <a:r>
-              <a:rPr lang="en-US" sz="1700" dirty="0">
-                <a:solidFill>
-                  <a:srgbClr val="17364A"/>
-                </a:solidFill>
-                <a:latin typeface="Aptos" pitchFamily="34" charset="0"/>
-                <a:ea typeface="Aptos" pitchFamily="34" charset="-122"/>
-                <a:cs typeface="Aptos" pitchFamily="34" charset="-120"/>
-              </a:rPr>
-              <a:t>Create a portfolio view that balances innovation, risk, equity, and operational capacity.</a:t>
-            </a:r>
-            <a:endParaRPr lang="en-US" sz="1700" dirty="0"/>
-          </a:p>
-        </p:txBody>
-      </p:sp>
-      <p:sp>
-        <p:nvSpPr>
-          <p:cNvPr id="11" name="Shape 9"/>
+            <a:endParaRPr lang="en-US" sz="2100" dirty="0"/>
+          </a:p>
+        </p:txBody>
+      </p:sp>
+      <p:sp>
+        <p:nvSpPr>
+          <p:cNvPr id="12" name="Shape 10"/>
           <p:cNvSpPr/>
           <p:nvPr/>
         </p:nvSpPr>
@@ -11801,14 +12877,14 @@
       </p:sp>
       <p:sp>
         <p:nvSpPr>
-          <p:cNvPr id="12" name="Text 10"/>
+          <p:cNvPr id="13" name="Text 11"/>
           <p:cNvSpPr/>
           <p:nvPr/>
         </p:nvSpPr>
         <p:spPr>
           <a:xfrm>
             <a:off x="8074152" y="1563624"/>
-            <a:ext cx="2825496" cy="201168"/>
+            <a:ext cx="2825496" cy="256032"/>
           </a:xfrm>
           <a:prstGeom prst="rect">
             <a:avLst/>
@@ -11824,7 +12900,7 @@
               <a:buNone/>
             </a:pPr>
             <a:r>
-              <a:rPr lang="en-US" sz="950" b="1" dirty="0">
+              <a:rPr lang="en-US" sz="1300" b="1" dirty="0">
                 <a:solidFill>
                   <a:srgbClr val="0068B7"/>
                 </a:solidFill>
@@ -11834,20 +12910,20 @@
               </a:rPr>
               <a:t>Key idea</a:t>
             </a:r>
-            <a:endParaRPr lang="en-US" sz="950" dirty="0"/>
-          </a:p>
-        </p:txBody>
-      </p:sp>
-      <p:sp>
-        <p:nvSpPr>
-          <p:cNvPr id="13" name="Text 11"/>
-          <p:cNvSpPr/>
-          <p:nvPr/>
-        </p:nvSpPr>
-        <p:spPr>
-          <a:xfrm>
-            <a:off x="8074152" y="1856232"/>
-            <a:ext cx="2825496" cy="1261872"/>
+            <a:endParaRPr lang="en-US" sz="1300" dirty="0"/>
+          </a:p>
+        </p:txBody>
+      </p:sp>
+      <p:sp>
+        <p:nvSpPr>
+          <p:cNvPr id="14" name="Text 12"/>
+          <p:cNvSpPr/>
+          <p:nvPr/>
+        </p:nvSpPr>
+        <p:spPr>
+          <a:xfrm>
+            <a:off x="8074152" y="1920240"/>
+            <a:ext cx="2825496" cy="1188720"/>
           </a:xfrm>
           <a:prstGeom prst="rect">
             <a:avLst/>
@@ -11865,7 +12941,7 @@
               <a:buNone/>
             </a:pPr>
             <a:r>
-              <a:rPr lang="en-US" sz="1250" dirty="0">
+              <a:rPr lang="en-US" sz="1550" dirty="0">
                 <a:solidFill>
                   <a:srgbClr val="17364A"/>
                 </a:solidFill>
@@ -11875,13 +12951,13 @@
               </a:rPr>
               <a:t>Define the purpose of an AI portfolio strategy for public health agencies.</a:t>
             </a:r>
-            <a:endParaRPr lang="en-US" sz="1250" dirty="0"/>
-          </a:p>
-        </p:txBody>
-      </p:sp>
-      <p:sp>
-        <p:nvSpPr>
-          <p:cNvPr id="14" name="Shape 12"/>
+            <a:endParaRPr lang="en-US" sz="1550" dirty="0"/>
+          </a:p>
+        </p:txBody>
+      </p:sp>
+      <p:sp>
+        <p:nvSpPr>
+          <p:cNvPr id="15" name="Shape 13"/>
           <p:cNvSpPr/>
           <p:nvPr/>
         </p:nvSpPr>
@@ -11908,14 +12984,14 @@
       </p:sp>
       <p:sp>
         <p:nvSpPr>
-          <p:cNvPr id="15" name="Text 13"/>
+          <p:cNvPr id="16" name="Text 14"/>
           <p:cNvSpPr/>
           <p:nvPr/>
         </p:nvSpPr>
         <p:spPr>
           <a:xfrm>
             <a:off x="8074152" y="3666744"/>
-            <a:ext cx="2825496" cy="201168"/>
+            <a:ext cx="2825496" cy="256032"/>
           </a:xfrm>
           <a:prstGeom prst="rect">
             <a:avLst/>
@@ -11931,7 +13007,7 @@
               <a:buNone/>
             </a:pPr>
             <a:r>
-              <a:rPr lang="en-US" sz="950" b="1" dirty="0">
+              <a:rPr lang="en-US" sz="1300" b="1" dirty="0">
                 <a:solidFill>
                   <a:srgbClr val="0068B7"/>
                 </a:solidFill>
@@ -11941,20 +13017,20 @@
               </a:rPr>
               <a:t>Use this for</a:t>
             </a:r>
-            <a:endParaRPr lang="en-US" sz="950" dirty="0"/>
-          </a:p>
-        </p:txBody>
-      </p:sp>
-      <p:sp>
-        <p:nvSpPr>
-          <p:cNvPr id="16" name="Text 14"/>
-          <p:cNvSpPr/>
-          <p:nvPr/>
-        </p:nvSpPr>
-        <p:spPr>
-          <a:xfrm>
-            <a:off x="8074152" y="3959352"/>
-            <a:ext cx="2825496" cy="1170432"/>
+            <a:endParaRPr lang="en-US" sz="1300" dirty="0"/>
+          </a:p>
+        </p:txBody>
+      </p:sp>
+      <p:sp>
+        <p:nvSpPr>
+          <p:cNvPr id="17" name="Text 15"/>
+          <p:cNvSpPr/>
+          <p:nvPr/>
+        </p:nvSpPr>
+        <p:spPr>
+          <a:xfrm>
+            <a:off x="8074152" y="4023360"/>
+            <a:ext cx="2825496" cy="1097280"/>
           </a:xfrm>
           <a:prstGeom prst="rect">
             <a:avLst/>
@@ -11972,7 +13048,7 @@
               <a:buNone/>
             </a:pPr>
             <a:r>
-              <a:rPr lang="en-US" sz="1250" dirty="0">
+              <a:rPr lang="en-US" sz="1550" dirty="0">
                 <a:solidFill>
                   <a:srgbClr val="17364A"/>
                 </a:solidFill>
@@ -11982,7 +13058,7 @@
               </a:rPr>
               <a:t>Connect the concept to public health decisions, safeguards, documentation, or implementation work.</a:t>
             </a:r>
-            <a:endParaRPr lang="en-US" sz="1250" dirty="0"/>
+            <a:endParaRPr lang="en-US" sz="1550" dirty="0"/>
           </a:p>
         </p:txBody>
       </p:sp>
@@ -12179,7 +13255,7 @@
                 <a:ea typeface="Aptos" pitchFamily="34" charset="-122"/>
                 <a:cs typeface="Aptos" pitchFamily="34" charset="-120"/>
               </a:rPr>
-              <a:t>© Paula Soper</a:t>
+              <a:t>Â© Paula Soper</a:t>
             </a:r>
             <a:endParaRPr lang="en-US" sz="800" dirty="0"/>
           </a:p>
@@ -12187,7 +13263,46 @@
       </p:sp>
       <p:sp>
         <p:nvSpPr>
-          <p:cNvPr id="7" name="Shape 5"/>
+          <p:cNvPr id="7" name="Text 5"/>
+          <p:cNvSpPr/>
+          <p:nvPr/>
+        </p:nvSpPr>
+        <p:spPr>
+          <a:xfrm>
+            <a:off x="11137392" y="6510528"/>
+            <a:ext cx="411480" cy="201168"/>
+          </a:xfrm>
+          <a:prstGeom prst="rect">
+            <a:avLst/>
+          </a:prstGeom>
+          <a:noFill/>
+          <a:ln/>
+        </p:spPr>
+        <p:txBody>
+          <a:bodyPr wrap="square" lIns="0" tIns="0" rIns="0" bIns="0" rtlCol="0" anchor="ctr"/>
+          <a:lstStyle/>
+          <a:p>
+            <a:pPr algn="r" indent="0" marL="0">
+              <a:buNone/>
+            </a:pPr>
+            <a:r>
+              <a:rPr lang="en-US" sz="900" dirty="0">
+                <a:solidFill>
+                  <a:srgbClr val="5F7181"/>
+                </a:solidFill>
+                <a:latin typeface="Aptos" pitchFamily="34" charset="0"/>
+                <a:ea typeface="Aptos" pitchFamily="34" charset="-122"/>
+                <a:cs typeface="Aptos" pitchFamily="34" charset="-120"/>
+              </a:rPr>
+              <a:t>6</a:t>
+            </a:r>
+            <a:endParaRPr lang="en-US" sz="900" dirty="0"/>
+          </a:p>
+        </p:txBody>
+      </p:sp>
+      <p:sp>
+        <p:nvSpPr>
+          <p:cNvPr id="8" name="Shape 6"/>
           <p:cNvSpPr/>
           <p:nvPr/>
         </p:nvSpPr>
@@ -12212,7 +13327,7 @@
       </p:sp>
       <p:sp>
         <p:nvSpPr>
-          <p:cNvPr id="8" name="Text 6"/>
+          <p:cNvPr id="9" name="Text 7"/>
           <p:cNvSpPr/>
           <p:nvPr/>
         </p:nvSpPr>
@@ -12251,14 +13366,14 @@
       </p:sp>
       <p:sp>
         <p:nvSpPr>
-          <p:cNvPr id="9" name="Text 7"/>
+          <p:cNvPr id="10" name="Text 8"/>
           <p:cNvSpPr/>
           <p:nvPr/>
         </p:nvSpPr>
         <p:spPr>
           <a:xfrm>
             <a:off x="640080" y="621792"/>
-            <a:ext cx="10881360" cy="566928"/>
+            <a:ext cx="10881360" cy="713232"/>
           </a:xfrm>
           <a:prstGeom prst="rect">
             <a:avLst/>
@@ -12276,7 +13391,7 @@
               <a:buNone/>
             </a:pPr>
             <a:r>
-              <a:rPr lang="en-US" sz="2700" b="1" dirty="0">
+              <a:rPr lang="en-US" sz="3400" b="1" dirty="0">
                 <a:solidFill>
                   <a:srgbClr val="003A63"/>
                 </a:solidFill>
@@ -12286,20 +13401,20 @@
               </a:rPr>
               <a:t>Module Overview</a:t>
             </a:r>
-            <a:endParaRPr lang="en-US" sz="2700" dirty="0"/>
-          </a:p>
-        </p:txBody>
-      </p:sp>
-      <p:sp>
-        <p:nvSpPr>
-          <p:cNvPr id="10" name="Text 8"/>
-          <p:cNvSpPr/>
-          <p:nvPr/>
-        </p:nvSpPr>
-        <p:spPr>
-          <a:xfrm>
-            <a:off x="868680" y="1417320"/>
-            <a:ext cx="6675120" cy="4434840"/>
+            <a:endParaRPr lang="en-US" sz="3400" dirty="0"/>
+          </a:p>
+        </p:txBody>
+      </p:sp>
+      <p:sp>
+        <p:nvSpPr>
+          <p:cNvPr id="11" name="Text 9"/>
+          <p:cNvSpPr/>
+          <p:nvPr/>
+        </p:nvSpPr>
+        <p:spPr>
+          <a:xfrm>
+            <a:off x="868680" y="1508760"/>
+            <a:ext cx="6537960" cy="4160520"/>
           </a:xfrm>
           <a:prstGeom prst="rect">
             <a:avLst/>
@@ -12314,7 +13429,7 @@
           <a:lstStyle/>
           <a:p>
             <a:r>
-              <a:rPr lang="en-US" sz="1700" dirty="0">
+              <a:rPr lang="en-US" sz="2100" dirty="0">
                 <a:solidFill>
                   <a:srgbClr val="17364A"/>
                 </a:solidFill>
@@ -12324,11 +13439,11 @@
               </a:rPr>
               <a:t>AI opportunities can quickly exceed an agency's capacity to evaluate, implement, and sustain them.</a:t>
             </a:r>
-            <a:endParaRPr lang="en-US" sz="1700" dirty="0"/>
-          </a:p>
-          <a:p>
-            <a:r>
-              <a:rPr lang="en-US" sz="1700" dirty="0">
+            <a:endParaRPr lang="en-US" sz="2100" dirty="0"/>
+          </a:p>
+          <a:p>
+            <a:r>
+              <a:rPr lang="en-US" sz="2100" dirty="0">
                 <a:solidFill>
                   <a:srgbClr val="17364A"/>
                 </a:solidFill>
@@ -12336,13 +13451,13 @@
                 <a:ea typeface="Aptos" pitchFamily="34" charset="-122"/>
                 <a:cs typeface="Aptos" pitchFamily="34" charset="-120"/>
               </a:rPr>
-              <a:t>Leaders need a portfolio strategy that helps distinguish high-value public health uses from attractive but low-impact.</a:t>
-            </a:r>
-            <a:endParaRPr lang="en-US" sz="1700" dirty="0"/>
-          </a:p>
-          <a:p>
-            <a:r>
-              <a:rPr lang="en-US" sz="1700" dirty="0">
+              <a:t>Leaders need a portfolio strategy that helps distinguish high-value public health uses from attractive.</a:t>
+            </a:r>
+            <a:endParaRPr lang="en-US" sz="2100" dirty="0"/>
+          </a:p>
+          <a:p>
+            <a:r>
+              <a:rPr lang="en-US" sz="2100" dirty="0">
                 <a:solidFill>
                   <a:srgbClr val="17364A"/>
                 </a:solidFill>
@@ -12350,29 +13465,15 @@
                 <a:ea typeface="Aptos" pitchFamily="34" charset="-122"/>
                 <a:cs typeface="Aptos" pitchFamily="34" charset="-120"/>
               </a:rPr>
-              <a:t>A portfolio approach organizes AI opportunities across programs, risk levels, readiness, equity impact, technical.</a:t>
-            </a:r>
-            <a:endParaRPr lang="en-US" sz="1700" dirty="0"/>
-          </a:p>
-          <a:p>
-            <a:r>
-              <a:rPr lang="en-US" sz="1700" dirty="0">
-                <a:solidFill>
-                  <a:srgbClr val="17364A"/>
-                </a:solidFill>
-                <a:latin typeface="Aptos" pitchFamily="34" charset="0"/>
-                <a:ea typeface="Aptos" pitchFamily="34" charset="-122"/>
-                <a:cs typeface="Aptos" pitchFamily="34" charset="-120"/>
-              </a:rPr>
-              <a:t>This module teaches leaders how to create an AI use case intake and prioritization process.</a:t>
-            </a:r>
-            <a:endParaRPr lang="en-US" sz="1700" dirty="0"/>
-          </a:p>
-        </p:txBody>
-      </p:sp>
-      <p:sp>
-        <p:nvSpPr>
-          <p:cNvPr id="11" name="Shape 9"/>
+              <a:t>A portfolio approach organizes AI opportunities across programs, risk levels, readiness, equity impact,.</a:t>
+            </a:r>
+            <a:endParaRPr lang="en-US" sz="2100" dirty="0"/>
+          </a:p>
+        </p:txBody>
+      </p:sp>
+      <p:sp>
+        <p:nvSpPr>
+          <p:cNvPr id="12" name="Shape 10"/>
           <p:cNvSpPr/>
           <p:nvPr/>
         </p:nvSpPr>
@@ -12399,14 +13500,14 @@
       </p:sp>
       <p:sp>
         <p:nvSpPr>
-          <p:cNvPr id="12" name="Text 10"/>
+          <p:cNvPr id="13" name="Text 11"/>
           <p:cNvSpPr/>
           <p:nvPr/>
         </p:nvSpPr>
         <p:spPr>
           <a:xfrm>
             <a:off x="8074152" y="1563624"/>
-            <a:ext cx="2825496" cy="201168"/>
+            <a:ext cx="2825496" cy="256032"/>
           </a:xfrm>
           <a:prstGeom prst="rect">
             <a:avLst/>
@@ -12422,7 +13523,7 @@
               <a:buNone/>
             </a:pPr>
             <a:r>
-              <a:rPr lang="en-US" sz="950" b="1" dirty="0">
+              <a:rPr lang="en-US" sz="1300" b="1" dirty="0">
                 <a:solidFill>
                   <a:srgbClr val="0068B7"/>
                 </a:solidFill>
@@ -12432,20 +13533,20 @@
               </a:rPr>
               <a:t>Key idea</a:t>
             </a:r>
-            <a:endParaRPr lang="en-US" sz="950" dirty="0"/>
-          </a:p>
-        </p:txBody>
-      </p:sp>
-      <p:sp>
-        <p:nvSpPr>
-          <p:cNvPr id="13" name="Text 11"/>
-          <p:cNvSpPr/>
-          <p:nvPr/>
-        </p:nvSpPr>
-        <p:spPr>
-          <a:xfrm>
-            <a:off x="8074152" y="1856232"/>
-            <a:ext cx="2825496" cy="1261872"/>
+            <a:endParaRPr lang="en-US" sz="1300" dirty="0"/>
+          </a:p>
+        </p:txBody>
+      </p:sp>
+      <p:sp>
+        <p:nvSpPr>
+          <p:cNvPr id="14" name="Text 12"/>
+          <p:cNvSpPr/>
+          <p:nvPr/>
+        </p:nvSpPr>
+        <p:spPr>
+          <a:xfrm>
+            <a:off x="8074152" y="1920240"/>
+            <a:ext cx="2825496" cy="1188720"/>
           </a:xfrm>
           <a:prstGeom prst="rect">
             <a:avLst/>
@@ -12463,7 +13564,7 @@
               <a:buNone/>
             </a:pPr>
             <a:r>
-              <a:rPr lang="en-US" sz="1250" dirty="0">
+              <a:rPr lang="en-US" sz="1550" dirty="0">
                 <a:solidFill>
                   <a:srgbClr val="17364A"/>
                 </a:solidFill>
@@ -12473,13 +13574,13 @@
               </a:rPr>
               <a:t>AI opportunities can quickly exceed an agency's capacity to evaluate, implement, and sustain them.</a:t>
             </a:r>
-            <a:endParaRPr lang="en-US" sz="1250" dirty="0"/>
-          </a:p>
-        </p:txBody>
-      </p:sp>
-      <p:sp>
-        <p:nvSpPr>
-          <p:cNvPr id="14" name="Shape 12"/>
+            <a:endParaRPr lang="en-US" sz="1550" dirty="0"/>
+          </a:p>
+        </p:txBody>
+      </p:sp>
+      <p:sp>
+        <p:nvSpPr>
+          <p:cNvPr id="15" name="Shape 13"/>
           <p:cNvSpPr/>
           <p:nvPr/>
         </p:nvSpPr>
@@ -12506,14 +13607,14 @@
       </p:sp>
       <p:sp>
         <p:nvSpPr>
-          <p:cNvPr id="15" name="Text 13"/>
+          <p:cNvPr id="16" name="Text 14"/>
           <p:cNvSpPr/>
           <p:nvPr/>
         </p:nvSpPr>
         <p:spPr>
           <a:xfrm>
             <a:off x="8074152" y="3666744"/>
-            <a:ext cx="2825496" cy="201168"/>
+            <a:ext cx="2825496" cy="256032"/>
           </a:xfrm>
           <a:prstGeom prst="rect">
             <a:avLst/>
@@ -12529,7 +13630,7 @@
               <a:buNone/>
             </a:pPr>
             <a:r>
-              <a:rPr lang="en-US" sz="950" b="1" dirty="0">
+              <a:rPr lang="en-US" sz="1300" b="1" dirty="0">
                 <a:solidFill>
                   <a:srgbClr val="0068B7"/>
                 </a:solidFill>
@@ -12539,20 +13640,20 @@
               </a:rPr>
               <a:t>Use this for</a:t>
             </a:r>
-            <a:endParaRPr lang="en-US" sz="950" dirty="0"/>
-          </a:p>
-        </p:txBody>
-      </p:sp>
-      <p:sp>
-        <p:nvSpPr>
-          <p:cNvPr id="16" name="Text 14"/>
-          <p:cNvSpPr/>
-          <p:nvPr/>
-        </p:nvSpPr>
-        <p:spPr>
-          <a:xfrm>
-            <a:off x="8074152" y="3959352"/>
-            <a:ext cx="2825496" cy="1170432"/>
+            <a:endParaRPr lang="en-US" sz="1300" dirty="0"/>
+          </a:p>
+        </p:txBody>
+      </p:sp>
+      <p:sp>
+        <p:nvSpPr>
+          <p:cNvPr id="17" name="Text 15"/>
+          <p:cNvSpPr/>
+          <p:nvPr/>
+        </p:nvSpPr>
+        <p:spPr>
+          <a:xfrm>
+            <a:off x="8074152" y="4023360"/>
+            <a:ext cx="2825496" cy="1097280"/>
           </a:xfrm>
           <a:prstGeom prst="rect">
             <a:avLst/>
@@ -12570,7 +13671,7 @@
               <a:buNone/>
             </a:pPr>
             <a:r>
-              <a:rPr lang="en-US" sz="1250" dirty="0">
+              <a:rPr lang="en-US" sz="1550" dirty="0">
                 <a:solidFill>
                   <a:srgbClr val="17364A"/>
                 </a:solidFill>
@@ -12580,7 +13681,7 @@
               </a:rPr>
               <a:t>Connect the concept to public health decisions, safeguards, documentation, or implementation work.</a:t>
             </a:r>
-            <a:endParaRPr lang="en-US" sz="1250" dirty="0"/>
+            <a:endParaRPr lang="en-US" sz="1550" dirty="0"/>
           </a:p>
         </p:txBody>
       </p:sp>
@@ -12777,7 +13878,7 @@
                 <a:ea typeface="Aptos" pitchFamily="34" charset="-122"/>
                 <a:cs typeface="Aptos" pitchFamily="34" charset="-120"/>
               </a:rPr>
-              <a:t>© Paula Soper</a:t>
+              <a:t>Â© Paula Soper</a:t>
             </a:r>
             <a:endParaRPr lang="en-US" sz="800" dirty="0"/>
           </a:p>
@@ -12785,7 +13886,46 @@
       </p:sp>
       <p:sp>
         <p:nvSpPr>
-          <p:cNvPr id="7" name="Shape 5"/>
+          <p:cNvPr id="7" name="Text 5"/>
+          <p:cNvSpPr/>
+          <p:nvPr/>
+        </p:nvSpPr>
+        <p:spPr>
+          <a:xfrm>
+            <a:off x="11137392" y="6510528"/>
+            <a:ext cx="411480" cy="201168"/>
+          </a:xfrm>
+          <a:prstGeom prst="rect">
+            <a:avLst/>
+          </a:prstGeom>
+          <a:noFill/>
+          <a:ln/>
+        </p:spPr>
+        <p:txBody>
+          <a:bodyPr wrap="square" lIns="0" tIns="0" rIns="0" bIns="0" rtlCol="0" anchor="ctr"/>
+          <a:lstStyle/>
+          <a:p>
+            <a:pPr algn="r" indent="0" marL="0">
+              <a:buNone/>
+            </a:pPr>
+            <a:r>
+              <a:rPr lang="en-US" sz="900" dirty="0">
+                <a:solidFill>
+                  <a:srgbClr val="5F7181"/>
+                </a:solidFill>
+                <a:latin typeface="Aptos" pitchFamily="34" charset="0"/>
+                <a:ea typeface="Aptos" pitchFamily="34" charset="-122"/>
+                <a:cs typeface="Aptos" pitchFamily="34" charset="-120"/>
+              </a:rPr>
+              <a:t>7</a:t>
+            </a:r>
+            <a:endParaRPr lang="en-US" sz="900" dirty="0"/>
+          </a:p>
+        </p:txBody>
+      </p:sp>
+      <p:sp>
+        <p:nvSpPr>
+          <p:cNvPr id="8" name="Shape 6"/>
           <p:cNvSpPr/>
           <p:nvPr/>
         </p:nvSpPr>
@@ -12810,7 +13950,7 @@
       </p:sp>
       <p:sp>
         <p:nvSpPr>
-          <p:cNvPr id="8" name="Text 6"/>
+          <p:cNvPr id="9" name="Text 7"/>
           <p:cNvSpPr/>
           <p:nvPr/>
         </p:nvSpPr>
@@ -12849,14 +13989,14 @@
       </p:sp>
       <p:sp>
         <p:nvSpPr>
-          <p:cNvPr id="9" name="Text 7"/>
+          <p:cNvPr id="10" name="Text 8"/>
           <p:cNvSpPr/>
           <p:nvPr/>
         </p:nvSpPr>
         <p:spPr>
           <a:xfrm>
             <a:off x="640080" y="621792"/>
-            <a:ext cx="10881360" cy="566928"/>
+            <a:ext cx="10881360" cy="713232"/>
           </a:xfrm>
           <a:prstGeom prst="rect">
             <a:avLst/>
@@ -12874,7 +14014,7 @@
               <a:buNone/>
             </a:pPr>
             <a:r>
-              <a:rPr lang="en-US" sz="2700" b="1" dirty="0">
+              <a:rPr lang="en-US" sz="3400" b="1" dirty="0">
                 <a:solidFill>
                   <a:srgbClr val="003A63"/>
                 </a:solidFill>
@@ -12884,20 +14024,20 @@
               </a:rPr>
               <a:t>Jurisdiction and Agency Policy Note</a:t>
             </a:r>
-            <a:endParaRPr lang="en-US" sz="2700" dirty="0"/>
-          </a:p>
-        </p:txBody>
-      </p:sp>
-      <p:sp>
-        <p:nvSpPr>
-          <p:cNvPr id="10" name="Text 8"/>
-          <p:cNvSpPr/>
-          <p:nvPr/>
-        </p:nvSpPr>
-        <p:spPr>
-          <a:xfrm>
-            <a:off x="868680" y="1417320"/>
-            <a:ext cx="6675120" cy="4434840"/>
+            <a:endParaRPr lang="en-US" sz="3400" dirty="0"/>
+          </a:p>
+        </p:txBody>
+      </p:sp>
+      <p:sp>
+        <p:nvSpPr>
+          <p:cNvPr id="11" name="Text 9"/>
+          <p:cNvSpPr/>
+          <p:nvPr/>
+        </p:nvSpPr>
+        <p:spPr>
+          <a:xfrm>
+            <a:off x="868680" y="1508760"/>
+            <a:ext cx="6537960" cy="4160520"/>
           </a:xfrm>
           <a:prstGeom prst="rect">
             <a:avLst/>
@@ -12912,7 +14052,7 @@
           <a:lstStyle/>
           <a:p>
             <a:r>
-              <a:rPr lang="en-US" sz="1700" dirty="0">
+              <a:rPr lang="en-US" sz="2100" dirty="0">
                 <a:solidFill>
                   <a:srgbClr val="17364A"/>
                 </a:solidFill>
@@ -12922,11 +14062,11 @@
               </a:rPr>
               <a:t>This national-level module is intended for training and planning purposes.</a:t>
             </a:r>
-            <a:endParaRPr lang="en-US" sz="1700" dirty="0"/>
-          </a:p>
-          <a:p>
-            <a:r>
-              <a:rPr lang="en-US" sz="1700" dirty="0">
+            <a:endParaRPr lang="en-US" sz="2100" dirty="0"/>
+          </a:p>
+          <a:p>
+            <a:r>
+              <a:rPr lang="en-US" sz="2100" dirty="0">
                 <a:solidFill>
                   <a:srgbClr val="17364A"/>
                 </a:solidFill>
@@ -12936,11 +14076,11 @@
               </a:rPr>
               <a:t>It does not replace legal, privacy, procurement, civil rights, records, or agency policy review.</a:t>
             </a:r>
-            <a:endParaRPr lang="en-US" sz="1700" dirty="0"/>
-          </a:p>
-          <a:p>
-            <a:r>
-              <a:rPr lang="en-US" sz="1700" dirty="0">
+            <a:endParaRPr lang="en-US" sz="2100" dirty="0"/>
+          </a:p>
+          <a:p>
+            <a:r>
+              <a:rPr lang="en-US" sz="2100" dirty="0">
                 <a:solidFill>
                   <a:srgbClr val="17364A"/>
                 </a:solidFill>
@@ -12948,15 +14088,15 @@
                 <a:ea typeface="Aptos" pitchFamily="34" charset="-122"/>
                 <a:cs typeface="Aptos" pitchFamily="34" charset="-120"/>
               </a:rPr>
-              <a:t>Learners should confirm applicable requirements in their own jurisdiction and organization before implementing AI-supported.</a:t>
-            </a:r>
-            <a:endParaRPr lang="en-US" sz="1700" dirty="0"/>
-          </a:p>
-        </p:txBody>
-      </p:sp>
-      <p:sp>
-        <p:nvSpPr>
-          <p:cNvPr id="11" name="Shape 9"/>
+              <a:t>Learners should confirm applicable requirements in their own jurisdiction and organization before.</a:t>
+            </a:r>
+            <a:endParaRPr lang="en-US" sz="2100" dirty="0"/>
+          </a:p>
+        </p:txBody>
+      </p:sp>
+      <p:sp>
+        <p:nvSpPr>
+          <p:cNvPr id="12" name="Shape 10"/>
           <p:cNvSpPr/>
           <p:nvPr/>
         </p:nvSpPr>
@@ -12983,14 +14123,14 @@
       </p:sp>
       <p:sp>
         <p:nvSpPr>
-          <p:cNvPr id="12" name="Text 10"/>
+          <p:cNvPr id="13" name="Text 11"/>
           <p:cNvSpPr/>
           <p:nvPr/>
         </p:nvSpPr>
         <p:spPr>
           <a:xfrm>
             <a:off x="8074152" y="1563624"/>
-            <a:ext cx="2825496" cy="201168"/>
+            <a:ext cx="2825496" cy="256032"/>
           </a:xfrm>
           <a:prstGeom prst="rect">
             <a:avLst/>
@@ -13006,7 +14146,7 @@
               <a:buNone/>
             </a:pPr>
             <a:r>
-              <a:rPr lang="en-US" sz="950" b="1" dirty="0">
+              <a:rPr lang="en-US" sz="1300" b="1" dirty="0">
                 <a:solidFill>
                   <a:srgbClr val="0068B7"/>
                 </a:solidFill>
@@ -13016,20 +14156,20 @@
               </a:rPr>
               <a:t>Key idea</a:t>
             </a:r>
-            <a:endParaRPr lang="en-US" sz="950" dirty="0"/>
-          </a:p>
-        </p:txBody>
-      </p:sp>
-      <p:sp>
-        <p:nvSpPr>
-          <p:cNvPr id="13" name="Text 11"/>
-          <p:cNvSpPr/>
-          <p:nvPr/>
-        </p:nvSpPr>
-        <p:spPr>
-          <a:xfrm>
-            <a:off x="8074152" y="1856232"/>
-            <a:ext cx="2825496" cy="1261872"/>
+            <a:endParaRPr lang="en-US" sz="1300" dirty="0"/>
+          </a:p>
+        </p:txBody>
+      </p:sp>
+      <p:sp>
+        <p:nvSpPr>
+          <p:cNvPr id="14" name="Text 12"/>
+          <p:cNvSpPr/>
+          <p:nvPr/>
+        </p:nvSpPr>
+        <p:spPr>
+          <a:xfrm>
+            <a:off x="8074152" y="1920240"/>
+            <a:ext cx="2825496" cy="1188720"/>
           </a:xfrm>
           <a:prstGeom prst="rect">
             <a:avLst/>
@@ -13047,7 +14187,7 @@
               <a:buNone/>
             </a:pPr>
             <a:r>
-              <a:rPr lang="en-US" sz="1250" dirty="0">
+              <a:rPr lang="en-US" sz="1550" dirty="0">
                 <a:solidFill>
                   <a:srgbClr val="17364A"/>
                 </a:solidFill>
@@ -13057,13 +14197,13 @@
               </a:rPr>
               <a:t>This national-level module is intended for training and planning purposes.</a:t>
             </a:r>
-            <a:endParaRPr lang="en-US" sz="1250" dirty="0"/>
-          </a:p>
-        </p:txBody>
-      </p:sp>
-      <p:sp>
-        <p:nvSpPr>
-          <p:cNvPr id="14" name="Shape 12"/>
+            <a:endParaRPr lang="en-US" sz="1550" dirty="0"/>
+          </a:p>
+        </p:txBody>
+      </p:sp>
+      <p:sp>
+        <p:nvSpPr>
+          <p:cNvPr id="15" name="Shape 13"/>
           <p:cNvSpPr/>
           <p:nvPr/>
         </p:nvSpPr>
@@ -13090,14 +14230,14 @@
       </p:sp>
       <p:sp>
         <p:nvSpPr>
-          <p:cNvPr id="15" name="Text 13"/>
+          <p:cNvPr id="16" name="Text 14"/>
           <p:cNvSpPr/>
           <p:nvPr/>
         </p:nvSpPr>
         <p:spPr>
           <a:xfrm>
             <a:off x="8074152" y="3666744"/>
-            <a:ext cx="2825496" cy="201168"/>
+            <a:ext cx="2825496" cy="256032"/>
           </a:xfrm>
           <a:prstGeom prst="rect">
             <a:avLst/>
@@ -13113,7 +14253,7 @@
               <a:buNone/>
             </a:pPr>
             <a:r>
-              <a:rPr lang="en-US" sz="950" b="1" dirty="0">
+              <a:rPr lang="en-US" sz="1300" b="1" dirty="0">
                 <a:solidFill>
                   <a:srgbClr val="0068B7"/>
                 </a:solidFill>
@@ -13123,20 +14263,20 @@
               </a:rPr>
               <a:t>Use this for</a:t>
             </a:r>
-            <a:endParaRPr lang="en-US" sz="950" dirty="0"/>
-          </a:p>
-        </p:txBody>
-      </p:sp>
-      <p:sp>
-        <p:nvSpPr>
-          <p:cNvPr id="16" name="Text 14"/>
-          <p:cNvSpPr/>
-          <p:nvPr/>
-        </p:nvSpPr>
-        <p:spPr>
-          <a:xfrm>
-            <a:off x="8074152" y="3959352"/>
-            <a:ext cx="2825496" cy="1170432"/>
+            <a:endParaRPr lang="en-US" sz="1300" dirty="0"/>
+          </a:p>
+        </p:txBody>
+      </p:sp>
+      <p:sp>
+        <p:nvSpPr>
+          <p:cNvPr id="17" name="Text 15"/>
+          <p:cNvSpPr/>
+          <p:nvPr/>
+        </p:nvSpPr>
+        <p:spPr>
+          <a:xfrm>
+            <a:off x="8074152" y="4023360"/>
+            <a:ext cx="2825496" cy="1097280"/>
           </a:xfrm>
           <a:prstGeom prst="rect">
             <a:avLst/>
@@ -13154,7 +14294,7 @@
               <a:buNone/>
             </a:pPr>
             <a:r>
-              <a:rPr lang="en-US" sz="1250" dirty="0">
+              <a:rPr lang="en-US" sz="1550" dirty="0">
                 <a:solidFill>
                   <a:srgbClr val="17364A"/>
                 </a:solidFill>
@@ -13164,7 +14304,7 @@
               </a:rPr>
               <a:t>Connect the concept to public health decisions, safeguards, documentation, or implementation work.</a:t>
             </a:r>
-            <a:endParaRPr lang="en-US" sz="1250" dirty="0"/>
+            <a:endParaRPr lang="en-US" sz="1550" dirty="0"/>
           </a:p>
         </p:txBody>
       </p:sp>
@@ -13361,7 +14501,7 @@
                 <a:ea typeface="Aptos" pitchFamily="34" charset="-122"/>
                 <a:cs typeface="Aptos" pitchFamily="34" charset="-120"/>
               </a:rPr>
-              <a:t>© Paula Soper</a:t>
+              <a:t>Â© Paula Soper</a:t>
             </a:r>
             <a:endParaRPr lang="en-US" sz="800" dirty="0"/>
           </a:p>
@@ -13369,7 +14509,46 @@
       </p:sp>
       <p:sp>
         <p:nvSpPr>
-          <p:cNvPr id="7" name="Shape 5"/>
+          <p:cNvPr id="7" name="Text 5"/>
+          <p:cNvSpPr/>
+          <p:nvPr/>
+        </p:nvSpPr>
+        <p:spPr>
+          <a:xfrm>
+            <a:off x="11137392" y="6510528"/>
+            <a:ext cx="411480" cy="201168"/>
+          </a:xfrm>
+          <a:prstGeom prst="rect">
+            <a:avLst/>
+          </a:prstGeom>
+          <a:noFill/>
+          <a:ln/>
+        </p:spPr>
+        <p:txBody>
+          <a:bodyPr wrap="square" lIns="0" tIns="0" rIns="0" bIns="0" rtlCol="0" anchor="ctr"/>
+          <a:lstStyle/>
+          <a:p>
+            <a:pPr algn="r" indent="0" marL="0">
+              <a:buNone/>
+            </a:pPr>
+            <a:r>
+              <a:rPr lang="en-US" sz="900" dirty="0">
+                <a:solidFill>
+                  <a:srgbClr val="5F7181"/>
+                </a:solidFill>
+                <a:latin typeface="Aptos" pitchFamily="34" charset="0"/>
+                <a:ea typeface="Aptos" pitchFamily="34" charset="-122"/>
+                <a:cs typeface="Aptos" pitchFamily="34" charset="-120"/>
+              </a:rPr>
+              <a:t>8</a:t>
+            </a:r>
+            <a:endParaRPr lang="en-US" sz="900" dirty="0"/>
+          </a:p>
+        </p:txBody>
+      </p:sp>
+      <p:sp>
+        <p:nvSpPr>
+          <p:cNvPr id="8" name="Shape 6"/>
           <p:cNvSpPr/>
           <p:nvPr/>
         </p:nvSpPr>
@@ -13394,7 +14573,7 @@
       </p:sp>
       <p:sp>
         <p:nvSpPr>
-          <p:cNvPr id="8" name="Text 6"/>
+          <p:cNvPr id="9" name="Text 7"/>
           <p:cNvSpPr/>
           <p:nvPr/>
         </p:nvSpPr>
@@ -13433,14 +14612,14 @@
       </p:sp>
       <p:sp>
         <p:nvSpPr>
-          <p:cNvPr id="9" name="Text 7"/>
+          <p:cNvPr id="10" name="Text 8"/>
           <p:cNvSpPr/>
           <p:nvPr/>
         </p:nvSpPr>
         <p:spPr>
           <a:xfrm>
             <a:off x="640080" y="621792"/>
-            <a:ext cx="10881360" cy="566928"/>
+            <a:ext cx="10881360" cy="713232"/>
           </a:xfrm>
           <a:prstGeom prst="rect">
             <a:avLst/>
@@ -13458,7 +14637,7 @@
               <a:buNone/>
             </a:pPr>
             <a:r>
-              <a:rPr lang="en-US" sz="2700" b="1" dirty="0">
+              <a:rPr lang="en-US" sz="3400" b="1" dirty="0">
                 <a:solidFill>
                   <a:srgbClr val="003A63"/>
                 </a:solidFill>
@@ -13468,20 +14647,20 @@
               </a:rPr>
               <a:t>Why This Topic Matters for Public Health AI</a:t>
             </a:r>
-            <a:endParaRPr lang="en-US" sz="2700" dirty="0"/>
-          </a:p>
-        </p:txBody>
-      </p:sp>
-      <p:sp>
-        <p:nvSpPr>
-          <p:cNvPr id="10" name="Text 8"/>
-          <p:cNvSpPr/>
-          <p:nvPr/>
-        </p:nvSpPr>
-        <p:spPr>
-          <a:xfrm>
-            <a:off x="868680" y="1417320"/>
-            <a:ext cx="6675120" cy="4434840"/>
+            <a:endParaRPr lang="en-US" sz="3400" dirty="0"/>
+          </a:p>
+        </p:txBody>
+      </p:sp>
+      <p:sp>
+        <p:nvSpPr>
+          <p:cNvPr id="11" name="Text 9"/>
+          <p:cNvSpPr/>
+          <p:nvPr/>
+        </p:nvSpPr>
+        <p:spPr>
+          <a:xfrm>
+            <a:off x="868680" y="1508760"/>
+            <a:ext cx="6537960" cy="4160520"/>
           </a:xfrm>
           <a:prstGeom prst="rect">
             <a:avLst/>
@@ -13496,7 +14675,7 @@
           <a:lstStyle/>
           <a:p>
             <a:r>
-              <a:rPr lang="en-US" sz="1700" dirty="0">
+              <a:rPr lang="en-US" sz="2100" dirty="0">
                 <a:solidFill>
                   <a:srgbClr val="17364A"/>
                 </a:solidFill>
@@ -13504,13 +14683,13 @@
                 <a:ea typeface="Aptos" pitchFamily="34" charset="-122"/>
                 <a:cs typeface="Aptos" pitchFamily="34" charset="-120"/>
               </a:rPr>
-              <a:t>Public health agencies have many possible AI use cases: summarizing case notes, analyzing call logs, drafting messages,.</a:t>
-            </a:r>
-            <a:endParaRPr lang="en-US" sz="1700" dirty="0"/>
-          </a:p>
-          <a:p>
-            <a:r>
-              <a:rPr lang="en-US" sz="1700" dirty="0">
+              <a:t>Public health agencies have many possible AI use cases: summarizing case notes, analyzing call logs,.</a:t>
+            </a:r>
+            <a:endParaRPr lang="en-US" sz="2100" dirty="0"/>
+          </a:p>
+          <a:p>
+            <a:r>
+              <a:rPr lang="en-US" sz="2100" dirty="0">
                 <a:solidFill>
                   <a:srgbClr val="17364A"/>
                 </a:solidFill>
@@ -13518,13 +14697,13 @@
                 <a:ea typeface="Aptos" pitchFamily="34" charset="-122"/>
                 <a:cs typeface="Aptos" pitchFamily="34" charset="-120"/>
               </a:rPr>
-              <a:t>Without a portfolio strategy, agencies may choose projects because they are visible, easy to demonstrate, or championed by.</a:t>
-            </a:r>
-            <a:endParaRPr lang="en-US" sz="1700" dirty="0"/>
-          </a:p>
-          <a:p>
-            <a:r>
-              <a:rPr lang="en-US" sz="1700" dirty="0">
+              <a:t>Without a portfolio strategy, agencies may choose projects because they are visible, easy to.</a:t>
+            </a:r>
+            <a:endParaRPr lang="en-US" sz="2100" dirty="0"/>
+          </a:p>
+          <a:p>
+            <a:r>
+              <a:rPr lang="en-US" sz="2100" dirty="0">
                 <a:solidFill>
                   <a:srgbClr val="17364A"/>
                 </a:solidFill>
@@ -13534,27 +14713,13 @@
               </a:rPr>
               <a:t>A portfolio strategy protects scarce capacity.</a:t>
             </a:r>
-            <a:endParaRPr lang="en-US" sz="1700" dirty="0"/>
-          </a:p>
-          <a:p>
-            <a:r>
-              <a:rPr lang="en-US" sz="1700" dirty="0">
-                <a:solidFill>
-                  <a:srgbClr val="17364A"/>
-                </a:solidFill>
-                <a:latin typeface="Aptos" pitchFamily="34" charset="0"/>
-                <a:ea typeface="Aptos" pitchFamily="34" charset="-122"/>
-                <a:cs typeface="Aptos" pitchFamily="34" charset="-120"/>
-              </a:rPr>
-              <a:t>Technical teams, privacy officers, legal counsel, procurement staff, program leaders, and data stewards cannot review every.</a:t>
-            </a:r>
-            <a:endParaRPr lang="en-US" sz="1700" dirty="0"/>
-          </a:p>
-        </p:txBody>
-      </p:sp>
-      <p:sp>
-        <p:nvSpPr>
-          <p:cNvPr id="11" name="Shape 9"/>
+            <a:endParaRPr lang="en-US" sz="2100" dirty="0"/>
+          </a:p>
+        </p:txBody>
+      </p:sp>
+      <p:sp>
+        <p:nvSpPr>
+          <p:cNvPr id="12" name="Shape 10"/>
           <p:cNvSpPr/>
           <p:nvPr/>
         </p:nvSpPr>
@@ -13581,14 +14746,14 @@
       </p:sp>
       <p:sp>
         <p:nvSpPr>
-          <p:cNvPr id="12" name="Text 10"/>
+          <p:cNvPr id="13" name="Text 11"/>
           <p:cNvSpPr/>
           <p:nvPr/>
         </p:nvSpPr>
         <p:spPr>
           <a:xfrm>
             <a:off x="8074152" y="1563624"/>
-            <a:ext cx="2825496" cy="201168"/>
+            <a:ext cx="2825496" cy="256032"/>
           </a:xfrm>
           <a:prstGeom prst="rect">
             <a:avLst/>
@@ -13604,7 +14769,7 @@
               <a:buNone/>
             </a:pPr>
             <a:r>
-              <a:rPr lang="en-US" sz="950" b="1" dirty="0">
+              <a:rPr lang="en-US" sz="1300" b="1" dirty="0">
                 <a:solidFill>
                   <a:srgbClr val="0068B7"/>
                 </a:solidFill>
@@ -13614,20 +14779,20 @@
               </a:rPr>
               <a:t>Key idea</a:t>
             </a:r>
-            <a:endParaRPr lang="en-US" sz="950" dirty="0"/>
-          </a:p>
-        </p:txBody>
-      </p:sp>
-      <p:sp>
-        <p:nvSpPr>
-          <p:cNvPr id="13" name="Text 11"/>
-          <p:cNvSpPr/>
-          <p:nvPr/>
-        </p:nvSpPr>
-        <p:spPr>
-          <a:xfrm>
-            <a:off x="8074152" y="1856232"/>
-            <a:ext cx="2825496" cy="1261872"/>
+            <a:endParaRPr lang="en-US" sz="1300" dirty="0"/>
+          </a:p>
+        </p:txBody>
+      </p:sp>
+      <p:sp>
+        <p:nvSpPr>
+          <p:cNvPr id="14" name="Text 12"/>
+          <p:cNvSpPr/>
+          <p:nvPr/>
+        </p:nvSpPr>
+        <p:spPr>
+          <a:xfrm>
+            <a:off x="8074152" y="1920240"/>
+            <a:ext cx="2825496" cy="1188720"/>
           </a:xfrm>
           <a:prstGeom prst="rect">
             <a:avLst/>
@@ -13645,7 +14810,7 @@
               <a:buNone/>
             </a:pPr>
             <a:r>
-              <a:rPr lang="en-US" sz="1250" dirty="0">
+              <a:rPr lang="en-US" sz="1550" dirty="0">
                 <a:solidFill>
                   <a:srgbClr val="17364A"/>
                 </a:solidFill>
@@ -13653,15 +14818,15 @@
                 <a:ea typeface="Aptos" pitchFamily="34" charset="-122"/>
                 <a:cs typeface="Aptos" pitchFamily="34" charset="-120"/>
               </a:rPr>
-              <a:t>Public health agencies have many possible AI use cases: summarizing case notes, analyzing call logs, drafting messages,.</a:t>
-            </a:r>
-            <a:endParaRPr lang="en-US" sz="1250" dirty="0"/>
-          </a:p>
-        </p:txBody>
-      </p:sp>
-      <p:sp>
-        <p:nvSpPr>
-          <p:cNvPr id="14" name="Shape 12"/>
+              <a:t>Public health agencies have many possible AI use cases: summarizing case notes, analyzing call logs,.</a:t>
+            </a:r>
+            <a:endParaRPr lang="en-US" sz="1550" dirty="0"/>
+          </a:p>
+        </p:txBody>
+      </p:sp>
+      <p:sp>
+        <p:nvSpPr>
+          <p:cNvPr id="15" name="Shape 13"/>
           <p:cNvSpPr/>
           <p:nvPr/>
         </p:nvSpPr>
@@ -13688,14 +14853,14 @@
       </p:sp>
       <p:sp>
         <p:nvSpPr>
-          <p:cNvPr id="15" name="Text 13"/>
+          <p:cNvPr id="16" name="Text 14"/>
           <p:cNvSpPr/>
           <p:nvPr/>
         </p:nvSpPr>
         <p:spPr>
           <a:xfrm>
             <a:off x="8074152" y="3666744"/>
-            <a:ext cx="2825496" cy="201168"/>
+            <a:ext cx="2825496" cy="256032"/>
           </a:xfrm>
           <a:prstGeom prst="rect">
             <a:avLst/>
@@ -13711,7 +14876,7 @@
               <a:buNone/>
             </a:pPr>
             <a:r>
-              <a:rPr lang="en-US" sz="950" b="1" dirty="0">
+              <a:rPr lang="en-US" sz="1300" b="1" dirty="0">
                 <a:solidFill>
                   <a:srgbClr val="0068B7"/>
                 </a:solidFill>
@@ -13721,20 +14886,20 @@
               </a:rPr>
               <a:t>Use this for</a:t>
             </a:r>
-            <a:endParaRPr lang="en-US" sz="950" dirty="0"/>
-          </a:p>
-        </p:txBody>
-      </p:sp>
-      <p:sp>
-        <p:nvSpPr>
-          <p:cNvPr id="16" name="Text 14"/>
-          <p:cNvSpPr/>
-          <p:nvPr/>
-        </p:nvSpPr>
-        <p:spPr>
-          <a:xfrm>
-            <a:off x="8074152" y="3959352"/>
-            <a:ext cx="2825496" cy="1170432"/>
+            <a:endParaRPr lang="en-US" sz="1300" dirty="0"/>
+          </a:p>
+        </p:txBody>
+      </p:sp>
+      <p:sp>
+        <p:nvSpPr>
+          <p:cNvPr id="17" name="Text 15"/>
+          <p:cNvSpPr/>
+          <p:nvPr/>
+        </p:nvSpPr>
+        <p:spPr>
+          <a:xfrm>
+            <a:off x="8074152" y="4023360"/>
+            <a:ext cx="2825496" cy="1097280"/>
           </a:xfrm>
           <a:prstGeom prst="rect">
             <a:avLst/>
@@ -13752,7 +14917,7 @@
               <a:buNone/>
             </a:pPr>
             <a:r>
-              <a:rPr lang="en-US" sz="1250" dirty="0">
+              <a:rPr lang="en-US" sz="1550" dirty="0">
                 <a:solidFill>
                   <a:srgbClr val="17364A"/>
                 </a:solidFill>
@@ -13762,7 +14927,7 @@
               </a:rPr>
               <a:t>Connect the concept to public health decisions, safeguards, documentation, or implementation work.</a:t>
             </a:r>
-            <a:endParaRPr lang="en-US" sz="1250" dirty="0"/>
+            <a:endParaRPr lang="en-US" sz="1550" dirty="0"/>
           </a:p>
         </p:txBody>
       </p:sp>
@@ -13959,7 +15124,7 @@
                 <a:ea typeface="Aptos" pitchFamily="34" charset="-122"/>
                 <a:cs typeface="Aptos" pitchFamily="34" charset="-120"/>
               </a:rPr>
-              <a:t>© Paula Soper</a:t>
+              <a:t>Â© Paula Soper</a:t>
             </a:r>
             <a:endParaRPr lang="en-US" sz="800" dirty="0"/>
           </a:p>
@@ -13967,7 +15132,46 @@
       </p:sp>
       <p:sp>
         <p:nvSpPr>
-          <p:cNvPr id="7" name="Shape 5"/>
+          <p:cNvPr id="7" name="Text 5"/>
+          <p:cNvSpPr/>
+          <p:nvPr/>
+        </p:nvSpPr>
+        <p:spPr>
+          <a:xfrm>
+            <a:off x="11137392" y="6510528"/>
+            <a:ext cx="411480" cy="201168"/>
+          </a:xfrm>
+          <a:prstGeom prst="rect">
+            <a:avLst/>
+          </a:prstGeom>
+          <a:noFill/>
+          <a:ln/>
+        </p:spPr>
+        <p:txBody>
+          <a:bodyPr wrap="square" lIns="0" tIns="0" rIns="0" bIns="0" rtlCol="0" anchor="ctr"/>
+          <a:lstStyle/>
+          <a:p>
+            <a:pPr algn="r" indent="0" marL="0">
+              <a:buNone/>
+            </a:pPr>
+            <a:r>
+              <a:rPr lang="en-US" sz="900" dirty="0">
+                <a:solidFill>
+                  <a:srgbClr val="5F7181"/>
+                </a:solidFill>
+                <a:latin typeface="Aptos" pitchFamily="34" charset="0"/>
+                <a:ea typeface="Aptos" pitchFamily="34" charset="-122"/>
+                <a:cs typeface="Aptos" pitchFamily="34" charset="-120"/>
+              </a:rPr>
+              <a:t>9</a:t>
+            </a:r>
+            <a:endParaRPr lang="en-US" sz="900" dirty="0"/>
+          </a:p>
+        </p:txBody>
+      </p:sp>
+      <p:sp>
+        <p:nvSpPr>
+          <p:cNvPr id="8" name="Shape 6"/>
           <p:cNvSpPr/>
           <p:nvPr/>
         </p:nvSpPr>
@@ -13992,7 +15196,7 @@
       </p:sp>
       <p:sp>
         <p:nvSpPr>
-          <p:cNvPr id="8" name="Text 6"/>
+          <p:cNvPr id="9" name="Text 7"/>
           <p:cNvSpPr/>
           <p:nvPr/>
         </p:nvSpPr>
@@ -14031,14 +15235,14 @@
       </p:sp>
       <p:sp>
         <p:nvSpPr>
-          <p:cNvPr id="9" name="Text 7"/>
+          <p:cNvPr id="10" name="Text 8"/>
           <p:cNvSpPr/>
           <p:nvPr/>
         </p:nvSpPr>
         <p:spPr>
           <a:xfrm>
             <a:off x="640080" y="621792"/>
-            <a:ext cx="10881360" cy="566928"/>
+            <a:ext cx="10881360" cy="713232"/>
           </a:xfrm>
           <a:prstGeom prst="rect">
             <a:avLst/>
@@ -14056,7 +15260,7 @@
               <a:buNone/>
             </a:pPr>
             <a:r>
-              <a:rPr lang="en-US" sz="2700" b="1" dirty="0">
+              <a:rPr lang="en-US" sz="3400" b="1" dirty="0">
                 <a:solidFill>
                   <a:srgbClr val="003A63"/>
                 </a:solidFill>
@@ -14066,20 +15270,20 @@
               </a:rPr>
               <a:t>Public Health Example</a:t>
             </a:r>
-            <a:endParaRPr lang="en-US" sz="2700" dirty="0"/>
-          </a:p>
-        </p:txBody>
-      </p:sp>
-      <p:sp>
-        <p:nvSpPr>
-          <p:cNvPr id="10" name="Text 8"/>
-          <p:cNvSpPr/>
-          <p:nvPr/>
-        </p:nvSpPr>
-        <p:spPr>
-          <a:xfrm>
-            <a:off x="868680" y="1417320"/>
-            <a:ext cx="6675120" cy="4434840"/>
+            <a:endParaRPr lang="en-US" sz="3400" dirty="0"/>
+          </a:p>
+        </p:txBody>
+      </p:sp>
+      <p:sp>
+        <p:nvSpPr>
+          <p:cNvPr id="11" name="Text 9"/>
+          <p:cNvSpPr/>
+          <p:nvPr/>
+        </p:nvSpPr>
+        <p:spPr>
+          <a:xfrm>
+            <a:off x="868680" y="1508760"/>
+            <a:ext cx="6537960" cy="4160520"/>
           </a:xfrm>
           <a:prstGeom prst="rect">
             <a:avLst/>
@@ -14094,7 +15298,7 @@
           <a:lstStyle/>
           <a:p>
             <a:r>
-              <a:rPr lang="en-US" sz="1700" dirty="0">
+              <a:rPr lang="en-US" sz="2100" dirty="0">
                 <a:solidFill>
                   <a:srgbClr val="17364A"/>
                 </a:solidFill>
@@ -14102,13 +15306,13 @@
                 <a:ea typeface="Aptos" pitchFamily="34" charset="-122"/>
                 <a:cs typeface="Aptos" pitchFamily="34" charset="-120"/>
               </a:rPr>
-              <a:t>A health department receives proposals for five AI uses: a public chatbot, a staff policy assistant, an outbreak signal.</a:t>
-            </a:r>
-            <a:endParaRPr lang="en-US" sz="1700" dirty="0"/>
-          </a:p>
-          <a:p>
-            <a:r>
-              <a:rPr lang="en-US" sz="1700" dirty="0">
+              <a:t>A health department receives proposals for five AI uses: a public chatbot, a staff policy assistant, an.</a:t>
+            </a:r>
+            <a:endParaRPr lang="en-US" sz="2100" dirty="0"/>
+          </a:p>
+          <a:p>
+            <a:r>
+              <a:rPr lang="en-US" sz="2100" dirty="0">
                 <a:solidFill>
                   <a:srgbClr val="17364A"/>
                 </a:solidFill>
@@ -14118,11 +15322,11 @@
               </a:rPr>
               <a:t>Each proposal has different benefits and risks.</a:t>
             </a:r>
-            <a:endParaRPr lang="en-US" sz="1700" dirty="0"/>
-          </a:p>
-          <a:p>
-            <a:r>
-              <a:rPr lang="en-US" sz="1700" dirty="0">
+            <a:endParaRPr lang="en-US" sz="2100" dirty="0"/>
+          </a:p>
+          <a:p>
+            <a:r>
+              <a:rPr lang="en-US" sz="2100" dirty="0">
                 <a:solidFill>
                   <a:srgbClr val="17364A"/>
                 </a:solidFill>
@@ -14132,27 +15336,13 @@
               </a:rPr>
               <a:t>A public chatbot may be visible but high-risk if it gives health advice.</a:t>
             </a:r>
-            <a:endParaRPr lang="en-US" sz="1700" dirty="0"/>
-          </a:p>
-          <a:p>
-            <a:r>
-              <a:rPr lang="en-US" sz="1700" dirty="0">
-                <a:solidFill>
-                  <a:srgbClr val="17364A"/>
-                </a:solidFill>
-                <a:latin typeface="Aptos" pitchFamily="34" charset="0"/>
-                <a:ea typeface="Aptos" pitchFamily="34" charset="-122"/>
-                <a:cs typeface="Aptos" pitchFamily="34" charset="-120"/>
-              </a:rPr>
-              <a:t>A staff policy assistant may be lower risk if it uses approved internal documents.</a:t>
-            </a:r>
-            <a:endParaRPr lang="en-US" sz="1700" dirty="0"/>
-          </a:p>
-        </p:txBody>
-      </p:sp>
-      <p:sp>
-        <p:nvSpPr>
-          <p:cNvPr id="11" name="Shape 9"/>
+            <a:endParaRPr lang="en-US" sz="2100" dirty="0"/>
+          </a:p>
+        </p:txBody>
+      </p:sp>
+      <p:sp>
+        <p:nvSpPr>
+          <p:cNvPr id="12" name="Shape 10"/>
           <p:cNvSpPr/>
           <p:nvPr/>
         </p:nvSpPr>
@@ -14179,14 +15369,14 @@
       </p:sp>
       <p:sp>
         <p:nvSpPr>
-          <p:cNvPr id="12" name="Text 10"/>
+          <p:cNvPr id="13" name="Text 11"/>
           <p:cNvSpPr/>
           <p:nvPr/>
         </p:nvSpPr>
         <p:spPr>
           <a:xfrm>
             <a:off x="8074152" y="1563624"/>
-            <a:ext cx="2825496" cy="201168"/>
+            <a:ext cx="2825496" cy="256032"/>
           </a:xfrm>
           <a:prstGeom prst="rect">
             <a:avLst/>
@@ -14202,7 +15392,7 @@
               <a:buNone/>
             </a:pPr>
             <a:r>
-              <a:rPr lang="en-US" sz="950" b="1" dirty="0">
+              <a:rPr lang="en-US" sz="1300" b="1" dirty="0">
                 <a:solidFill>
                   <a:srgbClr val="0068B7"/>
                 </a:solidFill>
@@ -14212,20 +15402,20 @@
               </a:rPr>
               <a:t>Key idea</a:t>
             </a:r>
-            <a:endParaRPr lang="en-US" sz="950" dirty="0"/>
-          </a:p>
-        </p:txBody>
-      </p:sp>
-      <p:sp>
-        <p:nvSpPr>
-          <p:cNvPr id="13" name="Text 11"/>
-          <p:cNvSpPr/>
-          <p:nvPr/>
-        </p:nvSpPr>
-        <p:spPr>
-          <a:xfrm>
-            <a:off x="8074152" y="1856232"/>
-            <a:ext cx="2825496" cy="1261872"/>
+            <a:endParaRPr lang="en-US" sz="1300" dirty="0"/>
+          </a:p>
+        </p:txBody>
+      </p:sp>
+      <p:sp>
+        <p:nvSpPr>
+          <p:cNvPr id="14" name="Text 12"/>
+          <p:cNvSpPr/>
+          <p:nvPr/>
+        </p:nvSpPr>
+        <p:spPr>
+          <a:xfrm>
+            <a:off x="8074152" y="1920240"/>
+            <a:ext cx="2825496" cy="1188720"/>
           </a:xfrm>
           <a:prstGeom prst="rect">
             <a:avLst/>
@@ -14243,7 +15433,7 @@
               <a:buNone/>
             </a:pPr>
             <a:r>
-              <a:rPr lang="en-US" sz="1250" dirty="0">
+              <a:rPr lang="en-US" sz="1550" dirty="0">
                 <a:solidFill>
                   <a:srgbClr val="17364A"/>
                 </a:solidFill>
@@ -14251,15 +15441,15 @@
                 <a:ea typeface="Aptos" pitchFamily="34" charset="-122"/>
                 <a:cs typeface="Aptos" pitchFamily="34" charset="-120"/>
               </a:rPr>
-              <a:t>A health department receives proposals for five AI uses: a public chatbot, a staff policy assistant, an outbreak signal.</a:t>
-            </a:r>
-            <a:endParaRPr lang="en-US" sz="1250" dirty="0"/>
-          </a:p>
-        </p:txBody>
-      </p:sp>
-      <p:sp>
-        <p:nvSpPr>
-          <p:cNvPr id="14" name="Shape 12"/>
+              <a:t>A health department receives proposals for five AI uses: a public chatbot, a staff policy assistant, an.</a:t>
+            </a:r>
+            <a:endParaRPr lang="en-US" sz="1550" dirty="0"/>
+          </a:p>
+        </p:txBody>
+      </p:sp>
+      <p:sp>
+        <p:nvSpPr>
+          <p:cNvPr id="15" name="Shape 13"/>
           <p:cNvSpPr/>
           <p:nvPr/>
         </p:nvSpPr>
@@ -14286,14 +15476,14 @@
       </p:sp>
       <p:sp>
         <p:nvSpPr>
-          <p:cNvPr id="15" name="Text 13"/>
+          <p:cNvPr id="16" name="Text 14"/>
           <p:cNvSpPr/>
           <p:nvPr/>
         </p:nvSpPr>
         <p:spPr>
           <a:xfrm>
             <a:off x="8074152" y="3666744"/>
-            <a:ext cx="2825496" cy="201168"/>
+            <a:ext cx="2825496" cy="256032"/>
           </a:xfrm>
           <a:prstGeom prst="rect">
             <a:avLst/>
@@ -14309,7 +15499,7 @@
               <a:buNone/>
             </a:pPr>
             <a:r>
-              <a:rPr lang="en-US" sz="950" b="1" dirty="0">
+              <a:rPr lang="en-US" sz="1300" b="1" dirty="0">
                 <a:solidFill>
                   <a:srgbClr val="0068B7"/>
                 </a:solidFill>
@@ -14319,20 +15509,20 @@
               </a:rPr>
               <a:t>Use this for</a:t>
             </a:r>
-            <a:endParaRPr lang="en-US" sz="950" dirty="0"/>
-          </a:p>
-        </p:txBody>
-      </p:sp>
-      <p:sp>
-        <p:nvSpPr>
-          <p:cNvPr id="16" name="Text 14"/>
-          <p:cNvSpPr/>
-          <p:nvPr/>
-        </p:nvSpPr>
-        <p:spPr>
-          <a:xfrm>
-            <a:off x="8074152" y="3959352"/>
-            <a:ext cx="2825496" cy="1170432"/>
+            <a:endParaRPr lang="en-US" sz="1300" dirty="0"/>
+          </a:p>
+        </p:txBody>
+      </p:sp>
+      <p:sp>
+        <p:nvSpPr>
+          <p:cNvPr id="17" name="Text 15"/>
+          <p:cNvSpPr/>
+          <p:nvPr/>
+        </p:nvSpPr>
+        <p:spPr>
+          <a:xfrm>
+            <a:off x="8074152" y="4023360"/>
+            <a:ext cx="2825496" cy="1097280"/>
           </a:xfrm>
           <a:prstGeom prst="rect">
             <a:avLst/>
@@ -14350,7 +15540,7 @@
               <a:buNone/>
             </a:pPr>
             <a:r>
-              <a:rPr lang="en-US" sz="1250" dirty="0">
+              <a:rPr lang="en-US" sz="1550" dirty="0">
                 <a:solidFill>
                   <a:srgbClr val="17364A"/>
                 </a:solidFill>
@@ -14360,7 +15550,7 @@
               </a:rPr>
               <a:t>Connect the concept to public health decisions, safeguards, documentation, or implementation work.</a:t>
             </a:r>
-            <a:endParaRPr lang="en-US" sz="1250" dirty="0"/>
+            <a:endParaRPr lang="en-US" sz="1550" dirty="0"/>
           </a:p>
         </p:txBody>
       </p:sp>
